--- a/slides/pptx/第11回_組織に載せる.pptx
+++ b/slides/pptx/第11回_組織に載せる.pptx
@@ -12,9 +12,14 @@
     <p:sldId id="260" r:id="rId6"/>
     <p:sldId id="261" r:id="rId7"/>
     <p:sldId id="262" r:id="rId8"/>
+    <p:sldId id="263" r:id="rId9"/>
+    <p:sldId id="264" r:id="rId10"/>
+    <p:sldId id="265" r:id="rId11"/>
+    <p:sldId id="266" r:id="rId12"/>
+    <p:sldId id="267" r:id="rId13"/>
   </p:sldIdLst>
   <p:notesMasterIdLst>
-    <p:notesMasterId r:id="rId9"/>
+    <p:notesMasterId r:id="rId14"/>
   </p:notesMasterIdLst>
   <p:sldSz cx="12192000" cy="6858000"/>
   <p:notesSz cx="6858000" cy="12192000"/>
@@ -508,8 +513,7 @@
           <a:p>
             <a:r>
               <a:rPr lang="en-US" dirty="0"/>
-              <a:t>実質の仕上げの回です。ここが決まると、来年も続きます。
-【ゴール】社長個人の技能を、会社の仕組みに変えます。推進役・権限・費用・効果測定を決めます。</a:t>
+              <a:t>前回の宿題（月次チェックを担当者と実施）を確認。所要時間の実測値を必ず聞く。20分前後なら、続けられる見込みが立つ。</a:t>
             </a:r>
             <a:endParaRPr lang="en-US" dirty="0"/>
           </a:p>
@@ -533,6 +537,270 @@
             <a:fld id="{F7021451-1387-4CA6-816F-3879F97B5CBC}" type="slidenum">
               <a:rPr lang="en-US"/>
               <a:t>1</a:t>
+            </a:fld>
+            <a:endParaRPr lang="en-US"/>
+          </a:p>
+        </p:txBody>
+      </p:sp>
+    </p:spTree>
+    <p:extLst>
+      <p:ext uri="{BB962C8B-B14F-4D97-AF65-F5344CB8AC3E}">
+        <p14:creationId xmlns:p14="http://schemas.microsoft.com/office/powerpoint/2010/main" val="1024086991"/>
+      </p:ext>
+    </p:extLst>
+  </p:cSld>
+  <p:clrMapOvr>
+    <a:masterClrMapping/>
+  </p:clrMapOvr>
+</p:notes>
+</file>
+
+<file path=ppt/notesSlides/notesSlide10.xml><?xml version="1.0" encoding="utf-8"?>
+<p:notes xmlns:a="http://schemas.openxmlformats.org/drawingml/2006/main" xmlns:r="http://schemas.openxmlformats.org/officeDocument/2006/relationships" xmlns:p="http://schemas.openxmlformats.org/presentationml/2006/main">
+  <p:cSld>
+    <p:spTree>
+      <p:nvGrpSpPr>
+        <p:cNvPr id="1" name=""/>
+        <p:cNvGrpSpPr/>
+        <p:nvPr/>
+      </p:nvGrpSpPr>
+      <p:grpSpPr>
+        <a:xfrm>
+          <a:off x="0" y="0"/>
+          <a:ext cx="0" cy="0"/>
+          <a:chOff x="0" y="0"/>
+          <a:chExt cx="0" cy="0"/>
+        </a:xfrm>
+      </p:grpSpPr>
+      <p:sp>
+        <p:nvSpPr>
+          <p:cNvPr id="2" name="Slide Image Placeholder 1"/>
+          <p:cNvSpPr>
+            <a:spLocks noGrp="1" noRot="1" noChangeAspect="1"/>
+          </p:cNvSpPr>
+          <p:nvPr>
+            <p:ph type="sldImg"/>
+          </p:nvPr>
+        </p:nvSpPr>
+        <p:spPr/>
+      </p:sp>
+      <p:sp>
+        <p:nvSpPr>
+          <p:cNvPr id="3" name="Notes Placeholder 2"/>
+          <p:cNvSpPr>
+            <a:spLocks noGrp="1"/>
+          </p:cNvSpPr>
+          <p:nvPr>
+            <p:ph type="body" idx="1"/>
+          </p:nvPr>
+        </p:nvSpPr>
+        <p:spPr/>
+        <p:txBody>
+          <a:bodyPr/>
+          <a:lstStyle/>
+          <a:p>
+            <a:r>
+              <a:rPr lang="en-US" dirty="0"/>
+              <a:t>月何時間、を数字で決める。「できる範囲で」は割り当てではない。</a:t>
+            </a:r>
+            <a:endParaRPr lang="en-US" dirty="0"/>
+          </a:p>
+        </p:txBody>
+      </p:sp>
+      <p:sp>
+        <p:nvSpPr>
+          <p:cNvPr id="4" name="Slide Number Placeholder 3"/>
+          <p:cNvSpPr>
+            <a:spLocks noGrp="1"/>
+          </p:cNvSpPr>
+          <p:nvPr>
+            <p:ph type="sldNum" sz="quarter" idx="10"/>
+          </p:nvPr>
+        </p:nvSpPr>
+        <p:spPr/>
+        <p:txBody>
+          <a:bodyPr/>
+          <a:lstStyle/>
+          <a:p>
+            <a:fld id="{F7021451-1387-4CA6-816F-3879F97B5CBC}" type="slidenum">
+              <a:rPr lang="en-US"/>
+              <a:t>10</a:t>
+            </a:fld>
+            <a:endParaRPr lang="en-US"/>
+          </a:p>
+        </p:txBody>
+      </p:sp>
+    </p:spTree>
+    <p:extLst>
+      <p:ext uri="{BB962C8B-B14F-4D97-AF65-F5344CB8AC3E}">
+        <p14:creationId xmlns:p14="http://schemas.microsoft.com/office/powerpoint/2010/main" val="1024086991"/>
+      </p:ext>
+    </p:extLst>
+  </p:cSld>
+  <p:clrMapOvr>
+    <a:masterClrMapping/>
+  </p:clrMapOvr>
+</p:notes>
+</file>
+
+<file path=ppt/notesSlides/notesSlide11.xml><?xml version="1.0" encoding="utf-8"?>
+<p:notes xmlns:a="http://schemas.openxmlformats.org/drawingml/2006/main" xmlns:r="http://schemas.openxmlformats.org/officeDocument/2006/relationships" xmlns:p="http://schemas.openxmlformats.org/presentationml/2006/main">
+  <p:cSld>
+    <p:spTree>
+      <p:nvGrpSpPr>
+        <p:cNvPr id="1" name=""/>
+        <p:cNvGrpSpPr/>
+        <p:nvPr/>
+      </p:nvGrpSpPr>
+      <p:grpSpPr>
+        <a:xfrm>
+          <a:off x="0" y="0"/>
+          <a:ext cx="0" cy="0"/>
+          <a:chOff x="0" y="0"/>
+          <a:chExt cx="0" cy="0"/>
+        </a:xfrm>
+      </p:grpSpPr>
+      <p:sp>
+        <p:nvSpPr>
+          <p:cNvPr id="2" name="Slide Image Placeholder 1"/>
+          <p:cNvSpPr>
+            <a:spLocks noGrp="1" noRot="1" noChangeAspect="1"/>
+          </p:cNvSpPr>
+          <p:nvPr>
+            <p:ph type="sldImg"/>
+          </p:nvPr>
+        </p:nvSpPr>
+        <p:spPr/>
+      </p:sp>
+      <p:sp>
+        <p:nvSpPr>
+          <p:cNvPr id="3" name="Notes Placeholder 2"/>
+          <p:cNvSpPr>
+            <a:spLocks noGrp="1"/>
+          </p:cNvSpPr>
+          <p:nvPr>
+            <p:ph type="body" idx="1"/>
+          </p:nvPr>
+        </p:nvSpPr>
+        <p:spPr/>
+        <p:txBody>
+          <a:bodyPr/>
+          <a:lstStyle/>
+          <a:p>
+            <a:r>
+              <a:rPr lang="en-US" dirty="0"/>
+              <a:t>個人名義の契約は、聞かないと出てこない。明細を一緒に見るくらいでよい。法人契約への移行提案は、この回が正しい場所。第2回で勧めると売り込みに見える。</a:t>
+            </a:r>
+            <a:endParaRPr lang="en-US" dirty="0"/>
+          </a:p>
+        </p:txBody>
+      </p:sp>
+      <p:sp>
+        <p:nvSpPr>
+          <p:cNvPr id="4" name="Slide Number Placeholder 3"/>
+          <p:cNvSpPr>
+            <a:spLocks noGrp="1"/>
+          </p:cNvSpPr>
+          <p:nvPr>
+            <p:ph type="sldNum" sz="quarter" idx="10"/>
+          </p:nvPr>
+        </p:nvSpPr>
+        <p:spPr/>
+        <p:txBody>
+          <a:bodyPr/>
+          <a:lstStyle/>
+          <a:p>
+            <a:fld id="{F7021451-1387-4CA6-816F-3879F97B5CBC}" type="slidenum">
+              <a:rPr lang="en-US"/>
+              <a:t>11</a:t>
+            </a:fld>
+            <a:endParaRPr lang="en-US"/>
+          </a:p>
+        </p:txBody>
+      </p:sp>
+    </p:spTree>
+    <p:extLst>
+      <p:ext uri="{BB962C8B-B14F-4D97-AF65-F5344CB8AC3E}">
+        <p14:creationId xmlns:p14="http://schemas.microsoft.com/office/powerpoint/2010/main" val="1024086991"/>
+      </p:ext>
+    </p:extLst>
+  </p:cSld>
+  <p:clrMapOvr>
+    <a:masterClrMapping/>
+  </p:clrMapOvr>
+</p:notes>
+</file>
+
+<file path=ppt/notesSlides/notesSlide12.xml><?xml version="1.0" encoding="utf-8"?>
+<p:notes xmlns:a="http://schemas.openxmlformats.org/drawingml/2006/main" xmlns:r="http://schemas.openxmlformats.org/officeDocument/2006/relationships" xmlns:p="http://schemas.openxmlformats.org/presentationml/2006/main">
+  <p:cSld>
+    <p:spTree>
+      <p:nvGrpSpPr>
+        <p:cNvPr id="1" name=""/>
+        <p:cNvGrpSpPr/>
+        <p:nvPr/>
+      </p:nvGrpSpPr>
+      <p:grpSpPr>
+        <a:xfrm>
+          <a:off x="0" y="0"/>
+          <a:ext cx="0" cy="0"/>
+          <a:chOff x="0" y="0"/>
+          <a:chExt cx="0" cy="0"/>
+        </a:xfrm>
+      </p:grpSpPr>
+      <p:sp>
+        <p:nvSpPr>
+          <p:cNvPr id="2" name="Slide Image Placeholder 1"/>
+          <p:cNvSpPr>
+            <a:spLocks noGrp="1" noRot="1" noChangeAspect="1"/>
+          </p:cNvSpPr>
+          <p:nvPr>
+            <p:ph type="sldImg"/>
+          </p:nvPr>
+        </p:nvSpPr>
+        <p:spPr/>
+      </p:sp>
+      <p:sp>
+        <p:nvSpPr>
+          <p:cNvPr id="3" name="Notes Placeholder 2"/>
+          <p:cNvSpPr>
+            <a:spLocks noGrp="1"/>
+          </p:cNvSpPr>
+          <p:nvPr>
+            <p:ph type="body" idx="1"/>
+          </p:nvPr>
+        </p:nvSpPr>
+        <p:spPr/>
+        <p:txBody>
+          <a:bodyPr/>
+          <a:lstStyle/>
+          <a:p>
+            <a:r>
+              <a:rPr lang="en-US" dirty="0"/>
+              <a:t>推定値で埋めさせない。実測してもらう。思ったより減っていない項目が見つかるのが、むしろ収穫。</a:t>
+            </a:r>
+            <a:endParaRPr lang="en-US" dirty="0"/>
+          </a:p>
+        </p:txBody>
+      </p:sp>
+      <p:sp>
+        <p:nvSpPr>
+          <p:cNvPr id="4" name="Slide Number Placeholder 3"/>
+          <p:cNvSpPr>
+            <a:spLocks noGrp="1"/>
+          </p:cNvSpPr>
+          <p:nvPr>
+            <p:ph type="sldNum" sz="quarter" idx="10"/>
+          </p:nvPr>
+        </p:nvSpPr>
+        <p:spPr/>
+        <p:txBody>
+          <a:bodyPr/>
+          <a:lstStyle/>
+          <a:p>
+            <a:fld id="{F7021451-1387-4CA6-816F-3879F97B5CBC}" type="slidenum">
+              <a:rPr lang="en-US"/>
+              <a:t>12</a:t>
             </a:fld>
             <a:endParaRPr lang="en-US"/>
           </a:p>
@@ -597,7 +865,7 @@
           <a:p>
             <a:r>
               <a:rPr lang="en-US" dirty="0"/>
-              <a:t>ここは30秒で。今日の到達点だけ言って、すぐ本題へ。</a:t>
+              <a:t>調査の32.0%は、受講者自身の実感と一致するはず。「うちもそうです」と言われたら、今日の重要性が伝わっている。</a:t>
             </a:r>
             <a:endParaRPr lang="en-US" dirty="0"/>
           </a:p>
@@ -685,7 +953,7 @@
           <a:p>
             <a:r>
               <a:rPr lang="en-US" dirty="0"/>
-              <a:t>先に結論を言わず、受講者の実物を題材にしてこの型に当てはめて見せる。</a:t>
+              <a:t>「今日決まれば来年も続く、決まらなければ半年で止まる」と重さを伝える。この回を軽く流さない。</a:t>
             </a:r>
             <a:endParaRPr lang="en-US" dirty="0"/>
           </a:p>
@@ -773,7 +1041,7 @@
           <a:p>
             <a:r>
               <a:rPr lang="en-US" dirty="0"/>
-              <a:t>必ず左（失敗例）から。自分の失敗として話す。うまくいく例だけ見せると、受講者は自分の失敗を言わなくなる。</a:t>
+              <a:t>4役割のうち「作る人は外注でよい」を強調。ここを社内に抱えようとして止まる会社が多い。</a:t>
             </a:r>
             <a:endParaRPr lang="en-US" dirty="0"/>
           </a:p>
@@ -861,7 +1129,7 @@
           <a:p>
             <a:r>
               <a:rPr lang="en-US" dirty="0"/>
-              <a:t>ここから講師は口頭指示のみ。画面を操作するのは必ず受講者。歯がゆくても手を出さない。</a:t>
+              <a:t>4行のうち、金額だけで語らせない。品質（やり直し件数）が最も説明しやすいことを伝える。</a:t>
             </a:r>
             <a:endParaRPr lang="en-US" dirty="0"/>
           </a:p>
@@ -949,7 +1217,7 @@
           <a:p>
             <a:r>
               <a:rPr lang="en-US" dirty="0"/>
-              <a:t>ここは資料を読み上げない。自分の言葉と、匿名事例で話す。</a:t>
+              <a:t>「ITが得意な若手」は、ほぼ全員が最初に思いつく答え。否定せず、なぜうまくいかないかを説明する。</a:t>
             </a:r>
             <a:endParaRPr lang="en-US" dirty="0"/>
           </a:p>
@@ -1037,7 +1305,7 @@
           <a:p>
             <a:r>
               <a:rPr lang="en-US" dirty="0"/>
-              <a:t>その場でカレンダーに入れてもらう。口頭の約束で終わらせない。</a:t>
+              <a:t>「面倒くさがり」が適性、という言い方は覚えてもらいやすい。時間の割り当てが本題であることを外さない。</a:t>
             </a:r>
             <a:endParaRPr lang="en-US" dirty="0"/>
           </a:p>
@@ -1061,6 +1329,182 @@
             <a:fld id="{F7021451-1387-4CA6-816F-3879F97B5CBC}" type="slidenum">
               <a:rPr lang="en-US"/>
               <a:t>7</a:t>
+            </a:fld>
+            <a:endParaRPr lang="en-US"/>
+          </a:p>
+        </p:txBody>
+      </p:sp>
+    </p:spTree>
+    <p:extLst>
+      <p:ext uri="{BB962C8B-B14F-4D97-AF65-F5344CB8AC3E}">
+        <p14:creationId xmlns:p14="http://schemas.microsoft.com/office/powerpoint/2010/main" val="1024086991"/>
+      </p:ext>
+    </p:extLst>
+  </p:cSld>
+  <p:clrMapOvr>
+    <a:masterClrMapping/>
+  </p:clrMapOvr>
+</p:notes>
+</file>
+
+<file path=ppt/notesSlides/notesSlide8.xml><?xml version="1.0" encoding="utf-8"?>
+<p:notes xmlns:a="http://schemas.openxmlformats.org/drawingml/2006/main" xmlns:r="http://schemas.openxmlformats.org/officeDocument/2006/relationships" xmlns:p="http://schemas.openxmlformats.org/presentationml/2006/main">
+  <p:cSld>
+    <p:spTree>
+      <p:nvGrpSpPr>
+        <p:cNvPr id="1" name=""/>
+        <p:cNvGrpSpPr/>
+        <p:nvPr/>
+      </p:nvGrpSpPr>
+      <p:grpSpPr>
+        <a:xfrm>
+          <a:off x="0" y="0"/>
+          <a:ext cx="0" cy="0"/>
+          <a:chOff x="0" y="0"/>
+          <a:chExt cx="0" cy="0"/>
+        </a:xfrm>
+      </p:grpSpPr>
+      <p:sp>
+        <p:nvSpPr>
+          <p:cNvPr id="2" name="Slide Image Placeholder 1"/>
+          <p:cNvSpPr>
+            <a:spLocks noGrp="1" noRot="1" noChangeAspect="1"/>
+          </p:cNvSpPr>
+          <p:nvPr>
+            <p:ph type="sldImg"/>
+          </p:nvPr>
+        </p:nvSpPr>
+        <p:spPr/>
+      </p:sp>
+      <p:sp>
+        <p:nvSpPr>
+          <p:cNvPr id="3" name="Notes Placeholder 2"/>
+          <p:cNvSpPr>
+            <a:spLocks noGrp="1"/>
+          </p:cNvSpPr>
+          <p:nvPr>
+            <p:ph type="body" idx="1"/>
+          </p:nvPr>
+        </p:nvSpPr>
+        <p:spPr/>
+        <p:txBody>
+          <a:bodyPr/>
+          <a:lstStyle/>
+          <a:p>
+            <a:r>
+              <a:rPr lang="en-US" dirty="0"/>
+              <a:t>1つ目が出たら、無理に決めさせない。持続可能な範囲を決めることも成果である、と言い切る。ここで無理をさせると、修了後に全部止まる。</a:t>
+            </a:r>
+            <a:endParaRPr lang="en-US" dirty="0"/>
+          </a:p>
+        </p:txBody>
+      </p:sp>
+      <p:sp>
+        <p:nvSpPr>
+          <p:cNvPr id="4" name="Slide Number Placeholder 3"/>
+          <p:cNvSpPr>
+            <a:spLocks noGrp="1"/>
+          </p:cNvSpPr>
+          <p:nvPr>
+            <p:ph type="sldNum" sz="quarter" idx="10"/>
+          </p:nvPr>
+        </p:nvSpPr>
+        <p:spPr/>
+        <p:txBody>
+          <a:bodyPr/>
+          <a:lstStyle/>
+          <a:p>
+            <a:fld id="{F7021451-1387-4CA6-816F-3879F97B5CBC}" type="slidenum">
+              <a:rPr lang="en-US"/>
+              <a:t>8</a:t>
+            </a:fld>
+            <a:endParaRPr lang="en-US"/>
+          </a:p>
+        </p:txBody>
+      </p:sp>
+    </p:spTree>
+    <p:extLst>
+      <p:ext uri="{BB962C8B-B14F-4D97-AF65-F5344CB8AC3E}">
+        <p14:creationId xmlns:p14="http://schemas.microsoft.com/office/powerpoint/2010/main" val="1024086991"/>
+      </p:ext>
+    </p:extLst>
+  </p:cSld>
+  <p:clrMapOvr>
+    <a:masterClrMapping/>
+  </p:clrMapOvr>
+</p:notes>
+</file>
+
+<file path=ppt/notesSlides/notesSlide9.xml><?xml version="1.0" encoding="utf-8"?>
+<p:notes xmlns:a="http://schemas.openxmlformats.org/drawingml/2006/main" xmlns:r="http://schemas.openxmlformats.org/officeDocument/2006/relationships" xmlns:p="http://schemas.openxmlformats.org/presentationml/2006/main">
+  <p:cSld>
+    <p:spTree>
+      <p:nvGrpSpPr>
+        <p:cNvPr id="1" name=""/>
+        <p:cNvGrpSpPr/>
+        <p:nvPr/>
+      </p:nvGrpSpPr>
+      <p:grpSpPr>
+        <a:xfrm>
+          <a:off x="0" y="0"/>
+          <a:ext cx="0" cy="0"/>
+          <a:chOff x="0" y="0"/>
+          <a:chExt cx="0" cy="0"/>
+        </a:xfrm>
+      </p:grpSpPr>
+      <p:sp>
+        <p:nvSpPr>
+          <p:cNvPr id="2" name="Slide Image Placeholder 1"/>
+          <p:cNvSpPr>
+            <a:spLocks noGrp="1" noRot="1" noChangeAspect="1"/>
+          </p:cNvSpPr>
+          <p:nvPr>
+            <p:ph type="sldImg"/>
+          </p:nvPr>
+        </p:nvSpPr>
+        <p:spPr/>
+      </p:sp>
+      <p:sp>
+        <p:nvSpPr>
+          <p:cNvPr id="3" name="Notes Placeholder 2"/>
+          <p:cNvSpPr>
+            <a:spLocks noGrp="1"/>
+          </p:cNvSpPr>
+          <p:nvPr>
+            <p:ph type="body" idx="1"/>
+          </p:nvPr>
+        </p:nvSpPr>
+        <p:spPr/>
+        <p:txBody>
+          <a:bodyPr/>
+          <a:lstStyle/>
+          <a:p>
+            <a:r>
+              <a:rPr lang="en-US" dirty="0"/>
+              <a:t>第8回の不足資料リストと第10回の基準未定義業務を、必ずここで回収する。担当のつかない項目は永久に埋まらない。</a:t>
+            </a:r>
+            <a:endParaRPr lang="en-US" dirty="0"/>
+          </a:p>
+        </p:txBody>
+      </p:sp>
+      <p:sp>
+        <p:nvSpPr>
+          <p:cNvPr id="4" name="Slide Number Placeholder 3"/>
+          <p:cNvSpPr>
+            <a:spLocks noGrp="1"/>
+          </p:cNvSpPr>
+          <p:nvPr>
+            <p:ph type="sldNum" sz="quarter" idx="10"/>
+          </p:nvPr>
+        </p:nvSpPr>
+        <p:spPr/>
+        <p:txBody>
+          <a:bodyPr/>
+          <a:lstStyle/>
+          <a:p>
+            <a:fld id="{F7021451-1387-4CA6-816F-3879F97B5CBC}" type="slidenum">
+              <a:rPr lang="en-US"/>
+              <a:t>9</a:t>
             </a:fld>
             <a:endParaRPr lang="en-US"/>
           </a:p>
@@ -1680,6 +2124,1284 @@
 </p:sld>
 </file>
 
+<file path=ppt/slides/slide10.xml><?xml version="1.0" encoding="utf-8"?>
+<p:sld xmlns:a="http://schemas.openxmlformats.org/drawingml/2006/main" xmlns:r="http://schemas.openxmlformats.org/officeDocument/2006/relationships" xmlns:p="http://schemas.openxmlformats.org/presentationml/2006/main">
+  <p:cSld name="Slide 10">
+    <p:bg>
+      <p:bgPr>
+        <a:solidFill>
+          <a:srgbClr val="F6F2EA"/>
+        </a:solidFill>
+      </p:bgPr>
+    </p:bg>
+    <p:spTree>
+      <p:nvGrpSpPr>
+        <p:cNvPr id="1" name=""/>
+        <p:cNvGrpSpPr/>
+        <p:nvPr/>
+      </p:nvGrpSpPr>
+      <p:grpSpPr>
+        <a:xfrm>
+          <a:off x="0" y="0"/>
+          <a:ext cx="0" cy="0"/>
+          <a:chOff x="0" y="0"/>
+          <a:chExt cx="0" cy="0"/>
+        </a:xfrm>
+      </p:grpSpPr>
+      <p:sp>
+        <p:nvSpPr>
+          <p:cNvPr id="2" name="Text 0"/>
+          <p:cNvSpPr txBox="1"/>
+          <p:nvPr/>
+        </p:nvSpPr>
+        <p:spPr>
+          <a:xfrm>
+            <a:off x="777240" y="566928"/>
+            <a:ext cx="10607040" cy="274320"/>
+          </a:xfrm>
+          <a:prstGeom prst="rect">
+            <a:avLst/>
+          </a:prstGeom>
+          <a:noFill/>
+          <a:ln/>
+        </p:spPr>
+        <p:txBody>
+          <a:bodyPr wrap="square" lIns="0" tIns="0" rIns="0" bIns="0" rtlCol="0" anchor="ctr"/>
+          <a:lstStyle/>
+          <a:p>
+            <a:pPr indent="0" marL="0">
+              <a:buNone/>
+            </a:pPr>
+            <a:r>
+              <a:rPr lang="en-US" sz="1100" b="1" spc="250" kern="0" dirty="0">
+                <a:solidFill>
+                  <a:srgbClr val="3B6B4A"/>
+                </a:solidFill>
+                <a:latin typeface="Yu Gothic" pitchFamily="34" charset="0"/>
+                <a:ea typeface="Yu Gothic" pitchFamily="34" charset="-122"/>
+                <a:cs typeface="Yu Gothic" pitchFamily="34" charset="-120"/>
+              </a:rPr>
+              <a:t>業務への組み込み</a:t>
+            </a:r>
+            <a:endParaRPr lang="en-US" sz="1100" dirty="0"/>
+          </a:p>
+        </p:txBody>
+      </p:sp>
+      <p:sp>
+        <p:nvSpPr>
+          <p:cNvPr id="3" name="Text 1"/>
+          <p:cNvSpPr txBox="1"/>
+          <p:nvPr/>
+        </p:nvSpPr>
+        <p:spPr>
+          <a:xfrm>
+            <a:off x="777240" y="896112"/>
+            <a:ext cx="10607040" cy="640080"/>
+          </a:xfrm>
+          <a:prstGeom prst="rect">
+            <a:avLst/>
+          </a:prstGeom>
+          <a:noFill/>
+          <a:ln/>
+        </p:spPr>
+        <p:txBody>
+          <a:bodyPr wrap="square" lIns="0" tIns="0" rIns="0" bIns="0" rtlCol="0" anchor="ctr"/>
+          <a:lstStyle/>
+          <a:p>
+            <a:pPr indent="0" marL="0">
+              <a:buNone/>
+            </a:pPr>
+            <a:r>
+              <a:rPr lang="en-US" sz="2600" b="1" dirty="0">
+                <a:solidFill>
+                  <a:srgbClr val="23201D"/>
+                </a:solidFill>
+                <a:latin typeface="Yu Gothic" pitchFamily="34" charset="0"/>
+                <a:ea typeface="Yu Gothic" pitchFamily="34" charset="-122"/>
+                <a:cs typeface="Yu Gothic" pitchFamily="34" charset="-120"/>
+              </a:rPr>
+              <a:t>帰る前に決めること</a:t>
+            </a:r>
+            <a:endParaRPr lang="en-US" sz="2600" dirty="0"/>
+          </a:p>
+        </p:txBody>
+      </p:sp>
+      <p:sp>
+        <p:nvSpPr>
+          <p:cNvPr id="4" name="Text 2"/>
+          <p:cNvSpPr txBox="1"/>
+          <p:nvPr/>
+        </p:nvSpPr>
+        <p:spPr>
+          <a:xfrm>
+            <a:off x="777240" y="1572768"/>
+            <a:ext cx="10607040" cy="320040"/>
+          </a:xfrm>
+          <a:prstGeom prst="rect">
+            <a:avLst/>
+          </a:prstGeom>
+          <a:noFill/>
+          <a:ln/>
+        </p:spPr>
+        <p:txBody>
+          <a:bodyPr wrap="square" lIns="0" tIns="0" rIns="0" bIns="0" rtlCol="0" anchor="ctr"/>
+          <a:lstStyle/>
+          <a:p>
+            <a:pPr indent="0" marL="0">
+              <a:buNone/>
+            </a:pPr>
+            <a:r>
+              <a:rPr lang="en-US" sz="1250" b="1" dirty="0">
+                <a:solidFill>
+                  <a:srgbClr val="3B6B4A"/>
+                </a:solidFill>
+                <a:latin typeface="Yu Gothic" pitchFamily="34" charset="0"/>
+                <a:ea typeface="Yu Gothic" pitchFamily="34" charset="-122"/>
+                <a:cs typeface="Yu Gothic" pitchFamily="34" charset="-120"/>
+              </a:rPr>
+              <a:t>ここを決めないと、持ち帰っても使われません。紙に書きます。</a:t>
+            </a:r>
+            <a:endParaRPr lang="en-US" sz="1250" dirty="0"/>
+          </a:p>
+        </p:txBody>
+      </p:sp>
+      <p:sp>
+        <p:nvSpPr>
+          <p:cNvPr id="5" name="Shape 3"/>
+          <p:cNvSpPr/>
+          <p:nvPr/>
+        </p:nvSpPr>
+        <p:spPr>
+          <a:xfrm>
+            <a:off x="777240" y="2103120"/>
+            <a:ext cx="10607040" cy="914400"/>
+          </a:xfrm>
+          <a:prstGeom prst="rect">
+            <a:avLst/>
+          </a:prstGeom>
+          <a:solidFill>
+            <a:srgbClr val="FFFFFF"/>
+          </a:solidFill>
+          <a:ln w="12700">
+            <a:solidFill>
+              <a:srgbClr val="EDE7DB"/>
+            </a:solidFill>
+            <a:prstDash val="solid"/>
+          </a:ln>
+        </p:spPr>
+      </p:sp>
+      <p:sp>
+        <p:nvSpPr>
+          <p:cNvPr id="6" name="Shape 4"/>
+          <p:cNvSpPr/>
+          <p:nvPr/>
+        </p:nvSpPr>
+        <p:spPr>
+          <a:xfrm>
+            <a:off x="777240" y="2103120"/>
+            <a:ext cx="54864" cy="914400"/>
+          </a:xfrm>
+          <a:prstGeom prst="rect">
+            <a:avLst/>
+          </a:prstGeom>
+          <a:solidFill>
+            <a:srgbClr val="3B6B4A"/>
+          </a:solidFill>
+          <a:ln w="12700">
+            <a:solidFill>
+              <a:srgbClr val="333333"/>
+            </a:solidFill>
+            <a:prstDash val="solid"/>
+          </a:ln>
+        </p:spPr>
+      </p:sp>
+      <p:sp>
+        <p:nvSpPr>
+          <p:cNvPr id="7" name="Text 5"/>
+          <p:cNvSpPr txBox="1"/>
+          <p:nvPr/>
+        </p:nvSpPr>
+        <p:spPr>
+          <a:xfrm>
+            <a:off x="1143000" y="2176272"/>
+            <a:ext cx="2757830" cy="768096"/>
+          </a:xfrm>
+          <a:prstGeom prst="rect">
+            <a:avLst/>
+          </a:prstGeom>
+          <a:noFill/>
+          <a:ln/>
+        </p:spPr>
+        <p:txBody>
+          <a:bodyPr wrap="square" lIns="0" tIns="0" rIns="0" bIns="0" rtlCol="0" anchor="ctr"/>
+          <a:lstStyle/>
+          <a:p>
+            <a:pPr indent="0" marL="0">
+              <a:buNone/>
+            </a:pPr>
+            <a:r>
+              <a:rPr lang="en-US" sz="1400" b="1" dirty="0">
+                <a:solidFill>
+                  <a:srgbClr val="3B6B4A"/>
+                </a:solidFill>
+                <a:latin typeface="Yu Gothic" pitchFamily="34" charset="0"/>
+                <a:ea typeface="Yu Gothic" pitchFamily="34" charset="-122"/>
+                <a:cs typeface="Yu Gothic" pitchFamily="34" charset="-120"/>
+              </a:rPr>
+              <a:t>回す人に、月何時間割り当てるか</a:t>
+            </a:r>
+            <a:endParaRPr lang="en-US" sz="1400" dirty="0"/>
+          </a:p>
+        </p:txBody>
+      </p:sp>
+      <p:sp>
+        <p:nvSpPr>
+          <p:cNvPr id="8" name="Text 6"/>
+          <p:cNvSpPr txBox="1"/>
+          <p:nvPr/>
+        </p:nvSpPr>
+        <p:spPr>
+          <a:xfrm>
+            <a:off x="4006901" y="2176272"/>
+            <a:ext cx="7011619" cy="768096"/>
+          </a:xfrm>
+          <a:prstGeom prst="rect">
+            <a:avLst/>
+          </a:prstGeom>
+          <a:noFill/>
+          <a:ln/>
+        </p:spPr>
+        <p:txBody>
+          <a:bodyPr wrap="square" lIns="0" tIns="0" rIns="0" bIns="0" rtlCol="0" anchor="ctr"/>
+          <a:lstStyle/>
+          <a:p>
+            <a:pPr indent="0" marL="0">
+              <a:lnSpc>
+                <a:spcPct val="130000"/>
+              </a:lnSpc>
+              <a:buNone/>
+            </a:pPr>
+            <a:r>
+              <a:rPr lang="en-US" sz="1250" dirty="0">
+                <a:solidFill>
+                  <a:srgbClr val="3F3933"/>
+                </a:solidFill>
+                <a:latin typeface="Yu Gothic" pitchFamily="34" charset="0"/>
+                <a:ea typeface="Yu Gothic" pitchFamily="34" charset="-122"/>
+                <a:cs typeface="Yu Gothic" pitchFamily="34" charset="-120"/>
+              </a:rPr>
+              <a:t>「片手間で」は必ず失敗します。時間を業務として認めます</a:t>
+            </a:r>
+            <a:endParaRPr lang="en-US" sz="1250" dirty="0"/>
+          </a:p>
+        </p:txBody>
+      </p:sp>
+      <p:sp>
+        <p:nvSpPr>
+          <p:cNvPr id="9" name="Shape 7"/>
+          <p:cNvSpPr/>
+          <p:nvPr/>
+        </p:nvSpPr>
+        <p:spPr>
+          <a:xfrm>
+            <a:off x="777240" y="3154680"/>
+            <a:ext cx="10607040" cy="914400"/>
+          </a:xfrm>
+          <a:prstGeom prst="rect">
+            <a:avLst/>
+          </a:prstGeom>
+          <a:solidFill>
+            <a:srgbClr val="FFFFFF"/>
+          </a:solidFill>
+          <a:ln w="12700">
+            <a:solidFill>
+              <a:srgbClr val="EDE7DB"/>
+            </a:solidFill>
+            <a:prstDash val="solid"/>
+          </a:ln>
+        </p:spPr>
+      </p:sp>
+      <p:sp>
+        <p:nvSpPr>
+          <p:cNvPr id="10" name="Shape 8"/>
+          <p:cNvSpPr/>
+          <p:nvPr/>
+        </p:nvSpPr>
+        <p:spPr>
+          <a:xfrm>
+            <a:off x="777240" y="3154680"/>
+            <a:ext cx="54864" cy="914400"/>
+          </a:xfrm>
+          <a:prstGeom prst="rect">
+            <a:avLst/>
+          </a:prstGeom>
+          <a:solidFill>
+            <a:srgbClr val="3B6B4A"/>
+          </a:solidFill>
+          <a:ln w="12700">
+            <a:solidFill>
+              <a:srgbClr val="333333"/>
+            </a:solidFill>
+            <a:prstDash val="solid"/>
+          </a:ln>
+        </p:spPr>
+      </p:sp>
+      <p:sp>
+        <p:nvSpPr>
+          <p:cNvPr id="11" name="Text 9"/>
+          <p:cNvSpPr txBox="1"/>
+          <p:nvPr/>
+        </p:nvSpPr>
+        <p:spPr>
+          <a:xfrm>
+            <a:off x="1143000" y="3227832"/>
+            <a:ext cx="2757830" cy="768096"/>
+          </a:xfrm>
+          <a:prstGeom prst="rect">
+            <a:avLst/>
+          </a:prstGeom>
+          <a:noFill/>
+          <a:ln/>
+        </p:spPr>
+        <p:txBody>
+          <a:bodyPr wrap="square" lIns="0" tIns="0" rIns="0" bIns="0" rtlCol="0" anchor="ctr"/>
+          <a:lstStyle/>
+          <a:p>
+            <a:pPr indent="0" marL="0">
+              <a:buNone/>
+            </a:pPr>
+            <a:r>
+              <a:rPr lang="en-US" sz="1400" b="1" dirty="0">
+                <a:solidFill>
+                  <a:srgbClr val="3B6B4A"/>
+                </a:solidFill>
+                <a:latin typeface="Yu Gothic" pitchFamily="34" charset="0"/>
+                <a:ea typeface="Yu Gothic" pitchFamily="34" charset="-122"/>
+                <a:cs typeface="Yu Gothic" pitchFamily="34" charset="-120"/>
+              </a:rPr>
+              <a:t>第8回・第10回の宿題を誰が引き取るか</a:t>
+            </a:r>
+            <a:endParaRPr lang="en-US" sz="1400" dirty="0"/>
+          </a:p>
+        </p:txBody>
+      </p:sp>
+      <p:sp>
+        <p:nvSpPr>
+          <p:cNvPr id="12" name="Text 10"/>
+          <p:cNvSpPr txBox="1"/>
+          <p:nvPr/>
+        </p:nvSpPr>
+        <p:spPr>
+          <a:xfrm>
+            <a:off x="4006901" y="3227832"/>
+            <a:ext cx="7011619" cy="768096"/>
+          </a:xfrm>
+          <a:prstGeom prst="rect">
+            <a:avLst/>
+          </a:prstGeom>
+          <a:noFill/>
+          <a:ln/>
+        </p:spPr>
+        <p:txBody>
+          <a:bodyPr wrap="square" lIns="0" tIns="0" rIns="0" bIns="0" rtlCol="0" anchor="ctr"/>
+          <a:lstStyle/>
+          <a:p>
+            <a:pPr indent="0" marL="0">
+              <a:lnSpc>
+                <a:spcPct val="130000"/>
+              </a:lnSpc>
+              <a:buNone/>
+            </a:pPr>
+            <a:r>
+              <a:rPr lang="en-US" sz="1250" dirty="0">
+                <a:solidFill>
+                  <a:srgbClr val="3F3933"/>
+                </a:solidFill>
+                <a:latin typeface="Yu Gothic" pitchFamily="34" charset="0"/>
+                <a:ea typeface="Yu Gothic" pitchFamily="34" charset="-122"/>
+                <a:cs typeface="Yu Gothic" pitchFamily="34" charset="-120"/>
+              </a:rPr>
+              <a:t>不足資料リストと、基準が決まっていない業務。担当のつかない項目は永久に埋まりません</a:t>
+            </a:r>
+            <a:endParaRPr lang="en-US" sz="1250" dirty="0"/>
+          </a:p>
+        </p:txBody>
+      </p:sp>
+      <p:sp>
+        <p:nvSpPr>
+          <p:cNvPr id="13" name="Shape 11"/>
+          <p:cNvSpPr/>
+          <p:nvPr/>
+        </p:nvSpPr>
+        <p:spPr>
+          <a:xfrm>
+            <a:off x="777240" y="4206240"/>
+            <a:ext cx="10607040" cy="914400"/>
+          </a:xfrm>
+          <a:prstGeom prst="rect">
+            <a:avLst/>
+          </a:prstGeom>
+          <a:solidFill>
+            <a:srgbClr val="FFFFFF"/>
+          </a:solidFill>
+          <a:ln w="12700">
+            <a:solidFill>
+              <a:srgbClr val="EDE7DB"/>
+            </a:solidFill>
+            <a:prstDash val="solid"/>
+          </a:ln>
+        </p:spPr>
+      </p:sp>
+      <p:sp>
+        <p:nvSpPr>
+          <p:cNvPr id="14" name="Shape 12"/>
+          <p:cNvSpPr/>
+          <p:nvPr/>
+        </p:nvSpPr>
+        <p:spPr>
+          <a:xfrm>
+            <a:off x="777240" y="4206240"/>
+            <a:ext cx="54864" cy="914400"/>
+          </a:xfrm>
+          <a:prstGeom prst="rect">
+            <a:avLst/>
+          </a:prstGeom>
+          <a:solidFill>
+            <a:srgbClr val="3B6B4A"/>
+          </a:solidFill>
+          <a:ln w="12700">
+            <a:solidFill>
+              <a:srgbClr val="333333"/>
+            </a:solidFill>
+            <a:prstDash val="solid"/>
+          </a:ln>
+        </p:spPr>
+      </p:sp>
+      <p:sp>
+        <p:nvSpPr>
+          <p:cNvPr id="15" name="Text 13"/>
+          <p:cNvSpPr txBox="1"/>
+          <p:nvPr/>
+        </p:nvSpPr>
+        <p:spPr>
+          <a:xfrm>
+            <a:off x="1143000" y="4279392"/>
+            <a:ext cx="2757830" cy="768096"/>
+          </a:xfrm>
+          <a:prstGeom prst="rect">
+            <a:avLst/>
+          </a:prstGeom>
+          <a:noFill/>
+          <a:ln/>
+        </p:spPr>
+        <p:txBody>
+          <a:bodyPr wrap="square" lIns="0" tIns="0" rIns="0" bIns="0" rtlCol="0" anchor="ctr"/>
+          <a:lstStyle/>
+          <a:p>
+            <a:pPr indent="0" marL="0">
+              <a:buNone/>
+            </a:pPr>
+            <a:r>
+              <a:rPr lang="en-US" sz="1400" b="1" dirty="0">
+                <a:solidFill>
+                  <a:srgbClr val="3B6B4A"/>
+                </a:solidFill>
+                <a:latin typeface="Yu Gothic" pitchFamily="34" charset="0"/>
+                <a:ea typeface="Yu Gothic" pitchFamily="34" charset="-122"/>
+                <a:cs typeface="Yu Gothic" pitchFamily="34" charset="-120"/>
+              </a:rPr>
+              <a:t>いつ見直すか</a:t>
+            </a:r>
+            <a:endParaRPr lang="en-US" sz="1400" dirty="0"/>
+          </a:p>
+        </p:txBody>
+      </p:sp>
+      <p:sp>
+        <p:nvSpPr>
+          <p:cNvPr id="16" name="Text 14"/>
+          <p:cNvSpPr txBox="1"/>
+          <p:nvPr/>
+        </p:nvSpPr>
+        <p:spPr>
+          <a:xfrm>
+            <a:off x="4006901" y="4279392"/>
+            <a:ext cx="7011619" cy="768096"/>
+          </a:xfrm>
+          <a:prstGeom prst="rect">
+            <a:avLst/>
+          </a:prstGeom>
+          <a:noFill/>
+          <a:ln/>
+        </p:spPr>
+        <p:txBody>
+          <a:bodyPr wrap="square" lIns="0" tIns="0" rIns="0" bIns="0" rtlCol="0" anchor="ctr"/>
+          <a:lstStyle/>
+          <a:p>
+            <a:pPr indent="0" marL="0">
+              <a:lnSpc>
+                <a:spcPct val="130000"/>
+              </a:lnSpc>
+              <a:buNone/>
+            </a:pPr>
+            <a:r>
+              <a:rPr lang="en-US" sz="1250" dirty="0">
+                <a:solidFill>
+                  <a:srgbClr val="3F3933"/>
+                </a:solidFill>
+                <a:latin typeface="Yu Gothic" pitchFamily="34" charset="0"/>
+                <a:ea typeface="Yu Gothic" pitchFamily="34" charset="-122"/>
+                <a:cs typeface="Yu Gothic" pitchFamily="34" charset="-120"/>
+              </a:rPr>
+              <a:t>3か月後。費用と効果を突き合わせる日を決めます</a:t>
+            </a:r>
+            <a:endParaRPr lang="en-US" sz="1250" dirty="0"/>
+          </a:p>
+        </p:txBody>
+      </p:sp>
+      <p:sp>
+        <p:nvSpPr>
+          <p:cNvPr id="17" name="Text 15"/>
+          <p:cNvSpPr txBox="1"/>
+          <p:nvPr/>
+        </p:nvSpPr>
+        <p:spPr>
+          <a:xfrm>
+            <a:off x="777240" y="6382512"/>
+            <a:ext cx="7424928" cy="256032"/>
+          </a:xfrm>
+          <a:prstGeom prst="rect">
+            <a:avLst/>
+          </a:prstGeom>
+          <a:noFill/>
+          <a:ln/>
+        </p:spPr>
+        <p:txBody>
+          <a:bodyPr wrap="square" lIns="0" tIns="0" rIns="0" bIns="0" rtlCol="0" anchor="ctr"/>
+          <a:lstStyle/>
+          <a:p>
+            <a:pPr indent="0" marL="0">
+              <a:buNone/>
+            </a:pPr>
+            <a:r>
+              <a:rPr lang="en-US" sz="900" dirty="0">
+                <a:solidFill>
+                  <a:srgbClr val="8A8177"/>
+                </a:solidFill>
+                <a:latin typeface="Yu Gothic" pitchFamily="34" charset="0"/>
+                <a:ea typeface="Yu Gothic" pitchFamily="34" charset="-122"/>
+                <a:cs typeface="Yu Gothic" pitchFamily="34" charset="-120"/>
+              </a:rPr>
+              <a:t>第11回　組織に載せる</a:t>
+            </a:r>
+            <a:endParaRPr lang="en-US" sz="900" dirty="0"/>
+          </a:p>
+        </p:txBody>
+      </p:sp>
+      <p:sp>
+        <p:nvSpPr>
+          <p:cNvPr id="18" name="Text 16"/>
+          <p:cNvSpPr txBox="1"/>
+          <p:nvPr/>
+        </p:nvSpPr>
+        <p:spPr>
+          <a:xfrm>
+            <a:off x="8202168" y="6382512"/>
+            <a:ext cx="3182112" cy="256032"/>
+          </a:xfrm>
+          <a:prstGeom prst="rect">
+            <a:avLst/>
+          </a:prstGeom>
+          <a:noFill/>
+          <a:ln/>
+        </p:spPr>
+        <p:txBody>
+          <a:bodyPr wrap="square" lIns="0" tIns="0" rIns="0" bIns="0" rtlCol="0" anchor="ctr"/>
+          <a:lstStyle/>
+          <a:p>
+            <a:pPr algn="r" indent="0" marL="0">
+              <a:buNone/>
+            </a:pPr>
+            <a:r>
+              <a:rPr lang="en-US" sz="900" dirty="0">
+                <a:solidFill>
+                  <a:srgbClr val="8A8177"/>
+                </a:solidFill>
+                <a:latin typeface="Yu Gothic" pitchFamily="34" charset="0"/>
+                <a:ea typeface="Yu Gothic" pitchFamily="34" charset="-122"/>
+                <a:cs typeface="Yu Gothic" pitchFamily="34" charset="-120"/>
+              </a:rPr>
+              <a:t>組み込み</a:t>
+            </a:r>
+            <a:endParaRPr lang="en-US" sz="900" dirty="0"/>
+          </a:p>
+        </p:txBody>
+      </p:sp>
+    </p:spTree>
+  </p:cSld>
+  <p:clrMapOvr>
+    <a:masterClrMapping/>
+  </p:clrMapOvr>
+</p:sld>
+</file>
+
+<file path=ppt/slides/slide11.xml><?xml version="1.0" encoding="utf-8"?>
+<p:sld xmlns:a="http://schemas.openxmlformats.org/drawingml/2006/main" xmlns:r="http://schemas.openxmlformats.org/officeDocument/2006/relationships" xmlns:p="http://schemas.openxmlformats.org/presentationml/2006/main">
+  <p:cSld name="Slide 11">
+    <p:bg>
+      <p:bgPr>
+        <a:solidFill>
+          <a:srgbClr val="F6F2EA"/>
+        </a:solidFill>
+      </p:bgPr>
+    </p:bg>
+    <p:spTree>
+      <p:nvGrpSpPr>
+        <p:cNvPr id="1" name=""/>
+        <p:cNvGrpSpPr/>
+        <p:nvPr/>
+      </p:nvGrpSpPr>
+      <p:grpSpPr>
+        <a:xfrm>
+          <a:off x="0" y="0"/>
+          <a:ext cx="0" cy="0"/>
+          <a:chOff x="0" y="0"/>
+          <a:chExt cx="0" cy="0"/>
+        </a:xfrm>
+      </p:grpSpPr>
+      <p:sp>
+        <p:nvSpPr>
+          <p:cNvPr id="2" name="Text 0"/>
+          <p:cNvSpPr txBox="1"/>
+          <p:nvPr/>
+        </p:nvSpPr>
+        <p:spPr>
+          <a:xfrm>
+            <a:off x="777240" y="566928"/>
+            <a:ext cx="10607040" cy="274320"/>
+          </a:xfrm>
+          <a:prstGeom prst="rect">
+            <a:avLst/>
+          </a:prstGeom>
+          <a:noFill/>
+          <a:ln/>
+        </p:spPr>
+        <p:txBody>
+          <a:bodyPr wrap="square" lIns="0" tIns="0" rIns="0" bIns="0" rtlCol="0" anchor="ctr"/>
+          <a:lstStyle/>
+          <a:p>
+            <a:pPr indent="0" marL="0">
+              <a:buNone/>
+            </a:pPr>
+            <a:r>
+              <a:rPr lang="en-US" sz="1100" b="1" spc="250" kern="0" dirty="0">
+                <a:solidFill>
+                  <a:srgbClr val="B04A2F"/>
+                </a:solidFill>
+                <a:latin typeface="Yu Gothic" pitchFamily="34" charset="0"/>
+                <a:ea typeface="Yu Gothic" pitchFamily="34" charset="-122"/>
+                <a:cs typeface="Yu Gothic" pitchFamily="34" charset="-120"/>
+              </a:rPr>
+              <a:t>ここだけは</a:t>
+            </a:r>
+            <a:endParaRPr lang="en-US" sz="1100" dirty="0"/>
+          </a:p>
+        </p:txBody>
+      </p:sp>
+      <p:sp>
+        <p:nvSpPr>
+          <p:cNvPr id="3" name="Text 1"/>
+          <p:cNvSpPr txBox="1"/>
+          <p:nvPr/>
+        </p:nvSpPr>
+        <p:spPr>
+          <a:xfrm>
+            <a:off x="777240" y="1097280"/>
+            <a:ext cx="10607040" cy="640080"/>
+          </a:xfrm>
+          <a:prstGeom prst="rect">
+            <a:avLst/>
+          </a:prstGeom>
+          <a:noFill/>
+          <a:ln/>
+        </p:spPr>
+        <p:txBody>
+          <a:bodyPr wrap="square" lIns="0" tIns="0" rIns="0" bIns="0" rtlCol="0" anchor="ctr"/>
+          <a:lstStyle/>
+          <a:p>
+            <a:pPr indent="0" marL="0">
+              <a:buNone/>
+            </a:pPr>
+            <a:r>
+              <a:rPr lang="en-US" sz="2600" b="1" dirty="0">
+                <a:solidFill>
+                  <a:srgbClr val="23201D"/>
+                </a:solidFill>
+                <a:latin typeface="Yu Gothic" pitchFamily="34" charset="0"/>
+                <a:ea typeface="Yu Gothic" pitchFamily="34" charset="-122"/>
+                <a:cs typeface="Yu Gothic" pitchFamily="34" charset="-120"/>
+              </a:rPr>
+              <a:t>個人名義の契約が残っていませんか</a:t>
+            </a:r>
+            <a:endParaRPr lang="en-US" sz="2600" dirty="0"/>
+          </a:p>
+        </p:txBody>
+      </p:sp>
+      <p:sp>
+        <p:nvSpPr>
+          <p:cNvPr id="4" name="Shape 2"/>
+          <p:cNvSpPr/>
+          <p:nvPr/>
+        </p:nvSpPr>
+        <p:spPr>
+          <a:xfrm>
+            <a:off x="777240" y="2148840"/>
+            <a:ext cx="64008" cy="2194560"/>
+          </a:xfrm>
+          <a:prstGeom prst="rect">
+            <a:avLst/>
+          </a:prstGeom>
+          <a:solidFill>
+            <a:srgbClr val="B04A2F"/>
+          </a:solidFill>
+          <a:ln w="12700">
+            <a:solidFill>
+              <a:srgbClr val="333333"/>
+            </a:solidFill>
+            <a:prstDash val="solid"/>
+          </a:ln>
+        </p:spPr>
+      </p:sp>
+      <p:sp>
+        <p:nvSpPr>
+          <p:cNvPr id="5" name="Text 3"/>
+          <p:cNvSpPr txBox="1"/>
+          <p:nvPr/>
+        </p:nvSpPr>
+        <p:spPr>
+          <a:xfrm>
+            <a:off x="1188720" y="2148840"/>
+            <a:ext cx="9966960" cy="2194560"/>
+          </a:xfrm>
+          <a:prstGeom prst="rect">
+            <a:avLst/>
+          </a:prstGeom>
+          <a:noFill/>
+          <a:ln/>
+        </p:spPr>
+        <p:txBody>
+          <a:bodyPr wrap="square" lIns="0" tIns="0" rIns="0" bIns="0" rtlCol="0" anchor="ctr"/>
+          <a:lstStyle/>
+          <a:p>
+            <a:pPr indent="0" marL="0">
+              <a:lnSpc>
+                <a:spcPct val="160000"/>
+              </a:lnSpc>
+              <a:buNone/>
+            </a:pPr>
+            <a:r>
+              <a:rPr lang="en-US" sz="1650" dirty="0">
+                <a:solidFill>
+                  <a:srgbClr val="3F3933"/>
+                </a:solidFill>
+                <a:latin typeface="Yu Gothic" pitchFamily="34" charset="0"/>
+                <a:ea typeface="Yu Gothic" pitchFamily="34" charset="-122"/>
+                <a:cs typeface="Yu Gothic" pitchFamily="34" charset="-120"/>
+              </a:rPr>
+              <a:t>ここで洗い出してください。社長個人のクレジットカードで契約したまま、社員が使っている状態は珍しくありません。退職時の手順も含めて、この回で整理します。法人契約への移行を検討するなら、今日がその場です。</a:t>
+            </a:r>
+            <a:endParaRPr lang="en-US" sz="1650" dirty="0"/>
+          </a:p>
+        </p:txBody>
+      </p:sp>
+      <p:sp>
+        <p:nvSpPr>
+          <p:cNvPr id="6" name="Shape 4"/>
+          <p:cNvSpPr/>
+          <p:nvPr/>
+        </p:nvSpPr>
+        <p:spPr>
+          <a:xfrm>
+            <a:off x="777240" y="4709160"/>
+            <a:ext cx="10607040" cy="960120"/>
+          </a:xfrm>
+          <a:prstGeom prst="rect">
+            <a:avLst/>
+          </a:prstGeom>
+          <a:solidFill>
+            <a:srgbClr val="EDE7DB"/>
+          </a:solidFill>
+          <a:ln w="12700">
+            <a:solidFill>
+              <a:srgbClr val="333333"/>
+            </a:solidFill>
+            <a:prstDash val="solid"/>
+          </a:ln>
+        </p:spPr>
+      </p:sp>
+      <p:sp>
+        <p:nvSpPr>
+          <p:cNvPr id="7" name="Text 5"/>
+          <p:cNvSpPr txBox="1"/>
+          <p:nvPr/>
+        </p:nvSpPr>
+        <p:spPr>
+          <a:xfrm>
+            <a:off x="1051560" y="4800600"/>
+            <a:ext cx="1463040" cy="256032"/>
+          </a:xfrm>
+          <a:prstGeom prst="rect">
+            <a:avLst/>
+          </a:prstGeom>
+          <a:noFill/>
+          <a:ln/>
+        </p:spPr>
+        <p:txBody>
+          <a:bodyPr wrap="square" lIns="0" tIns="0" rIns="0" bIns="0" rtlCol="0" anchor="ctr"/>
+          <a:lstStyle/>
+          <a:p>
+            <a:pPr indent="0" marL="0">
+              <a:buNone/>
+            </a:pPr>
+            <a:r>
+              <a:rPr lang="en-US" sz="900" b="1" spc="150" kern="0" dirty="0">
+                <a:solidFill>
+                  <a:srgbClr val="B04A2F"/>
+                </a:solidFill>
+                <a:latin typeface="Yu Gothic" pitchFamily="34" charset="0"/>
+                <a:ea typeface="Yu Gothic" pitchFamily="34" charset="-122"/>
+                <a:cs typeface="Yu Gothic" pitchFamily="34" charset="-120"/>
+              </a:rPr>
+              <a:t>他社では</a:t>
+            </a:r>
+            <a:endParaRPr lang="en-US" sz="900" dirty="0"/>
+          </a:p>
+        </p:txBody>
+      </p:sp>
+      <p:sp>
+        <p:nvSpPr>
+          <p:cNvPr id="8" name="Text 6"/>
+          <p:cNvSpPr txBox="1"/>
+          <p:nvPr/>
+        </p:nvSpPr>
+        <p:spPr>
+          <a:xfrm>
+            <a:off x="1051560" y="5029200"/>
+            <a:ext cx="10058400" cy="566928"/>
+          </a:xfrm>
+          <a:prstGeom prst="rect">
+            <a:avLst/>
+          </a:prstGeom>
+          <a:noFill/>
+          <a:ln/>
+        </p:spPr>
+        <p:txBody>
+          <a:bodyPr wrap="square" lIns="0" tIns="0" rIns="0" bIns="0" rtlCol="0" anchor="ctr"/>
+          <a:lstStyle/>
+          <a:p>
+            <a:pPr indent="0" marL="0">
+              <a:lnSpc>
+                <a:spcPct val="130000"/>
+              </a:lnSpc>
+              <a:buNone/>
+            </a:pPr>
+            <a:r>
+              <a:rPr lang="en-US" sz="1250" dirty="0">
+                <a:solidFill>
+                  <a:srgbClr val="3F3933"/>
+                </a:solidFill>
+                <a:latin typeface="Yu Gothic" pitchFamily="34" charset="0"/>
+                <a:ea typeface="Yu Gothic" pitchFamily="34" charset="-122"/>
+                <a:cs typeface="Yu Gothic" pitchFamily="34" charset="-120"/>
+              </a:rPr>
+              <a:t>推進役を決めずに始めた会社と、専任ではないが月4時間を正式に割り当てた会社の対比があります。前者は3か月で止まり、後者は1年後も回っています。差は熱意ではなく、時間が業務として認められていたかどうかでした。</a:t>
+            </a:r>
+            <a:endParaRPr lang="en-US" sz="1250" dirty="0"/>
+          </a:p>
+        </p:txBody>
+      </p:sp>
+      <p:sp>
+        <p:nvSpPr>
+          <p:cNvPr id="9" name="Text 7"/>
+          <p:cNvSpPr txBox="1"/>
+          <p:nvPr/>
+        </p:nvSpPr>
+        <p:spPr>
+          <a:xfrm>
+            <a:off x="777240" y="6382512"/>
+            <a:ext cx="7424928" cy="256032"/>
+          </a:xfrm>
+          <a:prstGeom prst="rect">
+            <a:avLst/>
+          </a:prstGeom>
+          <a:noFill/>
+          <a:ln/>
+        </p:spPr>
+        <p:txBody>
+          <a:bodyPr wrap="square" lIns="0" tIns="0" rIns="0" bIns="0" rtlCol="0" anchor="ctr"/>
+          <a:lstStyle/>
+          <a:p>
+            <a:pPr indent="0" marL="0">
+              <a:buNone/>
+            </a:pPr>
+            <a:r>
+              <a:rPr lang="en-US" sz="900" dirty="0">
+                <a:solidFill>
+                  <a:srgbClr val="8A8177"/>
+                </a:solidFill>
+                <a:latin typeface="Yu Gothic" pitchFamily="34" charset="0"/>
+                <a:ea typeface="Yu Gothic" pitchFamily="34" charset="-122"/>
+                <a:cs typeface="Yu Gothic" pitchFamily="34" charset="-120"/>
+              </a:rPr>
+              <a:t>第11回　組織に載せる</a:t>
+            </a:r>
+            <a:endParaRPr lang="en-US" sz="900" dirty="0"/>
+          </a:p>
+        </p:txBody>
+      </p:sp>
+      <p:sp>
+        <p:nvSpPr>
+          <p:cNvPr id="10" name="Text 8"/>
+          <p:cNvSpPr txBox="1"/>
+          <p:nvPr/>
+        </p:nvSpPr>
+        <p:spPr>
+          <a:xfrm>
+            <a:off x="8202168" y="6382512"/>
+            <a:ext cx="3182112" cy="256032"/>
+          </a:xfrm>
+          <a:prstGeom prst="rect">
+            <a:avLst/>
+          </a:prstGeom>
+          <a:noFill/>
+          <a:ln/>
+        </p:spPr>
+        <p:txBody>
+          <a:bodyPr wrap="square" lIns="0" tIns="0" rIns="0" bIns="0" rtlCol="0" anchor="ctr"/>
+          <a:lstStyle/>
+          <a:p>
+            <a:pPr algn="r" indent="0" marL="0">
+              <a:buNone/>
+            </a:pPr>
+            <a:r>
+              <a:rPr lang="en-US" sz="900" dirty="0">
+                <a:solidFill>
+                  <a:srgbClr val="8A8177"/>
+                </a:solidFill>
+                <a:latin typeface="Yu Gothic" pitchFamily="34" charset="0"/>
+                <a:ea typeface="Yu Gothic" pitchFamily="34" charset="-122"/>
+                <a:cs typeface="Yu Gothic" pitchFamily="34" charset="-120"/>
+              </a:rPr>
+              <a:t>ここだけは</a:t>
+            </a:r>
+            <a:endParaRPr lang="en-US" sz="900" dirty="0"/>
+          </a:p>
+        </p:txBody>
+      </p:sp>
+    </p:spTree>
+  </p:cSld>
+  <p:clrMapOvr>
+    <a:masterClrMapping/>
+  </p:clrMapOvr>
+</p:sld>
+</file>
+
+<file path=ppt/slides/slide12.xml><?xml version="1.0" encoding="utf-8"?>
+<p:sld xmlns:a="http://schemas.openxmlformats.org/drawingml/2006/main" xmlns:r="http://schemas.openxmlformats.org/officeDocument/2006/relationships" xmlns:p="http://schemas.openxmlformats.org/presentationml/2006/main">
+  <p:cSld name="Slide 12">
+    <p:bg>
+      <p:bgPr>
+        <a:solidFill>
+          <a:srgbClr val="23201D"/>
+        </a:solidFill>
+      </p:bgPr>
+    </p:bg>
+    <p:spTree>
+      <p:nvGrpSpPr>
+        <p:cNvPr id="1" name=""/>
+        <p:cNvGrpSpPr/>
+        <p:nvPr/>
+      </p:nvGrpSpPr>
+      <p:grpSpPr>
+        <a:xfrm>
+          <a:off x="0" y="0"/>
+          <a:ext cx="0" cy="0"/>
+          <a:chOff x="0" y="0"/>
+          <a:chExt cx="0" cy="0"/>
+        </a:xfrm>
+      </p:grpSpPr>
+      <p:sp>
+        <p:nvSpPr>
+          <p:cNvPr id="2" name="Text 0"/>
+          <p:cNvSpPr txBox="1"/>
+          <p:nvPr/>
+        </p:nvSpPr>
+        <p:spPr>
+          <a:xfrm>
+            <a:off x="777240" y="1280160"/>
+            <a:ext cx="10607040" cy="365760"/>
+          </a:xfrm>
+          <a:prstGeom prst="rect">
+            <a:avLst/>
+          </a:prstGeom>
+          <a:noFill/>
+          <a:ln/>
+        </p:spPr>
+        <p:txBody>
+          <a:bodyPr wrap="square" lIns="0" tIns="0" rIns="0" bIns="0" rtlCol="0" anchor="ctr"/>
+          <a:lstStyle/>
+          <a:p>
+            <a:pPr indent="0" marL="0">
+              <a:buNone/>
+            </a:pPr>
+            <a:r>
+              <a:rPr lang="en-US" sz="1200" b="1" spc="300" kern="0" dirty="0">
+                <a:solidFill>
+                  <a:srgbClr val="B04A2F"/>
+                </a:solidFill>
+                <a:latin typeface="Yu Gothic" pitchFamily="34" charset="0"/>
+                <a:ea typeface="Yu Gothic" pitchFamily="34" charset="-122"/>
+                <a:cs typeface="Yu Gothic" pitchFamily="34" charset="-120"/>
+              </a:rPr>
+              <a:t>今日の宿題</a:t>
+            </a:r>
+            <a:endParaRPr lang="en-US" sz="1200" dirty="0"/>
+          </a:p>
+        </p:txBody>
+      </p:sp>
+      <p:sp>
+        <p:nvSpPr>
+          <p:cNvPr id="3" name="Text 1"/>
+          <p:cNvSpPr txBox="1"/>
+          <p:nvPr/>
+        </p:nvSpPr>
+        <p:spPr>
+          <a:xfrm>
+            <a:off x="777240" y="1691640"/>
+            <a:ext cx="10607040" cy="640080"/>
+          </a:xfrm>
+          <a:prstGeom prst="rect">
+            <a:avLst/>
+          </a:prstGeom>
+          <a:noFill/>
+          <a:ln/>
+        </p:spPr>
+        <p:txBody>
+          <a:bodyPr wrap="square" lIns="0" tIns="0" rIns="0" bIns="0" rtlCol="0" anchor="ctr"/>
+          <a:lstStyle/>
+          <a:p>
+            <a:pPr indent="0" marL="0">
+              <a:buNone/>
+            </a:pPr>
+            <a:r>
+              <a:rPr lang="en-US" sz="3200" b="1" dirty="0">
+                <a:solidFill>
+                  <a:srgbClr val="FFFFFF"/>
+                </a:solidFill>
+                <a:latin typeface="Yu Gothic" pitchFamily="34" charset="0"/>
+                <a:ea typeface="Yu Gothic" pitchFamily="34" charset="-122"/>
+                <a:cs typeface="Yu Gothic" pitchFamily="34" charset="-120"/>
+              </a:rPr>
+              <a:t>ひとつだけ</a:t>
+            </a:r>
+            <a:endParaRPr lang="en-US" sz="3200" dirty="0"/>
+          </a:p>
+        </p:txBody>
+      </p:sp>
+      <p:sp>
+        <p:nvSpPr>
+          <p:cNvPr id="4" name="Shape 2"/>
+          <p:cNvSpPr/>
+          <p:nvPr/>
+        </p:nvSpPr>
+        <p:spPr>
+          <a:xfrm>
+            <a:off x="777240" y="2651760"/>
+            <a:ext cx="10607040" cy="1371600"/>
+          </a:xfrm>
+          <a:prstGeom prst="rect">
+            <a:avLst/>
+          </a:prstGeom>
+          <a:solidFill>
+            <a:srgbClr val="2E2A26"/>
+          </a:solidFill>
+          <a:ln w="12700">
+            <a:solidFill>
+              <a:srgbClr val="B04A2F"/>
+            </a:solidFill>
+            <a:prstDash val="solid"/>
+          </a:ln>
+        </p:spPr>
+      </p:sp>
+      <p:sp>
+        <p:nvSpPr>
+          <p:cNvPr id="5" name="Text 3"/>
+          <p:cNvSpPr txBox="1"/>
+          <p:nvPr/>
+        </p:nvSpPr>
+        <p:spPr>
+          <a:xfrm>
+            <a:off x="1234440" y="2743200"/>
+            <a:ext cx="9692640" cy="1188720"/>
+          </a:xfrm>
+          <a:prstGeom prst="rect">
+            <a:avLst/>
+          </a:prstGeom>
+          <a:noFill/>
+          <a:ln/>
+        </p:spPr>
+        <p:txBody>
+          <a:bodyPr wrap="square" lIns="0" tIns="0" rIns="0" bIns="0" rtlCol="0" anchor="ctr"/>
+          <a:lstStyle/>
+          <a:p>
+            <a:pPr indent="0" marL="0">
+              <a:lnSpc>
+                <a:spcPct val="140000"/>
+              </a:lnSpc>
+              <a:buNone/>
+            </a:pPr>
+            <a:r>
+              <a:rPr lang="en-US" sz="1900" b="1" dirty="0">
+                <a:solidFill>
+                  <a:srgbClr val="FFFFFF"/>
+                </a:solidFill>
+                <a:latin typeface="Yu Gothic" pitchFamily="34" charset="0"/>
+                <a:ea typeface="Yu Gothic" pitchFamily="34" charset="-122"/>
+                <a:cs typeface="Yu Gothic" pitchFamily="34" charset="-120"/>
+              </a:rPr>
+              <a:t>効果測定シートの「現在」の列を、実測値で埋める。</a:t>
+            </a:r>
+            <a:endParaRPr lang="en-US" sz="1900" dirty="0"/>
+          </a:p>
+        </p:txBody>
+      </p:sp>
+      <p:sp>
+        <p:nvSpPr>
+          <p:cNvPr id="6" name="Text 4"/>
+          <p:cNvSpPr txBox="1"/>
+          <p:nvPr/>
+        </p:nvSpPr>
+        <p:spPr>
+          <a:xfrm>
+            <a:off x="777240" y="4297680"/>
+            <a:ext cx="10607040" cy="274320"/>
+          </a:xfrm>
+          <a:prstGeom prst="rect">
+            <a:avLst/>
+          </a:prstGeom>
+          <a:noFill/>
+          <a:ln/>
+        </p:spPr>
+        <p:txBody>
+          <a:bodyPr wrap="square" lIns="0" tIns="0" rIns="0" bIns="0" rtlCol="0" anchor="ctr"/>
+          <a:lstStyle/>
+          <a:p>
+            <a:pPr indent="0" marL="0">
+              <a:buNone/>
+            </a:pPr>
+            <a:r>
+              <a:rPr lang="en-US" sz="1000" b="1" spc="200" kern="0" dirty="0">
+                <a:solidFill>
+                  <a:srgbClr val="B04A2F"/>
+                </a:solidFill>
+                <a:latin typeface="Yu Gothic" pitchFamily="34" charset="0"/>
+                <a:ea typeface="Yu Gothic" pitchFamily="34" charset="-122"/>
+                <a:cs typeface="Yu Gothic" pitchFamily="34" charset="-120"/>
+              </a:rPr>
+              <a:t>なぜこの宿題か</a:t>
+            </a:r>
+            <a:endParaRPr lang="en-US" sz="1000" dirty="0"/>
+          </a:p>
+        </p:txBody>
+      </p:sp>
+      <p:sp>
+        <p:nvSpPr>
+          <p:cNvPr id="7" name="Text 5"/>
+          <p:cNvSpPr txBox="1"/>
+          <p:nvPr/>
+        </p:nvSpPr>
+        <p:spPr>
+          <a:xfrm>
+            <a:off x="777240" y="4572000"/>
+            <a:ext cx="9546336" cy="914400"/>
+          </a:xfrm>
+          <a:prstGeom prst="rect">
+            <a:avLst/>
+          </a:prstGeom>
+          <a:noFill/>
+          <a:ln/>
+        </p:spPr>
+        <p:txBody>
+          <a:bodyPr wrap="square" lIns="0" tIns="0" rIns="0" bIns="0" rtlCol="0" anchor="ctr"/>
+          <a:lstStyle/>
+          <a:p>
+            <a:pPr indent="0" marL="0">
+              <a:lnSpc>
+                <a:spcPct val="145000"/>
+              </a:lnSpc>
+              <a:buNone/>
+            </a:pPr>
+            <a:r>
+              <a:rPr lang="en-US" sz="1350" dirty="0">
+                <a:solidFill>
+                  <a:srgbClr val="CFC6B8"/>
+                </a:solidFill>
+                <a:latin typeface="Yu Gothic" pitchFamily="34" charset="0"/>
+                <a:ea typeface="Yu Gothic" pitchFamily="34" charset="-122"/>
+                <a:cs typeface="Yu Gothic" pitchFamily="34" charset="-120"/>
+              </a:rPr>
+              <a:t>現在値がないと、3か月後に何が変わったかが言えません。今日の推定値ではなく、実測してください。測ってみると、思っていたより減っていない項目が必ず見つかります。</a:t>
+            </a:r>
+            <a:endParaRPr lang="en-US" sz="1350" dirty="0"/>
+          </a:p>
+        </p:txBody>
+      </p:sp>
+      <p:sp>
+        <p:nvSpPr>
+          <p:cNvPr id="8" name="Text 6"/>
+          <p:cNvSpPr txBox="1"/>
+          <p:nvPr/>
+        </p:nvSpPr>
+        <p:spPr>
+          <a:xfrm>
+            <a:off x="777240" y="6382512"/>
+            <a:ext cx="10607040" cy="256032"/>
+          </a:xfrm>
+          <a:prstGeom prst="rect">
+            <a:avLst/>
+          </a:prstGeom>
+          <a:noFill/>
+          <a:ln/>
+        </p:spPr>
+        <p:txBody>
+          <a:bodyPr wrap="square" lIns="0" tIns="0" rIns="0" bIns="0" rtlCol="0" anchor="ctr"/>
+          <a:lstStyle/>
+          <a:p>
+            <a:pPr indent="0" marL="0">
+              <a:buNone/>
+            </a:pPr>
+            <a:r>
+              <a:rPr lang="en-US" sz="900" dirty="0">
+                <a:solidFill>
+                  <a:srgbClr val="6E6558"/>
+                </a:solidFill>
+                <a:latin typeface="Yu Gothic" pitchFamily="34" charset="0"/>
+                <a:ea typeface="Yu Gothic" pitchFamily="34" charset="-122"/>
+                <a:cs typeface="Yu Gothic" pitchFamily="34" charset="-120"/>
+              </a:rPr>
+              <a:t>第11回　組織に載せる</a:t>
+            </a:r>
+            <a:endParaRPr lang="en-US" sz="900" dirty="0"/>
+          </a:p>
+        </p:txBody>
+      </p:sp>
+    </p:spTree>
+  </p:cSld>
+  <p:clrMapOvr>
+    <a:masterClrMapping/>
+  </p:clrMapOvr>
+</p:sld>
+</file>
+
 <file path=ppt/slides/slide2.xml><?xml version="1.0" encoding="utf-8"?>
 <p:sld xmlns:a="http://schemas.openxmlformats.org/drawingml/2006/main" xmlns:r="http://schemas.openxmlformats.org/officeDocument/2006/relationships" xmlns:p="http://schemas.openxmlformats.org/presentationml/2006/main">
   <p:cSld name="Slide 2">
@@ -1712,7 +3434,7 @@
         </p:nvSpPr>
         <p:spPr>
           <a:xfrm>
-            <a:off x="777240" y="777240"/>
+            <a:off x="777240" y="566928"/>
             <a:ext cx="10607040" cy="274320"/>
           </a:xfrm>
           <a:prstGeom prst="rect">
@@ -1737,7 +3459,7 @@
                 <a:ea typeface="Yu Gothic" pitchFamily="34" charset="-122"/>
                 <a:cs typeface="Yu Gothic" pitchFamily="34" charset="-120"/>
               </a:rPr>
-              <a:t>今日のゴール</a:t>
+              <a:t>今日の出発点</a:t>
             </a:r>
             <a:endParaRPr lang="en-US" sz="1100" dirty="0"/>
           </a:p>
@@ -1751,27 +3473,24 @@
         </p:nvSpPr>
         <p:spPr>
           <a:xfrm>
-            <a:off x="777240" y="1280160"/>
-            <a:ext cx="9758477" cy="1828800"/>
-          </a:xfrm>
-          <a:prstGeom prst="rect">
-            <a:avLst/>
-          </a:prstGeom>
-          <a:noFill/>
-          <a:ln/>
-        </p:spPr>
-        <p:txBody>
-          <a:bodyPr wrap="square" lIns="0" tIns="0" rIns="0" bIns="0" rtlCol="0" anchor="ctr"/>
-          <a:lstStyle/>
-          <a:p>
-            <a:pPr indent="0" marL="0">
-              <a:lnSpc>
-                <a:spcPct val="145000"/>
-              </a:lnSpc>
-              <a:buNone/>
-            </a:pPr>
-            <a:r>
-              <a:rPr lang="en-US" sz="2800" b="1" dirty="0">
+            <a:off x="777240" y="896112"/>
+            <a:ext cx="10607040" cy="640080"/>
+          </a:xfrm>
+          <a:prstGeom prst="rect">
+            <a:avLst/>
+          </a:prstGeom>
+          <a:noFill/>
+          <a:ln/>
+        </p:spPr>
+        <p:txBody>
+          <a:bodyPr wrap="square" lIns="0" tIns="0" rIns="0" bIns="0" rtlCol="0" anchor="ctr"/>
+          <a:lstStyle/>
+          <a:p>
+            <a:pPr indent="0" marL="0">
+              <a:buNone/>
+            </a:pPr>
+            <a:r>
+              <a:rPr lang="en-US" sz="2600" b="1" dirty="0">
                 <a:solidFill>
                   <a:srgbClr val="23201D"/>
                 </a:solidFill>
@@ -1779,9 +3498,9 @@
                 <a:ea typeface="Yu Gothic" pitchFamily="34" charset="-122"/>
                 <a:cs typeface="Yu Gothic" pitchFamily="34" charset="-120"/>
               </a:rPr>
-              <a:t>社長個人の技能を、会社の仕組みに変えます。推進役・権限・費用・効果測定を決めます。</a:t>
-            </a:r>
-            <a:endParaRPr lang="en-US" sz="2800" dirty="0"/>
+              <a:t>ここまでの成果は、まだ社長個人に紐づいています。</a:t>
+            </a:r>
+            <a:endParaRPr lang="en-US" sz="2600" dirty="0"/>
           </a:p>
         </p:txBody>
       </p:sp>
@@ -1793,14 +3512,323 @@
         </p:nvSpPr>
         <p:spPr>
           <a:xfrm>
-            <a:off x="777240" y="3429000"/>
-            <a:ext cx="10607040" cy="18288"/>
+            <a:off x="777240" y="1783080"/>
+            <a:ext cx="10607040" cy="713232"/>
           </a:xfrm>
           <a:prstGeom prst="rect">
             <a:avLst/>
           </a:prstGeom>
           <a:solidFill>
-            <a:srgbClr val="EDE7DB"/>
+            <a:srgbClr val="FFFFFF"/>
+          </a:solidFill>
+          <a:ln w="12700">
+            <a:solidFill>
+              <a:srgbClr val="EDE7DB"/>
+            </a:solidFill>
+            <a:prstDash val="solid"/>
+          </a:ln>
+        </p:spPr>
+      </p:sp>
+      <p:sp>
+        <p:nvSpPr>
+          <p:cNvPr id="5" name="Text 3"/>
+          <p:cNvSpPr txBox="1"/>
+          <p:nvPr/>
+        </p:nvSpPr>
+        <p:spPr>
+          <a:xfrm>
+            <a:off x="1051560" y="1783080"/>
+            <a:ext cx="365760" cy="713232"/>
+          </a:xfrm>
+          <a:prstGeom prst="rect">
+            <a:avLst/>
+          </a:prstGeom>
+          <a:noFill/>
+          <a:ln/>
+        </p:spPr>
+        <p:txBody>
+          <a:bodyPr wrap="square" lIns="0" tIns="0" rIns="0" bIns="0" rtlCol="0" anchor="ctr"/>
+          <a:lstStyle/>
+          <a:p>
+            <a:pPr indent="0" marL="0">
+              <a:buNone/>
+            </a:pPr>
+            <a:r>
+              <a:rPr lang="en-US" sz="1400" dirty="0">
+                <a:solidFill>
+                  <a:srgbClr val="8A8177"/>
+                </a:solidFill>
+                <a:latin typeface="Yu Gothic" pitchFamily="34" charset="0"/>
+                <a:ea typeface="Yu Gothic" pitchFamily="34" charset="-122"/>
+                <a:cs typeface="Yu Gothic" pitchFamily="34" charset="-120"/>
+              </a:rPr>
+              <a:t>―</a:t>
+            </a:r>
+            <a:endParaRPr lang="en-US" sz="1400" dirty="0"/>
+          </a:p>
+        </p:txBody>
+      </p:sp>
+      <p:sp>
+        <p:nvSpPr>
+          <p:cNvPr id="6" name="Text 4"/>
+          <p:cNvSpPr txBox="1"/>
+          <p:nvPr/>
+        </p:nvSpPr>
+        <p:spPr>
+          <a:xfrm>
+            <a:off x="1508760" y="1783080"/>
+            <a:ext cx="9601200" cy="713232"/>
+          </a:xfrm>
+          <a:prstGeom prst="rect">
+            <a:avLst/>
+          </a:prstGeom>
+          <a:noFill/>
+          <a:ln/>
+        </p:spPr>
+        <p:txBody>
+          <a:bodyPr wrap="square" lIns="0" tIns="0" rIns="0" bIns="0" rtlCol="0" anchor="ctr"/>
+          <a:lstStyle/>
+          <a:p>
+            <a:pPr indent="0" marL="0">
+              <a:buNone/>
+            </a:pPr>
+            <a:r>
+              <a:rPr lang="en-US" sz="1500" dirty="0">
+                <a:solidFill>
+                  <a:srgbClr val="23201D"/>
+                </a:solidFill>
+                <a:latin typeface="Yu Gothic" pitchFamily="34" charset="0"/>
+                <a:ea typeface="Yu Gothic" pitchFamily="34" charset="-122"/>
+                <a:cs typeface="Yu Gothic" pitchFamily="34" charset="-120"/>
+              </a:rPr>
+              <a:t>導入検討でつまずく理由の第1位は「推進人材がいない」（32.0%）</a:t>
+            </a:r>
+            <a:endParaRPr lang="en-US" sz="1500" dirty="0"/>
+          </a:p>
+        </p:txBody>
+      </p:sp>
+      <p:sp>
+        <p:nvSpPr>
+          <p:cNvPr id="7" name="Shape 5"/>
+          <p:cNvSpPr/>
+          <p:nvPr/>
+        </p:nvSpPr>
+        <p:spPr>
+          <a:xfrm>
+            <a:off x="777240" y="2624328"/>
+            <a:ext cx="10607040" cy="713232"/>
+          </a:xfrm>
+          <a:prstGeom prst="rect">
+            <a:avLst/>
+          </a:prstGeom>
+          <a:solidFill>
+            <a:srgbClr val="FFFFFF"/>
+          </a:solidFill>
+          <a:ln w="12700">
+            <a:solidFill>
+              <a:srgbClr val="EDE7DB"/>
+            </a:solidFill>
+            <a:prstDash val="solid"/>
+          </a:ln>
+        </p:spPr>
+      </p:sp>
+      <p:sp>
+        <p:nvSpPr>
+          <p:cNvPr id="8" name="Text 6"/>
+          <p:cNvSpPr txBox="1"/>
+          <p:nvPr/>
+        </p:nvSpPr>
+        <p:spPr>
+          <a:xfrm>
+            <a:off x="1051560" y="2624328"/>
+            <a:ext cx="365760" cy="713232"/>
+          </a:xfrm>
+          <a:prstGeom prst="rect">
+            <a:avLst/>
+          </a:prstGeom>
+          <a:noFill/>
+          <a:ln/>
+        </p:spPr>
+        <p:txBody>
+          <a:bodyPr wrap="square" lIns="0" tIns="0" rIns="0" bIns="0" rtlCol="0" anchor="ctr"/>
+          <a:lstStyle/>
+          <a:p>
+            <a:pPr indent="0" marL="0">
+              <a:buNone/>
+            </a:pPr>
+            <a:r>
+              <a:rPr lang="en-US" sz="1400" dirty="0">
+                <a:solidFill>
+                  <a:srgbClr val="8A8177"/>
+                </a:solidFill>
+                <a:latin typeface="Yu Gothic" pitchFamily="34" charset="0"/>
+                <a:ea typeface="Yu Gothic" pitchFamily="34" charset="-122"/>
+                <a:cs typeface="Yu Gothic" pitchFamily="34" charset="-120"/>
+              </a:rPr>
+              <a:t>―</a:t>
+            </a:r>
+            <a:endParaRPr lang="en-US" sz="1400" dirty="0"/>
+          </a:p>
+        </p:txBody>
+      </p:sp>
+      <p:sp>
+        <p:nvSpPr>
+          <p:cNvPr id="9" name="Text 7"/>
+          <p:cNvSpPr txBox="1"/>
+          <p:nvPr/>
+        </p:nvSpPr>
+        <p:spPr>
+          <a:xfrm>
+            <a:off x="1508760" y="2624328"/>
+            <a:ext cx="9601200" cy="713232"/>
+          </a:xfrm>
+          <a:prstGeom prst="rect">
+            <a:avLst/>
+          </a:prstGeom>
+          <a:noFill/>
+          <a:ln/>
+        </p:spPr>
+        <p:txBody>
+          <a:bodyPr wrap="square" lIns="0" tIns="0" rIns="0" bIns="0" rtlCol="0" anchor="ctr"/>
+          <a:lstStyle/>
+          <a:p>
+            <a:pPr indent="0" marL="0">
+              <a:buNone/>
+            </a:pPr>
+            <a:r>
+              <a:rPr lang="en-US" sz="1500" dirty="0">
+                <a:solidFill>
+                  <a:srgbClr val="23201D"/>
+                </a:solidFill>
+                <a:latin typeface="Yu Gothic" pitchFamily="34" charset="0"/>
+                <a:ea typeface="Yu Gothic" pitchFamily="34" charset="-122"/>
+                <a:cs typeface="Yu Gothic" pitchFamily="34" charset="-120"/>
+              </a:rPr>
+              <a:t>作ったものはあるが、直せるのは社長だけ</a:t>
+            </a:r>
+            <a:endParaRPr lang="en-US" sz="1500" dirty="0"/>
+          </a:p>
+        </p:txBody>
+      </p:sp>
+      <p:sp>
+        <p:nvSpPr>
+          <p:cNvPr id="10" name="Shape 8"/>
+          <p:cNvSpPr/>
+          <p:nvPr/>
+        </p:nvSpPr>
+        <p:spPr>
+          <a:xfrm>
+            <a:off x="777240" y="3465576"/>
+            <a:ext cx="10607040" cy="713232"/>
+          </a:xfrm>
+          <a:prstGeom prst="rect">
+            <a:avLst/>
+          </a:prstGeom>
+          <a:solidFill>
+            <a:srgbClr val="FFFFFF"/>
+          </a:solidFill>
+          <a:ln w="12700">
+            <a:solidFill>
+              <a:srgbClr val="EDE7DB"/>
+            </a:solidFill>
+            <a:prstDash val="solid"/>
+          </a:ln>
+        </p:spPr>
+      </p:sp>
+      <p:sp>
+        <p:nvSpPr>
+          <p:cNvPr id="11" name="Text 9"/>
+          <p:cNvSpPr txBox="1"/>
+          <p:nvPr/>
+        </p:nvSpPr>
+        <p:spPr>
+          <a:xfrm>
+            <a:off x="1051560" y="3465576"/>
+            <a:ext cx="365760" cy="713232"/>
+          </a:xfrm>
+          <a:prstGeom prst="rect">
+            <a:avLst/>
+          </a:prstGeom>
+          <a:noFill/>
+          <a:ln/>
+        </p:spPr>
+        <p:txBody>
+          <a:bodyPr wrap="square" lIns="0" tIns="0" rIns="0" bIns="0" rtlCol="0" anchor="ctr"/>
+          <a:lstStyle/>
+          <a:p>
+            <a:pPr indent="0" marL="0">
+              <a:buNone/>
+            </a:pPr>
+            <a:r>
+              <a:rPr lang="en-US" sz="1400" dirty="0">
+                <a:solidFill>
+                  <a:srgbClr val="8A8177"/>
+                </a:solidFill>
+                <a:latin typeface="Yu Gothic" pitchFamily="34" charset="0"/>
+                <a:ea typeface="Yu Gothic" pitchFamily="34" charset="-122"/>
+                <a:cs typeface="Yu Gothic" pitchFamily="34" charset="-120"/>
+              </a:rPr>
+              <a:t>―</a:t>
+            </a:r>
+            <a:endParaRPr lang="en-US" sz="1400" dirty="0"/>
+          </a:p>
+        </p:txBody>
+      </p:sp>
+      <p:sp>
+        <p:nvSpPr>
+          <p:cNvPr id="12" name="Text 10"/>
+          <p:cNvSpPr txBox="1"/>
+          <p:nvPr/>
+        </p:nvSpPr>
+        <p:spPr>
+          <a:xfrm>
+            <a:off x="1508760" y="3465576"/>
+            <a:ext cx="9601200" cy="713232"/>
+          </a:xfrm>
+          <a:prstGeom prst="rect">
+            <a:avLst/>
+          </a:prstGeom>
+          <a:noFill/>
+          <a:ln/>
+        </p:spPr>
+        <p:txBody>
+          <a:bodyPr wrap="square" lIns="0" tIns="0" rIns="0" bIns="0" rtlCol="0" anchor="ctr"/>
+          <a:lstStyle/>
+          <a:p>
+            <a:pPr indent="0" marL="0">
+              <a:buNone/>
+            </a:pPr>
+            <a:r>
+              <a:rPr lang="en-US" sz="1500" dirty="0">
+                <a:solidFill>
+                  <a:srgbClr val="23201D"/>
+                </a:solidFill>
+                <a:latin typeface="Yu Gothic" pitchFamily="34" charset="0"/>
+                <a:ea typeface="Yu Gothic" pitchFamily="34" charset="-122"/>
+                <a:cs typeface="Yu Gothic" pitchFamily="34" charset="-120"/>
+              </a:rPr>
+              <a:t>費用も権限も、把握しているのは社長だけ</a:t>
+            </a:r>
+            <a:endParaRPr lang="en-US" sz="1500" dirty="0"/>
+          </a:p>
+        </p:txBody>
+      </p:sp>
+      <p:sp>
+        <p:nvSpPr>
+          <p:cNvPr id="13" name="Shape 11"/>
+          <p:cNvSpPr/>
+          <p:nvPr/>
+        </p:nvSpPr>
+        <p:spPr>
+          <a:xfrm>
+            <a:off x="777240" y="4526280"/>
+            <a:ext cx="10607040" cy="914400"/>
+          </a:xfrm>
+          <a:prstGeom prst="rect">
+            <a:avLst/>
+          </a:prstGeom>
+          <a:solidFill>
+            <a:srgbClr val="B04A2F"/>
           </a:solidFill>
           <a:ln w="12700">
             <a:solidFill>
@@ -1812,14 +3840,14 @@
       </p:sp>
       <p:sp>
         <p:nvSpPr>
-          <p:cNvPr id="5" name="Text 3"/>
-          <p:cNvSpPr txBox="1"/>
-          <p:nvPr/>
-        </p:nvSpPr>
-        <p:spPr>
-          <a:xfrm>
-            <a:off x="777240" y="3657600"/>
-            <a:ext cx="9015984" cy="822960"/>
+          <p:cNvPr id="14" name="Text 12"/>
+          <p:cNvSpPr txBox="1"/>
+          <p:nvPr/>
+        </p:nvSpPr>
+        <p:spPr>
+          <a:xfrm>
+            <a:off x="1143000" y="4526280"/>
+            <a:ext cx="9875520" cy="914400"/>
           </a:xfrm>
           <a:prstGeom prst="rect">
             <a:avLst/>
@@ -1833,84 +3861,59 @@
           <a:p>
             <a:pPr indent="0" marL="0">
               <a:lnSpc>
-                <a:spcPct val="140000"/>
+                <a:spcPct val="130000"/>
               </a:lnSpc>
               <a:buNone/>
             </a:pPr>
             <a:r>
-              <a:rPr lang="en-US" sz="1500" dirty="0">
-                <a:solidFill>
-                  <a:srgbClr val="5A534A"/>
-                </a:solidFill>
-                <a:latin typeface="Yu Gothic" pitchFamily="34" charset="0"/>
-                <a:ea typeface="Yu Gothic" pitchFamily="34" charset="-122"/>
-                <a:cs typeface="Yu Gothic" pitchFamily="34" charset="-120"/>
-              </a:rPr>
-              <a:t>実質の仕上げの回です。ここが決まると、来年も続きます。</a:t>
-            </a:r>
-            <a:endParaRPr lang="en-US" sz="1500" dirty="0"/>
-          </a:p>
-        </p:txBody>
-      </p:sp>
-      <p:sp>
-        <p:nvSpPr>
-          <p:cNvPr id="6" name="Shape 4"/>
-          <p:cNvSpPr/>
-          <p:nvPr/>
-        </p:nvSpPr>
-        <p:spPr>
-          <a:xfrm>
-            <a:off x="777240" y="4846320"/>
-            <a:ext cx="10607040" cy="777240"/>
-          </a:xfrm>
-          <a:prstGeom prst="rect">
-            <a:avLst/>
-          </a:prstGeom>
-          <a:solidFill>
-            <a:srgbClr val="EDE7DB"/>
-          </a:solidFill>
-          <a:ln w="12700">
-            <a:solidFill>
-              <a:srgbClr val="333333"/>
-            </a:solidFill>
-            <a:prstDash val="solid"/>
-          </a:ln>
-        </p:spPr>
-      </p:sp>
-      <p:sp>
-        <p:nvSpPr>
-          <p:cNvPr id="7" name="Text 5"/>
-          <p:cNvSpPr txBox="1"/>
-          <p:nvPr/>
-        </p:nvSpPr>
-        <p:spPr>
-          <a:xfrm>
-            <a:off x="960120" y="4956048"/>
-            <a:ext cx="1956816" cy="237744"/>
-          </a:xfrm>
-          <a:prstGeom prst="rect">
-            <a:avLst/>
-          </a:prstGeom>
-          <a:noFill/>
-          <a:ln/>
-        </p:spPr>
-        <p:txBody>
-          <a:bodyPr wrap="square" lIns="0" tIns="0" rIns="0" bIns="0" rtlCol="0" anchor="ctr"/>
-          <a:lstStyle/>
-          <a:p>
-            <a:pPr indent="0" marL="0">
-              <a:buNone/>
-            </a:pPr>
-            <a:r>
-              <a:rPr lang="en-US" sz="900" b="1" dirty="0">
-                <a:solidFill>
-                  <a:srgbClr val="B04A2F"/>
-                </a:solidFill>
-                <a:latin typeface="Yu Gothic" pitchFamily="34" charset="0"/>
-                <a:ea typeface="Yu Gothic" pitchFamily="34" charset="-122"/>
-                <a:cs typeface="Yu Gothic" pitchFamily="34" charset="-120"/>
-              </a:rPr>
-              <a:t>0-15分</a:t>
+              <a:rPr lang="en-US" sz="1800" b="1" dirty="0">
+                <a:solidFill>
+                  <a:srgbClr val="FFFFFF"/>
+                </a:solidFill>
+                <a:latin typeface="Yu Gothic" pitchFamily="34" charset="0"/>
+                <a:ea typeface="Yu Gothic" pitchFamily="34" charset="-122"/>
+                <a:cs typeface="Yu Gothic" pitchFamily="34" charset="-120"/>
+              </a:rPr>
+              <a:t>今日は、社長がいなくても回る形に移します。実質の仕上げです。</a:t>
+            </a:r>
+            <a:endParaRPr lang="en-US" sz="1800" dirty="0"/>
+          </a:p>
+        </p:txBody>
+      </p:sp>
+      <p:sp>
+        <p:nvSpPr>
+          <p:cNvPr id="15" name="Text 13"/>
+          <p:cNvSpPr txBox="1"/>
+          <p:nvPr/>
+        </p:nvSpPr>
+        <p:spPr>
+          <a:xfrm>
+            <a:off x="777240" y="6382512"/>
+            <a:ext cx="7424928" cy="256032"/>
+          </a:xfrm>
+          <a:prstGeom prst="rect">
+            <a:avLst/>
+          </a:prstGeom>
+          <a:noFill/>
+          <a:ln/>
+        </p:spPr>
+        <p:txBody>
+          <a:bodyPr wrap="square" lIns="0" tIns="0" rIns="0" bIns="0" rtlCol="0" anchor="ctr"/>
+          <a:lstStyle/>
+          <a:p>
+            <a:pPr indent="0" marL="0">
+              <a:buNone/>
+            </a:pPr>
+            <a:r>
+              <a:rPr lang="en-US" sz="900" dirty="0">
+                <a:solidFill>
+                  <a:srgbClr val="8A8177"/>
+                </a:solidFill>
+                <a:latin typeface="Yu Gothic" pitchFamily="34" charset="0"/>
+                <a:ea typeface="Yu Gothic" pitchFamily="34" charset="-122"/>
+                <a:cs typeface="Yu Gothic" pitchFamily="34" charset="-120"/>
+              </a:rPr>
+              <a:t>第11回　組織に載せる</a:t>
             </a:r>
             <a:endParaRPr lang="en-US" sz="900" dirty="0"/>
           </a:p>
@@ -1918,377 +3921,26 @@
       </p:sp>
       <p:sp>
         <p:nvSpPr>
-          <p:cNvPr id="8" name="Text 6"/>
-          <p:cNvSpPr txBox="1"/>
-          <p:nvPr/>
-        </p:nvSpPr>
-        <p:spPr>
-          <a:xfrm>
-            <a:off x="960120" y="5193792"/>
-            <a:ext cx="1956816" cy="365760"/>
-          </a:xfrm>
-          <a:prstGeom prst="rect">
-            <a:avLst/>
-          </a:prstGeom>
-          <a:noFill/>
-          <a:ln/>
-        </p:spPr>
-        <p:txBody>
-          <a:bodyPr wrap="square" lIns="0" tIns="0" rIns="0" bIns="0" rtlCol="0" anchor="ctr"/>
-          <a:lstStyle/>
-          <a:p>
-            <a:pPr indent="0" marL="0">
-              <a:buNone/>
-            </a:pPr>
-            <a:r>
-              <a:rPr lang="en-US" sz="1100" dirty="0">
-                <a:solidFill>
-                  <a:srgbClr val="23201D"/>
-                </a:solidFill>
-                <a:latin typeface="Yu Gothic" pitchFamily="34" charset="0"/>
-                <a:ea typeface="Yu Gothic" pitchFamily="34" charset="-122"/>
-                <a:cs typeface="Yu Gothic" pitchFamily="34" charset="-120"/>
-              </a:rPr>
-              <a:t>前回の宿題を実物で</a:t>
-            </a:r>
-            <a:endParaRPr lang="en-US" sz="1100" dirty="0"/>
-          </a:p>
-        </p:txBody>
-      </p:sp>
-      <p:sp>
-        <p:nvSpPr>
-          <p:cNvPr id="9" name="Text 7"/>
-          <p:cNvSpPr txBox="1"/>
-          <p:nvPr/>
-        </p:nvSpPr>
-        <p:spPr>
-          <a:xfrm>
-            <a:off x="3008376" y="4956048"/>
-            <a:ext cx="1956816" cy="237744"/>
-          </a:xfrm>
-          <a:prstGeom prst="rect">
-            <a:avLst/>
-          </a:prstGeom>
-          <a:noFill/>
-          <a:ln/>
-        </p:spPr>
-        <p:txBody>
-          <a:bodyPr wrap="square" lIns="0" tIns="0" rIns="0" bIns="0" rtlCol="0" anchor="ctr"/>
-          <a:lstStyle/>
-          <a:p>
-            <a:pPr indent="0" marL="0">
-              <a:buNone/>
-            </a:pPr>
-            <a:r>
-              <a:rPr lang="en-US" sz="900" b="1" dirty="0">
-                <a:solidFill>
-                  <a:srgbClr val="B04A2F"/>
-                </a:solidFill>
-                <a:latin typeface="Yu Gothic" pitchFamily="34" charset="0"/>
-                <a:ea typeface="Yu Gothic" pitchFamily="34" charset="-122"/>
-                <a:cs typeface="Yu Gothic" pitchFamily="34" charset="-120"/>
-              </a:rPr>
-              <a:t>15-35分</a:t>
-            </a:r>
-            <a:endParaRPr lang="en-US" sz="900" dirty="0"/>
-          </a:p>
-        </p:txBody>
-      </p:sp>
-      <p:sp>
-        <p:nvSpPr>
-          <p:cNvPr id="10" name="Text 8"/>
-          <p:cNvSpPr txBox="1"/>
-          <p:nvPr/>
-        </p:nvSpPr>
-        <p:spPr>
-          <a:xfrm>
-            <a:off x="3008376" y="5193792"/>
-            <a:ext cx="1956816" cy="365760"/>
-          </a:xfrm>
-          <a:prstGeom prst="rect">
-            <a:avLst/>
-          </a:prstGeom>
-          <a:noFill/>
-          <a:ln/>
-        </p:spPr>
-        <p:txBody>
-          <a:bodyPr wrap="square" lIns="0" tIns="0" rIns="0" bIns="0" rtlCol="0" anchor="ctr"/>
-          <a:lstStyle/>
-          <a:p>
-            <a:pPr indent="0" marL="0">
-              <a:buNone/>
-            </a:pPr>
-            <a:r>
-              <a:rPr lang="en-US" sz="1100" dirty="0">
-                <a:solidFill>
-                  <a:srgbClr val="23201D"/>
-                </a:solidFill>
-                <a:latin typeface="Yu Gothic" pitchFamily="34" charset="0"/>
-                <a:ea typeface="Yu Gothic" pitchFamily="34" charset="-122"/>
-                <a:cs typeface="Yu Gothic" pitchFamily="34" charset="-120"/>
-              </a:rPr>
-              <a:t>テーマとデモ</a:t>
-            </a:r>
-            <a:endParaRPr lang="en-US" sz="1100" dirty="0"/>
-          </a:p>
-        </p:txBody>
-      </p:sp>
-      <p:sp>
-        <p:nvSpPr>
-          <p:cNvPr id="11" name="Text 9"/>
-          <p:cNvSpPr txBox="1"/>
-          <p:nvPr/>
-        </p:nvSpPr>
-        <p:spPr>
-          <a:xfrm>
-            <a:off x="5056632" y="4956048"/>
-            <a:ext cx="1956816" cy="237744"/>
-          </a:xfrm>
-          <a:prstGeom prst="rect">
-            <a:avLst/>
-          </a:prstGeom>
-          <a:noFill/>
-          <a:ln/>
-        </p:spPr>
-        <p:txBody>
-          <a:bodyPr wrap="square" lIns="0" tIns="0" rIns="0" bIns="0" rtlCol="0" anchor="ctr"/>
-          <a:lstStyle/>
-          <a:p>
-            <a:pPr indent="0" marL="0">
-              <a:buNone/>
-            </a:pPr>
-            <a:r>
-              <a:rPr lang="en-US" sz="900" b="1" dirty="0">
-                <a:solidFill>
-                  <a:srgbClr val="B04A2F"/>
-                </a:solidFill>
-                <a:latin typeface="Yu Gothic" pitchFamily="34" charset="0"/>
-                <a:ea typeface="Yu Gothic" pitchFamily="34" charset="-122"/>
-                <a:cs typeface="Yu Gothic" pitchFamily="34" charset="-120"/>
-              </a:rPr>
-              <a:t>35-90分</a:t>
-            </a:r>
-            <a:endParaRPr lang="en-US" sz="900" dirty="0"/>
-          </a:p>
-        </p:txBody>
-      </p:sp>
-      <p:sp>
-        <p:nvSpPr>
-          <p:cNvPr id="12" name="Text 10"/>
-          <p:cNvSpPr txBox="1"/>
-          <p:nvPr/>
-        </p:nvSpPr>
-        <p:spPr>
-          <a:xfrm>
-            <a:off x="5056632" y="5193792"/>
-            <a:ext cx="1956816" cy="365760"/>
-          </a:xfrm>
-          <a:prstGeom prst="rect">
-            <a:avLst/>
-          </a:prstGeom>
-          <a:noFill/>
-          <a:ln/>
-        </p:spPr>
-        <p:txBody>
-          <a:bodyPr wrap="square" lIns="0" tIns="0" rIns="0" bIns="0" rtlCol="0" anchor="ctr"/>
-          <a:lstStyle/>
-          <a:p>
-            <a:pPr indent="0" marL="0">
-              <a:buNone/>
-            </a:pPr>
-            <a:r>
-              <a:rPr lang="en-US" sz="1100" dirty="0">
-                <a:solidFill>
-                  <a:srgbClr val="23201D"/>
-                </a:solidFill>
-                <a:latin typeface="Yu Gothic" pitchFamily="34" charset="0"/>
-                <a:ea typeface="Yu Gothic" pitchFamily="34" charset="-122"/>
-                <a:cs typeface="Yu Gothic" pitchFamily="34" charset="-120"/>
-              </a:rPr>
-              <a:t>一緒に手を動かす</a:t>
-            </a:r>
-            <a:endParaRPr lang="en-US" sz="1100" dirty="0"/>
-          </a:p>
-        </p:txBody>
-      </p:sp>
-      <p:sp>
-        <p:nvSpPr>
-          <p:cNvPr id="13" name="Text 11"/>
-          <p:cNvSpPr txBox="1"/>
-          <p:nvPr/>
-        </p:nvSpPr>
-        <p:spPr>
-          <a:xfrm>
-            <a:off x="7104888" y="4956048"/>
-            <a:ext cx="1956816" cy="237744"/>
-          </a:xfrm>
-          <a:prstGeom prst="rect">
-            <a:avLst/>
-          </a:prstGeom>
-          <a:noFill/>
-          <a:ln/>
-        </p:spPr>
-        <p:txBody>
-          <a:bodyPr wrap="square" lIns="0" tIns="0" rIns="0" bIns="0" rtlCol="0" anchor="ctr"/>
-          <a:lstStyle/>
-          <a:p>
-            <a:pPr indent="0" marL="0">
-              <a:buNone/>
-            </a:pPr>
-            <a:r>
-              <a:rPr lang="en-US" sz="900" b="1" dirty="0">
-                <a:solidFill>
-                  <a:srgbClr val="B04A2F"/>
-                </a:solidFill>
-                <a:latin typeface="Yu Gothic" pitchFamily="34" charset="0"/>
-                <a:ea typeface="Yu Gothic" pitchFamily="34" charset="-122"/>
-                <a:cs typeface="Yu Gothic" pitchFamily="34" charset="-120"/>
-              </a:rPr>
-              <a:t>90-105分</a:t>
-            </a:r>
-            <a:endParaRPr lang="en-US" sz="900" dirty="0"/>
-          </a:p>
-        </p:txBody>
-      </p:sp>
-      <p:sp>
-        <p:nvSpPr>
-          <p:cNvPr id="14" name="Text 12"/>
-          <p:cNvSpPr txBox="1"/>
-          <p:nvPr/>
-        </p:nvSpPr>
-        <p:spPr>
-          <a:xfrm>
-            <a:off x="7104888" y="5193792"/>
-            <a:ext cx="1956816" cy="365760"/>
-          </a:xfrm>
-          <a:prstGeom prst="rect">
-            <a:avLst/>
-          </a:prstGeom>
-          <a:noFill/>
-          <a:ln/>
-        </p:spPr>
-        <p:txBody>
-          <a:bodyPr wrap="square" lIns="0" tIns="0" rIns="0" bIns="0" rtlCol="0" anchor="ctr"/>
-          <a:lstStyle/>
-          <a:p>
-            <a:pPr indent="0" marL="0">
-              <a:buNone/>
-            </a:pPr>
-            <a:r>
-              <a:rPr lang="en-US" sz="1100" dirty="0">
-                <a:solidFill>
-                  <a:srgbClr val="23201D"/>
-                </a:solidFill>
-                <a:latin typeface="Yu Gothic" pitchFamily="34" charset="0"/>
-                <a:ea typeface="Yu Gothic" pitchFamily="34" charset="-122"/>
-                <a:cs typeface="Yu Gothic" pitchFamily="34" charset="-120"/>
-              </a:rPr>
-              <a:t>業務への組み込み</a:t>
-            </a:r>
-            <a:endParaRPr lang="en-US" sz="1100" dirty="0"/>
-          </a:p>
-        </p:txBody>
-      </p:sp>
-      <p:sp>
-        <p:nvSpPr>
-          <p:cNvPr id="15" name="Text 13"/>
-          <p:cNvSpPr txBox="1"/>
-          <p:nvPr/>
-        </p:nvSpPr>
-        <p:spPr>
-          <a:xfrm>
-            <a:off x="9153144" y="4956048"/>
-            <a:ext cx="1956816" cy="237744"/>
-          </a:xfrm>
-          <a:prstGeom prst="rect">
-            <a:avLst/>
-          </a:prstGeom>
-          <a:noFill/>
-          <a:ln/>
-        </p:spPr>
-        <p:txBody>
-          <a:bodyPr wrap="square" lIns="0" tIns="0" rIns="0" bIns="0" rtlCol="0" anchor="ctr"/>
-          <a:lstStyle/>
-          <a:p>
-            <a:pPr indent="0" marL="0">
-              <a:buNone/>
-            </a:pPr>
-            <a:r>
-              <a:rPr lang="en-US" sz="900" b="1" dirty="0">
-                <a:solidFill>
-                  <a:srgbClr val="B04A2F"/>
-                </a:solidFill>
-                <a:latin typeface="Yu Gothic" pitchFamily="34" charset="0"/>
-                <a:ea typeface="Yu Gothic" pitchFamily="34" charset="-122"/>
-                <a:cs typeface="Yu Gothic" pitchFamily="34" charset="-120"/>
-              </a:rPr>
-              <a:t>105-120分</a:t>
-            </a:r>
-            <a:endParaRPr lang="en-US" sz="900" dirty="0"/>
-          </a:p>
-        </p:txBody>
-      </p:sp>
-      <p:sp>
-        <p:nvSpPr>
           <p:cNvPr id="16" name="Text 14"/>
           <p:cNvSpPr txBox="1"/>
           <p:nvPr/>
         </p:nvSpPr>
         <p:spPr>
           <a:xfrm>
-            <a:off x="9153144" y="5193792"/>
-            <a:ext cx="1956816" cy="365760"/>
-          </a:xfrm>
-          <a:prstGeom prst="rect">
-            <a:avLst/>
-          </a:prstGeom>
-          <a:noFill/>
-          <a:ln/>
-        </p:spPr>
-        <p:txBody>
-          <a:bodyPr wrap="square" lIns="0" tIns="0" rIns="0" bIns="0" rtlCol="0" anchor="ctr"/>
-          <a:lstStyle/>
-          <a:p>
-            <a:pPr indent="0" marL="0">
-              <a:buNone/>
-            </a:pPr>
-            <a:r>
-              <a:rPr lang="en-US" sz="1100" dirty="0">
-                <a:solidFill>
-                  <a:srgbClr val="23201D"/>
-                </a:solidFill>
-                <a:latin typeface="Yu Gothic" pitchFamily="34" charset="0"/>
-                <a:ea typeface="Yu Gothic" pitchFamily="34" charset="-122"/>
-                <a:cs typeface="Yu Gothic" pitchFamily="34" charset="-120"/>
-              </a:rPr>
-              <a:t>宿題・記録</a:t>
-            </a:r>
-            <a:endParaRPr lang="en-US" sz="1100" dirty="0"/>
-          </a:p>
-        </p:txBody>
-      </p:sp>
-      <p:sp>
-        <p:nvSpPr>
-          <p:cNvPr id="17" name="Text 15"/>
-          <p:cNvSpPr txBox="1"/>
-          <p:nvPr/>
-        </p:nvSpPr>
-        <p:spPr>
-          <a:xfrm>
-            <a:off x="777240" y="6355080"/>
-            <a:ext cx="7424928" cy="274320"/>
-          </a:xfrm>
-          <a:prstGeom prst="rect">
-            <a:avLst/>
-          </a:prstGeom>
-          <a:noFill/>
-          <a:ln/>
-        </p:spPr>
-        <p:txBody>
-          <a:bodyPr wrap="square" lIns="0" tIns="0" rIns="0" bIns="0" rtlCol="0" anchor="ctr"/>
-          <a:lstStyle/>
-          <a:p>
-            <a:pPr indent="0" marL="0">
+            <a:off x="8202168" y="6382512"/>
+            <a:ext cx="3182112" cy="256032"/>
+          </a:xfrm>
+          <a:prstGeom prst="rect">
+            <a:avLst/>
+          </a:prstGeom>
+          <a:noFill/>
+          <a:ln/>
+        </p:spPr>
+        <p:txBody>
+          <a:bodyPr wrap="square" lIns="0" tIns="0" rIns="0" bIns="0" rtlCol="0" anchor="ctr"/>
+          <a:lstStyle/>
+          <a:p>
+            <a:pPr algn="r" indent="0" marL="0">
               <a:buNone/>
             </a:pPr>
             <a:r>
@@ -2300,46 +3952,7 @@
                 <a:ea typeface="Yu Gothic" pitchFamily="34" charset="-122"/>
                 <a:cs typeface="Yu Gothic" pitchFamily="34" charset="-120"/>
               </a:rPr>
-              <a:t>第11回　組織に載せる</a:t>
-            </a:r>
-            <a:endParaRPr lang="en-US" sz="900" dirty="0"/>
-          </a:p>
-        </p:txBody>
-      </p:sp>
-      <p:sp>
-        <p:nvSpPr>
-          <p:cNvPr id="18" name="Text 16"/>
-          <p:cNvSpPr txBox="1"/>
-          <p:nvPr/>
-        </p:nvSpPr>
-        <p:spPr>
-          <a:xfrm>
-            <a:off x="8202168" y="6355080"/>
-            <a:ext cx="3182112" cy="274320"/>
-          </a:xfrm>
-          <a:prstGeom prst="rect">
-            <a:avLst/>
-          </a:prstGeom>
-          <a:noFill/>
-          <a:ln/>
-        </p:spPr>
-        <p:txBody>
-          <a:bodyPr wrap="square" lIns="0" tIns="0" rIns="0" bIns="0" rtlCol="0" anchor="ctr"/>
-          <a:lstStyle/>
-          <a:p>
-            <a:pPr algn="r" indent="0" marL="0">
-              <a:buNone/>
-            </a:pPr>
-            <a:r>
-              <a:rPr lang="en-US" sz="900" dirty="0">
-                <a:solidFill>
-                  <a:srgbClr val="8A8177"/>
-                </a:solidFill>
-                <a:latin typeface="Yu Gothic" pitchFamily="34" charset="0"/>
-                <a:ea typeface="Yu Gothic" pitchFamily="34" charset="-122"/>
-                <a:cs typeface="Yu Gothic" pitchFamily="34" charset="-120"/>
-              </a:rPr>
-              <a:t>今日のゴール</a:t>
+              <a:t>出発点</a:t>
             </a:r>
             <a:endParaRPr lang="en-US" sz="900" dirty="0"/>
           </a:p>
@@ -2385,7 +3998,7 @@
         </p:nvSpPr>
         <p:spPr>
           <a:xfrm>
-            <a:off x="777240" y="640080"/>
+            <a:off x="777240" y="566928"/>
             <a:ext cx="10607040" cy="274320"/>
           </a:xfrm>
           <a:prstGeom prst="rect">
@@ -2410,7 +4023,7 @@
                 <a:ea typeface="Yu Gothic" pitchFamily="34" charset="-122"/>
                 <a:cs typeface="Yu Gothic" pitchFamily="34" charset="-120"/>
               </a:rPr>
-              <a:t>考え方</a:t>
+              <a:t>今日のゴール</a:t>
             </a:r>
             <a:endParaRPr lang="en-US" sz="1100" dirty="0"/>
           </a:p>
@@ -2424,24 +4037,27 @@
         </p:nvSpPr>
         <p:spPr>
           <a:xfrm>
-            <a:off x="777240" y="960120"/>
-            <a:ext cx="10607040" cy="640080"/>
-          </a:xfrm>
-          <a:prstGeom prst="rect">
-            <a:avLst/>
-          </a:prstGeom>
-          <a:noFill/>
-          <a:ln/>
-        </p:spPr>
-        <p:txBody>
-          <a:bodyPr wrap="square" lIns="0" tIns="0" rIns="0" bIns="0" rtlCol="0" anchor="ctr"/>
-          <a:lstStyle/>
-          <a:p>
-            <a:pPr indent="0" marL="0">
-              <a:buNone/>
-            </a:pPr>
-            <a:r>
-              <a:rPr lang="en-US" sz="2700" b="1" dirty="0">
+            <a:off x="777240" y="1143000"/>
+            <a:ext cx="9864547" cy="1645920"/>
+          </a:xfrm>
+          <a:prstGeom prst="rect">
+            <a:avLst/>
+          </a:prstGeom>
+          <a:noFill/>
+          <a:ln/>
+        </p:spPr>
+        <p:txBody>
+          <a:bodyPr wrap="square" lIns="0" tIns="0" rIns="0" bIns="0" rtlCol="0" anchor="ctr"/>
+          <a:lstStyle/>
+          <a:p>
+            <a:pPr indent="0" marL="0">
+              <a:lnSpc>
+                <a:spcPct val="145000"/>
+              </a:lnSpc>
+              <a:buNone/>
+            </a:pPr>
+            <a:r>
+              <a:rPr lang="en-US" sz="2600" b="1" dirty="0">
                 <a:solidFill>
                   <a:srgbClr val="23201D"/>
                 </a:solidFill>
@@ -2449,9 +4065,9 @@
                 <a:ea typeface="Yu Gothic" pitchFamily="34" charset="-122"/>
                 <a:cs typeface="Yu Gothic" pitchFamily="34" charset="-120"/>
               </a:rPr>
-              <a:t>役割は4つ。人数は1〜2名の兼任で構いません</a:t>
-            </a:r>
-            <a:endParaRPr lang="en-US" sz="2700" dirty="0"/>
+              <a:t>社長個人の技能を、会社の仕組みに変えます。推進役・権限・費用・効果測定を決めます。</a:t>
+            </a:r>
+            <a:endParaRPr lang="en-US" sz="2600" dirty="0"/>
           </a:p>
         </p:txBody>
       </p:sp>
@@ -2463,18 +4079,18 @@
         </p:nvSpPr>
         <p:spPr>
           <a:xfrm>
-            <a:off x="777240" y="1783080"/>
-            <a:ext cx="10607040" cy="838962"/>
+            <a:off x="777240" y="3063240"/>
+            <a:ext cx="10607040" cy="18288"/>
           </a:xfrm>
           <a:prstGeom prst="rect">
             <a:avLst/>
           </a:prstGeom>
           <a:solidFill>
-            <a:srgbClr val="FFFFFF"/>
+            <a:srgbClr val="EDE7DB"/>
           </a:solidFill>
           <a:ln w="12700">
             <a:solidFill>
-              <a:srgbClr val="EDE7DB"/>
+              <a:srgbClr val="333333"/>
             </a:solidFill>
             <a:prstDash val="solid"/>
           </a:ln>
@@ -2482,24 +4098,66 @@
       </p:sp>
       <p:sp>
         <p:nvSpPr>
-          <p:cNvPr id="5" name="Shape 3"/>
+          <p:cNvPr id="5" name="Text 3"/>
+          <p:cNvSpPr txBox="1"/>
+          <p:nvPr/>
+        </p:nvSpPr>
+        <p:spPr>
+          <a:xfrm>
+            <a:off x="777240" y="3291840"/>
+            <a:ext cx="9334195" cy="1005840"/>
+          </a:xfrm>
+          <a:prstGeom prst="rect">
+            <a:avLst/>
+          </a:prstGeom>
+          <a:noFill/>
+          <a:ln/>
+        </p:spPr>
+        <p:txBody>
+          <a:bodyPr wrap="square" lIns="0" tIns="0" rIns="0" bIns="0" rtlCol="0" anchor="ctr"/>
+          <a:lstStyle/>
+          <a:p>
+            <a:pPr indent="0" marL="0">
+              <a:lnSpc>
+                <a:spcPct val="140000"/>
+              </a:lnSpc>
+              <a:buNone/>
+            </a:pPr>
+            <a:r>
+              <a:rPr lang="en-US" sz="1450" dirty="0">
+                <a:solidFill>
+                  <a:srgbClr val="5A534A"/>
+                </a:solidFill>
+                <a:latin typeface="Yu Gothic" pitchFamily="34" charset="0"/>
+                <a:ea typeface="Yu Gothic" pitchFamily="34" charset="-122"/>
+                <a:cs typeface="Yu Gothic" pitchFamily="34" charset="-120"/>
+              </a:rPr>
+              <a:t>今日決まると、来年も続きます。決まらなければ、半年で止まります。それくらい重い回です。</a:t>
+            </a:r>
+            <a:endParaRPr lang="en-US" sz="1450" dirty="0"/>
+          </a:p>
+        </p:txBody>
+      </p:sp>
+      <p:sp>
+        <p:nvSpPr>
+          <p:cNvPr id="6" name="Shape 4"/>
           <p:cNvSpPr/>
           <p:nvPr/>
         </p:nvSpPr>
         <p:spPr>
           <a:xfrm>
-            <a:off x="1033272" y="2010537"/>
-            <a:ext cx="384048" cy="384048"/>
-          </a:xfrm>
-          <a:prstGeom prst="ellipse">
+            <a:off x="777240" y="4754880"/>
+            <a:ext cx="10607040" cy="822960"/>
+          </a:xfrm>
+          <a:prstGeom prst="rect">
             <a:avLst/>
           </a:prstGeom>
           <a:solidFill>
-            <a:srgbClr val="B04A2F"/>
+            <a:srgbClr val="EDE7DB"/>
           </a:solidFill>
           <a:ln w="12700">
             <a:solidFill>
-              <a:srgbClr val="B04A2F"/>
+              <a:srgbClr val="333333"/>
             </a:solidFill>
             <a:prstDash val="solid"/>
           </a:ln>
@@ -2507,69 +4165,69 @@
       </p:sp>
       <p:sp>
         <p:nvSpPr>
-          <p:cNvPr id="6" name="Text 4"/>
-          <p:cNvSpPr txBox="1"/>
-          <p:nvPr/>
-        </p:nvSpPr>
-        <p:spPr>
-          <a:xfrm>
-            <a:off x="1033272" y="2010537"/>
-            <a:ext cx="384048" cy="384048"/>
-          </a:xfrm>
-          <a:prstGeom prst="rect">
-            <a:avLst/>
-          </a:prstGeom>
-          <a:noFill/>
-          <a:ln/>
-        </p:spPr>
-        <p:txBody>
-          <a:bodyPr wrap="square" lIns="0" tIns="0" rIns="0" bIns="0" rtlCol="0" anchor="ctr"/>
-          <a:lstStyle/>
-          <a:p>
-            <a:pPr algn="ctr" indent="0" marL="0">
-              <a:buNone/>
-            </a:pPr>
-            <a:r>
-              <a:rPr lang="en-US" sz="1400" b="1" dirty="0">
-                <a:solidFill>
-                  <a:srgbClr val="FFFFFF"/>
-                </a:solidFill>
-                <a:latin typeface="Yu Gothic" pitchFamily="34" charset="0"/>
-                <a:ea typeface="Yu Gothic" pitchFamily="34" charset="-122"/>
-                <a:cs typeface="Yu Gothic" pitchFamily="34" charset="-120"/>
-              </a:rPr>
-              <a:t>1</a:t>
-            </a:r>
-            <a:endParaRPr lang="en-US" sz="1400" dirty="0"/>
-          </a:p>
-        </p:txBody>
-      </p:sp>
-      <p:sp>
-        <p:nvSpPr>
           <p:cNvPr id="7" name="Text 5"/>
           <p:cNvSpPr txBox="1"/>
           <p:nvPr/>
         </p:nvSpPr>
         <p:spPr>
           <a:xfrm>
-            <a:off x="1645920" y="1874520"/>
-            <a:ext cx="3394253" cy="656082"/>
-          </a:xfrm>
-          <a:prstGeom prst="rect">
-            <a:avLst/>
-          </a:prstGeom>
-          <a:noFill/>
-          <a:ln/>
-        </p:spPr>
-        <p:txBody>
-          <a:bodyPr wrap="square" lIns="0" tIns="0" rIns="0" bIns="0" rtlCol="0" anchor="ctr"/>
-          <a:lstStyle/>
-          <a:p>
-            <a:pPr indent="0" marL="0">
-              <a:buNone/>
-            </a:pPr>
-            <a:r>
-              <a:rPr lang="en-US" sz="1500" b="1" dirty="0">
+            <a:off x="960120" y="4873752"/>
+            <a:ext cx="1956816" cy="237744"/>
+          </a:xfrm>
+          <a:prstGeom prst="rect">
+            <a:avLst/>
+          </a:prstGeom>
+          <a:noFill/>
+          <a:ln/>
+        </p:spPr>
+        <p:txBody>
+          <a:bodyPr wrap="square" lIns="0" tIns="0" rIns="0" bIns="0" rtlCol="0" anchor="ctr"/>
+          <a:lstStyle/>
+          <a:p>
+            <a:pPr indent="0" marL="0">
+              <a:buNone/>
+            </a:pPr>
+            <a:r>
+              <a:rPr lang="en-US" sz="900" b="1" dirty="0">
+                <a:solidFill>
+                  <a:srgbClr val="B04A2F"/>
+                </a:solidFill>
+                <a:latin typeface="Yu Gothic" pitchFamily="34" charset="0"/>
+                <a:ea typeface="Yu Gothic" pitchFamily="34" charset="-122"/>
+                <a:cs typeface="Yu Gothic" pitchFamily="34" charset="-120"/>
+              </a:rPr>
+              <a:t>0-15分</a:t>
+            </a:r>
+            <a:endParaRPr lang="en-US" sz="900" dirty="0"/>
+          </a:p>
+        </p:txBody>
+      </p:sp>
+      <p:sp>
+        <p:nvSpPr>
+          <p:cNvPr id="8" name="Text 6"/>
+          <p:cNvSpPr txBox="1"/>
+          <p:nvPr/>
+        </p:nvSpPr>
+        <p:spPr>
+          <a:xfrm>
+            <a:off x="960120" y="5111496"/>
+            <a:ext cx="1956816" cy="384048"/>
+          </a:xfrm>
+          <a:prstGeom prst="rect">
+            <a:avLst/>
+          </a:prstGeom>
+          <a:noFill/>
+          <a:ln/>
+        </p:spPr>
+        <p:txBody>
+          <a:bodyPr wrap="square" lIns="0" tIns="0" rIns="0" bIns="0" rtlCol="0" anchor="ctr"/>
+          <a:lstStyle/>
+          <a:p>
+            <a:pPr indent="0" marL="0">
+              <a:buNone/>
+            </a:pPr>
+            <a:r>
+              <a:rPr lang="en-US" sz="1100" dirty="0">
                 <a:solidFill>
                   <a:srgbClr val="23201D"/>
                 </a:solidFill>
@@ -2577,103 +4235,89 @@
                 <a:ea typeface="Yu Gothic" pitchFamily="34" charset="-122"/>
                 <a:cs typeface="Yu Gothic" pitchFamily="34" charset="-120"/>
               </a:rPr>
-              <a:t>決める人（経営者）</a:t>
-            </a:r>
-            <a:endParaRPr lang="en-US" sz="1500" dirty="0"/>
-          </a:p>
-        </p:txBody>
-      </p:sp>
-      <p:sp>
-        <p:nvSpPr>
-          <p:cNvPr id="8" name="Text 6"/>
-          <p:cNvSpPr txBox="1"/>
-          <p:nvPr/>
-        </p:nvSpPr>
-        <p:spPr>
-          <a:xfrm>
-            <a:off x="5146243" y="1874520"/>
-            <a:ext cx="5963717" cy="656082"/>
-          </a:xfrm>
-          <a:prstGeom prst="rect">
-            <a:avLst/>
-          </a:prstGeom>
-          <a:noFill/>
-          <a:ln/>
-        </p:spPr>
-        <p:txBody>
-          <a:bodyPr wrap="square" lIns="0" tIns="0" rIns="0" bIns="0" rtlCol="0" anchor="ctr"/>
-          <a:lstStyle/>
-          <a:p>
-            <a:pPr indent="0" marL="0">
-              <a:lnSpc>
-                <a:spcPct val="130000"/>
-              </a:lnSpc>
-              <a:buNone/>
-            </a:pPr>
-            <a:r>
-              <a:rPr lang="en-US" sz="1250" dirty="0">
-                <a:solidFill>
-                  <a:srgbClr val="5A534A"/>
-                </a:solidFill>
-                <a:latin typeface="Yu Gothic" pitchFamily="34" charset="0"/>
-                <a:ea typeface="Yu Gothic" pitchFamily="34" charset="-122"/>
-                <a:cs typeface="Yu Gothic" pitchFamily="34" charset="-120"/>
-              </a:rPr>
-              <a:t>予算・範囲・やめる判断</a:t>
-            </a:r>
-            <a:endParaRPr lang="en-US" sz="1250" dirty="0"/>
-          </a:p>
-        </p:txBody>
-      </p:sp>
-      <p:sp>
-        <p:nvSpPr>
-          <p:cNvPr id="9" name="Shape 7"/>
-          <p:cNvSpPr/>
-          <p:nvPr/>
-        </p:nvSpPr>
-        <p:spPr>
-          <a:xfrm>
-            <a:off x="777240" y="2768346"/>
-            <a:ext cx="10607040" cy="838962"/>
-          </a:xfrm>
-          <a:prstGeom prst="rect">
-            <a:avLst/>
-          </a:prstGeom>
-          <a:solidFill>
-            <a:srgbClr val="FFFFFF"/>
-          </a:solidFill>
-          <a:ln w="12700">
-            <a:solidFill>
-              <a:srgbClr val="EDE7DB"/>
-            </a:solidFill>
-            <a:prstDash val="solid"/>
-          </a:ln>
-        </p:spPr>
-      </p:sp>
-      <p:sp>
-        <p:nvSpPr>
-          <p:cNvPr id="10" name="Shape 8"/>
-          <p:cNvSpPr/>
-          <p:nvPr/>
-        </p:nvSpPr>
-        <p:spPr>
-          <a:xfrm>
-            <a:off x="1033272" y="2995803"/>
-            <a:ext cx="384048" cy="384048"/>
-          </a:xfrm>
-          <a:prstGeom prst="ellipse">
-            <a:avLst/>
-          </a:prstGeom>
-          <a:solidFill>
-            <a:srgbClr val="B04A2F"/>
-          </a:solidFill>
-          <a:ln w="12700">
-            <a:solidFill>
-              <a:srgbClr val="B04A2F"/>
-            </a:solidFill>
-            <a:prstDash val="solid"/>
-          </a:ln>
-        </p:spPr>
+              <a:t>前回の宿題を実物で</a:t>
+            </a:r>
+            <a:endParaRPr lang="en-US" sz="1100" dirty="0"/>
+          </a:p>
+        </p:txBody>
+      </p:sp>
+      <p:sp>
+        <p:nvSpPr>
+          <p:cNvPr id="9" name="Text 7"/>
+          <p:cNvSpPr txBox="1"/>
+          <p:nvPr/>
+        </p:nvSpPr>
+        <p:spPr>
+          <a:xfrm>
+            <a:off x="3008376" y="4873752"/>
+            <a:ext cx="1956816" cy="237744"/>
+          </a:xfrm>
+          <a:prstGeom prst="rect">
+            <a:avLst/>
+          </a:prstGeom>
+          <a:noFill/>
+          <a:ln/>
+        </p:spPr>
+        <p:txBody>
+          <a:bodyPr wrap="square" lIns="0" tIns="0" rIns="0" bIns="0" rtlCol="0" anchor="ctr"/>
+          <a:lstStyle/>
+          <a:p>
+            <a:pPr indent="0" marL="0">
+              <a:buNone/>
+            </a:pPr>
+            <a:r>
+              <a:rPr lang="en-US" sz="900" b="1" dirty="0">
+                <a:solidFill>
+                  <a:srgbClr val="B04A2F"/>
+                </a:solidFill>
+                <a:latin typeface="Yu Gothic" pitchFamily="34" charset="0"/>
+                <a:ea typeface="Yu Gothic" pitchFamily="34" charset="-122"/>
+                <a:cs typeface="Yu Gothic" pitchFamily="34" charset="-120"/>
+              </a:rPr>
+              <a:t>15-35分</a:t>
+            </a:r>
+            <a:endParaRPr lang="en-US" sz="900" dirty="0"/>
+          </a:p>
+        </p:txBody>
+      </p:sp>
+      <p:sp>
+        <p:nvSpPr>
+          <p:cNvPr id="10" name="Text 8"/>
+          <p:cNvSpPr txBox="1"/>
+          <p:nvPr/>
+        </p:nvSpPr>
+        <p:spPr>
+          <a:xfrm>
+            <a:off x="3008376" y="5111496"/>
+            <a:ext cx="1956816" cy="384048"/>
+          </a:xfrm>
+          <a:prstGeom prst="rect">
+            <a:avLst/>
+          </a:prstGeom>
+          <a:noFill/>
+          <a:ln/>
+        </p:spPr>
+        <p:txBody>
+          <a:bodyPr wrap="square" lIns="0" tIns="0" rIns="0" bIns="0" rtlCol="0" anchor="ctr"/>
+          <a:lstStyle/>
+          <a:p>
+            <a:pPr indent="0" marL="0">
+              <a:buNone/>
+            </a:pPr>
+            <a:r>
+              <a:rPr lang="en-US" sz="1100" dirty="0">
+                <a:solidFill>
+                  <a:srgbClr val="23201D"/>
+                </a:solidFill>
+                <a:latin typeface="Yu Gothic" pitchFamily="34" charset="0"/>
+                <a:ea typeface="Yu Gothic" pitchFamily="34" charset="-122"/>
+                <a:cs typeface="Yu Gothic" pitchFamily="34" charset="-120"/>
+              </a:rPr>
+              <a:t>テーマとデモ</a:t>
+            </a:r>
+            <a:endParaRPr lang="en-US" sz="1100" dirty="0"/>
+          </a:p>
+        </p:txBody>
       </p:sp>
       <p:sp>
         <p:nvSpPr>
@@ -2683,34 +4327,34 @@
         </p:nvSpPr>
         <p:spPr>
           <a:xfrm>
-            <a:off x="1033272" y="2995803"/>
-            <a:ext cx="384048" cy="384048"/>
-          </a:xfrm>
-          <a:prstGeom prst="rect">
-            <a:avLst/>
-          </a:prstGeom>
-          <a:noFill/>
-          <a:ln/>
-        </p:spPr>
-        <p:txBody>
-          <a:bodyPr wrap="square" lIns="0" tIns="0" rIns="0" bIns="0" rtlCol="0" anchor="ctr"/>
-          <a:lstStyle/>
-          <a:p>
-            <a:pPr algn="ctr" indent="0" marL="0">
-              <a:buNone/>
-            </a:pPr>
-            <a:r>
-              <a:rPr lang="en-US" sz="1400" b="1" dirty="0">
-                <a:solidFill>
-                  <a:srgbClr val="FFFFFF"/>
-                </a:solidFill>
-                <a:latin typeface="Yu Gothic" pitchFamily="34" charset="0"/>
-                <a:ea typeface="Yu Gothic" pitchFamily="34" charset="-122"/>
-                <a:cs typeface="Yu Gothic" pitchFamily="34" charset="-120"/>
-              </a:rPr>
-              <a:t>2</a:t>
-            </a:r>
-            <a:endParaRPr lang="en-US" sz="1400" dirty="0"/>
+            <a:off x="5056632" y="4873752"/>
+            <a:ext cx="1956816" cy="237744"/>
+          </a:xfrm>
+          <a:prstGeom prst="rect">
+            <a:avLst/>
+          </a:prstGeom>
+          <a:noFill/>
+          <a:ln/>
+        </p:spPr>
+        <p:txBody>
+          <a:bodyPr wrap="square" lIns="0" tIns="0" rIns="0" bIns="0" rtlCol="0" anchor="ctr"/>
+          <a:lstStyle/>
+          <a:p>
+            <a:pPr indent="0" marL="0">
+              <a:buNone/>
+            </a:pPr>
+            <a:r>
+              <a:rPr lang="en-US" sz="900" b="1" dirty="0">
+                <a:solidFill>
+                  <a:srgbClr val="B04A2F"/>
+                </a:solidFill>
+                <a:latin typeface="Yu Gothic" pitchFamily="34" charset="0"/>
+                <a:ea typeface="Yu Gothic" pitchFamily="34" charset="-122"/>
+                <a:cs typeface="Yu Gothic" pitchFamily="34" charset="-120"/>
+              </a:rPr>
+              <a:t>35-90分</a:t>
+            </a:r>
+            <a:endParaRPr lang="en-US" sz="900" dirty="0"/>
           </a:p>
         </p:txBody>
       </p:sp>
@@ -2722,24 +4366,24 @@
         </p:nvSpPr>
         <p:spPr>
           <a:xfrm>
-            <a:off x="1645920" y="2859786"/>
-            <a:ext cx="3394253" cy="656082"/>
-          </a:xfrm>
-          <a:prstGeom prst="rect">
-            <a:avLst/>
-          </a:prstGeom>
-          <a:noFill/>
-          <a:ln/>
-        </p:spPr>
-        <p:txBody>
-          <a:bodyPr wrap="square" lIns="0" tIns="0" rIns="0" bIns="0" rtlCol="0" anchor="ctr"/>
-          <a:lstStyle/>
-          <a:p>
-            <a:pPr indent="0" marL="0">
-              <a:buNone/>
-            </a:pPr>
-            <a:r>
-              <a:rPr lang="en-US" sz="1500" b="1" dirty="0">
+            <a:off x="5056632" y="5111496"/>
+            <a:ext cx="1956816" cy="384048"/>
+          </a:xfrm>
+          <a:prstGeom prst="rect">
+            <a:avLst/>
+          </a:prstGeom>
+          <a:noFill/>
+          <a:ln/>
+        </p:spPr>
+        <p:txBody>
+          <a:bodyPr wrap="square" lIns="0" tIns="0" rIns="0" bIns="0" rtlCol="0" anchor="ctr"/>
+          <a:lstStyle/>
+          <a:p>
+            <a:pPr indent="0" marL="0">
+              <a:buNone/>
+            </a:pPr>
+            <a:r>
+              <a:rPr lang="en-US" sz="1100" dirty="0">
                 <a:solidFill>
                   <a:srgbClr val="23201D"/>
                 </a:solidFill>
@@ -2747,9 +4391,9 @@
                 <a:ea typeface="Yu Gothic" pitchFamily="34" charset="-122"/>
                 <a:cs typeface="Yu Gothic" pitchFamily="34" charset="-120"/>
               </a:rPr>
-              <a:t>回す人</a:t>
-            </a:r>
-            <a:endParaRPr lang="en-US" sz="1500" dirty="0"/>
+              <a:t>一緒に手を動かす</a:t>
+            </a:r>
+            <a:endParaRPr lang="en-US" sz="1100" dirty="0"/>
           </a:p>
         </p:txBody>
       </p:sp>
@@ -2761,89 +4405,114 @@
         </p:nvSpPr>
         <p:spPr>
           <a:xfrm>
-            <a:off x="5146243" y="2859786"/>
-            <a:ext cx="5963717" cy="656082"/>
-          </a:xfrm>
-          <a:prstGeom prst="rect">
-            <a:avLst/>
-          </a:prstGeom>
-          <a:noFill/>
-          <a:ln/>
-        </p:spPr>
-        <p:txBody>
-          <a:bodyPr wrap="square" lIns="0" tIns="0" rIns="0" bIns="0" rtlCol="0" anchor="ctr"/>
-          <a:lstStyle/>
-          <a:p>
-            <a:pPr indent="0" marL="0">
-              <a:lnSpc>
-                <a:spcPct val="130000"/>
-              </a:lnSpc>
-              <a:buNone/>
-            </a:pPr>
-            <a:r>
-              <a:rPr lang="en-US" sz="1250" dirty="0">
-                <a:solidFill>
-                  <a:srgbClr val="5A534A"/>
-                </a:solidFill>
-                <a:latin typeface="Yu Gothic" pitchFamily="34" charset="0"/>
-                <a:ea typeface="Yu Gothic" pitchFamily="34" charset="-122"/>
-                <a:cs typeface="Yu Gothic" pitchFamily="34" charset="-120"/>
-              </a:rPr>
-              <a:t>月次チェック、質問の一次受け</a:t>
-            </a:r>
-            <a:endParaRPr lang="en-US" sz="1250" dirty="0"/>
-          </a:p>
-        </p:txBody>
-      </p:sp>
-      <p:sp>
-        <p:nvSpPr>
-          <p:cNvPr id="14" name="Shape 12"/>
-          <p:cNvSpPr/>
-          <p:nvPr/>
-        </p:nvSpPr>
-        <p:spPr>
-          <a:xfrm>
-            <a:off x="777240" y="3753612"/>
-            <a:ext cx="10607040" cy="838962"/>
-          </a:xfrm>
-          <a:prstGeom prst="rect">
-            <a:avLst/>
-          </a:prstGeom>
-          <a:solidFill>
-            <a:srgbClr val="FFFFFF"/>
-          </a:solidFill>
-          <a:ln w="12700">
-            <a:solidFill>
-              <a:srgbClr val="EDE7DB"/>
-            </a:solidFill>
-            <a:prstDash val="solid"/>
-          </a:ln>
-        </p:spPr>
-      </p:sp>
-      <p:sp>
-        <p:nvSpPr>
-          <p:cNvPr id="15" name="Shape 13"/>
-          <p:cNvSpPr/>
-          <p:nvPr/>
-        </p:nvSpPr>
-        <p:spPr>
-          <a:xfrm>
-            <a:off x="1033272" y="3981069"/>
-            <a:ext cx="384048" cy="384048"/>
-          </a:xfrm>
-          <a:prstGeom prst="ellipse">
-            <a:avLst/>
-          </a:prstGeom>
-          <a:solidFill>
-            <a:srgbClr val="B04A2F"/>
-          </a:solidFill>
-          <a:ln w="12700">
-            <a:solidFill>
-              <a:srgbClr val="B04A2F"/>
-            </a:solidFill>
-            <a:prstDash val="solid"/>
-          </a:ln>
-        </p:spPr>
+            <a:off x="7104888" y="4873752"/>
+            <a:ext cx="1956816" cy="237744"/>
+          </a:xfrm>
+          <a:prstGeom prst="rect">
+            <a:avLst/>
+          </a:prstGeom>
+          <a:noFill/>
+          <a:ln/>
+        </p:spPr>
+        <p:txBody>
+          <a:bodyPr wrap="square" lIns="0" tIns="0" rIns="0" bIns="0" rtlCol="0" anchor="ctr"/>
+          <a:lstStyle/>
+          <a:p>
+            <a:pPr indent="0" marL="0">
+              <a:buNone/>
+            </a:pPr>
+            <a:r>
+              <a:rPr lang="en-US" sz="900" b="1" dirty="0">
+                <a:solidFill>
+                  <a:srgbClr val="B04A2F"/>
+                </a:solidFill>
+                <a:latin typeface="Yu Gothic" pitchFamily="34" charset="0"/>
+                <a:ea typeface="Yu Gothic" pitchFamily="34" charset="-122"/>
+                <a:cs typeface="Yu Gothic" pitchFamily="34" charset="-120"/>
+              </a:rPr>
+              <a:t>90-105分</a:t>
+            </a:r>
+            <a:endParaRPr lang="en-US" sz="900" dirty="0"/>
+          </a:p>
+        </p:txBody>
+      </p:sp>
+      <p:sp>
+        <p:nvSpPr>
+          <p:cNvPr id="14" name="Text 12"/>
+          <p:cNvSpPr txBox="1"/>
+          <p:nvPr/>
+        </p:nvSpPr>
+        <p:spPr>
+          <a:xfrm>
+            <a:off x="7104888" y="5111496"/>
+            <a:ext cx="1956816" cy="384048"/>
+          </a:xfrm>
+          <a:prstGeom prst="rect">
+            <a:avLst/>
+          </a:prstGeom>
+          <a:noFill/>
+          <a:ln/>
+        </p:spPr>
+        <p:txBody>
+          <a:bodyPr wrap="square" lIns="0" tIns="0" rIns="0" bIns="0" rtlCol="0" anchor="ctr"/>
+          <a:lstStyle/>
+          <a:p>
+            <a:pPr indent="0" marL="0">
+              <a:buNone/>
+            </a:pPr>
+            <a:r>
+              <a:rPr lang="en-US" sz="1100" dirty="0">
+                <a:solidFill>
+                  <a:srgbClr val="23201D"/>
+                </a:solidFill>
+                <a:latin typeface="Yu Gothic" pitchFamily="34" charset="0"/>
+                <a:ea typeface="Yu Gothic" pitchFamily="34" charset="-122"/>
+                <a:cs typeface="Yu Gothic" pitchFamily="34" charset="-120"/>
+              </a:rPr>
+              <a:t>業務への組み込み</a:t>
+            </a:r>
+            <a:endParaRPr lang="en-US" sz="1100" dirty="0"/>
+          </a:p>
+        </p:txBody>
+      </p:sp>
+      <p:sp>
+        <p:nvSpPr>
+          <p:cNvPr id="15" name="Text 13"/>
+          <p:cNvSpPr txBox="1"/>
+          <p:nvPr/>
+        </p:nvSpPr>
+        <p:spPr>
+          <a:xfrm>
+            <a:off x="9153144" y="4873752"/>
+            <a:ext cx="1956816" cy="237744"/>
+          </a:xfrm>
+          <a:prstGeom prst="rect">
+            <a:avLst/>
+          </a:prstGeom>
+          <a:noFill/>
+          <a:ln/>
+        </p:spPr>
+        <p:txBody>
+          <a:bodyPr wrap="square" lIns="0" tIns="0" rIns="0" bIns="0" rtlCol="0" anchor="ctr"/>
+          <a:lstStyle/>
+          <a:p>
+            <a:pPr indent="0" marL="0">
+              <a:buNone/>
+            </a:pPr>
+            <a:r>
+              <a:rPr lang="en-US" sz="900" b="1" dirty="0">
+                <a:solidFill>
+                  <a:srgbClr val="B04A2F"/>
+                </a:solidFill>
+                <a:latin typeface="Yu Gothic" pitchFamily="34" charset="0"/>
+                <a:ea typeface="Yu Gothic" pitchFamily="34" charset="-122"/>
+                <a:cs typeface="Yu Gothic" pitchFamily="34" charset="-120"/>
+              </a:rPr>
+              <a:t>105-120分</a:t>
+            </a:r>
+            <a:endParaRPr lang="en-US" sz="900" dirty="0"/>
+          </a:p>
+        </p:txBody>
       </p:sp>
       <p:sp>
         <p:nvSpPr>
@@ -2853,34 +4522,34 @@
         </p:nvSpPr>
         <p:spPr>
           <a:xfrm>
-            <a:off x="1033272" y="3981069"/>
-            <a:ext cx="384048" cy="384048"/>
-          </a:xfrm>
-          <a:prstGeom prst="rect">
-            <a:avLst/>
-          </a:prstGeom>
-          <a:noFill/>
-          <a:ln/>
-        </p:spPr>
-        <p:txBody>
-          <a:bodyPr wrap="square" lIns="0" tIns="0" rIns="0" bIns="0" rtlCol="0" anchor="ctr"/>
-          <a:lstStyle/>
-          <a:p>
-            <a:pPr algn="ctr" indent="0" marL="0">
-              <a:buNone/>
-            </a:pPr>
-            <a:r>
-              <a:rPr lang="en-US" sz="1400" b="1" dirty="0">
-                <a:solidFill>
-                  <a:srgbClr val="FFFFFF"/>
-                </a:solidFill>
-                <a:latin typeface="Yu Gothic" pitchFamily="34" charset="0"/>
-                <a:ea typeface="Yu Gothic" pitchFamily="34" charset="-122"/>
-                <a:cs typeface="Yu Gothic" pitchFamily="34" charset="-120"/>
-              </a:rPr>
-              <a:t>3</a:t>
-            </a:r>
-            <a:endParaRPr lang="en-US" sz="1400" dirty="0"/>
+            <a:off x="9153144" y="5111496"/>
+            <a:ext cx="1956816" cy="384048"/>
+          </a:xfrm>
+          <a:prstGeom prst="rect">
+            <a:avLst/>
+          </a:prstGeom>
+          <a:noFill/>
+          <a:ln/>
+        </p:spPr>
+        <p:txBody>
+          <a:bodyPr wrap="square" lIns="0" tIns="0" rIns="0" bIns="0" rtlCol="0" anchor="ctr"/>
+          <a:lstStyle/>
+          <a:p>
+            <a:pPr indent="0" marL="0">
+              <a:buNone/>
+            </a:pPr>
+            <a:r>
+              <a:rPr lang="en-US" sz="1100" dirty="0">
+                <a:solidFill>
+                  <a:srgbClr val="23201D"/>
+                </a:solidFill>
+                <a:latin typeface="Yu Gothic" pitchFamily="34" charset="0"/>
+                <a:ea typeface="Yu Gothic" pitchFamily="34" charset="-122"/>
+                <a:cs typeface="Yu Gothic" pitchFamily="34" charset="-120"/>
+              </a:rPr>
+              <a:t>宿題・記録</a:t>
+            </a:r>
+            <a:endParaRPr lang="en-US" sz="1100" dirty="0"/>
           </a:p>
         </p:txBody>
       </p:sp>
@@ -2892,34 +4561,34 @@
         </p:nvSpPr>
         <p:spPr>
           <a:xfrm>
-            <a:off x="1645920" y="3845052"/>
-            <a:ext cx="3394253" cy="656082"/>
-          </a:xfrm>
-          <a:prstGeom prst="rect">
-            <a:avLst/>
-          </a:prstGeom>
-          <a:noFill/>
-          <a:ln/>
-        </p:spPr>
-        <p:txBody>
-          <a:bodyPr wrap="square" lIns="0" tIns="0" rIns="0" bIns="0" rtlCol="0" anchor="ctr"/>
-          <a:lstStyle/>
-          <a:p>
-            <a:pPr indent="0" marL="0">
-              <a:buNone/>
-            </a:pPr>
-            <a:r>
-              <a:rPr lang="en-US" sz="1500" b="1" dirty="0">
-                <a:solidFill>
-                  <a:srgbClr val="23201D"/>
-                </a:solidFill>
-                <a:latin typeface="Yu Gothic" pitchFamily="34" charset="0"/>
-                <a:ea typeface="Yu Gothic" pitchFamily="34" charset="-122"/>
-                <a:cs typeface="Yu Gothic" pitchFamily="34" charset="-120"/>
-              </a:rPr>
-              <a:t>作る人</a:t>
-            </a:r>
-            <a:endParaRPr lang="en-US" sz="1500" dirty="0"/>
+            <a:off x="777240" y="6382512"/>
+            <a:ext cx="7424928" cy="256032"/>
+          </a:xfrm>
+          <a:prstGeom prst="rect">
+            <a:avLst/>
+          </a:prstGeom>
+          <a:noFill/>
+          <a:ln/>
+        </p:spPr>
+        <p:txBody>
+          <a:bodyPr wrap="square" lIns="0" tIns="0" rIns="0" bIns="0" rtlCol="0" anchor="ctr"/>
+          <a:lstStyle/>
+          <a:p>
+            <a:pPr indent="0" marL="0">
+              <a:buNone/>
+            </a:pPr>
+            <a:r>
+              <a:rPr lang="en-US" sz="900" dirty="0">
+                <a:solidFill>
+                  <a:srgbClr val="8A8177"/>
+                </a:solidFill>
+                <a:latin typeface="Yu Gothic" pitchFamily="34" charset="0"/>
+                <a:ea typeface="Yu Gothic" pitchFamily="34" charset="-122"/>
+                <a:cs typeface="Yu Gothic" pitchFamily="34" charset="-120"/>
+              </a:rPr>
+              <a:t>第11回　組織に載せる</a:t>
+            </a:r>
+            <a:endParaRPr lang="en-US" sz="900" dirty="0"/>
           </a:p>
         </p:txBody>
       </p:sp>
@@ -2931,271 +4600,20 @@
         </p:nvSpPr>
         <p:spPr>
           <a:xfrm>
-            <a:off x="5146243" y="3845052"/>
-            <a:ext cx="5963717" cy="656082"/>
-          </a:xfrm>
-          <a:prstGeom prst="rect">
-            <a:avLst/>
-          </a:prstGeom>
-          <a:noFill/>
-          <a:ln/>
-        </p:spPr>
-        <p:txBody>
-          <a:bodyPr wrap="square" lIns="0" tIns="0" rIns="0" bIns="0" rtlCol="0" anchor="ctr"/>
-          <a:lstStyle/>
-          <a:p>
-            <a:pPr indent="0" marL="0">
-              <a:lnSpc>
-                <a:spcPct val="130000"/>
-              </a:lnSpc>
-              <a:buNone/>
-            </a:pPr>
-            <a:r>
-              <a:rPr lang="en-US" sz="1250" dirty="0">
-                <a:solidFill>
-                  <a:srgbClr val="5A534A"/>
-                </a:solidFill>
-                <a:latin typeface="Yu Gothic" pitchFamily="34" charset="0"/>
-                <a:ea typeface="Yu Gothic" pitchFamily="34" charset="-122"/>
-                <a:cs typeface="Yu Gothic" pitchFamily="34" charset="-120"/>
-              </a:rPr>
-              <a:t>指示文と専用AIの改修。外注でよい</a:t>
-            </a:r>
-            <a:endParaRPr lang="en-US" sz="1250" dirty="0"/>
-          </a:p>
-        </p:txBody>
-      </p:sp>
-      <p:sp>
-        <p:nvSpPr>
-          <p:cNvPr id="19" name="Shape 17"/>
-          <p:cNvSpPr/>
-          <p:nvPr/>
-        </p:nvSpPr>
-        <p:spPr>
-          <a:xfrm>
-            <a:off x="777240" y="4738878"/>
-            <a:ext cx="10607040" cy="838962"/>
-          </a:xfrm>
-          <a:prstGeom prst="rect">
-            <a:avLst/>
-          </a:prstGeom>
-          <a:solidFill>
-            <a:srgbClr val="FFFFFF"/>
-          </a:solidFill>
-          <a:ln w="12700">
-            <a:solidFill>
-              <a:srgbClr val="EDE7DB"/>
-            </a:solidFill>
-            <a:prstDash val="solid"/>
-          </a:ln>
-        </p:spPr>
-      </p:sp>
-      <p:sp>
-        <p:nvSpPr>
-          <p:cNvPr id="20" name="Shape 18"/>
-          <p:cNvSpPr/>
-          <p:nvPr/>
-        </p:nvSpPr>
-        <p:spPr>
-          <a:xfrm>
-            <a:off x="1033272" y="4966335"/>
-            <a:ext cx="384048" cy="384048"/>
-          </a:xfrm>
-          <a:prstGeom prst="ellipse">
-            <a:avLst/>
-          </a:prstGeom>
-          <a:solidFill>
-            <a:srgbClr val="B04A2F"/>
-          </a:solidFill>
-          <a:ln w="12700">
-            <a:solidFill>
-              <a:srgbClr val="B04A2F"/>
-            </a:solidFill>
-            <a:prstDash val="solid"/>
-          </a:ln>
-        </p:spPr>
-      </p:sp>
-      <p:sp>
-        <p:nvSpPr>
-          <p:cNvPr id="21" name="Text 19"/>
-          <p:cNvSpPr txBox="1"/>
-          <p:nvPr/>
-        </p:nvSpPr>
-        <p:spPr>
-          <a:xfrm>
-            <a:off x="1033272" y="4966335"/>
-            <a:ext cx="384048" cy="384048"/>
-          </a:xfrm>
-          <a:prstGeom prst="rect">
-            <a:avLst/>
-          </a:prstGeom>
-          <a:noFill/>
-          <a:ln/>
-        </p:spPr>
-        <p:txBody>
-          <a:bodyPr wrap="square" lIns="0" tIns="0" rIns="0" bIns="0" rtlCol="0" anchor="ctr"/>
-          <a:lstStyle/>
-          <a:p>
-            <a:pPr algn="ctr" indent="0" marL="0">
-              <a:buNone/>
-            </a:pPr>
-            <a:r>
-              <a:rPr lang="en-US" sz="1400" b="1" dirty="0">
-                <a:solidFill>
-                  <a:srgbClr val="FFFFFF"/>
-                </a:solidFill>
-                <a:latin typeface="Yu Gothic" pitchFamily="34" charset="0"/>
-                <a:ea typeface="Yu Gothic" pitchFamily="34" charset="-122"/>
-                <a:cs typeface="Yu Gothic" pitchFamily="34" charset="-120"/>
-              </a:rPr>
-              <a:t>4</a:t>
-            </a:r>
-            <a:endParaRPr lang="en-US" sz="1400" dirty="0"/>
-          </a:p>
-        </p:txBody>
-      </p:sp>
-      <p:sp>
-        <p:nvSpPr>
-          <p:cNvPr id="22" name="Text 20"/>
-          <p:cNvSpPr txBox="1"/>
-          <p:nvPr/>
-        </p:nvSpPr>
-        <p:spPr>
-          <a:xfrm>
-            <a:off x="1645920" y="4830318"/>
-            <a:ext cx="3394253" cy="656082"/>
-          </a:xfrm>
-          <a:prstGeom prst="rect">
-            <a:avLst/>
-          </a:prstGeom>
-          <a:noFill/>
-          <a:ln/>
-        </p:spPr>
-        <p:txBody>
-          <a:bodyPr wrap="square" lIns="0" tIns="0" rIns="0" bIns="0" rtlCol="0" anchor="ctr"/>
-          <a:lstStyle/>
-          <a:p>
-            <a:pPr indent="0" marL="0">
-              <a:buNone/>
-            </a:pPr>
-            <a:r>
-              <a:rPr lang="en-US" sz="1500" b="1" dirty="0">
-                <a:solidFill>
-                  <a:srgbClr val="23201D"/>
-                </a:solidFill>
-                <a:latin typeface="Yu Gothic" pitchFamily="34" charset="0"/>
-                <a:ea typeface="Yu Gothic" pitchFamily="34" charset="-122"/>
-                <a:cs typeface="Yu Gothic" pitchFamily="34" charset="-120"/>
-              </a:rPr>
-              <a:t>守る人</a:t>
-            </a:r>
-            <a:endParaRPr lang="en-US" sz="1500" dirty="0"/>
-          </a:p>
-        </p:txBody>
-      </p:sp>
-      <p:sp>
-        <p:nvSpPr>
-          <p:cNvPr id="23" name="Text 21"/>
-          <p:cNvSpPr txBox="1"/>
-          <p:nvPr/>
-        </p:nvSpPr>
-        <p:spPr>
-          <a:xfrm>
-            <a:off x="5146243" y="4830318"/>
-            <a:ext cx="5963717" cy="656082"/>
-          </a:xfrm>
-          <a:prstGeom prst="rect">
-            <a:avLst/>
-          </a:prstGeom>
-          <a:noFill/>
-          <a:ln/>
-        </p:spPr>
-        <p:txBody>
-          <a:bodyPr wrap="square" lIns="0" tIns="0" rIns="0" bIns="0" rtlCol="0" anchor="ctr"/>
-          <a:lstStyle/>
-          <a:p>
-            <a:pPr indent="0" marL="0">
-              <a:lnSpc>
-                <a:spcPct val="130000"/>
-              </a:lnSpc>
-              <a:buNone/>
-            </a:pPr>
-            <a:r>
-              <a:rPr lang="en-US" sz="1250" dirty="0">
-                <a:solidFill>
-                  <a:srgbClr val="5A534A"/>
-                </a:solidFill>
-                <a:latin typeface="Yu Gothic" pitchFamily="34" charset="0"/>
-                <a:ea typeface="Yu Gothic" pitchFamily="34" charset="-122"/>
-                <a:cs typeface="Yu Gothic" pitchFamily="34" charset="-120"/>
-              </a:rPr>
-              <a:t>情報の扱い、アカウント管理</a:t>
-            </a:r>
-            <a:endParaRPr lang="en-US" sz="1250" dirty="0"/>
-          </a:p>
-        </p:txBody>
-      </p:sp>
-      <p:sp>
-        <p:nvSpPr>
-          <p:cNvPr id="24" name="Text 22"/>
-          <p:cNvSpPr txBox="1"/>
-          <p:nvPr/>
-        </p:nvSpPr>
-        <p:spPr>
-          <a:xfrm>
-            <a:off x="777240" y="5715000"/>
-            <a:ext cx="10607040" cy="457200"/>
-          </a:xfrm>
-          <a:prstGeom prst="rect">
-            <a:avLst/>
-          </a:prstGeom>
-          <a:noFill/>
-          <a:ln/>
-        </p:spPr>
-        <p:txBody>
-          <a:bodyPr wrap="square" lIns="0" tIns="0" rIns="0" bIns="0" rtlCol="0" anchor="ctr"/>
-          <a:lstStyle/>
-          <a:p>
-            <a:pPr indent="0" marL="0">
-              <a:buNone/>
-            </a:pPr>
-            <a:r>
-              <a:rPr lang="en-US" sz="1200" b="1" dirty="0">
-                <a:solidFill>
-                  <a:srgbClr val="B04A2F"/>
-                </a:solidFill>
-                <a:latin typeface="Yu Gothic" pitchFamily="34" charset="0"/>
-                <a:ea typeface="Yu Gothic" pitchFamily="34" charset="-122"/>
-                <a:cs typeface="Yu Gothic" pitchFamily="34" charset="-120"/>
-              </a:rPr>
-              <a:t>「作る人」を社内に抱えようとして止まる会社が多くあります。外注で構いません。</a:t>
-            </a:r>
-            <a:endParaRPr lang="en-US" sz="1200" dirty="0"/>
-          </a:p>
-        </p:txBody>
-      </p:sp>
-      <p:sp>
-        <p:nvSpPr>
-          <p:cNvPr id="25" name="Text 23"/>
-          <p:cNvSpPr txBox="1"/>
-          <p:nvPr/>
-        </p:nvSpPr>
-        <p:spPr>
-          <a:xfrm>
-            <a:off x="777240" y="6355080"/>
-            <a:ext cx="7424928" cy="274320"/>
-          </a:xfrm>
-          <a:prstGeom prst="rect">
-            <a:avLst/>
-          </a:prstGeom>
-          <a:noFill/>
-          <a:ln/>
-        </p:spPr>
-        <p:txBody>
-          <a:bodyPr wrap="square" lIns="0" tIns="0" rIns="0" bIns="0" rtlCol="0" anchor="ctr"/>
-          <a:lstStyle/>
-          <a:p>
-            <a:pPr indent="0" marL="0">
+            <a:off x="8202168" y="6382512"/>
+            <a:ext cx="3182112" cy="256032"/>
+          </a:xfrm>
+          <a:prstGeom prst="rect">
+            <a:avLst/>
+          </a:prstGeom>
+          <a:noFill/>
+          <a:ln/>
+        </p:spPr>
+        <p:txBody>
+          <a:bodyPr wrap="square" lIns="0" tIns="0" rIns="0" bIns="0" rtlCol="0" anchor="ctr"/>
+          <a:lstStyle/>
+          <a:p>
+            <a:pPr algn="r" indent="0" marL="0">
               <a:buNone/>
             </a:pPr>
             <a:r>
@@ -3207,46 +4625,7 @@
                 <a:ea typeface="Yu Gothic" pitchFamily="34" charset="-122"/>
                 <a:cs typeface="Yu Gothic" pitchFamily="34" charset="-120"/>
               </a:rPr>
-              <a:t>第11回　組織に載せる</a:t>
-            </a:r>
-            <a:endParaRPr lang="en-US" sz="900" dirty="0"/>
-          </a:p>
-        </p:txBody>
-      </p:sp>
-      <p:sp>
-        <p:nvSpPr>
-          <p:cNvPr id="26" name="Text 24"/>
-          <p:cNvSpPr txBox="1"/>
-          <p:nvPr/>
-        </p:nvSpPr>
-        <p:spPr>
-          <a:xfrm>
-            <a:off x="8202168" y="6355080"/>
-            <a:ext cx="3182112" cy="274320"/>
-          </a:xfrm>
-          <a:prstGeom prst="rect">
-            <a:avLst/>
-          </a:prstGeom>
-          <a:noFill/>
-          <a:ln/>
-        </p:spPr>
-        <p:txBody>
-          <a:bodyPr wrap="square" lIns="0" tIns="0" rIns="0" bIns="0" rtlCol="0" anchor="ctr"/>
-          <a:lstStyle/>
-          <a:p>
-            <a:pPr algn="r" indent="0" marL="0">
-              <a:buNone/>
-            </a:pPr>
-            <a:r>
-              <a:rPr lang="en-US" sz="900" dirty="0">
-                <a:solidFill>
-                  <a:srgbClr val="8A8177"/>
-                </a:solidFill>
-                <a:latin typeface="Yu Gothic" pitchFamily="34" charset="0"/>
-                <a:ea typeface="Yu Gothic" pitchFamily="34" charset="-122"/>
-                <a:cs typeface="Yu Gothic" pitchFamily="34" charset="-120"/>
-              </a:rPr>
-              <a:t>考え方</a:t>
+              <a:t>ゴール</a:t>
             </a:r>
             <a:endParaRPr lang="en-US" sz="900" dirty="0"/>
           </a:p>
@@ -3292,7 +4671,7 @@
         </p:nvSpPr>
         <p:spPr>
           <a:xfrm>
-            <a:off x="777240" y="640080"/>
+            <a:off x="777240" y="566928"/>
             <a:ext cx="10607040" cy="274320"/>
           </a:xfrm>
           <a:prstGeom prst="rect">
@@ -3317,7 +4696,7 @@
                 <a:ea typeface="Yu Gothic" pitchFamily="34" charset="-122"/>
                 <a:cs typeface="Yu Gothic" pitchFamily="34" charset="-120"/>
               </a:rPr>
-              <a:t>実演</a:t>
+              <a:t>考え方</a:t>
             </a:r>
             <a:endParaRPr lang="en-US" sz="1100" dirty="0"/>
           </a:p>
@@ -3331,7 +4710,7 @@
         </p:nvSpPr>
         <p:spPr>
           <a:xfrm>
-            <a:off x="777240" y="960120"/>
+            <a:off x="777240" y="896112"/>
             <a:ext cx="10607040" cy="640080"/>
           </a:xfrm>
           <a:prstGeom prst="rect">
@@ -3348,7 +4727,7 @@
               <a:buNone/>
             </a:pPr>
             <a:r>
-              <a:rPr lang="en-US" sz="2700" b="1" dirty="0">
+              <a:rPr lang="en-US" sz="2600" b="1" dirty="0">
                 <a:solidFill>
                   <a:srgbClr val="23201D"/>
                 </a:solidFill>
@@ -3356,9 +4735,9 @@
                 <a:ea typeface="Yu Gothic" pitchFamily="34" charset="-122"/>
                 <a:cs typeface="Yu Gothic" pitchFamily="34" charset="-120"/>
               </a:rPr>
-              <a:t>推進役の選び方</a:t>
-            </a:r>
-            <a:endParaRPr lang="en-US" sz="2700" dirty="0"/>
+              <a:t>役割は4つ。人数は1〜2名の兼任で構いません</a:t>
+            </a:r>
+            <a:endParaRPr lang="en-US" sz="2600" dirty="0"/>
           </a:p>
         </p:txBody>
       </p:sp>
@@ -3370,18 +4749,18 @@
         </p:nvSpPr>
         <p:spPr>
           <a:xfrm>
-            <a:off x="777240" y="1828800"/>
-            <a:ext cx="4983480" cy="3566160"/>
+            <a:off x="777240" y="1691640"/>
+            <a:ext cx="10607040" cy="864108"/>
           </a:xfrm>
           <a:prstGeom prst="rect">
             <a:avLst/>
           </a:prstGeom>
           <a:solidFill>
-            <a:srgbClr val="EDE7DB"/>
+            <a:srgbClr val="FFFFFF"/>
           </a:solidFill>
-          <a:ln w="15875">
+          <a:ln w="12700">
             <a:solidFill>
-              <a:srgbClr val="8A8177"/>
+              <a:srgbClr val="EDE7DB"/>
             </a:solidFill>
             <a:prstDash val="solid"/>
           </a:ln>
@@ -3395,497 +4774,8 @@
         </p:nvSpPr>
         <p:spPr>
           <a:xfrm>
-            <a:off x="777240" y="1828800"/>
-            <a:ext cx="4983480" cy="566928"/>
-          </a:xfrm>
-          <a:prstGeom prst="rect">
-            <a:avLst/>
-          </a:prstGeom>
-          <a:solidFill>
-            <a:srgbClr val="8A8177"/>
-          </a:solidFill>
-          <a:ln w="12700">
-            <a:solidFill>
-              <a:srgbClr val="333333"/>
-            </a:solidFill>
-            <a:prstDash val="solid"/>
-          </a:ln>
-        </p:spPr>
-      </p:sp>
-      <p:sp>
-        <p:nvSpPr>
-          <p:cNvPr id="6" name="Text 4"/>
-          <p:cNvSpPr txBox="1"/>
-          <p:nvPr/>
-        </p:nvSpPr>
-        <p:spPr>
-          <a:xfrm>
-            <a:off x="1005840" y="1883664"/>
-            <a:ext cx="4526280" cy="457200"/>
-          </a:xfrm>
-          <a:prstGeom prst="rect">
-            <a:avLst/>
-          </a:prstGeom>
-          <a:noFill/>
-          <a:ln/>
-        </p:spPr>
-        <p:txBody>
-          <a:bodyPr wrap="square" lIns="0" tIns="0" rIns="0" bIns="0" rtlCol="0" anchor="ctr"/>
-          <a:lstStyle/>
-          <a:p>
-            <a:pPr indent="0" marL="0">
-              <a:buNone/>
-            </a:pPr>
-            <a:r>
-              <a:rPr lang="en-US" sz="1400" b="1" dirty="0">
-                <a:solidFill>
-                  <a:srgbClr val="FFFFFF"/>
-                </a:solidFill>
-                <a:latin typeface="Yu Gothic" pitchFamily="34" charset="0"/>
-                <a:ea typeface="Yu Gothic" pitchFamily="34" charset="-122"/>
-                <a:cs typeface="Yu Gothic" pitchFamily="34" charset="-120"/>
-              </a:rPr>
-              <a:t>選びがちな人</a:t>
-            </a:r>
-            <a:endParaRPr lang="en-US" sz="1400" dirty="0"/>
-          </a:p>
-        </p:txBody>
-      </p:sp>
-      <p:sp>
-        <p:nvSpPr>
-          <p:cNvPr id="7" name="Text 5"/>
-          <p:cNvSpPr txBox="1"/>
-          <p:nvPr/>
-        </p:nvSpPr>
-        <p:spPr>
-          <a:xfrm>
-            <a:off x="1097280" y="2606040"/>
-            <a:ext cx="4343400" cy="548640"/>
-          </a:xfrm>
-          <a:prstGeom prst="rect">
-            <a:avLst/>
-          </a:prstGeom>
-          <a:noFill/>
-          <a:ln/>
-        </p:spPr>
-        <p:txBody>
-          <a:bodyPr wrap="square" lIns="0" tIns="0" rIns="0" bIns="0" rtlCol="0" anchor="ctr"/>
-          <a:lstStyle/>
-          <a:p>
-            <a:pPr indent="0" marL="0">
-              <a:lnSpc>
-                <a:spcPct val="125000"/>
-              </a:lnSpc>
-              <a:buNone/>
-            </a:pPr>
-            <a:r>
-              <a:rPr lang="en-US" sz="1300" dirty="0">
-                <a:solidFill>
-                  <a:srgbClr val="23201D"/>
-                </a:solidFill>
-                <a:latin typeface="Yu Gothic" pitchFamily="34" charset="0"/>
-                <a:ea typeface="Yu Gothic" pitchFamily="34" charset="-122"/>
-                <a:cs typeface="Yu Gothic" pitchFamily="34" charset="-120"/>
-              </a:rPr>
-              <a:t>ITが得意な人</a:t>
-            </a:r>
-            <a:endParaRPr lang="en-US" sz="1300" dirty="0"/>
-          </a:p>
-        </p:txBody>
-      </p:sp>
-      <p:sp>
-        <p:nvSpPr>
-          <p:cNvPr id="8" name="Text 6"/>
-          <p:cNvSpPr txBox="1"/>
-          <p:nvPr/>
-        </p:nvSpPr>
-        <p:spPr>
-          <a:xfrm>
-            <a:off x="1097280" y="3172968"/>
-            <a:ext cx="4343400" cy="548640"/>
-          </a:xfrm>
-          <a:prstGeom prst="rect">
-            <a:avLst/>
-          </a:prstGeom>
-          <a:noFill/>
-          <a:ln/>
-        </p:spPr>
-        <p:txBody>
-          <a:bodyPr wrap="square" lIns="0" tIns="0" rIns="0" bIns="0" rtlCol="0" anchor="ctr"/>
-          <a:lstStyle/>
-          <a:p>
-            <a:pPr indent="0" marL="0">
-              <a:lnSpc>
-                <a:spcPct val="125000"/>
-              </a:lnSpc>
-              <a:buNone/>
-            </a:pPr>
-            <a:r>
-              <a:rPr lang="en-US" sz="1300" dirty="0">
-                <a:solidFill>
-                  <a:srgbClr val="23201D"/>
-                </a:solidFill>
-                <a:latin typeface="Yu Gothic" pitchFamily="34" charset="0"/>
-                <a:ea typeface="Yu Gothic" pitchFamily="34" charset="-122"/>
-                <a:cs typeface="Yu Gothic" pitchFamily="34" charset="-120"/>
-              </a:rPr>
-              <a:t>若いから、という理由</a:t>
-            </a:r>
-            <a:endParaRPr lang="en-US" sz="1300" dirty="0"/>
-          </a:p>
-        </p:txBody>
-      </p:sp>
-      <p:sp>
-        <p:nvSpPr>
-          <p:cNvPr id="9" name="Text 7"/>
-          <p:cNvSpPr txBox="1"/>
-          <p:nvPr/>
-        </p:nvSpPr>
-        <p:spPr>
-          <a:xfrm>
-            <a:off x="1097280" y="3739896"/>
-            <a:ext cx="4343400" cy="548640"/>
-          </a:xfrm>
-          <a:prstGeom prst="rect">
-            <a:avLst/>
-          </a:prstGeom>
-          <a:noFill/>
-          <a:ln/>
-        </p:spPr>
-        <p:txBody>
-          <a:bodyPr wrap="square" lIns="0" tIns="0" rIns="0" bIns="0" rtlCol="0" anchor="ctr"/>
-          <a:lstStyle/>
-          <a:p>
-            <a:pPr indent="0" marL="0">
-              <a:lnSpc>
-                <a:spcPct val="125000"/>
-              </a:lnSpc>
-              <a:buNone/>
-            </a:pPr>
-            <a:r>
-              <a:rPr lang="en-US" sz="1300" dirty="0">
-                <a:solidFill>
-                  <a:srgbClr val="23201D"/>
-                </a:solidFill>
-                <a:latin typeface="Yu Gothic" pitchFamily="34" charset="0"/>
-                <a:ea typeface="Yu Gothic" pitchFamily="34" charset="-122"/>
-                <a:cs typeface="Yu Gothic" pitchFamily="34" charset="-120"/>
-              </a:rPr>
-              <a:t>本人がその業務を知らない</a:t>
-            </a:r>
-            <a:endParaRPr lang="en-US" sz="1300" dirty="0"/>
-          </a:p>
-        </p:txBody>
-      </p:sp>
-      <p:sp>
-        <p:nvSpPr>
-          <p:cNvPr id="10" name="Text 8"/>
-          <p:cNvSpPr txBox="1"/>
-          <p:nvPr/>
-        </p:nvSpPr>
-        <p:spPr>
-          <a:xfrm>
-            <a:off x="1097280" y="4306824"/>
-            <a:ext cx="4343400" cy="548640"/>
-          </a:xfrm>
-          <a:prstGeom prst="rect">
-            <a:avLst/>
-          </a:prstGeom>
-          <a:noFill/>
-          <a:ln/>
-        </p:spPr>
-        <p:txBody>
-          <a:bodyPr wrap="square" lIns="0" tIns="0" rIns="0" bIns="0" rtlCol="0" anchor="ctr"/>
-          <a:lstStyle/>
-          <a:p>
-            <a:pPr indent="0" marL="0">
-              <a:lnSpc>
-                <a:spcPct val="125000"/>
-              </a:lnSpc>
-              <a:buNone/>
-            </a:pPr>
-            <a:r>
-              <a:rPr lang="en-US" sz="1300" dirty="0">
-                <a:solidFill>
-                  <a:srgbClr val="23201D"/>
-                </a:solidFill>
-                <a:latin typeface="Yu Gothic" pitchFamily="34" charset="0"/>
-                <a:ea typeface="Yu Gothic" pitchFamily="34" charset="-122"/>
-                <a:cs typeface="Yu Gothic" pitchFamily="34" charset="-120"/>
-              </a:rPr>
-              <a:t>結果、現場とずれたものができる</a:t>
-            </a:r>
-            <a:endParaRPr lang="en-US" sz="1300" dirty="0"/>
-          </a:p>
-        </p:txBody>
-      </p:sp>
-      <p:sp>
-        <p:nvSpPr>
-          <p:cNvPr id="11" name="Shape 9"/>
-          <p:cNvSpPr/>
-          <p:nvPr/>
-        </p:nvSpPr>
-        <p:spPr>
-          <a:xfrm>
-            <a:off x="6400800" y="1828800"/>
-            <a:ext cx="4983480" cy="3566160"/>
-          </a:xfrm>
-          <a:prstGeom prst="rect">
-            <a:avLst/>
-          </a:prstGeom>
-          <a:solidFill>
-            <a:srgbClr val="FFFFFF"/>
-          </a:solidFill>
-          <a:ln w="15875">
-            <a:solidFill>
-              <a:srgbClr val="3B6B4A"/>
-            </a:solidFill>
-            <a:prstDash val="solid"/>
-          </a:ln>
-        </p:spPr>
-      </p:sp>
-      <p:sp>
-        <p:nvSpPr>
-          <p:cNvPr id="12" name="Shape 10"/>
-          <p:cNvSpPr/>
-          <p:nvPr/>
-        </p:nvSpPr>
-        <p:spPr>
-          <a:xfrm>
-            <a:off x="6400800" y="1828800"/>
-            <a:ext cx="4983480" cy="566928"/>
-          </a:xfrm>
-          <a:prstGeom prst="rect">
-            <a:avLst/>
-          </a:prstGeom>
-          <a:solidFill>
-            <a:srgbClr val="3B6B4A"/>
-          </a:solidFill>
-          <a:ln w="12700">
-            <a:solidFill>
-              <a:srgbClr val="333333"/>
-            </a:solidFill>
-            <a:prstDash val="solid"/>
-          </a:ln>
-        </p:spPr>
-      </p:sp>
-      <p:sp>
-        <p:nvSpPr>
-          <p:cNvPr id="13" name="Text 11"/>
-          <p:cNvSpPr txBox="1"/>
-          <p:nvPr/>
-        </p:nvSpPr>
-        <p:spPr>
-          <a:xfrm>
-            <a:off x="6629400" y="1883664"/>
-            <a:ext cx="4526280" cy="457200"/>
-          </a:xfrm>
-          <a:prstGeom prst="rect">
-            <a:avLst/>
-          </a:prstGeom>
-          <a:noFill/>
-          <a:ln/>
-        </p:spPr>
-        <p:txBody>
-          <a:bodyPr wrap="square" lIns="0" tIns="0" rIns="0" bIns="0" rtlCol="0" anchor="ctr"/>
-          <a:lstStyle/>
-          <a:p>
-            <a:pPr indent="0" marL="0">
-              <a:buNone/>
-            </a:pPr>
-            <a:r>
-              <a:rPr lang="en-US" sz="1400" b="1" dirty="0">
-                <a:solidFill>
-                  <a:srgbClr val="FFFFFF"/>
-                </a:solidFill>
-                <a:latin typeface="Yu Gothic" pitchFamily="34" charset="0"/>
-                <a:ea typeface="Yu Gothic" pitchFamily="34" charset="-122"/>
-                <a:cs typeface="Yu Gothic" pitchFamily="34" charset="-120"/>
-              </a:rPr>
-              <a:t>適任な人</a:t>
-            </a:r>
-            <a:endParaRPr lang="en-US" sz="1400" dirty="0"/>
-          </a:p>
-        </p:txBody>
-      </p:sp>
-      <p:sp>
-        <p:nvSpPr>
-          <p:cNvPr id="14" name="Text 12"/>
-          <p:cNvSpPr txBox="1"/>
-          <p:nvPr/>
-        </p:nvSpPr>
-        <p:spPr>
-          <a:xfrm>
-            <a:off x="6720840" y="2606040"/>
-            <a:ext cx="4343400" cy="548640"/>
-          </a:xfrm>
-          <a:prstGeom prst="rect">
-            <a:avLst/>
-          </a:prstGeom>
-          <a:noFill/>
-          <a:ln/>
-        </p:spPr>
-        <p:txBody>
-          <a:bodyPr wrap="square" lIns="0" tIns="0" rIns="0" bIns="0" rtlCol="0" anchor="ctr"/>
-          <a:lstStyle/>
-          <a:p>
-            <a:pPr indent="0" marL="0">
-              <a:lnSpc>
-                <a:spcPct val="125000"/>
-              </a:lnSpc>
-              <a:buNone/>
-            </a:pPr>
-            <a:r>
-              <a:rPr lang="en-US" sz="1300" dirty="0">
-                <a:solidFill>
-                  <a:srgbClr val="23201D"/>
-                </a:solidFill>
-                <a:latin typeface="Yu Gothic" pitchFamily="34" charset="0"/>
-                <a:ea typeface="Yu Gothic" pitchFamily="34" charset="-122"/>
-                <a:cs typeface="Yu Gothic" pitchFamily="34" charset="-120"/>
-              </a:rPr>
-              <a:t>その業務をいちばんよく知っている人</a:t>
-            </a:r>
-            <a:endParaRPr lang="en-US" sz="1300" dirty="0"/>
-          </a:p>
-        </p:txBody>
-      </p:sp>
-      <p:sp>
-        <p:nvSpPr>
-          <p:cNvPr id="15" name="Text 13"/>
-          <p:cNvSpPr txBox="1"/>
-          <p:nvPr/>
-        </p:nvSpPr>
-        <p:spPr>
-          <a:xfrm>
-            <a:off x="6720840" y="3172968"/>
-            <a:ext cx="4343400" cy="548640"/>
-          </a:xfrm>
-          <a:prstGeom prst="rect">
-            <a:avLst/>
-          </a:prstGeom>
-          <a:noFill/>
-          <a:ln/>
-        </p:spPr>
-        <p:txBody>
-          <a:bodyPr wrap="square" lIns="0" tIns="0" rIns="0" bIns="0" rtlCol="0" anchor="ctr"/>
-          <a:lstStyle/>
-          <a:p>
-            <a:pPr indent="0" marL="0">
-              <a:lnSpc>
-                <a:spcPct val="125000"/>
-              </a:lnSpc>
-              <a:buNone/>
-            </a:pPr>
-            <a:r>
-              <a:rPr lang="en-US" sz="1300" dirty="0">
-                <a:solidFill>
-                  <a:srgbClr val="23201D"/>
-                </a:solidFill>
-                <a:latin typeface="Yu Gothic" pitchFamily="34" charset="0"/>
-                <a:ea typeface="Yu Gothic" pitchFamily="34" charset="-122"/>
-                <a:cs typeface="Yu Gothic" pitchFamily="34" charset="-120"/>
-              </a:rPr>
-              <a:t>面倒くさがりな人</a:t>
-            </a:r>
-            <a:endParaRPr lang="en-US" sz="1300" dirty="0"/>
-          </a:p>
-        </p:txBody>
-      </p:sp>
-      <p:sp>
-        <p:nvSpPr>
-          <p:cNvPr id="16" name="Text 14"/>
-          <p:cNvSpPr txBox="1"/>
-          <p:nvPr/>
-        </p:nvSpPr>
-        <p:spPr>
-          <a:xfrm>
-            <a:off x="6720840" y="3739896"/>
-            <a:ext cx="4343400" cy="548640"/>
-          </a:xfrm>
-          <a:prstGeom prst="rect">
-            <a:avLst/>
-          </a:prstGeom>
-          <a:noFill/>
-          <a:ln/>
-        </p:spPr>
-        <p:txBody>
-          <a:bodyPr wrap="square" lIns="0" tIns="0" rIns="0" bIns="0" rtlCol="0" anchor="ctr"/>
-          <a:lstStyle/>
-          <a:p>
-            <a:pPr indent="0" marL="0">
-              <a:lnSpc>
-                <a:spcPct val="125000"/>
-              </a:lnSpc>
-              <a:buNone/>
-            </a:pPr>
-            <a:r>
-              <a:rPr lang="en-US" sz="1300" dirty="0">
-                <a:solidFill>
-                  <a:srgbClr val="23201D"/>
-                </a:solidFill>
-                <a:latin typeface="Yu Gothic" pitchFamily="34" charset="0"/>
-                <a:ea typeface="Yu Gothic" pitchFamily="34" charset="-122"/>
-                <a:cs typeface="Yu Gothic" pitchFamily="34" charset="-120"/>
-              </a:rPr>
-              <a:t>月あたりの時間を正式に割り当てる</a:t>
-            </a:r>
-            <a:endParaRPr lang="en-US" sz="1300" dirty="0"/>
-          </a:p>
-        </p:txBody>
-      </p:sp>
-      <p:sp>
-        <p:nvSpPr>
-          <p:cNvPr id="17" name="Text 15"/>
-          <p:cNvSpPr txBox="1"/>
-          <p:nvPr/>
-        </p:nvSpPr>
-        <p:spPr>
-          <a:xfrm>
-            <a:off x="6720840" y="4306824"/>
-            <a:ext cx="4343400" cy="548640"/>
-          </a:xfrm>
-          <a:prstGeom prst="rect">
-            <a:avLst/>
-          </a:prstGeom>
-          <a:noFill/>
-          <a:ln/>
-        </p:spPr>
-        <p:txBody>
-          <a:bodyPr wrap="square" lIns="0" tIns="0" rIns="0" bIns="0" rtlCol="0" anchor="ctr"/>
-          <a:lstStyle/>
-          <a:p>
-            <a:pPr indent="0" marL="0">
-              <a:lnSpc>
-                <a:spcPct val="125000"/>
-              </a:lnSpc>
-              <a:buNone/>
-            </a:pPr>
-            <a:r>
-              <a:rPr lang="en-US" sz="1300" dirty="0">
-                <a:solidFill>
-                  <a:srgbClr val="23201D"/>
-                </a:solidFill>
-                <a:latin typeface="Yu Gothic" pitchFamily="34" charset="0"/>
-                <a:ea typeface="Yu Gothic" pitchFamily="34" charset="-122"/>
-                <a:cs typeface="Yu Gothic" pitchFamily="34" charset="-120"/>
-              </a:rPr>
-              <a:t>「片手間で」は必ず失敗します</a:t>
-            </a:r>
-            <a:endParaRPr lang="en-US" sz="1300" dirty="0"/>
-          </a:p>
-        </p:txBody>
-      </p:sp>
-      <p:sp>
-        <p:nvSpPr>
-          <p:cNvPr id="18" name="Shape 16"/>
-          <p:cNvSpPr/>
-          <p:nvPr/>
-        </p:nvSpPr>
-        <p:spPr>
-          <a:xfrm>
-            <a:off x="5815584" y="3337560"/>
-            <a:ext cx="512064" cy="512064"/>
+            <a:off x="1014984" y="1940814"/>
+            <a:ext cx="365760" cy="365760"/>
           </a:xfrm>
           <a:prstGeom prst="ellipse">
             <a:avLst/>
@@ -3903,14 +4793,14 @@
       </p:sp>
       <p:sp>
         <p:nvSpPr>
-          <p:cNvPr id="19" name="Text 17"/>
-          <p:cNvSpPr txBox="1"/>
-          <p:nvPr/>
-        </p:nvSpPr>
-        <p:spPr>
-          <a:xfrm>
-            <a:off x="5815584" y="3337560"/>
-            <a:ext cx="512064" cy="512064"/>
+          <p:cNvPr id="6" name="Text 4"/>
+          <p:cNvSpPr txBox="1"/>
+          <p:nvPr/>
+        </p:nvSpPr>
+        <p:spPr>
+          <a:xfrm>
+            <a:off x="1014984" y="1940814"/>
+            <a:ext cx="365760" cy="365760"/>
           </a:xfrm>
           <a:prstGeom prst="rect">
             <a:avLst/>
@@ -3926,7 +4816,7 @@
               <a:buNone/>
             </a:pPr>
             <a:r>
-              <a:rPr lang="en-US" sz="1800" b="1" dirty="0">
+              <a:rPr lang="en-US" sz="1300" b="1" dirty="0">
                 <a:solidFill>
                   <a:srgbClr val="FFFFFF"/>
                 </a:solidFill>
@@ -3934,22 +4824,652 @@
                 <a:ea typeface="Yu Gothic" pitchFamily="34" charset="-122"/>
                 <a:cs typeface="Yu Gothic" pitchFamily="34" charset="-120"/>
               </a:rPr>
-              <a:t>→</a:t>
-            </a:r>
-            <a:endParaRPr lang="en-US" sz="1800" dirty="0"/>
-          </a:p>
-        </p:txBody>
-      </p:sp>
-      <p:sp>
-        <p:nvSpPr>
-          <p:cNvPr id="20" name="Text 18"/>
-          <p:cNvSpPr txBox="1"/>
-          <p:nvPr/>
-        </p:nvSpPr>
-        <p:spPr>
-          <a:xfrm>
-            <a:off x="777240" y="6355080"/>
-            <a:ext cx="7424928" cy="274320"/>
+              <a:t>1</a:t>
+            </a:r>
+            <a:endParaRPr lang="en-US" sz="1300" dirty="0"/>
+          </a:p>
+        </p:txBody>
+      </p:sp>
+      <p:sp>
+        <p:nvSpPr>
+          <p:cNvPr id="7" name="Text 5"/>
+          <p:cNvSpPr txBox="1"/>
+          <p:nvPr/>
+        </p:nvSpPr>
+        <p:spPr>
+          <a:xfrm>
+            <a:off x="1600200" y="1764792"/>
+            <a:ext cx="3182112" cy="717804"/>
+          </a:xfrm>
+          <a:prstGeom prst="rect">
+            <a:avLst/>
+          </a:prstGeom>
+          <a:noFill/>
+          <a:ln/>
+        </p:spPr>
+        <p:txBody>
+          <a:bodyPr wrap="square" lIns="0" tIns="0" rIns="0" bIns="0" rtlCol="0" anchor="ctr"/>
+          <a:lstStyle/>
+          <a:p>
+            <a:pPr indent="0" marL="0">
+              <a:buNone/>
+            </a:pPr>
+            <a:r>
+              <a:rPr lang="en-US" sz="1450" b="1" dirty="0">
+                <a:solidFill>
+                  <a:srgbClr val="23201D"/>
+                </a:solidFill>
+                <a:latin typeface="Yu Gothic" pitchFamily="34" charset="0"/>
+                <a:ea typeface="Yu Gothic" pitchFamily="34" charset="-122"/>
+                <a:cs typeface="Yu Gothic" pitchFamily="34" charset="-120"/>
+              </a:rPr>
+              <a:t>決める人（経営者）</a:t>
+            </a:r>
+            <a:endParaRPr lang="en-US" sz="1450" dirty="0"/>
+          </a:p>
+        </p:txBody>
+      </p:sp>
+      <p:sp>
+        <p:nvSpPr>
+          <p:cNvPr id="8" name="Text 6"/>
+          <p:cNvSpPr txBox="1"/>
+          <p:nvPr/>
+        </p:nvSpPr>
+        <p:spPr>
+          <a:xfrm>
+            <a:off x="4888382" y="1764792"/>
+            <a:ext cx="6267298" cy="717804"/>
+          </a:xfrm>
+          <a:prstGeom prst="rect">
+            <a:avLst/>
+          </a:prstGeom>
+          <a:noFill/>
+          <a:ln/>
+        </p:spPr>
+        <p:txBody>
+          <a:bodyPr wrap="square" lIns="0" tIns="0" rIns="0" bIns="0" rtlCol="0" anchor="ctr"/>
+          <a:lstStyle/>
+          <a:p>
+            <a:pPr indent="0" marL="0">
+              <a:lnSpc>
+                <a:spcPct val="130000"/>
+              </a:lnSpc>
+              <a:buNone/>
+            </a:pPr>
+            <a:r>
+              <a:rPr lang="en-US" sz="1200" dirty="0">
+                <a:solidFill>
+                  <a:srgbClr val="5A534A"/>
+                </a:solidFill>
+                <a:latin typeface="Yu Gothic" pitchFamily="34" charset="0"/>
+                <a:ea typeface="Yu Gothic" pitchFamily="34" charset="-122"/>
+                <a:cs typeface="Yu Gothic" pitchFamily="34" charset="-120"/>
+              </a:rPr>
+              <a:t>予算・範囲・やめる判断。ここは動かせません</a:t>
+            </a:r>
+            <a:endParaRPr lang="en-US" sz="1200" dirty="0"/>
+          </a:p>
+        </p:txBody>
+      </p:sp>
+      <p:sp>
+        <p:nvSpPr>
+          <p:cNvPr id="9" name="Shape 7"/>
+          <p:cNvSpPr/>
+          <p:nvPr/>
+        </p:nvSpPr>
+        <p:spPr>
+          <a:xfrm>
+            <a:off x="777240" y="2683764"/>
+            <a:ext cx="10607040" cy="864108"/>
+          </a:xfrm>
+          <a:prstGeom prst="rect">
+            <a:avLst/>
+          </a:prstGeom>
+          <a:solidFill>
+            <a:srgbClr val="FFFFFF"/>
+          </a:solidFill>
+          <a:ln w="12700">
+            <a:solidFill>
+              <a:srgbClr val="EDE7DB"/>
+            </a:solidFill>
+            <a:prstDash val="solid"/>
+          </a:ln>
+        </p:spPr>
+      </p:sp>
+      <p:sp>
+        <p:nvSpPr>
+          <p:cNvPr id="10" name="Shape 8"/>
+          <p:cNvSpPr/>
+          <p:nvPr/>
+        </p:nvSpPr>
+        <p:spPr>
+          <a:xfrm>
+            <a:off x="1014984" y="2932938"/>
+            <a:ext cx="365760" cy="365760"/>
+          </a:xfrm>
+          <a:prstGeom prst="ellipse">
+            <a:avLst/>
+          </a:prstGeom>
+          <a:solidFill>
+            <a:srgbClr val="B04A2F"/>
+          </a:solidFill>
+          <a:ln w="12700">
+            <a:solidFill>
+              <a:srgbClr val="333333"/>
+            </a:solidFill>
+            <a:prstDash val="solid"/>
+          </a:ln>
+        </p:spPr>
+      </p:sp>
+      <p:sp>
+        <p:nvSpPr>
+          <p:cNvPr id="11" name="Text 9"/>
+          <p:cNvSpPr txBox="1"/>
+          <p:nvPr/>
+        </p:nvSpPr>
+        <p:spPr>
+          <a:xfrm>
+            <a:off x="1014984" y="2932938"/>
+            <a:ext cx="365760" cy="365760"/>
+          </a:xfrm>
+          <a:prstGeom prst="rect">
+            <a:avLst/>
+          </a:prstGeom>
+          <a:noFill/>
+          <a:ln/>
+        </p:spPr>
+        <p:txBody>
+          <a:bodyPr wrap="square" lIns="0" tIns="0" rIns="0" bIns="0" rtlCol="0" anchor="ctr"/>
+          <a:lstStyle/>
+          <a:p>
+            <a:pPr algn="ctr" indent="0" marL="0">
+              <a:buNone/>
+            </a:pPr>
+            <a:r>
+              <a:rPr lang="en-US" sz="1300" b="1" dirty="0">
+                <a:solidFill>
+                  <a:srgbClr val="FFFFFF"/>
+                </a:solidFill>
+                <a:latin typeface="Yu Gothic" pitchFamily="34" charset="0"/>
+                <a:ea typeface="Yu Gothic" pitchFamily="34" charset="-122"/>
+                <a:cs typeface="Yu Gothic" pitchFamily="34" charset="-120"/>
+              </a:rPr>
+              <a:t>2</a:t>
+            </a:r>
+            <a:endParaRPr lang="en-US" sz="1300" dirty="0"/>
+          </a:p>
+        </p:txBody>
+      </p:sp>
+      <p:sp>
+        <p:nvSpPr>
+          <p:cNvPr id="12" name="Text 10"/>
+          <p:cNvSpPr txBox="1"/>
+          <p:nvPr/>
+        </p:nvSpPr>
+        <p:spPr>
+          <a:xfrm>
+            <a:off x="1600200" y="2756916"/>
+            <a:ext cx="3182112" cy="717804"/>
+          </a:xfrm>
+          <a:prstGeom prst="rect">
+            <a:avLst/>
+          </a:prstGeom>
+          <a:noFill/>
+          <a:ln/>
+        </p:spPr>
+        <p:txBody>
+          <a:bodyPr wrap="square" lIns="0" tIns="0" rIns="0" bIns="0" rtlCol="0" anchor="ctr"/>
+          <a:lstStyle/>
+          <a:p>
+            <a:pPr indent="0" marL="0">
+              <a:buNone/>
+            </a:pPr>
+            <a:r>
+              <a:rPr lang="en-US" sz="1450" b="1" dirty="0">
+                <a:solidFill>
+                  <a:srgbClr val="23201D"/>
+                </a:solidFill>
+                <a:latin typeface="Yu Gothic" pitchFamily="34" charset="0"/>
+                <a:ea typeface="Yu Gothic" pitchFamily="34" charset="-122"/>
+                <a:cs typeface="Yu Gothic" pitchFamily="34" charset="-120"/>
+              </a:rPr>
+              <a:t>回す人</a:t>
+            </a:r>
+            <a:endParaRPr lang="en-US" sz="1450" dirty="0"/>
+          </a:p>
+        </p:txBody>
+      </p:sp>
+      <p:sp>
+        <p:nvSpPr>
+          <p:cNvPr id="13" name="Text 11"/>
+          <p:cNvSpPr txBox="1"/>
+          <p:nvPr/>
+        </p:nvSpPr>
+        <p:spPr>
+          <a:xfrm>
+            <a:off x="4888382" y="2756916"/>
+            <a:ext cx="6267298" cy="717804"/>
+          </a:xfrm>
+          <a:prstGeom prst="rect">
+            <a:avLst/>
+          </a:prstGeom>
+          <a:noFill/>
+          <a:ln/>
+        </p:spPr>
+        <p:txBody>
+          <a:bodyPr wrap="square" lIns="0" tIns="0" rIns="0" bIns="0" rtlCol="0" anchor="ctr"/>
+          <a:lstStyle/>
+          <a:p>
+            <a:pPr indent="0" marL="0">
+              <a:lnSpc>
+                <a:spcPct val="130000"/>
+              </a:lnSpc>
+              <a:buNone/>
+            </a:pPr>
+            <a:r>
+              <a:rPr lang="en-US" sz="1200" dirty="0">
+                <a:solidFill>
+                  <a:srgbClr val="5A534A"/>
+                </a:solidFill>
+                <a:latin typeface="Yu Gothic" pitchFamily="34" charset="0"/>
+                <a:ea typeface="Yu Gothic" pitchFamily="34" charset="-122"/>
+                <a:cs typeface="Yu Gothic" pitchFamily="34" charset="-120"/>
+              </a:rPr>
+              <a:t>月次チェック、質問の一次受け。推進候補の方がここ</a:t>
+            </a:r>
+            <a:endParaRPr lang="en-US" sz="1200" dirty="0"/>
+          </a:p>
+        </p:txBody>
+      </p:sp>
+      <p:sp>
+        <p:nvSpPr>
+          <p:cNvPr id="14" name="Shape 12"/>
+          <p:cNvSpPr/>
+          <p:nvPr/>
+        </p:nvSpPr>
+        <p:spPr>
+          <a:xfrm>
+            <a:off x="777240" y="3675888"/>
+            <a:ext cx="10607040" cy="864108"/>
+          </a:xfrm>
+          <a:prstGeom prst="rect">
+            <a:avLst/>
+          </a:prstGeom>
+          <a:solidFill>
+            <a:srgbClr val="FFFFFF"/>
+          </a:solidFill>
+          <a:ln w="12700">
+            <a:solidFill>
+              <a:srgbClr val="EDE7DB"/>
+            </a:solidFill>
+            <a:prstDash val="solid"/>
+          </a:ln>
+        </p:spPr>
+      </p:sp>
+      <p:sp>
+        <p:nvSpPr>
+          <p:cNvPr id="15" name="Shape 13"/>
+          <p:cNvSpPr/>
+          <p:nvPr/>
+        </p:nvSpPr>
+        <p:spPr>
+          <a:xfrm>
+            <a:off x="1014984" y="3925062"/>
+            <a:ext cx="365760" cy="365760"/>
+          </a:xfrm>
+          <a:prstGeom prst="ellipse">
+            <a:avLst/>
+          </a:prstGeom>
+          <a:solidFill>
+            <a:srgbClr val="B04A2F"/>
+          </a:solidFill>
+          <a:ln w="12700">
+            <a:solidFill>
+              <a:srgbClr val="333333"/>
+            </a:solidFill>
+            <a:prstDash val="solid"/>
+          </a:ln>
+        </p:spPr>
+      </p:sp>
+      <p:sp>
+        <p:nvSpPr>
+          <p:cNvPr id="16" name="Text 14"/>
+          <p:cNvSpPr txBox="1"/>
+          <p:nvPr/>
+        </p:nvSpPr>
+        <p:spPr>
+          <a:xfrm>
+            <a:off x="1014984" y="3925062"/>
+            <a:ext cx="365760" cy="365760"/>
+          </a:xfrm>
+          <a:prstGeom prst="rect">
+            <a:avLst/>
+          </a:prstGeom>
+          <a:noFill/>
+          <a:ln/>
+        </p:spPr>
+        <p:txBody>
+          <a:bodyPr wrap="square" lIns="0" tIns="0" rIns="0" bIns="0" rtlCol="0" anchor="ctr"/>
+          <a:lstStyle/>
+          <a:p>
+            <a:pPr algn="ctr" indent="0" marL="0">
+              <a:buNone/>
+            </a:pPr>
+            <a:r>
+              <a:rPr lang="en-US" sz="1300" b="1" dirty="0">
+                <a:solidFill>
+                  <a:srgbClr val="FFFFFF"/>
+                </a:solidFill>
+                <a:latin typeface="Yu Gothic" pitchFamily="34" charset="0"/>
+                <a:ea typeface="Yu Gothic" pitchFamily="34" charset="-122"/>
+                <a:cs typeface="Yu Gothic" pitchFamily="34" charset="-120"/>
+              </a:rPr>
+              <a:t>3</a:t>
+            </a:r>
+            <a:endParaRPr lang="en-US" sz="1300" dirty="0"/>
+          </a:p>
+        </p:txBody>
+      </p:sp>
+      <p:sp>
+        <p:nvSpPr>
+          <p:cNvPr id="17" name="Text 15"/>
+          <p:cNvSpPr txBox="1"/>
+          <p:nvPr/>
+        </p:nvSpPr>
+        <p:spPr>
+          <a:xfrm>
+            <a:off x="1600200" y="3749040"/>
+            <a:ext cx="3182112" cy="717804"/>
+          </a:xfrm>
+          <a:prstGeom prst="rect">
+            <a:avLst/>
+          </a:prstGeom>
+          <a:noFill/>
+          <a:ln/>
+        </p:spPr>
+        <p:txBody>
+          <a:bodyPr wrap="square" lIns="0" tIns="0" rIns="0" bIns="0" rtlCol="0" anchor="ctr"/>
+          <a:lstStyle/>
+          <a:p>
+            <a:pPr indent="0" marL="0">
+              <a:buNone/>
+            </a:pPr>
+            <a:r>
+              <a:rPr lang="en-US" sz="1450" b="1" dirty="0">
+                <a:solidFill>
+                  <a:srgbClr val="23201D"/>
+                </a:solidFill>
+                <a:latin typeface="Yu Gothic" pitchFamily="34" charset="0"/>
+                <a:ea typeface="Yu Gothic" pitchFamily="34" charset="-122"/>
+                <a:cs typeface="Yu Gothic" pitchFamily="34" charset="-120"/>
+              </a:rPr>
+              <a:t>作る人</a:t>
+            </a:r>
+            <a:endParaRPr lang="en-US" sz="1450" dirty="0"/>
+          </a:p>
+        </p:txBody>
+      </p:sp>
+      <p:sp>
+        <p:nvSpPr>
+          <p:cNvPr id="18" name="Text 16"/>
+          <p:cNvSpPr txBox="1"/>
+          <p:nvPr/>
+        </p:nvSpPr>
+        <p:spPr>
+          <a:xfrm>
+            <a:off x="4888382" y="3749040"/>
+            <a:ext cx="6267298" cy="717804"/>
+          </a:xfrm>
+          <a:prstGeom prst="rect">
+            <a:avLst/>
+          </a:prstGeom>
+          <a:noFill/>
+          <a:ln/>
+        </p:spPr>
+        <p:txBody>
+          <a:bodyPr wrap="square" lIns="0" tIns="0" rIns="0" bIns="0" rtlCol="0" anchor="ctr"/>
+          <a:lstStyle/>
+          <a:p>
+            <a:pPr indent="0" marL="0">
+              <a:lnSpc>
+                <a:spcPct val="130000"/>
+              </a:lnSpc>
+              <a:buNone/>
+            </a:pPr>
+            <a:r>
+              <a:rPr lang="en-US" sz="1200" dirty="0">
+                <a:solidFill>
+                  <a:srgbClr val="5A534A"/>
+                </a:solidFill>
+                <a:latin typeface="Yu Gothic" pitchFamily="34" charset="0"/>
+                <a:ea typeface="Yu Gothic" pitchFamily="34" charset="-122"/>
+                <a:cs typeface="Yu Gothic" pitchFamily="34" charset="-120"/>
+              </a:rPr>
+              <a:t>指示文と専用AIの改修。外注でよい</a:t>
+            </a:r>
+            <a:endParaRPr lang="en-US" sz="1200" dirty="0"/>
+          </a:p>
+        </p:txBody>
+      </p:sp>
+      <p:sp>
+        <p:nvSpPr>
+          <p:cNvPr id="19" name="Shape 17"/>
+          <p:cNvSpPr/>
+          <p:nvPr/>
+        </p:nvSpPr>
+        <p:spPr>
+          <a:xfrm>
+            <a:off x="777240" y="4668012"/>
+            <a:ext cx="10607040" cy="864108"/>
+          </a:xfrm>
+          <a:prstGeom prst="rect">
+            <a:avLst/>
+          </a:prstGeom>
+          <a:solidFill>
+            <a:srgbClr val="FFFFFF"/>
+          </a:solidFill>
+          <a:ln w="12700">
+            <a:solidFill>
+              <a:srgbClr val="EDE7DB"/>
+            </a:solidFill>
+            <a:prstDash val="solid"/>
+          </a:ln>
+        </p:spPr>
+      </p:sp>
+      <p:sp>
+        <p:nvSpPr>
+          <p:cNvPr id="20" name="Shape 18"/>
+          <p:cNvSpPr/>
+          <p:nvPr/>
+        </p:nvSpPr>
+        <p:spPr>
+          <a:xfrm>
+            <a:off x="1014984" y="4917186"/>
+            <a:ext cx="365760" cy="365760"/>
+          </a:xfrm>
+          <a:prstGeom prst="ellipse">
+            <a:avLst/>
+          </a:prstGeom>
+          <a:solidFill>
+            <a:srgbClr val="B04A2F"/>
+          </a:solidFill>
+          <a:ln w="12700">
+            <a:solidFill>
+              <a:srgbClr val="333333"/>
+            </a:solidFill>
+            <a:prstDash val="solid"/>
+          </a:ln>
+        </p:spPr>
+      </p:sp>
+      <p:sp>
+        <p:nvSpPr>
+          <p:cNvPr id="21" name="Text 19"/>
+          <p:cNvSpPr txBox="1"/>
+          <p:nvPr/>
+        </p:nvSpPr>
+        <p:spPr>
+          <a:xfrm>
+            <a:off x="1014984" y="4917186"/>
+            <a:ext cx="365760" cy="365760"/>
+          </a:xfrm>
+          <a:prstGeom prst="rect">
+            <a:avLst/>
+          </a:prstGeom>
+          <a:noFill/>
+          <a:ln/>
+        </p:spPr>
+        <p:txBody>
+          <a:bodyPr wrap="square" lIns="0" tIns="0" rIns="0" bIns="0" rtlCol="0" anchor="ctr"/>
+          <a:lstStyle/>
+          <a:p>
+            <a:pPr algn="ctr" indent="0" marL="0">
+              <a:buNone/>
+            </a:pPr>
+            <a:r>
+              <a:rPr lang="en-US" sz="1300" b="1" dirty="0">
+                <a:solidFill>
+                  <a:srgbClr val="FFFFFF"/>
+                </a:solidFill>
+                <a:latin typeface="Yu Gothic" pitchFamily="34" charset="0"/>
+                <a:ea typeface="Yu Gothic" pitchFamily="34" charset="-122"/>
+                <a:cs typeface="Yu Gothic" pitchFamily="34" charset="-120"/>
+              </a:rPr>
+              <a:t>4</a:t>
+            </a:r>
+            <a:endParaRPr lang="en-US" sz="1300" dirty="0"/>
+          </a:p>
+        </p:txBody>
+      </p:sp>
+      <p:sp>
+        <p:nvSpPr>
+          <p:cNvPr id="22" name="Text 20"/>
+          <p:cNvSpPr txBox="1"/>
+          <p:nvPr/>
+        </p:nvSpPr>
+        <p:spPr>
+          <a:xfrm>
+            <a:off x="1600200" y="4741164"/>
+            <a:ext cx="3182112" cy="717804"/>
+          </a:xfrm>
+          <a:prstGeom prst="rect">
+            <a:avLst/>
+          </a:prstGeom>
+          <a:noFill/>
+          <a:ln/>
+        </p:spPr>
+        <p:txBody>
+          <a:bodyPr wrap="square" lIns="0" tIns="0" rIns="0" bIns="0" rtlCol="0" anchor="ctr"/>
+          <a:lstStyle/>
+          <a:p>
+            <a:pPr indent="0" marL="0">
+              <a:buNone/>
+            </a:pPr>
+            <a:r>
+              <a:rPr lang="en-US" sz="1450" b="1" dirty="0">
+                <a:solidFill>
+                  <a:srgbClr val="23201D"/>
+                </a:solidFill>
+                <a:latin typeface="Yu Gothic" pitchFamily="34" charset="0"/>
+                <a:ea typeface="Yu Gothic" pitchFamily="34" charset="-122"/>
+                <a:cs typeface="Yu Gothic" pitchFamily="34" charset="-120"/>
+              </a:rPr>
+              <a:t>守る人</a:t>
+            </a:r>
+            <a:endParaRPr lang="en-US" sz="1450" dirty="0"/>
+          </a:p>
+        </p:txBody>
+      </p:sp>
+      <p:sp>
+        <p:nvSpPr>
+          <p:cNvPr id="23" name="Text 21"/>
+          <p:cNvSpPr txBox="1"/>
+          <p:nvPr/>
+        </p:nvSpPr>
+        <p:spPr>
+          <a:xfrm>
+            <a:off x="4888382" y="4741164"/>
+            <a:ext cx="6267298" cy="717804"/>
+          </a:xfrm>
+          <a:prstGeom prst="rect">
+            <a:avLst/>
+          </a:prstGeom>
+          <a:noFill/>
+          <a:ln/>
+        </p:spPr>
+        <p:txBody>
+          <a:bodyPr wrap="square" lIns="0" tIns="0" rIns="0" bIns="0" rtlCol="0" anchor="ctr"/>
+          <a:lstStyle/>
+          <a:p>
+            <a:pPr indent="0" marL="0">
+              <a:lnSpc>
+                <a:spcPct val="130000"/>
+              </a:lnSpc>
+              <a:buNone/>
+            </a:pPr>
+            <a:r>
+              <a:rPr lang="en-US" sz="1200" dirty="0">
+                <a:solidFill>
+                  <a:srgbClr val="5A534A"/>
+                </a:solidFill>
+                <a:latin typeface="Yu Gothic" pitchFamily="34" charset="0"/>
+                <a:ea typeface="Yu Gothic" pitchFamily="34" charset="-122"/>
+                <a:cs typeface="Yu Gothic" pitchFamily="34" charset="-120"/>
+              </a:rPr>
+              <a:t>情報の扱い、アカウント管理。総務や情シスの兼任可</a:t>
+            </a:r>
+            <a:endParaRPr lang="en-US" sz="1200" dirty="0"/>
+          </a:p>
+        </p:txBody>
+      </p:sp>
+      <p:sp>
+        <p:nvSpPr>
+          <p:cNvPr id="24" name="Text 22"/>
+          <p:cNvSpPr txBox="1"/>
+          <p:nvPr/>
+        </p:nvSpPr>
+        <p:spPr>
+          <a:xfrm>
+            <a:off x="777240" y="5669280"/>
+            <a:ext cx="10607040" cy="411480"/>
+          </a:xfrm>
+          <a:prstGeom prst="rect">
+            <a:avLst/>
+          </a:prstGeom>
+          <a:noFill/>
+          <a:ln/>
+        </p:spPr>
+        <p:txBody>
+          <a:bodyPr wrap="square" lIns="0" tIns="0" rIns="0" bIns="0" rtlCol="0" anchor="ctr"/>
+          <a:lstStyle/>
+          <a:p>
+            <a:pPr indent="0" marL="0">
+              <a:buNone/>
+            </a:pPr>
+            <a:r>
+              <a:rPr lang="en-US" sz="1200" b="1" dirty="0">
+                <a:solidFill>
+                  <a:srgbClr val="B04A2F"/>
+                </a:solidFill>
+                <a:latin typeface="Yu Gothic" pitchFamily="34" charset="0"/>
+                <a:ea typeface="Yu Gothic" pitchFamily="34" charset="-122"/>
+                <a:cs typeface="Yu Gothic" pitchFamily="34" charset="-120"/>
+              </a:rPr>
+              <a:t>「作る人」を社内に抱えようとして止まる会社が多くあります。ここは外注で構いません。</a:t>
+            </a:r>
+            <a:endParaRPr lang="en-US" sz="1200" dirty="0"/>
+          </a:p>
+        </p:txBody>
+      </p:sp>
+      <p:sp>
+        <p:nvSpPr>
+          <p:cNvPr id="25" name="Text 23"/>
+          <p:cNvSpPr txBox="1"/>
+          <p:nvPr/>
+        </p:nvSpPr>
+        <p:spPr>
+          <a:xfrm>
+            <a:off x="777240" y="6382512"/>
+            <a:ext cx="7424928" cy="256032"/>
           </a:xfrm>
           <a:prstGeom prst="rect">
             <a:avLst/>
@@ -3981,14 +5501,14 @@
       </p:sp>
       <p:sp>
         <p:nvSpPr>
-          <p:cNvPr id="21" name="Text 19"/>
-          <p:cNvSpPr txBox="1"/>
-          <p:nvPr/>
-        </p:nvSpPr>
-        <p:spPr>
-          <a:xfrm>
-            <a:off x="8202168" y="6355080"/>
-            <a:ext cx="3182112" cy="274320"/>
+          <p:cNvPr id="26" name="Text 24"/>
+          <p:cNvSpPr txBox="1"/>
+          <p:nvPr/>
+        </p:nvSpPr>
+        <p:spPr>
+          <a:xfrm>
+            <a:off x="8202168" y="6382512"/>
+            <a:ext cx="3182112" cy="256032"/>
           </a:xfrm>
           <a:prstGeom prst="rect">
             <a:avLst/>
@@ -4012,7 +5532,7 @@
                 <a:ea typeface="Yu Gothic" pitchFamily="34" charset="-122"/>
                 <a:cs typeface="Yu Gothic" pitchFamily="34" charset="-120"/>
               </a:rPr>
-              <a:t>実演</a:t>
+              <a:t>考え方</a:t>
             </a:r>
             <a:endParaRPr lang="en-US" sz="900" dirty="0"/>
           </a:p>
@@ -4058,7 +5578,7 @@
         </p:nvSpPr>
         <p:spPr>
           <a:xfrm>
-            <a:off x="777240" y="640080"/>
+            <a:off x="777240" y="566928"/>
             <a:ext cx="10607040" cy="274320"/>
           </a:xfrm>
           <a:prstGeom prst="rect">
@@ -4083,7 +5603,7 @@
                 <a:ea typeface="Yu Gothic" pitchFamily="34" charset="-122"/>
                 <a:cs typeface="Yu Gothic" pitchFamily="34" charset="-120"/>
               </a:rPr>
-              <a:t>演習</a:t>
+              <a:t>あてはめ</a:t>
             </a:r>
             <a:endParaRPr lang="en-US" sz="1100" dirty="0"/>
           </a:p>
@@ -4097,7 +5617,7 @@
         </p:nvSpPr>
         <p:spPr>
           <a:xfrm>
-            <a:off x="777240" y="960120"/>
+            <a:off x="777240" y="896112"/>
             <a:ext cx="10607040" cy="640080"/>
           </a:xfrm>
           <a:prstGeom prst="rect">
@@ -4114,7 +5634,7 @@
               <a:buNone/>
             </a:pPr>
             <a:r>
-              <a:rPr lang="en-US" sz="2700" b="1" dirty="0">
+              <a:rPr lang="en-US" sz="2600" b="1" dirty="0">
                 <a:solidFill>
                   <a:srgbClr val="23201D"/>
                 </a:solidFill>
@@ -4122,61 +5642,22 @@
                 <a:ea typeface="Yu Gothic" pitchFamily="34" charset="-122"/>
                 <a:cs typeface="Yu Gothic" pitchFamily="34" charset="-120"/>
               </a:rPr>
-              <a:t>今日、一緒にやること</a:t>
-            </a:r>
-            <a:endParaRPr lang="en-US" sz="2700" dirty="0"/>
-          </a:p>
-        </p:txBody>
-      </p:sp>
-      <p:sp>
-        <p:nvSpPr>
-          <p:cNvPr id="4" name="Text 2"/>
-          <p:cNvSpPr txBox="1"/>
-          <p:nvPr/>
-        </p:nvSpPr>
-        <p:spPr>
-          <a:xfrm>
-            <a:off x="777240" y="1627632"/>
-            <a:ext cx="10607040" cy="320040"/>
-          </a:xfrm>
-          <a:prstGeom prst="rect">
-            <a:avLst/>
-          </a:prstGeom>
-          <a:noFill/>
-          <a:ln/>
-        </p:spPr>
-        <p:txBody>
-          <a:bodyPr wrap="square" lIns="0" tIns="0" rIns="0" bIns="0" rtlCol="0" anchor="ctr"/>
-          <a:lstStyle/>
-          <a:p>
-            <a:pPr indent="0" marL="0">
-              <a:buNone/>
-            </a:pPr>
-            <a:r>
-              <a:rPr lang="en-US" sz="1250" b="1" dirty="0">
-                <a:solidFill>
-                  <a:srgbClr val="2F4F6B"/>
-                </a:solidFill>
-                <a:latin typeface="Yu Gothic" pitchFamily="34" charset="0"/>
-                <a:ea typeface="Yu Gothic" pitchFamily="34" charset="-122"/>
-                <a:cs typeface="Yu Gothic" pitchFamily="34" charset="-120"/>
-              </a:rPr>
-              <a:t>55分。操作するのはご自身です。</a:t>
-            </a:r>
-            <a:endParaRPr lang="en-US" sz="1250" dirty="0"/>
-          </a:p>
-        </p:txBody>
-      </p:sp>
-      <p:sp>
-        <p:nvSpPr>
-          <p:cNvPr id="5" name="Shape 3"/>
+              <a:t>効果は、4行で測ります</a:t>
+            </a:r>
+            <a:endParaRPr lang="en-US" sz="2600" dirty="0"/>
+          </a:p>
+        </p:txBody>
+      </p:sp>
+      <p:sp>
+        <p:nvSpPr>
+          <p:cNvPr id="4" name="Shape 2"/>
           <p:cNvSpPr/>
           <p:nvPr/>
         </p:nvSpPr>
         <p:spPr>
           <a:xfrm>
-            <a:off x="777240" y="2240280"/>
-            <a:ext cx="3383280" cy="2697480"/>
+            <a:off x="777240" y="1691640"/>
+            <a:ext cx="10607040" cy="3401568"/>
           </a:xfrm>
           <a:prstGeom prst="rect">
             <a:avLst/>
@@ -4184,9 +5665,9 @@
           <a:solidFill>
             <a:srgbClr val="FFFFFF"/>
           </a:solidFill>
-          <a:ln w="12700">
+          <a:ln w="15875">
             <a:solidFill>
-              <a:srgbClr val="EDE7DB"/>
+              <a:srgbClr val="2F4F6B"/>
             </a:solidFill>
             <a:prstDash val="solid"/>
           </a:ln>
@@ -4194,16 +5675,16 @@
       </p:sp>
       <p:sp>
         <p:nvSpPr>
-          <p:cNvPr id="6" name="Shape 4"/>
+          <p:cNvPr id="5" name="Shape 3"/>
           <p:cNvSpPr/>
           <p:nvPr/>
         </p:nvSpPr>
         <p:spPr>
           <a:xfrm>
-            <a:off x="1051560" y="2487168"/>
-            <a:ext cx="438912" cy="438912"/>
-          </a:xfrm>
-          <a:prstGeom prst="ellipse">
+            <a:off x="777240" y="1691640"/>
+            <a:ext cx="10607040" cy="457200"/>
+          </a:xfrm>
+          <a:prstGeom prst="rect">
             <a:avLst/>
           </a:prstGeom>
           <a:solidFill>
@@ -4211,7 +5692,7 @@
           </a:solidFill>
           <a:ln w="12700">
             <a:solidFill>
-              <a:srgbClr val="2F4F6B"/>
+              <a:srgbClr val="333333"/>
             </a:solidFill>
             <a:prstDash val="solid"/>
           </a:ln>
@@ -4219,40 +5700,82 @@
       </p:sp>
       <p:sp>
         <p:nvSpPr>
+          <p:cNvPr id="6" name="Text 4"/>
+          <p:cNvSpPr txBox="1"/>
+          <p:nvPr/>
+        </p:nvSpPr>
+        <p:spPr>
+          <a:xfrm>
+            <a:off x="1051560" y="1709928"/>
+            <a:ext cx="10058400" cy="420624"/>
+          </a:xfrm>
+          <a:prstGeom prst="rect">
+            <a:avLst/>
+          </a:prstGeom>
+          <a:noFill/>
+          <a:ln/>
+        </p:spPr>
+        <p:txBody>
+          <a:bodyPr wrap="square" lIns="0" tIns="0" rIns="0" bIns="0" rtlCol="0" anchor="ctr"/>
+          <a:lstStyle/>
+          <a:p>
+            <a:pPr indent="0" marL="0">
+              <a:buNone/>
+            </a:pPr>
+            <a:r>
+              <a:rPr lang="en-US" sz="1200" b="1" dirty="0">
+                <a:solidFill>
+                  <a:srgbClr val="FFFFFF"/>
+                </a:solidFill>
+                <a:latin typeface="Yu Gothic" pitchFamily="34" charset="0"/>
+                <a:ea typeface="Yu Gothic" pitchFamily="34" charset="-122"/>
+                <a:cs typeface="Yu Gothic" pitchFamily="34" charset="-120"/>
+              </a:rPr>
+              <a:t>効果測定シート（毎月・4行だけ）</a:t>
+            </a:r>
+            <a:endParaRPr lang="en-US" sz="1200" dirty="0"/>
+          </a:p>
+        </p:txBody>
+      </p:sp>
+      <p:sp>
+        <p:nvSpPr>
           <p:cNvPr id="7" name="Text 5"/>
           <p:cNvSpPr txBox="1"/>
           <p:nvPr/>
         </p:nvSpPr>
         <p:spPr>
           <a:xfrm>
-            <a:off x="1051560" y="2487168"/>
-            <a:ext cx="438912" cy="438912"/>
-          </a:xfrm>
-          <a:prstGeom prst="rect">
-            <a:avLst/>
-          </a:prstGeom>
-          <a:noFill/>
-          <a:ln/>
-        </p:spPr>
-        <p:txBody>
-          <a:bodyPr wrap="square" lIns="0" tIns="0" rIns="0" bIns="0" rtlCol="0" anchor="ctr"/>
-          <a:lstStyle/>
-          <a:p>
-            <a:pPr algn="ctr" indent="0" marL="0">
-              <a:buNone/>
-            </a:pPr>
-            <a:r>
-              <a:rPr lang="en-US" sz="1400" b="1" dirty="0">
-                <a:solidFill>
-                  <a:srgbClr val="FFFFFF"/>
-                </a:solidFill>
-                <a:latin typeface="Yu Gothic" pitchFamily="34" charset="0"/>
-                <a:ea typeface="Yu Gothic" pitchFamily="34" charset="-122"/>
-                <a:cs typeface="Yu Gothic" pitchFamily="34" charset="-120"/>
-              </a:rPr>
-              <a:t>1</a:t>
-            </a:r>
-            <a:endParaRPr lang="en-US" sz="1400" dirty="0"/>
+            <a:off x="1097280" y="2331720"/>
+            <a:ext cx="2057400" cy="530352"/>
+          </a:xfrm>
+          <a:prstGeom prst="rect">
+            <a:avLst/>
+          </a:prstGeom>
+          <a:noFill/>
+          <a:ln/>
+        </p:spPr>
+        <p:txBody>
+          <a:bodyPr wrap="square" lIns="0" tIns="0" rIns="0" bIns="0" rtlCol="0" anchor="ctr"/>
+          <a:lstStyle/>
+          <a:p>
+            <a:pPr indent="0" marL="0">
+              <a:lnSpc>
+                <a:spcPct val="110000"/>
+              </a:lnSpc>
+              <a:buNone/>
+            </a:pPr>
+            <a:r>
+              <a:rPr lang="en-US" sz="1100" b="1" dirty="0">
+                <a:solidFill>
+                  <a:srgbClr val="2F4F6B"/>
+                </a:solidFill>
+                <a:latin typeface="Yu Gothic" pitchFamily="34" charset="0"/>
+                <a:ea typeface="Yu Gothic" pitchFamily="34" charset="-122"/>
+                <a:cs typeface="Yu Gothic" pitchFamily="34" charset="-120"/>
+              </a:rPr>
+              <a:t>時間</a:t>
+            </a:r>
+            <a:endParaRPr lang="en-US" sz="1100" dirty="0"/>
           </a:p>
         </p:txBody>
       </p:sp>
@@ -4264,8 +5787,8 @@
         </p:nvSpPr>
         <p:spPr>
           <a:xfrm>
-            <a:off x="1051560" y="3035808"/>
-            <a:ext cx="2834640" cy="777240"/>
+            <a:off x="3291840" y="2331720"/>
+            <a:ext cx="7772400" cy="530352"/>
           </a:xfrm>
           <a:prstGeom prst="rect">
             <a:avLst/>
@@ -4279,22 +5802,22 @@
           <a:p>
             <a:pPr indent="0" marL="0">
               <a:lnSpc>
-                <a:spcPct val="125000"/>
+                <a:spcPct val="115000"/>
               </a:lnSpc>
               <a:buNone/>
             </a:pPr>
             <a:r>
-              <a:rPr lang="en-US" sz="1500" b="1" dirty="0">
+              <a:rPr lang="en-US" sz="1150" dirty="0">
                 <a:solidFill>
                   <a:srgbClr val="23201D"/>
                 </a:solidFill>
-                <a:latin typeface="Yu Gothic" pitchFamily="34" charset="0"/>
-                <a:ea typeface="Yu Gothic" pitchFamily="34" charset="-122"/>
-                <a:cs typeface="Yu Gothic" pitchFamily="34" charset="-120"/>
-              </a:rPr>
-              <a:t>体制図を書く</a:t>
-            </a:r>
-            <a:endParaRPr lang="en-US" sz="1500" dirty="0"/>
+                <a:latin typeface="Consolas" pitchFamily="34" charset="0"/>
+                <a:ea typeface="Consolas" pitchFamily="34" charset="-122"/>
+                <a:cs typeface="Consolas" pitchFamily="34" charset="-120"/>
+              </a:rPr>
+              <a:t>対象業務の所要時間（月）　例：20時間 → 7時間</a:t>
+            </a:r>
+            <a:endParaRPr lang="en-US" sz="1150" dirty="0"/>
           </a:p>
         </p:txBody>
       </p:sp>
@@ -4306,8 +5829,8 @@
         </p:nvSpPr>
         <p:spPr>
           <a:xfrm>
-            <a:off x="1051560" y="3822192"/>
-            <a:ext cx="2834640" cy="960120"/>
+            <a:off x="1097280" y="2862072"/>
+            <a:ext cx="2057400" cy="530352"/>
           </a:xfrm>
           <a:prstGeom prst="rect">
             <a:avLst/>
@@ -4321,12 +5844,348 @@
           <a:p>
             <a:pPr indent="0" marL="0">
               <a:lnSpc>
-                <a:spcPct val="130000"/>
+                <a:spcPct val="110000"/>
               </a:lnSpc>
               <a:buNone/>
             </a:pPr>
             <a:r>
-              <a:rPr lang="en-US" sz="1200" dirty="0">
+              <a:rPr lang="en-US" sz="1100" b="1" dirty="0">
+                <a:solidFill>
+                  <a:srgbClr val="2F4F6B"/>
+                </a:solidFill>
+                <a:latin typeface="Yu Gothic" pitchFamily="34" charset="0"/>
+                <a:ea typeface="Yu Gothic" pitchFamily="34" charset="-122"/>
+                <a:cs typeface="Yu Gothic" pitchFamily="34" charset="-120"/>
+              </a:rPr>
+              <a:t>品質</a:t>
+            </a:r>
+            <a:endParaRPr lang="en-US" sz="1100" dirty="0"/>
+          </a:p>
+        </p:txBody>
+      </p:sp>
+      <p:sp>
+        <p:nvSpPr>
+          <p:cNvPr id="10" name="Text 8"/>
+          <p:cNvSpPr txBox="1"/>
+          <p:nvPr/>
+        </p:nvSpPr>
+        <p:spPr>
+          <a:xfrm>
+            <a:off x="3291840" y="2862072"/>
+            <a:ext cx="7772400" cy="530352"/>
+          </a:xfrm>
+          <a:prstGeom prst="rect">
+            <a:avLst/>
+          </a:prstGeom>
+          <a:noFill/>
+          <a:ln/>
+        </p:spPr>
+        <p:txBody>
+          <a:bodyPr wrap="square" lIns="0" tIns="0" rIns="0" bIns="0" rtlCol="0" anchor="ctr"/>
+          <a:lstStyle/>
+          <a:p>
+            <a:pPr indent="0" marL="0">
+              <a:lnSpc>
+                <a:spcPct val="115000"/>
+              </a:lnSpc>
+              <a:buNone/>
+            </a:pPr>
+            <a:r>
+              <a:rPr lang="en-US" sz="1150" dirty="0">
+                <a:solidFill>
+                  <a:srgbClr val="23201D"/>
+                </a:solidFill>
+                <a:latin typeface="Consolas" pitchFamily="34" charset="0"/>
+                <a:ea typeface="Consolas" pitchFamily="34" charset="-122"/>
+                <a:cs typeface="Consolas" pitchFamily="34" charset="-120"/>
+              </a:rPr>
+              <a:t>正解セットの点数、やり直しの件数　例：○7件／やり直し 月3件→1件</a:t>
+            </a:r>
+            <a:endParaRPr lang="en-US" sz="1150" dirty="0"/>
+          </a:p>
+        </p:txBody>
+      </p:sp>
+      <p:sp>
+        <p:nvSpPr>
+          <p:cNvPr id="11" name="Text 9"/>
+          <p:cNvSpPr txBox="1"/>
+          <p:nvPr/>
+        </p:nvSpPr>
+        <p:spPr>
+          <a:xfrm>
+            <a:off x="1097280" y="3392424"/>
+            <a:ext cx="2057400" cy="530352"/>
+          </a:xfrm>
+          <a:prstGeom prst="rect">
+            <a:avLst/>
+          </a:prstGeom>
+          <a:noFill/>
+          <a:ln/>
+        </p:spPr>
+        <p:txBody>
+          <a:bodyPr wrap="square" lIns="0" tIns="0" rIns="0" bIns="0" rtlCol="0" anchor="ctr"/>
+          <a:lstStyle/>
+          <a:p>
+            <a:pPr indent="0" marL="0">
+              <a:lnSpc>
+                <a:spcPct val="110000"/>
+              </a:lnSpc>
+              <a:buNone/>
+            </a:pPr>
+            <a:r>
+              <a:rPr lang="en-US" sz="1100" b="1" dirty="0">
+                <a:solidFill>
+                  <a:srgbClr val="2F4F6B"/>
+                </a:solidFill>
+                <a:latin typeface="Yu Gothic" pitchFamily="34" charset="0"/>
+                <a:ea typeface="Yu Gothic" pitchFamily="34" charset="-122"/>
+                <a:cs typeface="Yu Gothic" pitchFamily="34" charset="-120"/>
+              </a:rPr>
+              <a:t>範囲</a:t>
+            </a:r>
+            <a:endParaRPr lang="en-US" sz="1100" dirty="0"/>
+          </a:p>
+        </p:txBody>
+      </p:sp>
+      <p:sp>
+        <p:nvSpPr>
+          <p:cNvPr id="12" name="Text 10"/>
+          <p:cNvSpPr txBox="1"/>
+          <p:nvPr/>
+        </p:nvSpPr>
+        <p:spPr>
+          <a:xfrm>
+            <a:off x="3291840" y="3392424"/>
+            <a:ext cx="7772400" cy="530352"/>
+          </a:xfrm>
+          <a:prstGeom prst="rect">
+            <a:avLst/>
+          </a:prstGeom>
+          <a:noFill/>
+          <a:ln/>
+        </p:spPr>
+        <p:txBody>
+          <a:bodyPr wrap="square" lIns="0" tIns="0" rIns="0" bIns="0" rtlCol="0" anchor="ctr"/>
+          <a:lstStyle/>
+          <a:p>
+            <a:pPr indent="0" marL="0">
+              <a:lnSpc>
+                <a:spcPct val="115000"/>
+              </a:lnSpc>
+              <a:buNone/>
+            </a:pPr>
+            <a:r>
+              <a:rPr lang="en-US" sz="1150" dirty="0">
+                <a:solidFill>
+                  <a:srgbClr val="23201D"/>
+                </a:solidFill>
+                <a:latin typeface="Consolas" pitchFamily="34" charset="0"/>
+                <a:ea typeface="Consolas" pitchFamily="34" charset="-122"/>
+                <a:cs typeface="Consolas" pitchFamily="34" charset="-120"/>
+              </a:rPr>
+              <a:t>使っている人数、業務数　例：3名・2業務</a:t>
+            </a:r>
+            <a:endParaRPr lang="en-US" sz="1150" dirty="0"/>
+          </a:p>
+        </p:txBody>
+      </p:sp>
+      <p:sp>
+        <p:nvSpPr>
+          <p:cNvPr id="13" name="Text 11"/>
+          <p:cNvSpPr txBox="1"/>
+          <p:nvPr/>
+        </p:nvSpPr>
+        <p:spPr>
+          <a:xfrm>
+            <a:off x="1097280" y="3922776"/>
+            <a:ext cx="2057400" cy="530352"/>
+          </a:xfrm>
+          <a:prstGeom prst="rect">
+            <a:avLst/>
+          </a:prstGeom>
+          <a:noFill/>
+          <a:ln/>
+        </p:spPr>
+        <p:txBody>
+          <a:bodyPr wrap="square" lIns="0" tIns="0" rIns="0" bIns="0" rtlCol="0" anchor="ctr"/>
+          <a:lstStyle/>
+          <a:p>
+            <a:pPr indent="0" marL="0">
+              <a:lnSpc>
+                <a:spcPct val="110000"/>
+              </a:lnSpc>
+              <a:buNone/>
+            </a:pPr>
+            <a:r>
+              <a:rPr lang="en-US" sz="1100" b="1" dirty="0">
+                <a:solidFill>
+                  <a:srgbClr val="2F4F6B"/>
+                </a:solidFill>
+                <a:latin typeface="Yu Gothic" pitchFamily="34" charset="0"/>
+                <a:ea typeface="Yu Gothic" pitchFamily="34" charset="-122"/>
+                <a:cs typeface="Yu Gothic" pitchFamily="34" charset="-120"/>
+              </a:rPr>
+              <a:t>金額</a:t>
+            </a:r>
+            <a:endParaRPr lang="en-US" sz="1100" dirty="0"/>
+          </a:p>
+        </p:txBody>
+      </p:sp>
+      <p:sp>
+        <p:nvSpPr>
+          <p:cNvPr id="14" name="Text 12"/>
+          <p:cNvSpPr txBox="1"/>
+          <p:nvPr/>
+        </p:nvSpPr>
+        <p:spPr>
+          <a:xfrm>
+            <a:off x="3291840" y="3922776"/>
+            <a:ext cx="7772400" cy="530352"/>
+          </a:xfrm>
+          <a:prstGeom prst="rect">
+            <a:avLst/>
+          </a:prstGeom>
+          <a:noFill/>
+          <a:ln/>
+        </p:spPr>
+        <p:txBody>
+          <a:bodyPr wrap="square" lIns="0" tIns="0" rIns="0" bIns="0" rtlCol="0" anchor="ctr"/>
+          <a:lstStyle/>
+          <a:p>
+            <a:pPr indent="0" marL="0">
+              <a:lnSpc>
+                <a:spcPct val="115000"/>
+              </a:lnSpc>
+              <a:buNone/>
+            </a:pPr>
+            <a:r>
+              <a:rPr lang="en-US" sz="1150" dirty="0">
+                <a:solidFill>
+                  <a:srgbClr val="23201D"/>
+                </a:solidFill>
+                <a:latin typeface="Consolas" pitchFamily="34" charset="0"/>
+                <a:ea typeface="Consolas" pitchFamily="34" charset="-122"/>
+                <a:cs typeface="Consolas" pitchFamily="34" charset="-120"/>
+              </a:rPr>
+              <a:t>削減時間 × 時間単価 − 月額費用　例：13h × 3,000円 − 6,000円</a:t>
+            </a:r>
+            <a:endParaRPr lang="en-US" sz="1150" dirty="0"/>
+          </a:p>
+        </p:txBody>
+      </p:sp>
+      <p:sp>
+        <p:nvSpPr>
+          <p:cNvPr id="15" name="Text 13"/>
+          <p:cNvSpPr txBox="1"/>
+          <p:nvPr/>
+        </p:nvSpPr>
+        <p:spPr>
+          <a:xfrm>
+            <a:off x="1097280" y="4453128"/>
+            <a:ext cx="2057400" cy="530352"/>
+          </a:xfrm>
+          <a:prstGeom prst="rect">
+            <a:avLst/>
+          </a:prstGeom>
+          <a:noFill/>
+          <a:ln/>
+        </p:spPr>
+        <p:txBody>
+          <a:bodyPr wrap="square" lIns="0" tIns="0" rIns="0" bIns="0" rtlCol="0" anchor="ctr"/>
+          <a:lstStyle/>
+          <a:p>
+            <a:pPr indent="0" marL="0">
+              <a:lnSpc>
+                <a:spcPct val="110000"/>
+              </a:lnSpc>
+              <a:buNone/>
+            </a:pPr>
+            <a:r>
+              <a:rPr lang="en-US" sz="1100" b="1" dirty="0">
+                <a:solidFill>
+                  <a:srgbClr val="2F4F6B"/>
+                </a:solidFill>
+                <a:latin typeface="Yu Gothic" pitchFamily="34" charset="0"/>
+                <a:ea typeface="Yu Gothic" pitchFamily="34" charset="-122"/>
+                <a:cs typeface="Yu Gothic" pitchFamily="34" charset="-120"/>
+              </a:rPr>
+              <a:t>報告先</a:t>
+            </a:r>
+            <a:endParaRPr lang="en-US" sz="1100" dirty="0"/>
+          </a:p>
+        </p:txBody>
+      </p:sp>
+      <p:sp>
+        <p:nvSpPr>
+          <p:cNvPr id="16" name="Text 14"/>
+          <p:cNvSpPr txBox="1"/>
+          <p:nvPr/>
+        </p:nvSpPr>
+        <p:spPr>
+          <a:xfrm>
+            <a:off x="3291840" y="4453128"/>
+            <a:ext cx="7772400" cy="530352"/>
+          </a:xfrm>
+          <a:prstGeom prst="rect">
+            <a:avLst/>
+          </a:prstGeom>
+          <a:noFill/>
+          <a:ln/>
+        </p:spPr>
+        <p:txBody>
+          <a:bodyPr wrap="square" lIns="0" tIns="0" rIns="0" bIns="0" rtlCol="0" anchor="ctr"/>
+          <a:lstStyle/>
+          <a:p>
+            <a:pPr indent="0" marL="0">
+              <a:lnSpc>
+                <a:spcPct val="115000"/>
+              </a:lnSpc>
+              <a:buNone/>
+            </a:pPr>
+            <a:r>
+              <a:rPr lang="en-US" sz="1150" dirty="0">
+                <a:solidFill>
+                  <a:srgbClr val="23201D"/>
+                </a:solidFill>
+                <a:latin typeface="Consolas" pitchFamily="34" charset="0"/>
+                <a:ea typeface="Consolas" pitchFamily="34" charset="-122"/>
+                <a:cs typeface="Consolas" pitchFamily="34" charset="-120"/>
+              </a:rPr>
+              <a:t>毎月の経営会議。数字だけ、コメントは1行</a:t>
+            </a:r>
+            <a:endParaRPr lang="en-US" sz="1150" dirty="0"/>
+          </a:p>
+        </p:txBody>
+      </p:sp>
+      <p:sp>
+        <p:nvSpPr>
+          <p:cNvPr id="17" name="Text 15"/>
+          <p:cNvSpPr txBox="1"/>
+          <p:nvPr/>
+        </p:nvSpPr>
+        <p:spPr>
+          <a:xfrm>
+            <a:off x="777240" y="5239512"/>
+            <a:ext cx="10607040" cy="548640"/>
+          </a:xfrm>
+          <a:prstGeom prst="rect">
+            <a:avLst/>
+          </a:prstGeom>
+          <a:noFill/>
+          <a:ln/>
+        </p:spPr>
+        <p:txBody>
+          <a:bodyPr wrap="square" lIns="0" tIns="0" rIns="0" bIns="0" rtlCol="0" anchor="ctr"/>
+          <a:lstStyle/>
+          <a:p>
+            <a:pPr indent="0" marL="0">
+              <a:lnSpc>
+                <a:spcPct val="135000"/>
+              </a:lnSpc>
+              <a:buNone/>
+            </a:pPr>
+            <a:r>
+              <a:rPr lang="en-US" sz="1250" dirty="0">
                 <a:solidFill>
                   <a:srgbClr val="5A534A"/>
                 </a:solidFill>
@@ -4334,271 +6193,9 @@
                 <a:ea typeface="Yu Gothic" pitchFamily="34" charset="-122"/>
                 <a:cs typeface="Yu Gothic" pitchFamily="34" charset="-120"/>
               </a:rPr>
-              <a:t>推進役を実名で決めます。決まらないなら、その理由を言葉にします</a:t>
-            </a:r>
-            <a:endParaRPr lang="en-US" sz="1200" dirty="0"/>
-          </a:p>
-        </p:txBody>
-      </p:sp>
-      <p:sp>
-        <p:nvSpPr>
-          <p:cNvPr id="10" name="Shape 8"/>
-          <p:cNvSpPr/>
-          <p:nvPr/>
-        </p:nvSpPr>
-        <p:spPr>
-          <a:xfrm>
-            <a:off x="4389120" y="2240280"/>
-            <a:ext cx="3383280" cy="2697480"/>
-          </a:xfrm>
-          <a:prstGeom prst="rect">
-            <a:avLst/>
-          </a:prstGeom>
-          <a:solidFill>
-            <a:srgbClr val="FFFFFF"/>
-          </a:solidFill>
-          <a:ln w="12700">
-            <a:solidFill>
-              <a:srgbClr val="EDE7DB"/>
-            </a:solidFill>
-            <a:prstDash val="solid"/>
-          </a:ln>
-        </p:spPr>
-      </p:sp>
-      <p:sp>
-        <p:nvSpPr>
-          <p:cNvPr id="11" name="Shape 9"/>
-          <p:cNvSpPr/>
-          <p:nvPr/>
-        </p:nvSpPr>
-        <p:spPr>
-          <a:xfrm>
-            <a:off x="4663440" y="2487168"/>
-            <a:ext cx="438912" cy="438912"/>
-          </a:xfrm>
-          <a:prstGeom prst="ellipse">
-            <a:avLst/>
-          </a:prstGeom>
-          <a:solidFill>
-            <a:srgbClr val="2F4F6B"/>
-          </a:solidFill>
-          <a:ln w="12700">
-            <a:solidFill>
-              <a:srgbClr val="2F4F6B"/>
-            </a:solidFill>
-            <a:prstDash val="solid"/>
-          </a:ln>
-        </p:spPr>
-      </p:sp>
-      <p:sp>
-        <p:nvSpPr>
-          <p:cNvPr id="12" name="Text 10"/>
-          <p:cNvSpPr txBox="1"/>
-          <p:nvPr/>
-        </p:nvSpPr>
-        <p:spPr>
-          <a:xfrm>
-            <a:off x="4663440" y="2487168"/>
-            <a:ext cx="438912" cy="438912"/>
-          </a:xfrm>
-          <a:prstGeom prst="rect">
-            <a:avLst/>
-          </a:prstGeom>
-          <a:noFill/>
-          <a:ln/>
-        </p:spPr>
-        <p:txBody>
-          <a:bodyPr wrap="square" lIns="0" tIns="0" rIns="0" bIns="0" rtlCol="0" anchor="ctr"/>
-          <a:lstStyle/>
-          <a:p>
-            <a:pPr algn="ctr" indent="0" marL="0">
-              <a:buNone/>
-            </a:pPr>
-            <a:r>
-              <a:rPr lang="en-US" sz="1400" b="1" dirty="0">
-                <a:solidFill>
-                  <a:srgbClr val="FFFFFF"/>
-                </a:solidFill>
-                <a:latin typeface="Yu Gothic" pitchFamily="34" charset="0"/>
-                <a:ea typeface="Yu Gothic" pitchFamily="34" charset="-122"/>
-                <a:cs typeface="Yu Gothic" pitchFamily="34" charset="-120"/>
-              </a:rPr>
-              <a:t>2</a:t>
-            </a:r>
-            <a:endParaRPr lang="en-US" sz="1400" dirty="0"/>
-          </a:p>
-        </p:txBody>
-      </p:sp>
-      <p:sp>
-        <p:nvSpPr>
-          <p:cNvPr id="13" name="Text 11"/>
-          <p:cNvSpPr txBox="1"/>
-          <p:nvPr/>
-        </p:nvSpPr>
-        <p:spPr>
-          <a:xfrm>
-            <a:off x="4663440" y="3035808"/>
-            <a:ext cx="2834640" cy="777240"/>
-          </a:xfrm>
-          <a:prstGeom prst="rect">
-            <a:avLst/>
-          </a:prstGeom>
-          <a:noFill/>
-          <a:ln/>
-        </p:spPr>
-        <p:txBody>
-          <a:bodyPr wrap="square" lIns="0" tIns="0" rIns="0" bIns="0" rtlCol="0" anchor="ctr"/>
-          <a:lstStyle/>
-          <a:p>
-            <a:pPr indent="0" marL="0">
-              <a:lnSpc>
-                <a:spcPct val="125000"/>
-              </a:lnSpc>
-              <a:buNone/>
-            </a:pPr>
-            <a:r>
-              <a:rPr lang="en-US" sz="1500" b="1" dirty="0">
-                <a:solidFill>
-                  <a:srgbClr val="23201D"/>
-                </a:solidFill>
-                <a:latin typeface="Yu Gothic" pitchFamily="34" charset="0"/>
-                <a:ea typeface="Yu Gothic" pitchFamily="34" charset="-122"/>
-                <a:cs typeface="Yu Gothic" pitchFamily="34" charset="-120"/>
-              </a:rPr>
-              <a:t>権限と費用を洗う</a:t>
-            </a:r>
-            <a:endParaRPr lang="en-US" sz="1500" dirty="0"/>
-          </a:p>
-        </p:txBody>
-      </p:sp>
-      <p:sp>
-        <p:nvSpPr>
-          <p:cNvPr id="14" name="Text 12"/>
-          <p:cNvSpPr txBox="1"/>
-          <p:nvPr/>
-        </p:nvSpPr>
-        <p:spPr>
-          <a:xfrm>
-            <a:off x="4663440" y="3822192"/>
-            <a:ext cx="2834640" cy="960120"/>
-          </a:xfrm>
-          <a:prstGeom prst="rect">
-            <a:avLst/>
-          </a:prstGeom>
-          <a:noFill/>
-          <a:ln/>
-        </p:spPr>
-        <p:txBody>
-          <a:bodyPr wrap="square" lIns="0" tIns="0" rIns="0" bIns="0" rtlCol="0" anchor="ctr"/>
-          <a:lstStyle/>
-          <a:p>
-            <a:pPr indent="0" marL="0">
-              <a:lnSpc>
-                <a:spcPct val="130000"/>
-              </a:lnSpc>
-              <a:buNone/>
-            </a:pPr>
-            <a:r>
-              <a:rPr lang="en-US" sz="1200" dirty="0">
-                <a:solidFill>
-                  <a:srgbClr val="5A534A"/>
-                </a:solidFill>
-                <a:latin typeface="Yu Gothic" pitchFamily="34" charset="0"/>
-                <a:ea typeface="Yu Gothic" pitchFamily="34" charset="-122"/>
-                <a:cs typeface="Yu Gothic" pitchFamily="34" charset="-120"/>
-              </a:rPr>
-              <a:t>個人名義の契約が残っていないかを確認します</a:t>
-            </a:r>
-            <a:endParaRPr lang="en-US" sz="1200" dirty="0"/>
-          </a:p>
-        </p:txBody>
-      </p:sp>
-      <p:sp>
-        <p:nvSpPr>
-          <p:cNvPr id="15" name="Shape 13"/>
-          <p:cNvSpPr/>
-          <p:nvPr/>
-        </p:nvSpPr>
-        <p:spPr>
-          <a:xfrm>
-            <a:off x="8001000" y="2240280"/>
-            <a:ext cx="3383280" cy="2697480"/>
-          </a:xfrm>
-          <a:prstGeom prst="rect">
-            <a:avLst/>
-          </a:prstGeom>
-          <a:solidFill>
-            <a:srgbClr val="FFFFFF"/>
-          </a:solidFill>
-          <a:ln w="12700">
-            <a:solidFill>
-              <a:srgbClr val="EDE7DB"/>
-            </a:solidFill>
-            <a:prstDash val="solid"/>
-          </a:ln>
-        </p:spPr>
-      </p:sp>
-      <p:sp>
-        <p:nvSpPr>
-          <p:cNvPr id="16" name="Shape 14"/>
-          <p:cNvSpPr/>
-          <p:nvPr/>
-        </p:nvSpPr>
-        <p:spPr>
-          <a:xfrm>
-            <a:off x="8275320" y="2487168"/>
-            <a:ext cx="438912" cy="438912"/>
-          </a:xfrm>
-          <a:prstGeom prst="ellipse">
-            <a:avLst/>
-          </a:prstGeom>
-          <a:solidFill>
-            <a:srgbClr val="2F4F6B"/>
-          </a:solidFill>
-          <a:ln w="12700">
-            <a:solidFill>
-              <a:srgbClr val="2F4F6B"/>
-            </a:solidFill>
-            <a:prstDash val="solid"/>
-          </a:ln>
-        </p:spPr>
-      </p:sp>
-      <p:sp>
-        <p:nvSpPr>
-          <p:cNvPr id="17" name="Text 15"/>
-          <p:cNvSpPr txBox="1"/>
-          <p:nvPr/>
-        </p:nvSpPr>
-        <p:spPr>
-          <a:xfrm>
-            <a:off x="8275320" y="2487168"/>
-            <a:ext cx="438912" cy="438912"/>
-          </a:xfrm>
-          <a:prstGeom prst="rect">
-            <a:avLst/>
-          </a:prstGeom>
-          <a:noFill/>
-          <a:ln/>
-        </p:spPr>
-        <p:txBody>
-          <a:bodyPr wrap="square" lIns="0" tIns="0" rIns="0" bIns="0" rtlCol="0" anchor="ctr"/>
-          <a:lstStyle/>
-          <a:p>
-            <a:pPr algn="ctr" indent="0" marL="0">
-              <a:buNone/>
-            </a:pPr>
-            <a:r>
-              <a:rPr lang="en-US" sz="1400" b="1" dirty="0">
-                <a:solidFill>
-                  <a:srgbClr val="FFFFFF"/>
-                </a:solidFill>
-                <a:latin typeface="Yu Gothic" pitchFamily="34" charset="0"/>
-                <a:ea typeface="Yu Gothic" pitchFamily="34" charset="-122"/>
-                <a:cs typeface="Yu Gothic" pitchFamily="34" charset="-120"/>
-              </a:rPr>
-              <a:t>3</a:t>
-            </a:r>
-            <a:endParaRPr lang="en-US" sz="1400" dirty="0"/>
+              <a:t>金額だけで語らないでください。中小企業のAI効果は効率化に出ますが、実際の価値は品質と範囲に出ることが多くあります。</a:t>
+            </a:r>
+            <a:endParaRPr lang="en-US" sz="1250" dirty="0"/>
           </a:p>
         </p:txBody>
       </p:sp>
@@ -4610,37 +6207,34 @@
         </p:nvSpPr>
         <p:spPr>
           <a:xfrm>
-            <a:off x="8275320" y="3035808"/>
-            <a:ext cx="2834640" cy="777240"/>
-          </a:xfrm>
-          <a:prstGeom prst="rect">
-            <a:avLst/>
-          </a:prstGeom>
-          <a:noFill/>
-          <a:ln/>
-        </p:spPr>
-        <p:txBody>
-          <a:bodyPr wrap="square" lIns="0" tIns="0" rIns="0" bIns="0" rtlCol="0" anchor="ctr"/>
-          <a:lstStyle/>
-          <a:p>
-            <a:pPr indent="0" marL="0">
-              <a:lnSpc>
-                <a:spcPct val="125000"/>
-              </a:lnSpc>
-              <a:buNone/>
-            </a:pPr>
-            <a:r>
-              <a:rPr lang="en-US" sz="1500" b="1" dirty="0">
-                <a:solidFill>
-                  <a:srgbClr val="23201D"/>
-                </a:solidFill>
-                <a:latin typeface="Yu Gothic" pitchFamily="34" charset="0"/>
-                <a:ea typeface="Yu Gothic" pitchFamily="34" charset="-122"/>
-                <a:cs typeface="Yu Gothic" pitchFamily="34" charset="-120"/>
-              </a:rPr>
-              <a:t>効果測定シートを作る</a:t>
-            </a:r>
-            <a:endParaRPr lang="en-US" sz="1500" dirty="0"/>
+            <a:off x="777240" y="6382512"/>
+            <a:ext cx="7424928" cy="256032"/>
+          </a:xfrm>
+          <a:prstGeom prst="rect">
+            <a:avLst/>
+          </a:prstGeom>
+          <a:noFill/>
+          <a:ln/>
+        </p:spPr>
+        <p:txBody>
+          <a:bodyPr wrap="square" lIns="0" tIns="0" rIns="0" bIns="0" rtlCol="0" anchor="ctr"/>
+          <a:lstStyle/>
+          <a:p>
+            <a:pPr indent="0" marL="0">
+              <a:buNone/>
+            </a:pPr>
+            <a:r>
+              <a:rPr lang="en-US" sz="900" dirty="0">
+                <a:solidFill>
+                  <a:srgbClr val="8A8177"/>
+                </a:solidFill>
+                <a:latin typeface="Yu Gothic" pitchFamily="34" charset="0"/>
+                <a:ea typeface="Yu Gothic" pitchFamily="34" charset="-122"/>
+                <a:cs typeface="Yu Gothic" pitchFamily="34" charset="-120"/>
+              </a:rPr>
+              <a:t>第11回　組織に載せる</a:t>
+            </a:r>
+            <a:endParaRPr lang="en-US" sz="900" dirty="0"/>
           </a:p>
         </p:txBody>
       </p:sp>
@@ -4652,62 +6246,20 @@
         </p:nvSpPr>
         <p:spPr>
           <a:xfrm>
-            <a:off x="8275320" y="3822192"/>
-            <a:ext cx="2834640" cy="960120"/>
-          </a:xfrm>
-          <a:prstGeom prst="rect">
-            <a:avLst/>
-          </a:prstGeom>
-          <a:noFill/>
-          <a:ln/>
-        </p:spPr>
-        <p:txBody>
-          <a:bodyPr wrap="square" lIns="0" tIns="0" rIns="0" bIns="0" rtlCol="0" anchor="ctr"/>
-          <a:lstStyle/>
-          <a:p>
-            <a:pPr indent="0" marL="0">
-              <a:lnSpc>
-                <a:spcPct val="130000"/>
-              </a:lnSpc>
-              <a:buNone/>
-            </a:pPr>
-            <a:r>
-              <a:rPr lang="en-US" sz="1200" dirty="0">
-                <a:solidFill>
-                  <a:srgbClr val="5A534A"/>
-                </a:solidFill>
-                <a:latin typeface="Yu Gothic" pitchFamily="34" charset="0"/>
-                <a:ea typeface="Yu Gothic" pitchFamily="34" charset="-122"/>
-                <a:cs typeface="Yu Gothic" pitchFamily="34" charset="-120"/>
-              </a:rPr>
-              <a:t>時間・品質・範囲・金額の4行。金額だけで語りません</a:t>
-            </a:r>
-            <a:endParaRPr lang="en-US" sz="1200" dirty="0"/>
-          </a:p>
-        </p:txBody>
-      </p:sp>
-      <p:sp>
-        <p:nvSpPr>
-          <p:cNvPr id="20" name="Text 18"/>
-          <p:cNvSpPr txBox="1"/>
-          <p:nvPr/>
-        </p:nvSpPr>
-        <p:spPr>
-          <a:xfrm>
-            <a:off x="777240" y="6355080"/>
-            <a:ext cx="7424928" cy="274320"/>
-          </a:xfrm>
-          <a:prstGeom prst="rect">
-            <a:avLst/>
-          </a:prstGeom>
-          <a:noFill/>
-          <a:ln/>
-        </p:spPr>
-        <p:txBody>
-          <a:bodyPr wrap="square" lIns="0" tIns="0" rIns="0" bIns="0" rtlCol="0" anchor="ctr"/>
-          <a:lstStyle/>
-          <a:p>
-            <a:pPr indent="0" marL="0">
+            <a:off x="8202168" y="6382512"/>
+            <a:ext cx="3182112" cy="256032"/>
+          </a:xfrm>
+          <a:prstGeom prst="rect">
+            <a:avLst/>
+          </a:prstGeom>
+          <a:noFill/>
+          <a:ln/>
+        </p:spPr>
+        <p:txBody>
+          <a:bodyPr wrap="square" lIns="0" tIns="0" rIns="0" bIns="0" rtlCol="0" anchor="ctr"/>
+          <a:lstStyle/>
+          <a:p>
+            <a:pPr algn="r" indent="0" marL="0">
               <a:buNone/>
             </a:pPr>
             <a:r>
@@ -4719,46 +6271,7 @@
                 <a:ea typeface="Yu Gothic" pitchFamily="34" charset="-122"/>
                 <a:cs typeface="Yu Gothic" pitchFamily="34" charset="-120"/>
               </a:rPr>
-              <a:t>第11回　組織に載せる</a:t>
-            </a:r>
-            <a:endParaRPr lang="en-US" sz="900" dirty="0"/>
-          </a:p>
-        </p:txBody>
-      </p:sp>
-      <p:sp>
-        <p:nvSpPr>
-          <p:cNvPr id="21" name="Text 19"/>
-          <p:cNvSpPr txBox="1"/>
-          <p:nvPr/>
-        </p:nvSpPr>
-        <p:spPr>
-          <a:xfrm>
-            <a:off x="8202168" y="6355080"/>
-            <a:ext cx="3182112" cy="274320"/>
-          </a:xfrm>
-          <a:prstGeom prst="rect">
-            <a:avLst/>
-          </a:prstGeom>
-          <a:noFill/>
-          <a:ln/>
-        </p:spPr>
-        <p:txBody>
-          <a:bodyPr wrap="square" lIns="0" tIns="0" rIns="0" bIns="0" rtlCol="0" anchor="ctr"/>
-          <a:lstStyle/>
-          <a:p>
-            <a:pPr algn="r" indent="0" marL="0">
-              <a:buNone/>
-            </a:pPr>
-            <a:r>
-              <a:rPr lang="en-US" sz="900" dirty="0">
-                <a:solidFill>
-                  <a:srgbClr val="8A8177"/>
-                </a:solidFill>
-                <a:latin typeface="Yu Gothic" pitchFamily="34" charset="0"/>
-                <a:ea typeface="Yu Gothic" pitchFamily="34" charset="-122"/>
-                <a:cs typeface="Yu Gothic" pitchFamily="34" charset="-120"/>
-              </a:rPr>
-              <a:t>演習</a:t>
+              <a:t>あてはめ</a:t>
             </a:r>
             <a:endParaRPr lang="en-US" sz="900" dirty="0"/>
           </a:p>
@@ -4804,7 +6317,7 @@
         </p:nvSpPr>
         <p:spPr>
           <a:xfrm>
-            <a:off x="777240" y="822960"/>
+            <a:off x="777240" y="566928"/>
             <a:ext cx="10607040" cy="274320"/>
           </a:xfrm>
           <a:prstGeom prst="rect">
@@ -4823,13 +6336,13 @@
             <a:r>
               <a:rPr lang="en-US" sz="1100" b="1" spc="250" kern="0" dirty="0">
                 <a:solidFill>
-                  <a:srgbClr val="B04A2F"/>
-                </a:solidFill>
-                <a:latin typeface="Yu Gothic" pitchFamily="34" charset="0"/>
-                <a:ea typeface="Yu Gothic" pitchFamily="34" charset="-122"/>
-                <a:cs typeface="Yu Gothic" pitchFamily="34" charset="-120"/>
-              </a:rPr>
-              <a:t>ここだけは</a:t>
+                  <a:srgbClr val="8A8177"/>
+                </a:solidFill>
+                <a:latin typeface="Yu Gothic" pitchFamily="34" charset="0"/>
+                <a:ea typeface="Yu Gothic" pitchFamily="34" charset="-122"/>
+                <a:cs typeface="Yu Gothic" pitchFamily="34" charset="-120"/>
+              </a:rPr>
+              <a:t>実演 ①</a:t>
             </a:r>
             <a:endParaRPr lang="en-US" sz="1100" dirty="0"/>
           </a:p>
@@ -4843,24 +6356,24 @@
         </p:nvSpPr>
         <p:spPr>
           <a:xfrm>
-            <a:off x="777240" y="1188720"/>
-            <a:ext cx="9546336" cy="822960"/>
-          </a:xfrm>
-          <a:prstGeom prst="rect">
-            <a:avLst/>
-          </a:prstGeom>
-          <a:noFill/>
-          <a:ln/>
-        </p:spPr>
-        <p:txBody>
-          <a:bodyPr wrap="square" lIns="0" tIns="0" rIns="0" bIns="0" rtlCol="0" anchor="ctr"/>
-          <a:lstStyle/>
-          <a:p>
-            <a:pPr indent="0" marL="0">
-              <a:buNone/>
-            </a:pPr>
-            <a:r>
-              <a:rPr lang="en-US" sz="3000" b="1" dirty="0">
+            <a:off x="777240" y="896112"/>
+            <a:ext cx="10607040" cy="640080"/>
+          </a:xfrm>
+          <a:prstGeom prst="rect">
+            <a:avLst/>
+          </a:prstGeom>
+          <a:noFill/>
+          <a:ln/>
+        </p:spPr>
+        <p:txBody>
+          <a:bodyPr wrap="square" lIns="0" tIns="0" rIns="0" bIns="0" rtlCol="0" anchor="ctr"/>
+          <a:lstStyle/>
+          <a:p>
+            <a:pPr indent="0" marL="0">
+              <a:buNone/>
+            </a:pPr>
+            <a:r>
+              <a:rPr lang="en-US" sz="2600" b="1" dirty="0">
                 <a:solidFill>
                   <a:srgbClr val="23201D"/>
                 </a:solidFill>
@@ -4868,9 +6381,9 @@
                 <a:ea typeface="Yu Gothic" pitchFamily="34" charset="-122"/>
                 <a:cs typeface="Yu Gothic" pitchFamily="34" charset="-120"/>
               </a:rPr>
-              <a:t>任せられる人がいない、なら</a:t>
-            </a:r>
-            <a:endParaRPr lang="en-US" sz="3000" dirty="0"/>
+              <a:t>推進役の選び方（よくある失敗）</a:t>
+            </a:r>
+            <a:endParaRPr lang="en-US" sz="2600" dirty="0"/>
           </a:p>
         </p:txBody>
       </p:sp>
@@ -4882,14 +6395,352 @@
         </p:nvSpPr>
         <p:spPr>
           <a:xfrm>
-            <a:off x="777240" y="2331720"/>
-            <a:ext cx="64008" cy="2011680"/>
+            <a:off x="777240" y="1691640"/>
+            <a:ext cx="4879238" cy="1371600"/>
           </a:xfrm>
           <a:prstGeom prst="rect">
             <a:avLst/>
           </a:prstGeom>
           <a:solidFill>
-            <a:srgbClr val="B04A2F"/>
+            <a:srgbClr val="EDE7DB"/>
+          </a:solidFill>
+          <a:ln w="15875">
+            <a:solidFill>
+              <a:srgbClr val="8A8177"/>
+            </a:solidFill>
+            <a:prstDash val="solid"/>
+          </a:ln>
+        </p:spPr>
+      </p:sp>
+      <p:sp>
+        <p:nvSpPr>
+          <p:cNvPr id="5" name="Text 3"/>
+          <p:cNvSpPr txBox="1"/>
+          <p:nvPr/>
+        </p:nvSpPr>
+        <p:spPr>
+          <a:xfrm>
+            <a:off x="1005840" y="1783080"/>
+            <a:ext cx="1828800" cy="274320"/>
+          </a:xfrm>
+          <a:prstGeom prst="rect">
+            <a:avLst/>
+          </a:prstGeom>
+          <a:noFill/>
+          <a:ln/>
+        </p:spPr>
+        <p:txBody>
+          <a:bodyPr wrap="square" lIns="0" tIns="0" rIns="0" bIns="0" rtlCol="0" anchor="ctr"/>
+          <a:lstStyle/>
+          <a:p>
+            <a:pPr indent="0" marL="0">
+              <a:buNone/>
+            </a:pPr>
+            <a:r>
+              <a:rPr lang="en-US" sz="1000" b="1" spc="200" kern="0" dirty="0">
+                <a:solidFill>
+                  <a:srgbClr val="8A8177"/>
+                </a:solidFill>
+                <a:latin typeface="Yu Gothic" pitchFamily="34" charset="0"/>
+                <a:ea typeface="Yu Gothic" pitchFamily="34" charset="-122"/>
+                <a:cs typeface="Yu Gothic" pitchFamily="34" charset="-120"/>
+              </a:rPr>
+              <a:t>入力</a:t>
+            </a:r>
+            <a:endParaRPr lang="en-US" sz="1000" dirty="0"/>
+          </a:p>
+        </p:txBody>
+      </p:sp>
+      <p:sp>
+        <p:nvSpPr>
+          <p:cNvPr id="6" name="Text 4"/>
+          <p:cNvSpPr txBox="1"/>
+          <p:nvPr/>
+        </p:nvSpPr>
+        <p:spPr>
+          <a:xfrm>
+            <a:off x="1005840" y="2084832"/>
+            <a:ext cx="4422038" cy="868680"/>
+          </a:xfrm>
+          <a:prstGeom prst="rect">
+            <a:avLst/>
+          </a:prstGeom>
+          <a:noFill/>
+          <a:ln/>
+        </p:spPr>
+        <p:txBody>
+          <a:bodyPr wrap="square" lIns="0" tIns="0" rIns="0" bIns="0" rtlCol="0" anchor="ctr"/>
+          <a:lstStyle/>
+          <a:p>
+            <a:pPr indent="0" marL="0">
+              <a:lnSpc>
+                <a:spcPct val="125000"/>
+              </a:lnSpc>
+              <a:buNone/>
+            </a:pPr>
+            <a:r>
+              <a:rPr lang="en-US" sz="1200" dirty="0">
+                <a:solidFill>
+                  <a:srgbClr val="23201D"/>
+                </a:solidFill>
+                <a:latin typeface="Consolas" pitchFamily="34" charset="0"/>
+                <a:ea typeface="Consolas" pitchFamily="34" charset="-122"/>
+                <a:cs typeface="Consolas" pitchFamily="34" charset="-120"/>
+              </a:rPr>
+              <a:t>「ITが得意そうな若手に任せよう」</a:t>
+            </a:r>
+            <a:endParaRPr lang="en-US" sz="1200" dirty="0"/>
+          </a:p>
+        </p:txBody>
+      </p:sp>
+      <p:sp>
+        <p:nvSpPr>
+          <p:cNvPr id="7" name="Shape 5"/>
+          <p:cNvSpPr/>
+          <p:nvPr/>
+        </p:nvSpPr>
+        <p:spPr>
+          <a:xfrm>
+            <a:off x="6080760" y="1691640"/>
+            <a:ext cx="5303520" cy="3017520"/>
+          </a:xfrm>
+          <a:prstGeom prst="rect">
+            <a:avLst/>
+          </a:prstGeom>
+          <a:solidFill>
+            <a:srgbClr val="FFFFFF"/>
+          </a:solidFill>
+          <a:ln w="12700">
+            <a:solidFill>
+              <a:srgbClr val="EDE7DB"/>
+            </a:solidFill>
+            <a:prstDash val="solid"/>
+          </a:ln>
+        </p:spPr>
+      </p:sp>
+      <p:sp>
+        <p:nvSpPr>
+          <p:cNvPr id="8" name="Text 6"/>
+          <p:cNvSpPr txBox="1"/>
+          <p:nvPr/>
+        </p:nvSpPr>
+        <p:spPr>
+          <a:xfrm>
+            <a:off x="6309360" y="1783080"/>
+            <a:ext cx="2743200" cy="274320"/>
+          </a:xfrm>
+          <a:prstGeom prst="rect">
+            <a:avLst/>
+          </a:prstGeom>
+          <a:noFill/>
+          <a:ln/>
+        </p:spPr>
+        <p:txBody>
+          <a:bodyPr wrap="square" lIns="0" tIns="0" rIns="0" bIns="0" rtlCol="0" anchor="ctr"/>
+          <a:lstStyle/>
+          <a:p>
+            <a:pPr indent="0" marL="0">
+              <a:buNone/>
+            </a:pPr>
+            <a:r>
+              <a:rPr lang="en-US" sz="1000" b="1" spc="200" kern="0" dirty="0">
+                <a:solidFill>
+                  <a:srgbClr val="8A8177"/>
+                </a:solidFill>
+                <a:latin typeface="Yu Gothic" pitchFamily="34" charset="0"/>
+                <a:ea typeface="Yu Gothic" pitchFamily="34" charset="-122"/>
+                <a:cs typeface="Yu Gothic" pitchFamily="34" charset="-120"/>
+              </a:rPr>
+              <a:t>出てくるもの</a:t>
+            </a:r>
+            <a:endParaRPr lang="en-US" sz="1000" dirty="0"/>
+          </a:p>
+        </p:txBody>
+      </p:sp>
+      <p:sp>
+        <p:nvSpPr>
+          <p:cNvPr id="9" name="Text 7"/>
+          <p:cNvSpPr txBox="1"/>
+          <p:nvPr/>
+        </p:nvSpPr>
+        <p:spPr>
+          <a:xfrm>
+            <a:off x="6309360" y="2148840"/>
+            <a:ext cx="4846320" cy="566928"/>
+          </a:xfrm>
+          <a:prstGeom prst="rect">
+            <a:avLst/>
+          </a:prstGeom>
+          <a:noFill/>
+          <a:ln/>
+        </p:spPr>
+        <p:txBody>
+          <a:bodyPr wrap="square" lIns="0" tIns="0" rIns="0" bIns="0" rtlCol="0" anchor="ctr"/>
+          <a:lstStyle/>
+          <a:p>
+            <a:pPr indent="0" marL="0">
+              <a:lnSpc>
+                <a:spcPct val="125000"/>
+              </a:lnSpc>
+              <a:buNone/>
+            </a:pPr>
+            <a:r>
+              <a:rPr lang="en-US" sz="1250" dirty="0">
+                <a:solidFill>
+                  <a:srgbClr val="23201D"/>
+                </a:solidFill>
+                <a:latin typeface="Yu Gothic" pitchFamily="34" charset="0"/>
+                <a:ea typeface="Yu Gothic" pitchFamily="34" charset="-122"/>
+                <a:cs typeface="Yu Gothic" pitchFamily="34" charset="-120"/>
+              </a:rPr>
+              <a:t>・本人がその業務を知らない</a:t>
+            </a:r>
+            <a:endParaRPr lang="en-US" sz="1250" dirty="0"/>
+          </a:p>
+        </p:txBody>
+      </p:sp>
+      <p:sp>
+        <p:nvSpPr>
+          <p:cNvPr id="10" name="Text 8"/>
+          <p:cNvSpPr txBox="1"/>
+          <p:nvPr/>
+        </p:nvSpPr>
+        <p:spPr>
+          <a:xfrm>
+            <a:off x="6309360" y="2752344"/>
+            <a:ext cx="4846320" cy="566928"/>
+          </a:xfrm>
+          <a:prstGeom prst="rect">
+            <a:avLst/>
+          </a:prstGeom>
+          <a:noFill/>
+          <a:ln/>
+        </p:spPr>
+        <p:txBody>
+          <a:bodyPr wrap="square" lIns="0" tIns="0" rIns="0" bIns="0" rtlCol="0" anchor="ctr"/>
+          <a:lstStyle/>
+          <a:p>
+            <a:pPr indent="0" marL="0">
+              <a:lnSpc>
+                <a:spcPct val="125000"/>
+              </a:lnSpc>
+              <a:buNone/>
+            </a:pPr>
+            <a:r>
+              <a:rPr lang="en-US" sz="1250" dirty="0">
+                <a:solidFill>
+                  <a:srgbClr val="23201D"/>
+                </a:solidFill>
+                <a:latin typeface="Yu Gothic" pitchFamily="34" charset="0"/>
+                <a:ea typeface="Yu Gothic" pitchFamily="34" charset="-122"/>
+                <a:cs typeface="Yu Gothic" pitchFamily="34" charset="-120"/>
+              </a:rPr>
+              <a:t>・現場とずれたものができる</a:t>
+            </a:r>
+            <a:endParaRPr lang="en-US" sz="1250" dirty="0"/>
+          </a:p>
+        </p:txBody>
+      </p:sp>
+      <p:sp>
+        <p:nvSpPr>
+          <p:cNvPr id="11" name="Text 9"/>
+          <p:cNvSpPr txBox="1"/>
+          <p:nvPr/>
+        </p:nvSpPr>
+        <p:spPr>
+          <a:xfrm>
+            <a:off x="6309360" y="3355848"/>
+            <a:ext cx="4846320" cy="566928"/>
+          </a:xfrm>
+          <a:prstGeom prst="rect">
+            <a:avLst/>
+          </a:prstGeom>
+          <a:noFill/>
+          <a:ln/>
+        </p:spPr>
+        <p:txBody>
+          <a:bodyPr wrap="square" lIns="0" tIns="0" rIns="0" bIns="0" rtlCol="0" anchor="ctr"/>
+          <a:lstStyle/>
+          <a:p>
+            <a:pPr indent="0" marL="0">
+              <a:lnSpc>
+                <a:spcPct val="125000"/>
+              </a:lnSpc>
+              <a:buNone/>
+            </a:pPr>
+            <a:r>
+              <a:rPr lang="en-US" sz="1250" dirty="0">
+                <a:solidFill>
+                  <a:srgbClr val="23201D"/>
+                </a:solidFill>
+                <a:latin typeface="Yu Gothic" pitchFamily="34" charset="0"/>
+                <a:ea typeface="Yu Gothic" pitchFamily="34" charset="-122"/>
+                <a:cs typeface="Yu Gothic" pitchFamily="34" charset="-120"/>
+              </a:rPr>
+              <a:t>・使われず、本人も自信をなくす</a:t>
+            </a:r>
+            <a:endParaRPr lang="en-US" sz="1250" dirty="0"/>
+          </a:p>
+        </p:txBody>
+      </p:sp>
+      <p:sp>
+        <p:nvSpPr>
+          <p:cNvPr id="12" name="Text 10"/>
+          <p:cNvSpPr txBox="1"/>
+          <p:nvPr/>
+        </p:nvSpPr>
+        <p:spPr>
+          <a:xfrm>
+            <a:off x="6309360" y="3959352"/>
+            <a:ext cx="4846320" cy="566928"/>
+          </a:xfrm>
+          <a:prstGeom prst="rect">
+            <a:avLst/>
+          </a:prstGeom>
+          <a:noFill/>
+          <a:ln/>
+        </p:spPr>
+        <p:txBody>
+          <a:bodyPr wrap="square" lIns="0" tIns="0" rIns="0" bIns="0" rtlCol="0" anchor="ctr"/>
+          <a:lstStyle/>
+          <a:p>
+            <a:pPr indent="0" marL="0">
+              <a:lnSpc>
+                <a:spcPct val="125000"/>
+              </a:lnSpc>
+              <a:buNone/>
+            </a:pPr>
+            <a:r>
+              <a:rPr lang="en-US" sz="1250" dirty="0">
+                <a:solidFill>
+                  <a:srgbClr val="23201D"/>
+                </a:solidFill>
+                <a:latin typeface="Yu Gothic" pitchFamily="34" charset="0"/>
+                <a:ea typeface="Yu Gothic" pitchFamily="34" charset="-122"/>
+                <a:cs typeface="Yu Gothic" pitchFamily="34" charset="-120"/>
+              </a:rPr>
+              <a:t>・結局、社長がやり直す</a:t>
+            </a:r>
+            <a:endParaRPr lang="en-US" sz="1250" dirty="0"/>
+          </a:p>
+        </p:txBody>
+      </p:sp>
+      <p:sp>
+        <p:nvSpPr>
+          <p:cNvPr id="13" name="Shape 11"/>
+          <p:cNvSpPr/>
+          <p:nvPr/>
+        </p:nvSpPr>
+        <p:spPr>
+          <a:xfrm>
+            <a:off x="777240" y="3291840"/>
+            <a:ext cx="4879238" cy="1417320"/>
+          </a:xfrm>
+          <a:prstGeom prst="rect">
+            <a:avLst/>
+          </a:prstGeom>
+          <a:solidFill>
+            <a:srgbClr val="E4DFD5"/>
           </a:solidFill>
           <a:ln w="12700">
             <a:solidFill>
@@ -4901,14 +6752,14 @@
       </p:sp>
       <p:sp>
         <p:nvSpPr>
-          <p:cNvPr id="5" name="Text 3"/>
-          <p:cNvSpPr txBox="1"/>
-          <p:nvPr/>
-        </p:nvSpPr>
-        <p:spPr>
-          <a:xfrm>
-            <a:off x="1188720" y="2331720"/>
-            <a:ext cx="9966960" cy="2011680"/>
+          <p:cNvPr id="14" name="Text 12"/>
+          <p:cNvSpPr txBox="1"/>
+          <p:nvPr/>
+        </p:nvSpPr>
+        <p:spPr>
+          <a:xfrm>
+            <a:off x="1005840" y="3383280"/>
+            <a:ext cx="4422038" cy="1234440"/>
           </a:xfrm>
           <a:prstGeom prst="rect">
             <a:avLst/>
@@ -4922,12 +6773,12 @@
           <a:p>
             <a:pPr indent="0" marL="0">
               <a:lnSpc>
-                <a:spcPct val="160000"/>
+                <a:spcPct val="135000"/>
               </a:lnSpc>
               <a:buNone/>
             </a:pPr>
             <a:r>
-              <a:rPr lang="en-US" sz="1700" dirty="0">
+              <a:rPr lang="en-US" sz="1250" dirty="0">
                 <a:solidFill>
                   <a:srgbClr val="3F3933"/>
                 </a:solidFill>
@@ -4935,22 +6786,86 @@
                 <a:ea typeface="Yu Gothic" pitchFamily="34" charset="-122"/>
                 <a:cs typeface="Yu Gothic" pitchFamily="34" charset="-120"/>
               </a:rPr>
-              <a:t>それが本当の経営課題です。無理に決めず、「社長が続ける前提で、どこまでなら維持できるか」に切り替えます。持続可能な範囲を決めることも、立派な成果です。</a:t>
-            </a:r>
-            <a:endParaRPr lang="en-US" sz="1700" dirty="0"/>
-          </a:p>
-        </p:txBody>
-      </p:sp>
-      <p:sp>
-        <p:nvSpPr>
-          <p:cNvPr id="6" name="Text 4"/>
-          <p:cNvSpPr txBox="1"/>
-          <p:nvPr/>
-        </p:nvSpPr>
-        <p:spPr>
-          <a:xfrm>
-            <a:off x="777240" y="6355080"/>
-            <a:ext cx="7424928" cy="274320"/>
+              <a:t>必要なのはITの知識ではなく、業務の知識です。道具の使い方は後から覚えられます。</a:t>
+            </a:r>
+            <a:endParaRPr lang="en-US" sz="1250" dirty="0"/>
+          </a:p>
+        </p:txBody>
+      </p:sp>
+      <p:sp>
+        <p:nvSpPr>
+          <p:cNvPr id="15" name="Shape 13"/>
+          <p:cNvSpPr/>
+          <p:nvPr/>
+        </p:nvSpPr>
+        <p:spPr>
+          <a:xfrm>
+            <a:off x="777240" y="4983480"/>
+            <a:ext cx="10607040" cy="685800"/>
+          </a:xfrm>
+          <a:prstGeom prst="rect">
+            <a:avLst/>
+          </a:prstGeom>
+          <a:solidFill>
+            <a:srgbClr val="8A8177"/>
+          </a:solidFill>
+          <a:ln w="12700">
+            <a:solidFill>
+              <a:srgbClr val="333333"/>
+            </a:solidFill>
+            <a:prstDash val="solid"/>
+          </a:ln>
+        </p:spPr>
+      </p:sp>
+      <p:sp>
+        <p:nvSpPr>
+          <p:cNvPr id="16" name="Text 14"/>
+          <p:cNvSpPr txBox="1"/>
+          <p:nvPr/>
+        </p:nvSpPr>
+        <p:spPr>
+          <a:xfrm>
+            <a:off x="1097280" y="4983480"/>
+            <a:ext cx="9966960" cy="685800"/>
+          </a:xfrm>
+          <a:prstGeom prst="rect">
+            <a:avLst/>
+          </a:prstGeom>
+          <a:noFill/>
+          <a:ln/>
+        </p:spPr>
+        <p:txBody>
+          <a:bodyPr wrap="square" lIns="0" tIns="0" rIns="0" bIns="0" rtlCol="0" anchor="ctr"/>
+          <a:lstStyle/>
+          <a:p>
+            <a:pPr indent="0" marL="0">
+              <a:buNone/>
+            </a:pPr>
+            <a:r>
+              <a:rPr lang="en-US" sz="1450" b="1" dirty="0">
+                <a:solidFill>
+                  <a:srgbClr val="FFFFFF"/>
+                </a:solidFill>
+                <a:latin typeface="Yu Gothic" pitchFamily="34" charset="0"/>
+                <a:ea typeface="Yu Gothic" pitchFamily="34" charset="-122"/>
+                <a:cs typeface="Yu Gothic" pitchFamily="34" charset="-120"/>
+              </a:rPr>
+              <a:t>ITが得意な人より、その業務を知っている人</a:t>
+            </a:r>
+            <a:endParaRPr lang="en-US" sz="1450" dirty="0"/>
+          </a:p>
+        </p:txBody>
+      </p:sp>
+      <p:sp>
+        <p:nvSpPr>
+          <p:cNvPr id="17" name="Text 15"/>
+          <p:cNvSpPr txBox="1"/>
+          <p:nvPr/>
+        </p:nvSpPr>
+        <p:spPr>
+          <a:xfrm>
+            <a:off x="777240" y="6382512"/>
+            <a:ext cx="7424928" cy="256032"/>
           </a:xfrm>
           <a:prstGeom prst="rect">
             <a:avLst/>
@@ -4982,14 +6897,14 @@
       </p:sp>
       <p:sp>
         <p:nvSpPr>
-          <p:cNvPr id="7" name="Text 5"/>
-          <p:cNvSpPr txBox="1"/>
-          <p:nvPr/>
-        </p:nvSpPr>
-        <p:spPr>
-          <a:xfrm>
-            <a:off x="8202168" y="6355080"/>
-            <a:ext cx="3182112" cy="274320"/>
+          <p:cNvPr id="18" name="Text 16"/>
+          <p:cNvSpPr txBox="1"/>
+          <p:nvPr/>
+        </p:nvSpPr>
+        <p:spPr>
+          <a:xfrm>
+            <a:off x="8202168" y="6382512"/>
+            <a:ext cx="3182112" cy="256032"/>
           </a:xfrm>
           <a:prstGeom prst="rect">
             <a:avLst/>
@@ -5013,7 +6928,7 @@
                 <a:ea typeface="Yu Gothic" pitchFamily="34" charset="-122"/>
                 <a:cs typeface="Yu Gothic" pitchFamily="34" charset="-120"/>
               </a:rPr>
-              <a:t>ここだけは</a:t>
+              <a:t>実演 ①</a:t>
             </a:r>
             <a:endParaRPr lang="en-US" sz="900" dirty="0"/>
           </a:p>
@@ -5033,7 +6948,7 @@
     <p:bg>
       <p:bgPr>
         <a:solidFill>
-          <a:srgbClr val="23201D"/>
+          <a:srgbClr val="F6F2EA"/>
         </a:solidFill>
       </p:bgPr>
     </p:bg>
@@ -5059,34 +6974,34 @@
         </p:nvSpPr>
         <p:spPr>
           <a:xfrm>
-            <a:off x="777240" y="1371600"/>
-            <a:ext cx="10607040" cy="365760"/>
-          </a:xfrm>
-          <a:prstGeom prst="rect">
-            <a:avLst/>
-          </a:prstGeom>
-          <a:noFill/>
-          <a:ln/>
-        </p:spPr>
-        <p:txBody>
-          <a:bodyPr wrap="square" lIns="0" tIns="0" rIns="0" bIns="0" rtlCol="0" anchor="ctr"/>
-          <a:lstStyle/>
-          <a:p>
-            <a:pPr indent="0" marL="0">
-              <a:buNone/>
-            </a:pPr>
-            <a:r>
-              <a:rPr lang="en-US" sz="1200" b="1" spc="300" kern="0" dirty="0">
-                <a:solidFill>
-                  <a:srgbClr val="B04A2F"/>
-                </a:solidFill>
-                <a:latin typeface="Yu Gothic" pitchFamily="34" charset="0"/>
-                <a:ea typeface="Yu Gothic" pitchFamily="34" charset="-122"/>
-                <a:cs typeface="Yu Gothic" pitchFamily="34" charset="-120"/>
-              </a:rPr>
-              <a:t>今日の宿題</a:t>
-            </a:r>
-            <a:endParaRPr lang="en-US" sz="1200" dirty="0"/>
+            <a:off x="777240" y="566928"/>
+            <a:ext cx="10607040" cy="274320"/>
+          </a:xfrm>
+          <a:prstGeom prst="rect">
+            <a:avLst/>
+          </a:prstGeom>
+          <a:noFill/>
+          <a:ln/>
+        </p:spPr>
+        <p:txBody>
+          <a:bodyPr wrap="square" lIns="0" tIns="0" rIns="0" bIns="0" rtlCol="0" anchor="ctr"/>
+          <a:lstStyle/>
+          <a:p>
+            <a:pPr indent="0" marL="0">
+              <a:buNone/>
+            </a:pPr>
+            <a:r>
+              <a:rPr lang="en-US" sz="1100" b="1" spc="250" kern="0" dirty="0">
+                <a:solidFill>
+                  <a:srgbClr val="3B6B4A"/>
+                </a:solidFill>
+                <a:latin typeface="Yu Gothic" pitchFamily="34" charset="0"/>
+                <a:ea typeface="Yu Gothic" pitchFamily="34" charset="-122"/>
+                <a:cs typeface="Yu Gothic" pitchFamily="34" charset="-120"/>
+              </a:rPr>
+              <a:t>実演 ②</a:t>
+            </a:r>
+            <a:endParaRPr lang="en-US" sz="1100" dirty="0"/>
           </a:p>
         </p:txBody>
       </p:sp>
@@ -5098,7 +7013,7 @@
         </p:nvSpPr>
         <p:spPr>
           <a:xfrm>
-            <a:off x="777240" y="1783080"/>
+            <a:off x="777240" y="896112"/>
             <a:ext cx="10607040" cy="640080"/>
           </a:xfrm>
           <a:prstGeom prst="rect">
@@ -5115,17 +7030,17 @@
               <a:buNone/>
             </a:pPr>
             <a:r>
-              <a:rPr lang="en-US" sz="3200" b="1" dirty="0">
-                <a:solidFill>
-                  <a:srgbClr val="FFFFFF"/>
-                </a:solidFill>
-                <a:latin typeface="Yu Gothic" pitchFamily="34" charset="0"/>
-                <a:ea typeface="Yu Gothic" pitchFamily="34" charset="-122"/>
-                <a:cs typeface="Yu Gothic" pitchFamily="34" charset="-120"/>
-              </a:rPr>
-              <a:t>ひとつだけ</a:t>
-            </a:r>
-            <a:endParaRPr lang="en-US" sz="3200" dirty="0"/>
+              <a:rPr lang="en-US" sz="2600" b="1" dirty="0">
+                <a:solidFill>
+                  <a:srgbClr val="23201D"/>
+                </a:solidFill>
+                <a:latin typeface="Yu Gothic" pitchFamily="34" charset="0"/>
+                <a:ea typeface="Yu Gothic" pitchFamily="34" charset="-122"/>
+                <a:cs typeface="Yu Gothic" pitchFamily="34" charset="-120"/>
+              </a:rPr>
+              <a:t>推進役の選び方（実際）</a:t>
+            </a:r>
+            <a:endParaRPr lang="en-US" sz="2600" dirty="0"/>
           </a:p>
         </p:txBody>
       </p:sp>
@@ -5137,18 +7052,124 @@
         </p:nvSpPr>
         <p:spPr>
           <a:xfrm>
-            <a:off x="777240" y="2743200"/>
-            <a:ext cx="10607040" cy="1463040"/>
+            <a:off x="777240" y="1691640"/>
+            <a:ext cx="4879238" cy="1371600"/>
           </a:xfrm>
           <a:prstGeom prst="rect">
             <a:avLst/>
           </a:prstGeom>
           <a:solidFill>
-            <a:srgbClr val="2E2A26"/>
+            <a:srgbClr val="FFFFFF"/>
+          </a:solidFill>
+          <a:ln w="15875">
+            <a:solidFill>
+              <a:srgbClr val="3B6B4A"/>
+            </a:solidFill>
+            <a:prstDash val="solid"/>
+          </a:ln>
+        </p:spPr>
+      </p:sp>
+      <p:sp>
+        <p:nvSpPr>
+          <p:cNvPr id="5" name="Text 3"/>
+          <p:cNvSpPr txBox="1"/>
+          <p:nvPr/>
+        </p:nvSpPr>
+        <p:spPr>
+          <a:xfrm>
+            <a:off x="1005840" y="1783080"/>
+            <a:ext cx="1828800" cy="274320"/>
+          </a:xfrm>
+          <a:prstGeom prst="rect">
+            <a:avLst/>
+          </a:prstGeom>
+          <a:noFill/>
+          <a:ln/>
+        </p:spPr>
+        <p:txBody>
+          <a:bodyPr wrap="square" lIns="0" tIns="0" rIns="0" bIns="0" rtlCol="0" anchor="ctr"/>
+          <a:lstStyle/>
+          <a:p>
+            <a:pPr indent="0" marL="0">
+              <a:buNone/>
+            </a:pPr>
+            <a:r>
+              <a:rPr lang="en-US" sz="1000" b="1" spc="200" kern="0" dirty="0">
+                <a:solidFill>
+                  <a:srgbClr val="3B6B4A"/>
+                </a:solidFill>
+                <a:latin typeface="Yu Gothic" pitchFamily="34" charset="0"/>
+                <a:ea typeface="Yu Gothic" pitchFamily="34" charset="-122"/>
+                <a:cs typeface="Yu Gothic" pitchFamily="34" charset="-120"/>
+              </a:rPr>
+              <a:t>入力</a:t>
+            </a:r>
+            <a:endParaRPr lang="en-US" sz="1000" dirty="0"/>
+          </a:p>
+        </p:txBody>
+      </p:sp>
+      <p:sp>
+        <p:nvSpPr>
+          <p:cNvPr id="6" name="Text 4"/>
+          <p:cNvSpPr txBox="1"/>
+          <p:nvPr/>
+        </p:nvSpPr>
+        <p:spPr>
+          <a:xfrm>
+            <a:off x="1005840" y="2084832"/>
+            <a:ext cx="4422038" cy="868680"/>
+          </a:xfrm>
+          <a:prstGeom prst="rect">
+            <a:avLst/>
+          </a:prstGeom>
+          <a:noFill/>
+          <a:ln/>
+        </p:spPr>
+        <p:txBody>
+          <a:bodyPr wrap="square" lIns="0" tIns="0" rIns="0" bIns="0" rtlCol="0" anchor="ctr"/>
+          <a:lstStyle/>
+          <a:p>
+            <a:pPr indent="0" marL="0">
+              <a:lnSpc>
+                <a:spcPct val="125000"/>
+              </a:lnSpc>
+              <a:buNone/>
+            </a:pPr>
+            <a:r>
+              <a:rPr lang="en-US" sz="1200" dirty="0">
+                <a:solidFill>
+                  <a:srgbClr val="23201D"/>
+                </a:solidFill>
+                <a:latin typeface="Consolas" pitchFamily="34" charset="0"/>
+                <a:ea typeface="Consolas" pitchFamily="34" charset="-122"/>
+                <a:cs typeface="Consolas" pitchFamily="34" charset="-120"/>
+              </a:rPr>
+              <a:t>「その業務をいちばん知っていて、面倒くさがりな人」</a:t>
+            </a:r>
+            <a:endParaRPr lang="en-US" sz="1200" dirty="0"/>
+          </a:p>
+        </p:txBody>
+      </p:sp>
+      <p:sp>
+        <p:nvSpPr>
+          <p:cNvPr id="7" name="Shape 5"/>
+          <p:cNvSpPr/>
+          <p:nvPr/>
+        </p:nvSpPr>
+        <p:spPr>
+          <a:xfrm>
+            <a:off x="6080760" y="1691640"/>
+            <a:ext cx="5303520" cy="3017520"/>
+          </a:xfrm>
+          <a:prstGeom prst="rect">
+            <a:avLst/>
+          </a:prstGeom>
+          <a:solidFill>
+            <a:srgbClr val="FFFFFF"/>
           </a:solidFill>
           <a:ln w="12700">
             <a:solidFill>
-              <a:srgbClr val="B04A2F"/>
+              <a:srgbClr val="EDE7DB"/>
             </a:solidFill>
             <a:prstDash val="solid"/>
           </a:ln>
@@ -5156,14 +7177,604 @@
       </p:sp>
       <p:sp>
         <p:nvSpPr>
+          <p:cNvPr id="8" name="Text 6"/>
+          <p:cNvSpPr txBox="1"/>
+          <p:nvPr/>
+        </p:nvSpPr>
+        <p:spPr>
+          <a:xfrm>
+            <a:off x="6309360" y="1783080"/>
+            <a:ext cx="2743200" cy="274320"/>
+          </a:xfrm>
+          <a:prstGeom prst="rect">
+            <a:avLst/>
+          </a:prstGeom>
+          <a:noFill/>
+          <a:ln/>
+        </p:spPr>
+        <p:txBody>
+          <a:bodyPr wrap="square" lIns="0" tIns="0" rIns="0" bIns="0" rtlCol="0" anchor="ctr"/>
+          <a:lstStyle/>
+          <a:p>
+            <a:pPr indent="0" marL="0">
+              <a:buNone/>
+            </a:pPr>
+            <a:r>
+              <a:rPr lang="en-US" sz="1000" b="1" spc="200" kern="0" dirty="0">
+                <a:solidFill>
+                  <a:srgbClr val="8A8177"/>
+                </a:solidFill>
+                <a:latin typeface="Yu Gothic" pitchFamily="34" charset="0"/>
+                <a:ea typeface="Yu Gothic" pitchFamily="34" charset="-122"/>
+                <a:cs typeface="Yu Gothic" pitchFamily="34" charset="-120"/>
+              </a:rPr>
+              <a:t>出てくるもの</a:t>
+            </a:r>
+            <a:endParaRPr lang="en-US" sz="1000" dirty="0"/>
+          </a:p>
+        </p:txBody>
+      </p:sp>
+      <p:sp>
+        <p:nvSpPr>
+          <p:cNvPr id="9" name="Text 7"/>
+          <p:cNvSpPr txBox="1"/>
+          <p:nvPr/>
+        </p:nvSpPr>
+        <p:spPr>
+          <a:xfrm>
+            <a:off x="6309360" y="2148840"/>
+            <a:ext cx="4846320" cy="566928"/>
+          </a:xfrm>
+          <a:prstGeom prst="rect">
+            <a:avLst/>
+          </a:prstGeom>
+          <a:noFill/>
+          <a:ln/>
+        </p:spPr>
+        <p:txBody>
+          <a:bodyPr wrap="square" lIns="0" tIns="0" rIns="0" bIns="0" rtlCol="0" anchor="ctr"/>
+          <a:lstStyle/>
+          <a:p>
+            <a:pPr indent="0" marL="0">
+              <a:lnSpc>
+                <a:spcPct val="125000"/>
+              </a:lnSpc>
+              <a:buNone/>
+            </a:pPr>
+            <a:r>
+              <a:rPr lang="en-US" sz="1250" dirty="0">
+                <a:solidFill>
+                  <a:srgbClr val="23201D"/>
+                </a:solidFill>
+                <a:latin typeface="Yu Gothic" pitchFamily="34" charset="0"/>
+                <a:ea typeface="Yu Gothic" pitchFamily="34" charset="-122"/>
+                <a:cs typeface="Yu Gothic" pitchFamily="34" charset="-120"/>
+              </a:rPr>
+              <a:t>・どこが無駄かを知っている</a:t>
+            </a:r>
+            <a:endParaRPr lang="en-US" sz="1250" dirty="0"/>
+          </a:p>
+        </p:txBody>
+      </p:sp>
+      <p:sp>
+        <p:nvSpPr>
+          <p:cNvPr id="10" name="Text 8"/>
+          <p:cNvSpPr txBox="1"/>
+          <p:nvPr/>
+        </p:nvSpPr>
+        <p:spPr>
+          <a:xfrm>
+            <a:off x="6309360" y="2752344"/>
+            <a:ext cx="4846320" cy="566928"/>
+          </a:xfrm>
+          <a:prstGeom prst="rect">
+            <a:avLst/>
+          </a:prstGeom>
+          <a:noFill/>
+          <a:ln/>
+        </p:spPr>
+        <p:txBody>
+          <a:bodyPr wrap="square" lIns="0" tIns="0" rIns="0" bIns="0" rtlCol="0" anchor="ctr"/>
+          <a:lstStyle/>
+          <a:p>
+            <a:pPr indent="0" marL="0">
+              <a:lnSpc>
+                <a:spcPct val="125000"/>
+              </a:lnSpc>
+              <a:buNone/>
+            </a:pPr>
+            <a:r>
+              <a:rPr lang="en-US" sz="1250" dirty="0">
+                <a:solidFill>
+                  <a:srgbClr val="23201D"/>
+                </a:solidFill>
+                <a:latin typeface="Yu Gothic" pitchFamily="34" charset="0"/>
+                <a:ea typeface="Yu Gothic" pitchFamily="34" charset="-122"/>
+                <a:cs typeface="Yu Gothic" pitchFamily="34" charset="-120"/>
+              </a:rPr>
+              <a:t>・楽になる方法を自分で探す</a:t>
+            </a:r>
+            <a:endParaRPr lang="en-US" sz="1250" dirty="0"/>
+          </a:p>
+        </p:txBody>
+      </p:sp>
+      <p:sp>
+        <p:nvSpPr>
+          <p:cNvPr id="11" name="Text 9"/>
+          <p:cNvSpPr txBox="1"/>
+          <p:nvPr/>
+        </p:nvSpPr>
+        <p:spPr>
+          <a:xfrm>
+            <a:off x="6309360" y="3355848"/>
+            <a:ext cx="4846320" cy="566928"/>
+          </a:xfrm>
+          <a:prstGeom prst="rect">
+            <a:avLst/>
+          </a:prstGeom>
+          <a:noFill/>
+          <a:ln/>
+        </p:spPr>
+        <p:txBody>
+          <a:bodyPr wrap="square" lIns="0" tIns="0" rIns="0" bIns="0" rtlCol="0" anchor="ctr"/>
+          <a:lstStyle/>
+          <a:p>
+            <a:pPr indent="0" marL="0">
+              <a:lnSpc>
+                <a:spcPct val="125000"/>
+              </a:lnSpc>
+              <a:buNone/>
+            </a:pPr>
+            <a:r>
+              <a:rPr lang="en-US" sz="1250" dirty="0">
+                <a:solidFill>
+                  <a:srgbClr val="23201D"/>
+                </a:solidFill>
+                <a:latin typeface="Yu Gothic" pitchFamily="34" charset="0"/>
+                <a:ea typeface="Yu Gothic" pitchFamily="34" charset="-122"/>
+                <a:cs typeface="Yu Gothic" pitchFamily="34" charset="-120"/>
+              </a:rPr>
+              <a:t>・現場に合ったものを作る</a:t>
+            </a:r>
+            <a:endParaRPr lang="en-US" sz="1250" dirty="0"/>
+          </a:p>
+        </p:txBody>
+      </p:sp>
+      <p:sp>
+        <p:nvSpPr>
+          <p:cNvPr id="12" name="Text 10"/>
+          <p:cNvSpPr txBox="1"/>
+          <p:nvPr/>
+        </p:nvSpPr>
+        <p:spPr>
+          <a:xfrm>
+            <a:off x="6309360" y="3959352"/>
+            <a:ext cx="4846320" cy="566928"/>
+          </a:xfrm>
+          <a:prstGeom prst="rect">
+            <a:avLst/>
+          </a:prstGeom>
+          <a:noFill/>
+          <a:ln/>
+        </p:spPr>
+        <p:txBody>
+          <a:bodyPr wrap="square" lIns="0" tIns="0" rIns="0" bIns="0" rtlCol="0" anchor="ctr"/>
+          <a:lstStyle/>
+          <a:p>
+            <a:pPr indent="0" marL="0">
+              <a:lnSpc>
+                <a:spcPct val="125000"/>
+              </a:lnSpc>
+              <a:buNone/>
+            </a:pPr>
+            <a:r>
+              <a:rPr lang="en-US" sz="1250" dirty="0">
+                <a:solidFill>
+                  <a:srgbClr val="23201D"/>
+                </a:solidFill>
+                <a:latin typeface="Yu Gothic" pitchFamily="34" charset="0"/>
+                <a:ea typeface="Yu Gothic" pitchFamily="34" charset="-122"/>
+                <a:cs typeface="Yu Gothic" pitchFamily="34" charset="-120"/>
+              </a:rPr>
+              <a:t>・月4時間を正式に割り当てる</a:t>
+            </a:r>
+            <a:endParaRPr lang="en-US" sz="1250" dirty="0"/>
+          </a:p>
+        </p:txBody>
+      </p:sp>
+      <p:sp>
+        <p:nvSpPr>
+          <p:cNvPr id="13" name="Shape 11"/>
+          <p:cNvSpPr/>
+          <p:nvPr/>
+        </p:nvSpPr>
+        <p:spPr>
+          <a:xfrm>
+            <a:off x="777240" y="3291840"/>
+            <a:ext cx="4879238" cy="1417320"/>
+          </a:xfrm>
+          <a:prstGeom prst="rect">
+            <a:avLst/>
+          </a:prstGeom>
+          <a:solidFill>
+            <a:srgbClr val="E7F0E9"/>
+          </a:solidFill>
+          <a:ln w="12700">
+            <a:solidFill>
+              <a:srgbClr val="333333"/>
+            </a:solidFill>
+            <a:prstDash val="solid"/>
+          </a:ln>
+        </p:spPr>
+      </p:sp>
+      <p:sp>
+        <p:nvSpPr>
+          <p:cNvPr id="14" name="Text 12"/>
+          <p:cNvSpPr txBox="1"/>
+          <p:nvPr/>
+        </p:nvSpPr>
+        <p:spPr>
+          <a:xfrm>
+            <a:off x="1005840" y="3383280"/>
+            <a:ext cx="4422038" cy="1234440"/>
+          </a:xfrm>
+          <a:prstGeom prst="rect">
+            <a:avLst/>
+          </a:prstGeom>
+          <a:noFill/>
+          <a:ln/>
+        </p:spPr>
+        <p:txBody>
+          <a:bodyPr wrap="square" lIns="0" tIns="0" rIns="0" bIns="0" rtlCol="0" anchor="ctr"/>
+          <a:lstStyle/>
+          <a:p>
+            <a:pPr indent="0" marL="0">
+              <a:lnSpc>
+                <a:spcPct val="135000"/>
+              </a:lnSpc>
+              <a:buNone/>
+            </a:pPr>
+            <a:r>
+              <a:rPr lang="en-US" sz="1250" dirty="0">
+                <a:solidFill>
+                  <a:srgbClr val="3F3933"/>
+                </a:solidFill>
+                <a:latin typeface="Yu Gothic" pitchFamily="34" charset="0"/>
+                <a:ea typeface="Yu Gothic" pitchFamily="34" charset="-122"/>
+                <a:cs typeface="Yu Gothic" pitchFamily="34" charset="-120"/>
+              </a:rPr>
+              <a:t>面倒くさがりであることが、実は最大の適性です。そして時間を正式に割り当てること。片手間では必ず失敗します。</a:t>
+            </a:r>
+            <a:endParaRPr lang="en-US" sz="1250" dirty="0"/>
+          </a:p>
+        </p:txBody>
+      </p:sp>
+      <p:sp>
+        <p:nvSpPr>
+          <p:cNvPr id="15" name="Shape 13"/>
+          <p:cNvSpPr/>
+          <p:nvPr/>
+        </p:nvSpPr>
+        <p:spPr>
+          <a:xfrm>
+            <a:off x="777240" y="4983480"/>
+            <a:ext cx="10607040" cy="685800"/>
+          </a:xfrm>
+          <a:prstGeom prst="rect">
+            <a:avLst/>
+          </a:prstGeom>
+          <a:solidFill>
+            <a:srgbClr val="3B6B4A"/>
+          </a:solidFill>
+          <a:ln w="12700">
+            <a:solidFill>
+              <a:srgbClr val="333333"/>
+            </a:solidFill>
+            <a:prstDash val="solid"/>
+          </a:ln>
+        </p:spPr>
+      </p:sp>
+      <p:sp>
+        <p:nvSpPr>
+          <p:cNvPr id="16" name="Text 14"/>
+          <p:cNvSpPr txBox="1"/>
+          <p:nvPr/>
+        </p:nvSpPr>
+        <p:spPr>
+          <a:xfrm>
+            <a:off x="1097280" y="4983480"/>
+            <a:ext cx="9966960" cy="685800"/>
+          </a:xfrm>
+          <a:prstGeom prst="rect">
+            <a:avLst/>
+          </a:prstGeom>
+          <a:noFill/>
+          <a:ln/>
+        </p:spPr>
+        <p:txBody>
+          <a:bodyPr wrap="square" lIns="0" tIns="0" rIns="0" bIns="0" rtlCol="0" anchor="ctr"/>
+          <a:lstStyle/>
+          <a:p>
+            <a:pPr indent="0" marL="0">
+              <a:buNone/>
+            </a:pPr>
+            <a:r>
+              <a:rPr lang="en-US" sz="1450" b="1" dirty="0">
+                <a:solidFill>
+                  <a:srgbClr val="FFFFFF"/>
+                </a:solidFill>
+                <a:latin typeface="Yu Gothic" pitchFamily="34" charset="0"/>
+                <a:ea typeface="Yu Gothic" pitchFamily="34" charset="-122"/>
+                <a:cs typeface="Yu Gothic" pitchFamily="34" charset="-120"/>
+              </a:rPr>
+              <a:t>熱意ではなく、時間を割り当てられるかで決まります</a:t>
+            </a:r>
+            <a:endParaRPr lang="en-US" sz="1450" dirty="0"/>
+          </a:p>
+        </p:txBody>
+      </p:sp>
+      <p:sp>
+        <p:nvSpPr>
+          <p:cNvPr id="17" name="Text 15"/>
+          <p:cNvSpPr txBox="1"/>
+          <p:nvPr/>
+        </p:nvSpPr>
+        <p:spPr>
+          <a:xfrm>
+            <a:off x="777240" y="6382512"/>
+            <a:ext cx="7424928" cy="256032"/>
+          </a:xfrm>
+          <a:prstGeom prst="rect">
+            <a:avLst/>
+          </a:prstGeom>
+          <a:noFill/>
+          <a:ln/>
+        </p:spPr>
+        <p:txBody>
+          <a:bodyPr wrap="square" lIns="0" tIns="0" rIns="0" bIns="0" rtlCol="0" anchor="ctr"/>
+          <a:lstStyle/>
+          <a:p>
+            <a:pPr indent="0" marL="0">
+              <a:buNone/>
+            </a:pPr>
+            <a:r>
+              <a:rPr lang="en-US" sz="900" dirty="0">
+                <a:solidFill>
+                  <a:srgbClr val="8A8177"/>
+                </a:solidFill>
+                <a:latin typeface="Yu Gothic" pitchFamily="34" charset="0"/>
+                <a:ea typeface="Yu Gothic" pitchFamily="34" charset="-122"/>
+                <a:cs typeface="Yu Gothic" pitchFamily="34" charset="-120"/>
+              </a:rPr>
+              <a:t>第11回　組織に載せる</a:t>
+            </a:r>
+            <a:endParaRPr lang="en-US" sz="900" dirty="0"/>
+          </a:p>
+        </p:txBody>
+      </p:sp>
+      <p:sp>
+        <p:nvSpPr>
+          <p:cNvPr id="18" name="Text 16"/>
+          <p:cNvSpPr txBox="1"/>
+          <p:nvPr/>
+        </p:nvSpPr>
+        <p:spPr>
+          <a:xfrm>
+            <a:off x="8202168" y="6382512"/>
+            <a:ext cx="3182112" cy="256032"/>
+          </a:xfrm>
+          <a:prstGeom prst="rect">
+            <a:avLst/>
+          </a:prstGeom>
+          <a:noFill/>
+          <a:ln/>
+        </p:spPr>
+        <p:txBody>
+          <a:bodyPr wrap="square" lIns="0" tIns="0" rIns="0" bIns="0" rtlCol="0" anchor="ctr"/>
+          <a:lstStyle/>
+          <a:p>
+            <a:pPr algn="r" indent="0" marL="0">
+              <a:buNone/>
+            </a:pPr>
+            <a:r>
+              <a:rPr lang="en-US" sz="900" dirty="0">
+                <a:solidFill>
+                  <a:srgbClr val="8A8177"/>
+                </a:solidFill>
+                <a:latin typeface="Yu Gothic" pitchFamily="34" charset="0"/>
+                <a:ea typeface="Yu Gothic" pitchFamily="34" charset="-122"/>
+                <a:cs typeface="Yu Gothic" pitchFamily="34" charset="-120"/>
+              </a:rPr>
+              <a:t>実演 ②</a:t>
+            </a:r>
+            <a:endParaRPr lang="en-US" sz="900" dirty="0"/>
+          </a:p>
+        </p:txBody>
+      </p:sp>
+    </p:spTree>
+  </p:cSld>
+  <p:clrMapOvr>
+    <a:masterClrMapping/>
+  </p:clrMapOvr>
+</p:sld>
+</file>
+
+<file path=ppt/slides/slide8.xml><?xml version="1.0" encoding="utf-8"?>
+<p:sld xmlns:a="http://schemas.openxmlformats.org/drawingml/2006/main" xmlns:r="http://schemas.openxmlformats.org/officeDocument/2006/relationships" xmlns:p="http://schemas.openxmlformats.org/presentationml/2006/main">
+  <p:cSld name="Slide 8">
+    <p:bg>
+      <p:bgPr>
+        <a:solidFill>
+          <a:srgbClr val="F6F2EA"/>
+        </a:solidFill>
+      </p:bgPr>
+    </p:bg>
+    <p:spTree>
+      <p:nvGrpSpPr>
+        <p:cNvPr id="1" name=""/>
+        <p:cNvGrpSpPr/>
+        <p:nvPr/>
+      </p:nvGrpSpPr>
+      <p:grpSpPr>
+        <a:xfrm>
+          <a:off x="0" y="0"/>
+          <a:ext cx="0" cy="0"/>
+          <a:chOff x="0" y="0"/>
+          <a:chExt cx="0" cy="0"/>
+        </a:xfrm>
+      </p:grpSpPr>
+      <p:sp>
+        <p:nvSpPr>
+          <p:cNvPr id="2" name="Text 0"/>
+          <p:cNvSpPr txBox="1"/>
+          <p:nvPr/>
+        </p:nvSpPr>
+        <p:spPr>
+          <a:xfrm>
+            <a:off x="777240" y="566928"/>
+            <a:ext cx="10607040" cy="274320"/>
+          </a:xfrm>
+          <a:prstGeom prst="rect">
+            <a:avLst/>
+          </a:prstGeom>
+          <a:noFill/>
+          <a:ln/>
+        </p:spPr>
+        <p:txBody>
+          <a:bodyPr wrap="square" lIns="0" tIns="0" rIns="0" bIns="0" rtlCol="0" anchor="ctr"/>
+          <a:lstStyle/>
+          <a:p>
+            <a:pPr indent="0" marL="0">
+              <a:buNone/>
+            </a:pPr>
+            <a:r>
+              <a:rPr lang="en-US" sz="1100" b="1" spc="250" kern="0" dirty="0">
+                <a:solidFill>
+                  <a:srgbClr val="B04A2F"/>
+                </a:solidFill>
+                <a:latin typeface="Yu Gothic" pitchFamily="34" charset="0"/>
+                <a:ea typeface="Yu Gothic" pitchFamily="34" charset="-122"/>
+                <a:cs typeface="Yu Gothic" pitchFamily="34" charset="-120"/>
+              </a:rPr>
+              <a:t>つまずきやすいところ</a:t>
+            </a:r>
+            <a:endParaRPr lang="en-US" sz="1100" dirty="0"/>
+          </a:p>
+        </p:txBody>
+      </p:sp>
+      <p:sp>
+        <p:nvSpPr>
+          <p:cNvPr id="3" name="Text 1"/>
+          <p:cNvSpPr txBox="1"/>
+          <p:nvPr/>
+        </p:nvSpPr>
+        <p:spPr>
+          <a:xfrm>
+            <a:off x="777240" y="896112"/>
+            <a:ext cx="10607040" cy="640080"/>
+          </a:xfrm>
+          <a:prstGeom prst="rect">
+            <a:avLst/>
+          </a:prstGeom>
+          <a:noFill/>
+          <a:ln/>
+        </p:spPr>
+        <p:txBody>
+          <a:bodyPr wrap="square" lIns="0" tIns="0" rIns="0" bIns="0" rtlCol="0" anchor="ctr"/>
+          <a:lstStyle/>
+          <a:p>
+            <a:pPr indent="0" marL="0">
+              <a:buNone/>
+            </a:pPr>
+            <a:r>
+              <a:rPr lang="en-US" sz="2600" b="1" dirty="0">
+                <a:solidFill>
+                  <a:srgbClr val="23201D"/>
+                </a:solidFill>
+                <a:latin typeface="Yu Gothic" pitchFamily="34" charset="0"/>
+                <a:ea typeface="Yu Gothic" pitchFamily="34" charset="-122"/>
+                <a:cs typeface="Yu Gothic" pitchFamily="34" charset="-120"/>
+              </a:rPr>
+              <a:t>この回で、よく起きること</a:t>
+            </a:r>
+            <a:endParaRPr lang="en-US" sz="2600" dirty="0"/>
+          </a:p>
+        </p:txBody>
+      </p:sp>
+      <p:sp>
+        <p:nvSpPr>
+          <p:cNvPr id="4" name="Shape 2"/>
+          <p:cNvSpPr/>
+          <p:nvPr/>
+        </p:nvSpPr>
+        <p:spPr>
+          <a:xfrm>
+            <a:off x="777240" y="1737360"/>
+            <a:ext cx="10607040" cy="1078992"/>
+          </a:xfrm>
+          <a:prstGeom prst="rect">
+            <a:avLst/>
+          </a:prstGeom>
+          <a:solidFill>
+            <a:srgbClr val="FFFFFF"/>
+          </a:solidFill>
+          <a:ln w="12700">
+            <a:solidFill>
+              <a:srgbClr val="EDE7DB"/>
+            </a:solidFill>
+            <a:prstDash val="solid"/>
+          </a:ln>
+        </p:spPr>
+      </p:sp>
+      <p:sp>
+        <p:nvSpPr>
           <p:cNvPr id="5" name="Text 3"/>
           <p:cNvSpPr txBox="1"/>
           <p:nvPr/>
         </p:nvSpPr>
         <p:spPr>
           <a:xfrm>
-            <a:off x="1234440" y="2880360"/>
-            <a:ext cx="9692640" cy="1188720"/>
+            <a:off x="1051560" y="1856232"/>
+            <a:ext cx="1463040" cy="256032"/>
+          </a:xfrm>
+          <a:prstGeom prst="rect">
+            <a:avLst/>
+          </a:prstGeom>
+          <a:noFill/>
+          <a:ln/>
+        </p:spPr>
+        <p:txBody>
+          <a:bodyPr wrap="square" lIns="0" tIns="0" rIns="0" bIns="0" rtlCol="0" anchor="ctr"/>
+          <a:lstStyle/>
+          <a:p>
+            <a:pPr indent="0" marL="0">
+              <a:buNone/>
+            </a:pPr>
+            <a:r>
+              <a:rPr lang="en-US" sz="900" b="1" spc="150" kern="0" dirty="0">
+                <a:solidFill>
+                  <a:srgbClr val="8A8177"/>
+                </a:solidFill>
+                <a:latin typeface="Yu Gothic" pitchFamily="34" charset="0"/>
+                <a:ea typeface="Yu Gothic" pitchFamily="34" charset="-122"/>
+                <a:cs typeface="Yu Gothic" pitchFamily="34" charset="-120"/>
+              </a:rPr>
+              <a:t>こうなったら</a:t>
+            </a:r>
+            <a:endParaRPr lang="en-US" sz="900" dirty="0"/>
+          </a:p>
+        </p:txBody>
+      </p:sp>
+      <p:sp>
+        <p:nvSpPr>
+          <p:cNvPr id="6" name="Text 4"/>
+          <p:cNvSpPr txBox="1"/>
+          <p:nvPr/>
+        </p:nvSpPr>
+        <p:spPr>
+          <a:xfrm>
+            <a:off x="1051560" y="2121408"/>
+            <a:ext cx="4454957" cy="566928"/>
           </a:xfrm>
           <a:prstGeom prst="rect">
             <a:avLst/>
@@ -5177,12 +7788,858 @@
           <a:p>
             <a:pPr indent="0" marL="0">
               <a:lnSpc>
-                <a:spcPct val="140000"/>
+                <a:spcPct val="120000"/>
               </a:lnSpc>
               <a:buNone/>
             </a:pPr>
             <a:r>
-              <a:rPr lang="en-US" sz="1900" b="1" dirty="0">
+              <a:rPr lang="en-US" sz="1350" b="1" dirty="0">
+                <a:solidFill>
+                  <a:srgbClr val="23201D"/>
+                </a:solidFill>
+                <a:latin typeface="Yu Gothic" pitchFamily="34" charset="0"/>
+                <a:ea typeface="Yu Gothic" pitchFamily="34" charset="-122"/>
+                <a:cs typeface="Yu Gothic" pitchFamily="34" charset="-120"/>
+              </a:rPr>
+              <a:t>任せられる人がいない</a:t>
+            </a:r>
+            <a:endParaRPr lang="en-US" sz="1350" dirty="0"/>
+          </a:p>
+        </p:txBody>
+      </p:sp>
+      <p:sp>
+        <p:nvSpPr>
+          <p:cNvPr id="7" name="Shape 5"/>
+          <p:cNvSpPr/>
+          <p:nvPr/>
+        </p:nvSpPr>
+        <p:spPr>
+          <a:xfrm>
+            <a:off x="5762549" y="1847088"/>
+            <a:ext cx="18288" cy="859536"/>
+          </a:xfrm>
+          <a:prstGeom prst="rect">
+            <a:avLst/>
+          </a:prstGeom>
+          <a:solidFill>
+            <a:srgbClr val="EDE7DB"/>
+          </a:solidFill>
+          <a:ln w="12700">
+            <a:solidFill>
+              <a:srgbClr val="333333"/>
+            </a:solidFill>
+            <a:prstDash val="solid"/>
+          </a:ln>
+        </p:spPr>
+      </p:sp>
+      <p:sp>
+        <p:nvSpPr>
+          <p:cNvPr id="8" name="Text 6"/>
+          <p:cNvSpPr txBox="1"/>
+          <p:nvPr/>
+        </p:nvSpPr>
+        <p:spPr>
+          <a:xfrm>
+            <a:off x="6080760" y="1856232"/>
+            <a:ext cx="1463040" cy="256032"/>
+          </a:xfrm>
+          <a:prstGeom prst="rect">
+            <a:avLst/>
+          </a:prstGeom>
+          <a:noFill/>
+          <a:ln/>
+        </p:spPr>
+        <p:txBody>
+          <a:bodyPr wrap="square" lIns="0" tIns="0" rIns="0" bIns="0" rtlCol="0" anchor="ctr"/>
+          <a:lstStyle/>
+          <a:p>
+            <a:pPr indent="0" marL="0">
+              <a:buNone/>
+            </a:pPr>
+            <a:r>
+              <a:rPr lang="en-US" sz="900" b="1" spc="150" kern="0" dirty="0">
+                <a:solidFill>
+                  <a:srgbClr val="B04A2F"/>
+                </a:solidFill>
+                <a:latin typeface="Yu Gothic" pitchFamily="34" charset="0"/>
+                <a:ea typeface="Yu Gothic" pitchFamily="34" charset="-122"/>
+                <a:cs typeface="Yu Gothic" pitchFamily="34" charset="-120"/>
+              </a:rPr>
+              <a:t>こうする</a:t>
+            </a:r>
+            <a:endParaRPr lang="en-US" sz="900" dirty="0"/>
+          </a:p>
+        </p:txBody>
+      </p:sp>
+      <p:sp>
+        <p:nvSpPr>
+          <p:cNvPr id="9" name="Text 7"/>
+          <p:cNvSpPr txBox="1"/>
+          <p:nvPr/>
+        </p:nvSpPr>
+        <p:spPr>
+          <a:xfrm>
+            <a:off x="6080760" y="2121408"/>
+            <a:ext cx="5091379" cy="566928"/>
+          </a:xfrm>
+          <a:prstGeom prst="rect">
+            <a:avLst/>
+          </a:prstGeom>
+          <a:noFill/>
+          <a:ln/>
+        </p:spPr>
+        <p:txBody>
+          <a:bodyPr wrap="square" lIns="0" tIns="0" rIns="0" bIns="0" rtlCol="0" anchor="ctr"/>
+          <a:lstStyle/>
+          <a:p>
+            <a:pPr indent="0" marL="0">
+              <a:lnSpc>
+                <a:spcPct val="125000"/>
+              </a:lnSpc>
+              <a:buNone/>
+            </a:pPr>
+            <a:r>
+              <a:rPr lang="en-US" sz="1250" dirty="0">
+                <a:solidFill>
+                  <a:srgbClr val="3F3933"/>
+                </a:solidFill>
+                <a:latin typeface="Yu Gothic" pitchFamily="34" charset="0"/>
+                <a:ea typeface="Yu Gothic" pitchFamily="34" charset="-122"/>
+                <a:cs typeface="Yu Gothic" pitchFamily="34" charset="-120"/>
+              </a:rPr>
+              <a:t>それが本当の経営課題です。無理に決めず「社長が続ける前提で、どこまでなら維持できるか」に切り替えます</a:t>
+            </a:r>
+            <a:endParaRPr lang="en-US" sz="1250" dirty="0"/>
+          </a:p>
+        </p:txBody>
+      </p:sp>
+      <p:sp>
+        <p:nvSpPr>
+          <p:cNvPr id="10" name="Shape 8"/>
+          <p:cNvSpPr/>
+          <p:nvPr/>
+        </p:nvSpPr>
+        <p:spPr>
+          <a:xfrm>
+            <a:off x="777240" y="2944368"/>
+            <a:ext cx="10607040" cy="1078992"/>
+          </a:xfrm>
+          <a:prstGeom prst="rect">
+            <a:avLst/>
+          </a:prstGeom>
+          <a:solidFill>
+            <a:srgbClr val="FFFFFF"/>
+          </a:solidFill>
+          <a:ln w="12700">
+            <a:solidFill>
+              <a:srgbClr val="EDE7DB"/>
+            </a:solidFill>
+            <a:prstDash val="solid"/>
+          </a:ln>
+        </p:spPr>
+      </p:sp>
+      <p:sp>
+        <p:nvSpPr>
+          <p:cNvPr id="11" name="Text 9"/>
+          <p:cNvSpPr txBox="1"/>
+          <p:nvPr/>
+        </p:nvSpPr>
+        <p:spPr>
+          <a:xfrm>
+            <a:off x="1051560" y="3063240"/>
+            <a:ext cx="1463040" cy="256032"/>
+          </a:xfrm>
+          <a:prstGeom prst="rect">
+            <a:avLst/>
+          </a:prstGeom>
+          <a:noFill/>
+          <a:ln/>
+        </p:spPr>
+        <p:txBody>
+          <a:bodyPr wrap="square" lIns="0" tIns="0" rIns="0" bIns="0" rtlCol="0" anchor="ctr"/>
+          <a:lstStyle/>
+          <a:p>
+            <a:pPr indent="0" marL="0">
+              <a:buNone/>
+            </a:pPr>
+            <a:r>
+              <a:rPr lang="en-US" sz="900" b="1" spc="150" kern="0" dirty="0">
+                <a:solidFill>
+                  <a:srgbClr val="8A8177"/>
+                </a:solidFill>
+                <a:latin typeface="Yu Gothic" pitchFamily="34" charset="0"/>
+                <a:ea typeface="Yu Gothic" pitchFamily="34" charset="-122"/>
+                <a:cs typeface="Yu Gothic" pitchFamily="34" charset="-120"/>
+              </a:rPr>
+              <a:t>こうなったら</a:t>
+            </a:r>
+            <a:endParaRPr lang="en-US" sz="900" dirty="0"/>
+          </a:p>
+        </p:txBody>
+      </p:sp>
+      <p:sp>
+        <p:nvSpPr>
+          <p:cNvPr id="12" name="Text 10"/>
+          <p:cNvSpPr txBox="1"/>
+          <p:nvPr/>
+        </p:nvSpPr>
+        <p:spPr>
+          <a:xfrm>
+            <a:off x="1051560" y="3328416"/>
+            <a:ext cx="4454957" cy="566928"/>
+          </a:xfrm>
+          <a:prstGeom prst="rect">
+            <a:avLst/>
+          </a:prstGeom>
+          <a:noFill/>
+          <a:ln/>
+        </p:spPr>
+        <p:txBody>
+          <a:bodyPr wrap="square" lIns="0" tIns="0" rIns="0" bIns="0" rtlCol="0" anchor="ctr"/>
+          <a:lstStyle/>
+          <a:p>
+            <a:pPr indent="0" marL="0">
+              <a:lnSpc>
+                <a:spcPct val="120000"/>
+              </a:lnSpc>
+              <a:buNone/>
+            </a:pPr>
+            <a:r>
+              <a:rPr lang="en-US" sz="1350" b="1" dirty="0">
+                <a:solidFill>
+                  <a:srgbClr val="23201D"/>
+                </a:solidFill>
+                <a:latin typeface="Yu Gothic" pitchFamily="34" charset="0"/>
+                <a:ea typeface="Yu Gothic" pitchFamily="34" charset="-122"/>
+                <a:cs typeface="Yu Gothic" pitchFamily="34" charset="-120"/>
+              </a:rPr>
+              <a:t>効果が数字にならない</a:t>
+            </a:r>
+            <a:endParaRPr lang="en-US" sz="1350" dirty="0"/>
+          </a:p>
+        </p:txBody>
+      </p:sp>
+      <p:sp>
+        <p:nvSpPr>
+          <p:cNvPr id="13" name="Shape 11"/>
+          <p:cNvSpPr/>
+          <p:nvPr/>
+        </p:nvSpPr>
+        <p:spPr>
+          <a:xfrm>
+            <a:off x="5762549" y="3054096"/>
+            <a:ext cx="18288" cy="859536"/>
+          </a:xfrm>
+          <a:prstGeom prst="rect">
+            <a:avLst/>
+          </a:prstGeom>
+          <a:solidFill>
+            <a:srgbClr val="EDE7DB"/>
+          </a:solidFill>
+          <a:ln w="12700">
+            <a:solidFill>
+              <a:srgbClr val="333333"/>
+            </a:solidFill>
+            <a:prstDash val="solid"/>
+          </a:ln>
+        </p:spPr>
+      </p:sp>
+      <p:sp>
+        <p:nvSpPr>
+          <p:cNvPr id="14" name="Text 12"/>
+          <p:cNvSpPr txBox="1"/>
+          <p:nvPr/>
+        </p:nvSpPr>
+        <p:spPr>
+          <a:xfrm>
+            <a:off x="6080760" y="3063240"/>
+            <a:ext cx="1463040" cy="256032"/>
+          </a:xfrm>
+          <a:prstGeom prst="rect">
+            <a:avLst/>
+          </a:prstGeom>
+          <a:noFill/>
+          <a:ln/>
+        </p:spPr>
+        <p:txBody>
+          <a:bodyPr wrap="square" lIns="0" tIns="0" rIns="0" bIns="0" rtlCol="0" anchor="ctr"/>
+          <a:lstStyle/>
+          <a:p>
+            <a:pPr indent="0" marL="0">
+              <a:buNone/>
+            </a:pPr>
+            <a:r>
+              <a:rPr lang="en-US" sz="900" b="1" spc="150" kern="0" dirty="0">
+                <a:solidFill>
+                  <a:srgbClr val="B04A2F"/>
+                </a:solidFill>
+                <a:latin typeface="Yu Gothic" pitchFamily="34" charset="0"/>
+                <a:ea typeface="Yu Gothic" pitchFamily="34" charset="-122"/>
+                <a:cs typeface="Yu Gothic" pitchFamily="34" charset="-120"/>
+              </a:rPr>
+              <a:t>こうする</a:t>
+            </a:r>
+            <a:endParaRPr lang="en-US" sz="900" dirty="0"/>
+          </a:p>
+        </p:txBody>
+      </p:sp>
+      <p:sp>
+        <p:nvSpPr>
+          <p:cNvPr id="15" name="Text 13"/>
+          <p:cNvSpPr txBox="1"/>
+          <p:nvPr/>
+        </p:nvSpPr>
+        <p:spPr>
+          <a:xfrm>
+            <a:off x="6080760" y="3328416"/>
+            <a:ext cx="5091379" cy="566928"/>
+          </a:xfrm>
+          <a:prstGeom prst="rect">
+            <a:avLst/>
+          </a:prstGeom>
+          <a:noFill/>
+          <a:ln/>
+        </p:spPr>
+        <p:txBody>
+          <a:bodyPr wrap="square" lIns="0" tIns="0" rIns="0" bIns="0" rtlCol="0" anchor="ctr"/>
+          <a:lstStyle/>
+          <a:p>
+            <a:pPr indent="0" marL="0">
+              <a:lnSpc>
+                <a:spcPct val="125000"/>
+              </a:lnSpc>
+              <a:buNone/>
+            </a:pPr>
+            <a:r>
+              <a:rPr lang="en-US" sz="1250" dirty="0">
+                <a:solidFill>
+                  <a:srgbClr val="3F3933"/>
+                </a:solidFill>
+                <a:latin typeface="Yu Gothic" pitchFamily="34" charset="0"/>
+                <a:ea typeface="Yu Gothic" pitchFamily="34" charset="-122"/>
+                <a:cs typeface="Yu Gothic" pitchFamily="34" charset="-120"/>
+              </a:rPr>
+              <a:t>時間以外の列を使います。やり直し件数は測りやすく、説得力があります</a:t>
+            </a:r>
+            <a:endParaRPr lang="en-US" sz="1250" dirty="0"/>
+          </a:p>
+        </p:txBody>
+      </p:sp>
+      <p:sp>
+        <p:nvSpPr>
+          <p:cNvPr id="16" name="Shape 14"/>
+          <p:cNvSpPr/>
+          <p:nvPr/>
+        </p:nvSpPr>
+        <p:spPr>
+          <a:xfrm>
+            <a:off x="777240" y="4151376"/>
+            <a:ext cx="10607040" cy="1078992"/>
+          </a:xfrm>
+          <a:prstGeom prst="rect">
+            <a:avLst/>
+          </a:prstGeom>
+          <a:solidFill>
+            <a:srgbClr val="FFFFFF"/>
+          </a:solidFill>
+          <a:ln w="12700">
+            <a:solidFill>
+              <a:srgbClr val="EDE7DB"/>
+            </a:solidFill>
+            <a:prstDash val="solid"/>
+          </a:ln>
+        </p:spPr>
+      </p:sp>
+      <p:sp>
+        <p:nvSpPr>
+          <p:cNvPr id="17" name="Text 15"/>
+          <p:cNvSpPr txBox="1"/>
+          <p:nvPr/>
+        </p:nvSpPr>
+        <p:spPr>
+          <a:xfrm>
+            <a:off x="1051560" y="4270248"/>
+            <a:ext cx="1463040" cy="256032"/>
+          </a:xfrm>
+          <a:prstGeom prst="rect">
+            <a:avLst/>
+          </a:prstGeom>
+          <a:noFill/>
+          <a:ln/>
+        </p:spPr>
+        <p:txBody>
+          <a:bodyPr wrap="square" lIns="0" tIns="0" rIns="0" bIns="0" rtlCol="0" anchor="ctr"/>
+          <a:lstStyle/>
+          <a:p>
+            <a:pPr indent="0" marL="0">
+              <a:buNone/>
+            </a:pPr>
+            <a:r>
+              <a:rPr lang="en-US" sz="900" b="1" spc="150" kern="0" dirty="0">
+                <a:solidFill>
+                  <a:srgbClr val="8A8177"/>
+                </a:solidFill>
+                <a:latin typeface="Yu Gothic" pitchFamily="34" charset="0"/>
+                <a:ea typeface="Yu Gothic" pitchFamily="34" charset="-122"/>
+                <a:cs typeface="Yu Gothic" pitchFamily="34" charset="-120"/>
+              </a:rPr>
+              <a:t>こうなったら</a:t>
+            </a:r>
+            <a:endParaRPr lang="en-US" sz="900" dirty="0"/>
+          </a:p>
+        </p:txBody>
+      </p:sp>
+      <p:sp>
+        <p:nvSpPr>
+          <p:cNvPr id="18" name="Text 16"/>
+          <p:cNvSpPr txBox="1"/>
+          <p:nvPr/>
+        </p:nvSpPr>
+        <p:spPr>
+          <a:xfrm>
+            <a:off x="1051560" y="4535424"/>
+            <a:ext cx="4454957" cy="566928"/>
+          </a:xfrm>
+          <a:prstGeom prst="rect">
+            <a:avLst/>
+          </a:prstGeom>
+          <a:noFill/>
+          <a:ln/>
+        </p:spPr>
+        <p:txBody>
+          <a:bodyPr wrap="square" lIns="0" tIns="0" rIns="0" bIns="0" rtlCol="0" anchor="ctr"/>
+          <a:lstStyle/>
+          <a:p>
+            <a:pPr indent="0" marL="0">
+              <a:lnSpc>
+                <a:spcPct val="120000"/>
+              </a:lnSpc>
+              <a:buNone/>
+            </a:pPr>
+            <a:r>
+              <a:rPr lang="en-US" sz="1350" b="1" dirty="0">
+                <a:solidFill>
+                  <a:srgbClr val="23201D"/>
+                </a:solidFill>
+                <a:latin typeface="Yu Gothic" pitchFamily="34" charset="0"/>
+                <a:ea typeface="Yu Gothic" pitchFamily="34" charset="-122"/>
+                <a:cs typeface="Yu Gothic" pitchFamily="34" charset="-120"/>
+              </a:rPr>
+              <a:t>費用対効果が合わない</a:t>
+            </a:r>
+            <a:endParaRPr lang="en-US" sz="1350" dirty="0"/>
+          </a:p>
+        </p:txBody>
+      </p:sp>
+      <p:sp>
+        <p:nvSpPr>
+          <p:cNvPr id="19" name="Shape 17"/>
+          <p:cNvSpPr/>
+          <p:nvPr/>
+        </p:nvSpPr>
+        <p:spPr>
+          <a:xfrm>
+            <a:off x="5762549" y="4261104"/>
+            <a:ext cx="18288" cy="859536"/>
+          </a:xfrm>
+          <a:prstGeom prst="rect">
+            <a:avLst/>
+          </a:prstGeom>
+          <a:solidFill>
+            <a:srgbClr val="EDE7DB"/>
+          </a:solidFill>
+          <a:ln w="12700">
+            <a:solidFill>
+              <a:srgbClr val="333333"/>
+            </a:solidFill>
+            <a:prstDash val="solid"/>
+          </a:ln>
+        </p:spPr>
+      </p:sp>
+      <p:sp>
+        <p:nvSpPr>
+          <p:cNvPr id="20" name="Text 18"/>
+          <p:cNvSpPr txBox="1"/>
+          <p:nvPr/>
+        </p:nvSpPr>
+        <p:spPr>
+          <a:xfrm>
+            <a:off x="6080760" y="4270248"/>
+            <a:ext cx="1463040" cy="256032"/>
+          </a:xfrm>
+          <a:prstGeom prst="rect">
+            <a:avLst/>
+          </a:prstGeom>
+          <a:noFill/>
+          <a:ln/>
+        </p:spPr>
+        <p:txBody>
+          <a:bodyPr wrap="square" lIns="0" tIns="0" rIns="0" bIns="0" rtlCol="0" anchor="ctr"/>
+          <a:lstStyle/>
+          <a:p>
+            <a:pPr indent="0" marL="0">
+              <a:buNone/>
+            </a:pPr>
+            <a:r>
+              <a:rPr lang="en-US" sz="900" b="1" spc="150" kern="0" dirty="0">
+                <a:solidFill>
+                  <a:srgbClr val="B04A2F"/>
+                </a:solidFill>
+                <a:latin typeface="Yu Gothic" pitchFamily="34" charset="0"/>
+                <a:ea typeface="Yu Gothic" pitchFamily="34" charset="-122"/>
+                <a:cs typeface="Yu Gothic" pitchFamily="34" charset="-120"/>
+              </a:rPr>
+              <a:t>こうする</a:t>
+            </a:r>
+            <a:endParaRPr lang="en-US" sz="900" dirty="0"/>
+          </a:p>
+        </p:txBody>
+      </p:sp>
+      <p:sp>
+        <p:nvSpPr>
+          <p:cNvPr id="21" name="Text 19"/>
+          <p:cNvSpPr txBox="1"/>
+          <p:nvPr/>
+        </p:nvSpPr>
+        <p:spPr>
+          <a:xfrm>
+            <a:off x="6080760" y="4535424"/>
+            <a:ext cx="5091379" cy="566928"/>
+          </a:xfrm>
+          <a:prstGeom prst="rect">
+            <a:avLst/>
+          </a:prstGeom>
+          <a:noFill/>
+          <a:ln/>
+        </p:spPr>
+        <p:txBody>
+          <a:bodyPr wrap="square" lIns="0" tIns="0" rIns="0" bIns="0" rtlCol="0" anchor="ctr"/>
+          <a:lstStyle/>
+          <a:p>
+            <a:pPr indent="0" marL="0">
+              <a:lnSpc>
+                <a:spcPct val="125000"/>
+              </a:lnSpc>
+              <a:buNone/>
+            </a:pPr>
+            <a:r>
+              <a:rPr lang="en-US" sz="1250" dirty="0">
+                <a:solidFill>
+                  <a:srgbClr val="3F3933"/>
+                </a:solidFill>
+                <a:latin typeface="Yu Gothic" pitchFamily="34" charset="0"/>
+                <a:ea typeface="Yu Gothic" pitchFamily="34" charset="-122"/>
+                <a:cs typeface="Yu Gothic" pitchFamily="34" charset="-120"/>
+              </a:rPr>
+              <a:t>合わないなら縮小する判断を支持します。やめる基準を書くことも、講座の成果です</a:t>
+            </a:r>
+            <a:endParaRPr lang="en-US" sz="1250" dirty="0"/>
+          </a:p>
+        </p:txBody>
+      </p:sp>
+      <p:sp>
+        <p:nvSpPr>
+          <p:cNvPr id="22" name="Text 20"/>
+          <p:cNvSpPr txBox="1"/>
+          <p:nvPr/>
+        </p:nvSpPr>
+        <p:spPr>
+          <a:xfrm>
+            <a:off x="777240" y="6382512"/>
+            <a:ext cx="7424928" cy="256032"/>
+          </a:xfrm>
+          <a:prstGeom prst="rect">
+            <a:avLst/>
+          </a:prstGeom>
+          <a:noFill/>
+          <a:ln/>
+        </p:spPr>
+        <p:txBody>
+          <a:bodyPr wrap="square" lIns="0" tIns="0" rIns="0" bIns="0" rtlCol="0" anchor="ctr"/>
+          <a:lstStyle/>
+          <a:p>
+            <a:pPr indent="0" marL="0">
+              <a:buNone/>
+            </a:pPr>
+            <a:r>
+              <a:rPr lang="en-US" sz="900" dirty="0">
+                <a:solidFill>
+                  <a:srgbClr val="8A8177"/>
+                </a:solidFill>
+                <a:latin typeface="Yu Gothic" pitchFamily="34" charset="0"/>
+                <a:ea typeface="Yu Gothic" pitchFamily="34" charset="-122"/>
+                <a:cs typeface="Yu Gothic" pitchFamily="34" charset="-120"/>
+              </a:rPr>
+              <a:t>第11回　組織に載せる</a:t>
+            </a:r>
+            <a:endParaRPr lang="en-US" sz="900" dirty="0"/>
+          </a:p>
+        </p:txBody>
+      </p:sp>
+      <p:sp>
+        <p:nvSpPr>
+          <p:cNvPr id="23" name="Text 21"/>
+          <p:cNvSpPr txBox="1"/>
+          <p:nvPr/>
+        </p:nvSpPr>
+        <p:spPr>
+          <a:xfrm>
+            <a:off x="8202168" y="6382512"/>
+            <a:ext cx="3182112" cy="256032"/>
+          </a:xfrm>
+          <a:prstGeom prst="rect">
+            <a:avLst/>
+          </a:prstGeom>
+          <a:noFill/>
+          <a:ln/>
+        </p:spPr>
+        <p:txBody>
+          <a:bodyPr wrap="square" lIns="0" tIns="0" rIns="0" bIns="0" rtlCol="0" anchor="ctr"/>
+          <a:lstStyle/>
+          <a:p>
+            <a:pPr algn="r" indent="0" marL="0">
+              <a:buNone/>
+            </a:pPr>
+            <a:r>
+              <a:rPr lang="en-US" sz="900" dirty="0">
+                <a:solidFill>
+                  <a:srgbClr val="8A8177"/>
+                </a:solidFill>
+                <a:latin typeface="Yu Gothic" pitchFamily="34" charset="0"/>
+                <a:ea typeface="Yu Gothic" pitchFamily="34" charset="-122"/>
+                <a:cs typeface="Yu Gothic" pitchFamily="34" charset="-120"/>
+              </a:rPr>
+              <a:t>つまずき</a:t>
+            </a:r>
+            <a:endParaRPr lang="en-US" sz="900" dirty="0"/>
+          </a:p>
+        </p:txBody>
+      </p:sp>
+    </p:spTree>
+  </p:cSld>
+  <p:clrMapOvr>
+    <a:masterClrMapping/>
+  </p:clrMapOvr>
+</p:sld>
+</file>
+
+<file path=ppt/slides/slide9.xml><?xml version="1.0" encoding="utf-8"?>
+<p:sld xmlns:a="http://schemas.openxmlformats.org/drawingml/2006/main" xmlns:r="http://schemas.openxmlformats.org/officeDocument/2006/relationships" xmlns:p="http://schemas.openxmlformats.org/presentationml/2006/main">
+  <p:cSld name="Slide 9">
+    <p:bg>
+      <p:bgPr>
+        <a:solidFill>
+          <a:srgbClr val="F6F2EA"/>
+        </a:solidFill>
+      </p:bgPr>
+    </p:bg>
+    <p:spTree>
+      <p:nvGrpSpPr>
+        <p:cNvPr id="1" name=""/>
+        <p:cNvGrpSpPr/>
+        <p:nvPr/>
+      </p:nvGrpSpPr>
+      <p:grpSpPr>
+        <a:xfrm>
+          <a:off x="0" y="0"/>
+          <a:ext cx="0" cy="0"/>
+          <a:chOff x="0" y="0"/>
+          <a:chExt cx="0" cy="0"/>
+        </a:xfrm>
+      </p:grpSpPr>
+      <p:sp>
+        <p:nvSpPr>
+          <p:cNvPr id="2" name="Text 0"/>
+          <p:cNvSpPr txBox="1"/>
+          <p:nvPr/>
+        </p:nvSpPr>
+        <p:spPr>
+          <a:xfrm>
+            <a:off x="777240" y="566928"/>
+            <a:ext cx="10607040" cy="274320"/>
+          </a:xfrm>
+          <a:prstGeom prst="rect">
+            <a:avLst/>
+          </a:prstGeom>
+          <a:noFill/>
+          <a:ln/>
+        </p:spPr>
+        <p:txBody>
+          <a:bodyPr wrap="square" lIns="0" tIns="0" rIns="0" bIns="0" rtlCol="0" anchor="ctr"/>
+          <a:lstStyle/>
+          <a:p>
+            <a:pPr indent="0" marL="0">
+              <a:buNone/>
+            </a:pPr>
+            <a:r>
+              <a:rPr lang="en-US" sz="1100" b="1" spc="250" kern="0" dirty="0">
+                <a:solidFill>
+                  <a:srgbClr val="2F4F6B"/>
+                </a:solidFill>
+                <a:latin typeface="Yu Gothic" pitchFamily="34" charset="0"/>
+                <a:ea typeface="Yu Gothic" pitchFamily="34" charset="-122"/>
+                <a:cs typeface="Yu Gothic" pitchFamily="34" charset="-120"/>
+              </a:rPr>
+              <a:t>演習</a:t>
+            </a:r>
+            <a:endParaRPr lang="en-US" sz="1100" dirty="0"/>
+          </a:p>
+        </p:txBody>
+      </p:sp>
+      <p:sp>
+        <p:nvSpPr>
+          <p:cNvPr id="3" name="Text 1"/>
+          <p:cNvSpPr txBox="1"/>
+          <p:nvPr/>
+        </p:nvSpPr>
+        <p:spPr>
+          <a:xfrm>
+            <a:off x="777240" y="896112"/>
+            <a:ext cx="10607040" cy="640080"/>
+          </a:xfrm>
+          <a:prstGeom prst="rect">
+            <a:avLst/>
+          </a:prstGeom>
+          <a:noFill/>
+          <a:ln/>
+        </p:spPr>
+        <p:txBody>
+          <a:bodyPr wrap="square" lIns="0" tIns="0" rIns="0" bIns="0" rtlCol="0" anchor="ctr"/>
+          <a:lstStyle/>
+          <a:p>
+            <a:pPr indent="0" marL="0">
+              <a:buNone/>
+            </a:pPr>
+            <a:r>
+              <a:rPr lang="en-US" sz="2600" b="1" dirty="0">
+                <a:solidFill>
+                  <a:srgbClr val="23201D"/>
+                </a:solidFill>
+                <a:latin typeface="Yu Gothic" pitchFamily="34" charset="0"/>
+                <a:ea typeface="Yu Gothic" pitchFamily="34" charset="-122"/>
+                <a:cs typeface="Yu Gothic" pitchFamily="34" charset="-120"/>
+              </a:rPr>
+              <a:t>今日、一緒にやること</a:t>
+            </a:r>
+            <a:endParaRPr lang="en-US" sz="2600" dirty="0"/>
+          </a:p>
+        </p:txBody>
+      </p:sp>
+      <p:sp>
+        <p:nvSpPr>
+          <p:cNvPr id="4" name="Text 2"/>
+          <p:cNvSpPr txBox="1"/>
+          <p:nvPr/>
+        </p:nvSpPr>
+        <p:spPr>
+          <a:xfrm>
+            <a:off x="777240" y="1572768"/>
+            <a:ext cx="10607040" cy="320040"/>
+          </a:xfrm>
+          <a:prstGeom prst="rect">
+            <a:avLst/>
+          </a:prstGeom>
+          <a:noFill/>
+          <a:ln/>
+        </p:spPr>
+        <p:txBody>
+          <a:bodyPr wrap="square" lIns="0" tIns="0" rIns="0" bIns="0" rtlCol="0" anchor="ctr"/>
+          <a:lstStyle/>
+          <a:p>
+            <a:pPr indent="0" marL="0">
+              <a:buNone/>
+            </a:pPr>
+            <a:r>
+              <a:rPr lang="en-US" sz="1250" b="1" dirty="0">
+                <a:solidFill>
+                  <a:srgbClr val="2F4F6B"/>
+                </a:solidFill>
+                <a:latin typeface="Yu Gothic" pitchFamily="34" charset="0"/>
+                <a:ea typeface="Yu Gothic" pitchFamily="34" charset="-122"/>
+                <a:cs typeface="Yu Gothic" pitchFamily="34" charset="-120"/>
+              </a:rPr>
+              <a:t>55分。操作するのはご自身です。</a:t>
+            </a:r>
+            <a:endParaRPr lang="en-US" sz="1250" dirty="0"/>
+          </a:p>
+        </p:txBody>
+      </p:sp>
+      <p:sp>
+        <p:nvSpPr>
+          <p:cNvPr id="5" name="Shape 3"/>
+          <p:cNvSpPr/>
+          <p:nvPr/>
+        </p:nvSpPr>
+        <p:spPr>
+          <a:xfrm>
+            <a:off x="777240" y="2148840"/>
+            <a:ext cx="3383280" cy="2880360"/>
+          </a:xfrm>
+          <a:prstGeom prst="rect">
+            <a:avLst/>
+          </a:prstGeom>
+          <a:solidFill>
+            <a:srgbClr val="FFFFFF"/>
+          </a:solidFill>
+          <a:ln w="12700">
+            <a:solidFill>
+              <a:srgbClr val="EDE7DB"/>
+            </a:solidFill>
+            <a:prstDash val="solid"/>
+          </a:ln>
+        </p:spPr>
+      </p:sp>
+      <p:sp>
+        <p:nvSpPr>
+          <p:cNvPr id="6" name="Shape 4"/>
+          <p:cNvSpPr/>
+          <p:nvPr/>
+        </p:nvSpPr>
+        <p:spPr>
+          <a:xfrm>
+            <a:off x="1051560" y="2395728"/>
+            <a:ext cx="438912" cy="438912"/>
+          </a:xfrm>
+          <a:prstGeom prst="ellipse">
+            <a:avLst/>
+          </a:prstGeom>
+          <a:solidFill>
+            <a:srgbClr val="2F4F6B"/>
+          </a:solidFill>
+          <a:ln w="12700">
+            <a:solidFill>
+              <a:srgbClr val="333333"/>
+            </a:solidFill>
+            <a:prstDash val="solid"/>
+          </a:ln>
+        </p:spPr>
+      </p:sp>
+      <p:sp>
+        <p:nvSpPr>
+          <p:cNvPr id="7" name="Text 5"/>
+          <p:cNvSpPr txBox="1"/>
+          <p:nvPr/>
+        </p:nvSpPr>
+        <p:spPr>
+          <a:xfrm>
+            <a:off x="1051560" y="2395728"/>
+            <a:ext cx="438912" cy="438912"/>
+          </a:xfrm>
+          <a:prstGeom prst="rect">
+            <a:avLst/>
+          </a:prstGeom>
+          <a:noFill/>
+          <a:ln/>
+        </p:spPr>
+        <p:txBody>
+          <a:bodyPr wrap="square" lIns="0" tIns="0" rIns="0" bIns="0" rtlCol="0" anchor="ctr"/>
+          <a:lstStyle/>
+          <a:p>
+            <a:pPr algn="ctr" indent="0" marL="0">
+              <a:buNone/>
+            </a:pPr>
+            <a:r>
+              <a:rPr lang="en-US" sz="1300" b="1" dirty="0">
                 <a:solidFill>
                   <a:srgbClr val="FFFFFF"/>
                 </a:solidFill>
@@ -5190,22 +8647,22 @@
                 <a:ea typeface="Yu Gothic" pitchFamily="34" charset="-122"/>
                 <a:cs typeface="Yu Gothic" pitchFamily="34" charset="-120"/>
               </a:rPr>
-              <a:t>効果測定シートの「現在」の列を、実測値で埋める。</a:t>
-            </a:r>
-            <a:endParaRPr lang="en-US" sz="1900" dirty="0"/>
-          </a:p>
-        </p:txBody>
-      </p:sp>
-      <p:sp>
-        <p:nvSpPr>
-          <p:cNvPr id="6" name="Text 4"/>
-          <p:cNvSpPr txBox="1"/>
-          <p:nvPr/>
-        </p:nvSpPr>
-        <p:spPr>
-          <a:xfrm>
-            <a:off x="777240" y="4572000"/>
-            <a:ext cx="10607040" cy="822960"/>
+              <a:t>1</a:t>
+            </a:r>
+            <a:endParaRPr lang="en-US" sz="1300" dirty="0"/>
+          </a:p>
+        </p:txBody>
+      </p:sp>
+      <p:sp>
+        <p:nvSpPr>
+          <p:cNvPr id="8" name="Text 6"/>
+          <p:cNvSpPr txBox="1"/>
+          <p:nvPr/>
+        </p:nvSpPr>
+        <p:spPr>
+          <a:xfrm>
+            <a:off x="1051560" y="2944368"/>
+            <a:ext cx="2834640" cy="731520"/>
           </a:xfrm>
           <a:prstGeom prst="rect">
             <a:avLst/>
@@ -5219,40 +8676,324 @@
           <a:p>
             <a:pPr indent="0" marL="0">
               <a:lnSpc>
-                <a:spcPct val="145000"/>
+                <a:spcPct val="125000"/>
               </a:lnSpc>
               <a:buNone/>
             </a:pPr>
             <a:r>
-              <a:rPr lang="en-US" sz="1300" dirty="0">
-                <a:solidFill>
-                  <a:srgbClr val="B9B0A4"/>
-                </a:solidFill>
-                <a:latin typeface="Yu Gothic" pitchFamily="34" charset="0"/>
-                <a:ea typeface="Yu Gothic" pitchFamily="34" charset="-122"/>
-                <a:cs typeface="Yu Gothic" pitchFamily="34" charset="-120"/>
-              </a:rPr>
-              <a:t>15分で終わる大きさにしてあります。できなかった回があっても構いません。</a:t>
+              <a:rPr lang="en-US" sz="1450" b="1" dirty="0">
+                <a:solidFill>
+                  <a:srgbClr val="23201D"/>
+                </a:solidFill>
+                <a:latin typeface="Yu Gothic" pitchFamily="34" charset="0"/>
+                <a:ea typeface="Yu Gothic" pitchFamily="34" charset="-122"/>
+                <a:cs typeface="Yu Gothic" pitchFamily="34" charset="-120"/>
+              </a:rPr>
+              <a:t>体制図を書く</a:t>
+            </a:r>
+            <a:endParaRPr lang="en-US" sz="1450" dirty="0"/>
+          </a:p>
+        </p:txBody>
+      </p:sp>
+      <p:sp>
+        <p:nvSpPr>
+          <p:cNvPr id="9" name="Text 7"/>
+          <p:cNvSpPr txBox="1"/>
+          <p:nvPr/>
+        </p:nvSpPr>
+        <p:spPr>
+          <a:xfrm>
+            <a:off x="1051560" y="3703320"/>
+            <a:ext cx="2834640" cy="1188720"/>
+          </a:xfrm>
+          <a:prstGeom prst="rect">
+            <a:avLst/>
+          </a:prstGeom>
+          <a:noFill/>
+          <a:ln/>
+        </p:spPr>
+        <p:txBody>
+          <a:bodyPr wrap="square" lIns="0" tIns="0" rIns="0" bIns="0" rtlCol="0" anchor="ctr"/>
+          <a:lstStyle/>
+          <a:p>
+            <a:pPr indent="0" marL="0">
+              <a:lnSpc>
+                <a:spcPct val="130000"/>
+              </a:lnSpc>
+              <a:buNone/>
+            </a:pPr>
+            <a:r>
+              <a:rPr lang="en-US" sz="1150" dirty="0">
+                <a:solidFill>
+                  <a:srgbClr val="5A534A"/>
+                </a:solidFill>
+                <a:latin typeface="Yu Gothic" pitchFamily="34" charset="0"/>
+                <a:ea typeface="Yu Gothic" pitchFamily="34" charset="-122"/>
+                <a:cs typeface="Yu Gothic" pitchFamily="34" charset="-120"/>
+              </a:rPr>
+              <a:t>推進役を実名で決めます。決まらないなら、その理由を言葉にします</a:t>
+            </a:r>
+            <a:endParaRPr lang="en-US" sz="1150" dirty="0"/>
+          </a:p>
+        </p:txBody>
+      </p:sp>
+      <p:sp>
+        <p:nvSpPr>
+          <p:cNvPr id="10" name="Shape 8"/>
+          <p:cNvSpPr/>
+          <p:nvPr/>
+        </p:nvSpPr>
+        <p:spPr>
+          <a:xfrm>
+            <a:off x="4389120" y="2148840"/>
+            <a:ext cx="3383280" cy="2880360"/>
+          </a:xfrm>
+          <a:prstGeom prst="rect">
+            <a:avLst/>
+          </a:prstGeom>
+          <a:solidFill>
+            <a:srgbClr val="FFFFFF"/>
+          </a:solidFill>
+          <a:ln w="12700">
+            <a:solidFill>
+              <a:srgbClr val="EDE7DB"/>
+            </a:solidFill>
+            <a:prstDash val="solid"/>
+          </a:ln>
+        </p:spPr>
+      </p:sp>
+      <p:sp>
+        <p:nvSpPr>
+          <p:cNvPr id="11" name="Shape 9"/>
+          <p:cNvSpPr/>
+          <p:nvPr/>
+        </p:nvSpPr>
+        <p:spPr>
+          <a:xfrm>
+            <a:off x="4663440" y="2395728"/>
+            <a:ext cx="438912" cy="438912"/>
+          </a:xfrm>
+          <a:prstGeom prst="ellipse">
+            <a:avLst/>
+          </a:prstGeom>
+          <a:solidFill>
+            <a:srgbClr val="2F4F6B"/>
+          </a:solidFill>
+          <a:ln w="12700">
+            <a:solidFill>
+              <a:srgbClr val="333333"/>
+            </a:solidFill>
+            <a:prstDash val="solid"/>
+          </a:ln>
+        </p:spPr>
+      </p:sp>
+      <p:sp>
+        <p:nvSpPr>
+          <p:cNvPr id="12" name="Text 10"/>
+          <p:cNvSpPr txBox="1"/>
+          <p:nvPr/>
+        </p:nvSpPr>
+        <p:spPr>
+          <a:xfrm>
+            <a:off x="4663440" y="2395728"/>
+            <a:ext cx="438912" cy="438912"/>
+          </a:xfrm>
+          <a:prstGeom prst="rect">
+            <a:avLst/>
+          </a:prstGeom>
+          <a:noFill/>
+          <a:ln/>
+        </p:spPr>
+        <p:txBody>
+          <a:bodyPr wrap="square" lIns="0" tIns="0" rIns="0" bIns="0" rtlCol="0" anchor="ctr"/>
+          <a:lstStyle/>
+          <a:p>
+            <a:pPr algn="ctr" indent="0" marL="0">
+              <a:buNone/>
+            </a:pPr>
+            <a:r>
+              <a:rPr lang="en-US" sz="1300" b="1" dirty="0">
+                <a:solidFill>
+                  <a:srgbClr val="FFFFFF"/>
+                </a:solidFill>
+                <a:latin typeface="Yu Gothic" pitchFamily="34" charset="0"/>
+                <a:ea typeface="Yu Gothic" pitchFamily="34" charset="-122"/>
+                <a:cs typeface="Yu Gothic" pitchFamily="34" charset="-120"/>
+              </a:rPr>
+              <a:t>2</a:t>
             </a:r>
             <a:endParaRPr lang="en-US" sz="1300" dirty="0"/>
           </a:p>
+        </p:txBody>
+      </p:sp>
+      <p:sp>
+        <p:nvSpPr>
+          <p:cNvPr id="13" name="Text 11"/>
+          <p:cNvSpPr txBox="1"/>
+          <p:nvPr/>
+        </p:nvSpPr>
+        <p:spPr>
+          <a:xfrm>
+            <a:off x="4663440" y="2944368"/>
+            <a:ext cx="2834640" cy="731520"/>
+          </a:xfrm>
+          <a:prstGeom prst="rect">
+            <a:avLst/>
+          </a:prstGeom>
+          <a:noFill/>
+          <a:ln/>
+        </p:spPr>
+        <p:txBody>
+          <a:bodyPr wrap="square" lIns="0" tIns="0" rIns="0" bIns="0" rtlCol="0" anchor="ctr"/>
+          <a:lstStyle/>
           <a:p>
             <a:pPr indent="0" marL="0">
               <a:lnSpc>
-                <a:spcPct val="145000"/>
+                <a:spcPct val="125000"/>
               </a:lnSpc>
               <a:buNone/>
             </a:pPr>
             <a:r>
-              <a:rPr lang="en-US" sz="1300" dirty="0">
-                <a:solidFill>
-                  <a:srgbClr val="B9B0A4"/>
-                </a:solidFill>
-                <a:latin typeface="Yu Gothic" pitchFamily="34" charset="0"/>
-                <a:ea typeface="Yu Gothic" pitchFamily="34" charset="-122"/>
-                <a:cs typeface="Yu Gothic" pitchFamily="34" charset="-120"/>
-              </a:rPr>
-              <a:t>2回続いたら、宿題の出し方を見直します。</a:t>
+              <a:rPr lang="en-US" sz="1450" b="1" dirty="0">
+                <a:solidFill>
+                  <a:srgbClr val="23201D"/>
+                </a:solidFill>
+                <a:latin typeface="Yu Gothic" pitchFamily="34" charset="0"/>
+                <a:ea typeface="Yu Gothic" pitchFamily="34" charset="-122"/>
+                <a:cs typeface="Yu Gothic" pitchFamily="34" charset="-120"/>
+              </a:rPr>
+              <a:t>権限と費用を洗う</a:t>
+            </a:r>
+            <a:endParaRPr lang="en-US" sz="1450" dirty="0"/>
+          </a:p>
+        </p:txBody>
+      </p:sp>
+      <p:sp>
+        <p:nvSpPr>
+          <p:cNvPr id="14" name="Text 12"/>
+          <p:cNvSpPr txBox="1"/>
+          <p:nvPr/>
+        </p:nvSpPr>
+        <p:spPr>
+          <a:xfrm>
+            <a:off x="4663440" y="3703320"/>
+            <a:ext cx="2834640" cy="1188720"/>
+          </a:xfrm>
+          <a:prstGeom prst="rect">
+            <a:avLst/>
+          </a:prstGeom>
+          <a:noFill/>
+          <a:ln/>
+        </p:spPr>
+        <p:txBody>
+          <a:bodyPr wrap="square" lIns="0" tIns="0" rIns="0" bIns="0" rtlCol="0" anchor="ctr"/>
+          <a:lstStyle/>
+          <a:p>
+            <a:pPr indent="0" marL="0">
+              <a:lnSpc>
+                <a:spcPct val="130000"/>
+              </a:lnSpc>
+              <a:buNone/>
+            </a:pPr>
+            <a:r>
+              <a:rPr lang="en-US" sz="1150" dirty="0">
+                <a:solidFill>
+                  <a:srgbClr val="5A534A"/>
+                </a:solidFill>
+                <a:latin typeface="Yu Gothic" pitchFamily="34" charset="0"/>
+                <a:ea typeface="Yu Gothic" pitchFamily="34" charset="-122"/>
+                <a:cs typeface="Yu Gothic" pitchFamily="34" charset="-120"/>
+              </a:rPr>
+              <a:t>誰が何のアカウントを持ち、月いくら払っているか。個人名義が残っていないかを確認します</a:t>
+            </a:r>
+            <a:endParaRPr lang="en-US" sz="1150" dirty="0"/>
+          </a:p>
+        </p:txBody>
+      </p:sp>
+      <p:sp>
+        <p:nvSpPr>
+          <p:cNvPr id="15" name="Shape 13"/>
+          <p:cNvSpPr/>
+          <p:nvPr/>
+        </p:nvSpPr>
+        <p:spPr>
+          <a:xfrm>
+            <a:off x="8001000" y="2148840"/>
+            <a:ext cx="3383280" cy="2880360"/>
+          </a:xfrm>
+          <a:prstGeom prst="rect">
+            <a:avLst/>
+          </a:prstGeom>
+          <a:solidFill>
+            <a:srgbClr val="FFFFFF"/>
+          </a:solidFill>
+          <a:ln w="12700">
+            <a:solidFill>
+              <a:srgbClr val="EDE7DB"/>
+            </a:solidFill>
+            <a:prstDash val="solid"/>
+          </a:ln>
+        </p:spPr>
+      </p:sp>
+      <p:sp>
+        <p:nvSpPr>
+          <p:cNvPr id="16" name="Shape 14"/>
+          <p:cNvSpPr/>
+          <p:nvPr/>
+        </p:nvSpPr>
+        <p:spPr>
+          <a:xfrm>
+            <a:off x="8275320" y="2395728"/>
+            <a:ext cx="438912" cy="438912"/>
+          </a:xfrm>
+          <a:prstGeom prst="ellipse">
+            <a:avLst/>
+          </a:prstGeom>
+          <a:solidFill>
+            <a:srgbClr val="2F4F6B"/>
+          </a:solidFill>
+          <a:ln w="12700">
+            <a:solidFill>
+              <a:srgbClr val="333333"/>
+            </a:solidFill>
+            <a:prstDash val="solid"/>
+          </a:ln>
+        </p:spPr>
+      </p:sp>
+      <p:sp>
+        <p:nvSpPr>
+          <p:cNvPr id="17" name="Text 15"/>
+          <p:cNvSpPr txBox="1"/>
+          <p:nvPr/>
+        </p:nvSpPr>
+        <p:spPr>
+          <a:xfrm>
+            <a:off x="8275320" y="2395728"/>
+            <a:ext cx="438912" cy="438912"/>
+          </a:xfrm>
+          <a:prstGeom prst="rect">
+            <a:avLst/>
+          </a:prstGeom>
+          <a:noFill/>
+          <a:ln/>
+        </p:spPr>
+        <p:txBody>
+          <a:bodyPr wrap="square" lIns="0" tIns="0" rIns="0" bIns="0" rtlCol="0" anchor="ctr"/>
+          <a:lstStyle/>
+          <a:p>
+            <a:pPr algn="ctr" indent="0" marL="0">
+              <a:buNone/>
+            </a:pPr>
+            <a:r>
+              <a:rPr lang="en-US" sz="1300" b="1" dirty="0">
+                <a:solidFill>
+                  <a:srgbClr val="FFFFFF"/>
+                </a:solidFill>
+                <a:latin typeface="Yu Gothic" pitchFamily="34" charset="0"/>
+                <a:ea typeface="Yu Gothic" pitchFamily="34" charset="-122"/>
+                <a:cs typeface="Yu Gothic" pitchFamily="34" charset="-120"/>
+              </a:rPr>
+              <a:t>3</a:t>
             </a:r>
             <a:endParaRPr lang="en-US" sz="1300" dirty="0"/>
           </a:p>
@@ -5260,14 +9001,98 @@
       </p:sp>
       <p:sp>
         <p:nvSpPr>
-          <p:cNvPr id="7" name="Text 5"/>
-          <p:cNvSpPr txBox="1"/>
-          <p:nvPr/>
-        </p:nvSpPr>
-        <p:spPr>
-          <a:xfrm>
-            <a:off x="777240" y="6355080"/>
-            <a:ext cx="10607040" cy="274320"/>
+          <p:cNvPr id="18" name="Text 16"/>
+          <p:cNvSpPr txBox="1"/>
+          <p:nvPr/>
+        </p:nvSpPr>
+        <p:spPr>
+          <a:xfrm>
+            <a:off x="8275320" y="2944368"/>
+            <a:ext cx="2834640" cy="731520"/>
+          </a:xfrm>
+          <a:prstGeom prst="rect">
+            <a:avLst/>
+          </a:prstGeom>
+          <a:noFill/>
+          <a:ln/>
+        </p:spPr>
+        <p:txBody>
+          <a:bodyPr wrap="square" lIns="0" tIns="0" rIns="0" bIns="0" rtlCol="0" anchor="ctr"/>
+          <a:lstStyle/>
+          <a:p>
+            <a:pPr indent="0" marL="0">
+              <a:lnSpc>
+                <a:spcPct val="125000"/>
+              </a:lnSpc>
+              <a:buNone/>
+            </a:pPr>
+            <a:r>
+              <a:rPr lang="en-US" sz="1450" b="1" dirty="0">
+                <a:solidFill>
+                  <a:srgbClr val="23201D"/>
+                </a:solidFill>
+                <a:latin typeface="Yu Gothic" pitchFamily="34" charset="0"/>
+                <a:ea typeface="Yu Gothic" pitchFamily="34" charset="-122"/>
+                <a:cs typeface="Yu Gothic" pitchFamily="34" charset="-120"/>
+              </a:rPr>
+              <a:t>効果測定シートを作る</a:t>
+            </a:r>
+            <a:endParaRPr lang="en-US" sz="1450" dirty="0"/>
+          </a:p>
+        </p:txBody>
+      </p:sp>
+      <p:sp>
+        <p:nvSpPr>
+          <p:cNvPr id="19" name="Text 17"/>
+          <p:cNvSpPr txBox="1"/>
+          <p:nvPr/>
+        </p:nvSpPr>
+        <p:spPr>
+          <a:xfrm>
+            <a:off x="8275320" y="3703320"/>
+            <a:ext cx="2834640" cy="1188720"/>
+          </a:xfrm>
+          <a:prstGeom prst="rect">
+            <a:avLst/>
+          </a:prstGeom>
+          <a:noFill/>
+          <a:ln/>
+        </p:spPr>
+        <p:txBody>
+          <a:bodyPr wrap="square" lIns="0" tIns="0" rIns="0" bIns="0" rtlCol="0" anchor="ctr"/>
+          <a:lstStyle/>
+          <a:p>
+            <a:pPr indent="0" marL="0">
+              <a:lnSpc>
+                <a:spcPct val="130000"/>
+              </a:lnSpc>
+              <a:buNone/>
+            </a:pPr>
+            <a:r>
+              <a:rPr lang="en-US" sz="1150" dirty="0">
+                <a:solidFill>
+                  <a:srgbClr val="5A534A"/>
+                </a:solidFill>
+                <a:latin typeface="Yu Gothic" pitchFamily="34" charset="0"/>
+                <a:ea typeface="Yu Gothic" pitchFamily="34" charset="-122"/>
+                <a:cs typeface="Yu Gothic" pitchFamily="34" charset="-120"/>
+              </a:rPr>
+              <a:t>時間・品質・範囲・金額の4行。現在値をその場で埋めます</a:t>
+            </a:r>
+            <a:endParaRPr lang="en-US" sz="1150" dirty="0"/>
+          </a:p>
+        </p:txBody>
+      </p:sp>
+      <p:sp>
+        <p:nvSpPr>
+          <p:cNvPr id="20" name="Text 18"/>
+          <p:cNvSpPr txBox="1"/>
+          <p:nvPr/>
+        </p:nvSpPr>
+        <p:spPr>
+          <a:xfrm>
+            <a:off x="777240" y="6382512"/>
+            <a:ext cx="7424928" cy="256032"/>
           </a:xfrm>
           <a:prstGeom prst="rect">
             <a:avLst/>
@@ -5285,13 +9110,52 @@
             <a:r>
               <a:rPr lang="en-US" sz="900" dirty="0">
                 <a:solidFill>
-                  <a:srgbClr val="6E6558"/>
+                  <a:srgbClr val="8A8177"/>
                 </a:solidFill>
                 <a:latin typeface="Yu Gothic" pitchFamily="34" charset="0"/>
                 <a:ea typeface="Yu Gothic" pitchFamily="34" charset="-122"/>
                 <a:cs typeface="Yu Gothic" pitchFamily="34" charset="-120"/>
               </a:rPr>
               <a:t>第11回　組織に載せる</a:t>
+            </a:r>
+            <a:endParaRPr lang="en-US" sz="900" dirty="0"/>
+          </a:p>
+        </p:txBody>
+      </p:sp>
+      <p:sp>
+        <p:nvSpPr>
+          <p:cNvPr id="21" name="Text 19"/>
+          <p:cNvSpPr txBox="1"/>
+          <p:nvPr/>
+        </p:nvSpPr>
+        <p:spPr>
+          <a:xfrm>
+            <a:off x="8202168" y="6382512"/>
+            <a:ext cx="3182112" cy="256032"/>
+          </a:xfrm>
+          <a:prstGeom prst="rect">
+            <a:avLst/>
+          </a:prstGeom>
+          <a:noFill/>
+          <a:ln/>
+        </p:spPr>
+        <p:txBody>
+          <a:bodyPr wrap="square" lIns="0" tIns="0" rIns="0" bIns="0" rtlCol="0" anchor="ctr"/>
+          <a:lstStyle/>
+          <a:p>
+            <a:pPr algn="r" indent="0" marL="0">
+              <a:buNone/>
+            </a:pPr>
+            <a:r>
+              <a:rPr lang="en-US" sz="900" dirty="0">
+                <a:solidFill>
+                  <a:srgbClr val="8A8177"/>
+                </a:solidFill>
+                <a:latin typeface="Yu Gothic" pitchFamily="34" charset="0"/>
+                <a:ea typeface="Yu Gothic" pitchFamily="34" charset="-122"/>
+                <a:cs typeface="Yu Gothic" pitchFamily="34" charset="-120"/>
+              </a:rPr>
+              <a:t>演習</a:t>
             </a:r>
             <a:endParaRPr lang="en-US" sz="900" dirty="0"/>
           </a:p>

--- a/slides/pptx/第11回_組織に載せる.pptx
+++ b/slides/pptx/第11回_組織に載せる.pptx
@@ -17,9 +17,12 @@
     <p:sldId id="265" r:id="rId11"/>
     <p:sldId id="266" r:id="rId12"/>
     <p:sldId id="267" r:id="rId13"/>
+    <p:sldId id="268" r:id="rId14"/>
+    <p:sldId id="269" r:id="rId15"/>
+    <p:sldId id="270" r:id="rId16"/>
   </p:sldIdLst>
   <p:notesMasterIdLst>
-    <p:notesMasterId r:id="rId14"/>
+    <p:notesMasterId r:id="rId17"/>
   </p:notesMasterIdLst>
   <p:sldSz cx="12192000" cy="6858000"/>
   <p:notesSz cx="6858000" cy="12192000"/>
@@ -601,7 +604,7 @@
           <a:p>
             <a:r>
               <a:rPr lang="en-US" dirty="0"/>
-              <a:t>月何時間、を数字で決める。「できる範囲で」は割り当てではない。</a:t>
+              <a:t>4役割は紙に書いて渡す。口頭だけだと翌週には消えている。</a:t>
             </a:r>
             <a:endParaRPr lang="en-US" dirty="0"/>
           </a:p>
@@ -689,7 +692,7 @@
           <a:p>
             <a:r>
               <a:rPr lang="en-US" dirty="0"/>
-              <a:t>個人名義の契約は、聞かないと出てこない。明細を一緒に見るくらいでよい。法人契約への移行提案は、この回が正しい場所。第2回で勧めると売り込みに見える。</a:t>
+              <a:t>第8回の不足資料リストと第10回の基準未定義業務を、必ずここで回収する。担当のつかない項目は永久に埋まらない。</a:t>
             </a:r>
             <a:endParaRPr lang="en-US" dirty="0"/>
           </a:p>
@@ -777,7 +780,7 @@
           <a:p>
             <a:r>
               <a:rPr lang="en-US" dirty="0"/>
-              <a:t>推定値で埋めさせない。実測してもらう。思ったより減っていない項目が見つかるのが、むしろ収穫。</a:t>
+              <a:t>月何時間、を数字で決める。「できる範囲で」は割り当てではない。</a:t>
             </a:r>
             <a:endParaRPr lang="en-US" dirty="0"/>
           </a:p>
@@ -801,6 +804,270 @@
             <a:fld id="{F7021451-1387-4CA6-816F-3879F97B5CBC}" type="slidenum">
               <a:rPr lang="en-US"/>
               <a:t>12</a:t>
+            </a:fld>
+            <a:endParaRPr lang="en-US"/>
+          </a:p>
+        </p:txBody>
+      </p:sp>
+    </p:spTree>
+    <p:extLst>
+      <p:ext uri="{BB962C8B-B14F-4D97-AF65-F5344CB8AC3E}">
+        <p14:creationId xmlns:p14="http://schemas.microsoft.com/office/powerpoint/2010/main" val="1024086991"/>
+      </p:ext>
+    </p:extLst>
+  </p:cSld>
+  <p:clrMapOvr>
+    <a:masterClrMapping/>
+  </p:clrMapOvr>
+</p:notes>
+</file>
+
+<file path=ppt/notesSlides/notesSlide13.xml><?xml version="1.0" encoding="utf-8"?>
+<p:notes xmlns:a="http://schemas.openxmlformats.org/drawingml/2006/main" xmlns:r="http://schemas.openxmlformats.org/officeDocument/2006/relationships" xmlns:p="http://schemas.openxmlformats.org/presentationml/2006/main">
+  <p:cSld>
+    <p:spTree>
+      <p:nvGrpSpPr>
+        <p:cNvPr id="1" name=""/>
+        <p:cNvGrpSpPr/>
+        <p:nvPr/>
+      </p:nvGrpSpPr>
+      <p:grpSpPr>
+        <a:xfrm>
+          <a:off x="0" y="0"/>
+          <a:ext cx="0" cy="0"/>
+          <a:chOff x="0" y="0"/>
+          <a:chExt cx="0" cy="0"/>
+        </a:xfrm>
+      </p:grpSpPr>
+      <p:sp>
+        <p:nvSpPr>
+          <p:cNvPr id="2" name="Slide Image Placeholder 1"/>
+          <p:cNvSpPr>
+            <a:spLocks noGrp="1" noRot="1" noChangeAspect="1"/>
+          </p:cNvSpPr>
+          <p:nvPr>
+            <p:ph type="sldImg"/>
+          </p:nvPr>
+        </p:nvSpPr>
+        <p:spPr/>
+      </p:sp>
+      <p:sp>
+        <p:nvSpPr>
+          <p:cNvPr id="3" name="Notes Placeholder 2"/>
+          <p:cNvSpPr>
+            <a:spLocks noGrp="1"/>
+          </p:cNvSpPr>
+          <p:nvPr>
+            <p:ph type="body" idx="1"/>
+          </p:nvPr>
+        </p:nvSpPr>
+        <p:spPr/>
+        <p:txBody>
+          <a:bodyPr/>
+          <a:lstStyle/>
+          <a:p>
+            <a:r>
+              <a:rPr lang="en-US" dirty="0"/>
+              <a:t>個人名義の契約は、聞かないと出てこない。明細を一緒に見るくらいでよい。法人契約への移行提案は、この回が正しい場所。第2回で勧めると売り込みに見える。</a:t>
+            </a:r>
+            <a:endParaRPr lang="en-US" dirty="0"/>
+          </a:p>
+        </p:txBody>
+      </p:sp>
+      <p:sp>
+        <p:nvSpPr>
+          <p:cNvPr id="4" name="Slide Number Placeholder 3"/>
+          <p:cNvSpPr>
+            <a:spLocks noGrp="1"/>
+          </p:cNvSpPr>
+          <p:nvPr>
+            <p:ph type="sldNum" sz="quarter" idx="10"/>
+          </p:nvPr>
+        </p:nvSpPr>
+        <p:spPr/>
+        <p:txBody>
+          <a:bodyPr/>
+          <a:lstStyle/>
+          <a:p>
+            <a:fld id="{F7021451-1387-4CA6-816F-3879F97B5CBC}" type="slidenum">
+              <a:rPr lang="en-US"/>
+              <a:t>13</a:t>
+            </a:fld>
+            <a:endParaRPr lang="en-US"/>
+          </a:p>
+        </p:txBody>
+      </p:sp>
+    </p:spTree>
+    <p:extLst>
+      <p:ext uri="{BB962C8B-B14F-4D97-AF65-F5344CB8AC3E}">
+        <p14:creationId xmlns:p14="http://schemas.microsoft.com/office/powerpoint/2010/main" val="1024086991"/>
+      </p:ext>
+    </p:extLst>
+  </p:cSld>
+  <p:clrMapOvr>
+    <a:masterClrMapping/>
+  </p:clrMapOvr>
+</p:notes>
+</file>
+
+<file path=ppt/notesSlides/notesSlide14.xml><?xml version="1.0" encoding="utf-8"?>
+<p:notes xmlns:a="http://schemas.openxmlformats.org/drawingml/2006/main" xmlns:r="http://schemas.openxmlformats.org/officeDocument/2006/relationships" xmlns:p="http://schemas.openxmlformats.org/presentationml/2006/main">
+  <p:cSld>
+    <p:spTree>
+      <p:nvGrpSpPr>
+        <p:cNvPr id="1" name=""/>
+        <p:cNvGrpSpPr/>
+        <p:nvPr/>
+      </p:nvGrpSpPr>
+      <p:grpSpPr>
+        <a:xfrm>
+          <a:off x="0" y="0"/>
+          <a:ext cx="0" cy="0"/>
+          <a:chOff x="0" y="0"/>
+          <a:chExt cx="0" cy="0"/>
+        </a:xfrm>
+      </p:grpSpPr>
+      <p:sp>
+        <p:nvSpPr>
+          <p:cNvPr id="2" name="Slide Image Placeholder 1"/>
+          <p:cNvSpPr>
+            <a:spLocks noGrp="1" noRot="1" noChangeAspect="1"/>
+          </p:cNvSpPr>
+          <p:nvPr>
+            <p:ph type="sldImg"/>
+          </p:nvPr>
+        </p:nvSpPr>
+        <p:spPr/>
+      </p:sp>
+      <p:sp>
+        <p:nvSpPr>
+          <p:cNvPr id="3" name="Notes Placeholder 2"/>
+          <p:cNvSpPr>
+            <a:spLocks noGrp="1"/>
+          </p:cNvSpPr>
+          <p:nvPr>
+            <p:ph type="body" idx="1"/>
+          </p:nvPr>
+        </p:nvSpPr>
+        <p:spPr/>
+        <p:txBody>
+          <a:bodyPr/>
+          <a:lstStyle/>
+          <a:p>
+            <a:r>
+              <a:rPr lang="en-US" dirty="0"/>
+              <a:t>最終回の壁打ち（1週間前・別枠30分）を、この場で日程確定する。第6回と同じ扱い。</a:t>
+            </a:r>
+            <a:endParaRPr lang="en-US" dirty="0"/>
+          </a:p>
+        </p:txBody>
+      </p:sp>
+      <p:sp>
+        <p:nvSpPr>
+          <p:cNvPr id="4" name="Slide Number Placeholder 3"/>
+          <p:cNvSpPr>
+            <a:spLocks noGrp="1"/>
+          </p:cNvSpPr>
+          <p:nvPr>
+            <p:ph type="sldNum" sz="quarter" idx="10"/>
+          </p:nvPr>
+        </p:nvSpPr>
+        <p:spPr/>
+        <p:txBody>
+          <a:bodyPr/>
+          <a:lstStyle/>
+          <a:p>
+            <a:fld id="{F7021451-1387-4CA6-816F-3879F97B5CBC}" type="slidenum">
+              <a:rPr lang="en-US"/>
+              <a:t>14</a:t>
+            </a:fld>
+            <a:endParaRPr lang="en-US"/>
+          </a:p>
+        </p:txBody>
+      </p:sp>
+    </p:spTree>
+    <p:extLst>
+      <p:ext uri="{BB962C8B-B14F-4D97-AF65-F5344CB8AC3E}">
+        <p14:creationId xmlns:p14="http://schemas.microsoft.com/office/powerpoint/2010/main" val="1024086991"/>
+      </p:ext>
+    </p:extLst>
+  </p:cSld>
+  <p:clrMapOvr>
+    <a:masterClrMapping/>
+  </p:clrMapOvr>
+</p:notes>
+</file>
+
+<file path=ppt/notesSlides/notesSlide15.xml><?xml version="1.0" encoding="utf-8"?>
+<p:notes xmlns:a="http://schemas.openxmlformats.org/drawingml/2006/main" xmlns:r="http://schemas.openxmlformats.org/officeDocument/2006/relationships" xmlns:p="http://schemas.openxmlformats.org/presentationml/2006/main">
+  <p:cSld>
+    <p:spTree>
+      <p:nvGrpSpPr>
+        <p:cNvPr id="1" name=""/>
+        <p:cNvGrpSpPr/>
+        <p:nvPr/>
+      </p:nvGrpSpPr>
+      <p:grpSpPr>
+        <a:xfrm>
+          <a:off x="0" y="0"/>
+          <a:ext cx="0" cy="0"/>
+          <a:chOff x="0" y="0"/>
+          <a:chExt cx="0" cy="0"/>
+        </a:xfrm>
+      </p:grpSpPr>
+      <p:sp>
+        <p:nvSpPr>
+          <p:cNvPr id="2" name="Slide Image Placeholder 1"/>
+          <p:cNvSpPr>
+            <a:spLocks noGrp="1" noRot="1" noChangeAspect="1"/>
+          </p:cNvSpPr>
+          <p:nvPr>
+            <p:ph type="sldImg"/>
+          </p:nvPr>
+        </p:nvSpPr>
+        <p:spPr/>
+      </p:sp>
+      <p:sp>
+        <p:nvSpPr>
+          <p:cNvPr id="3" name="Notes Placeholder 2"/>
+          <p:cNvSpPr>
+            <a:spLocks noGrp="1"/>
+          </p:cNvSpPr>
+          <p:nvPr>
+            <p:ph type="body" idx="1"/>
+          </p:nvPr>
+        </p:nvSpPr>
+        <p:spPr/>
+        <p:txBody>
+          <a:bodyPr/>
+          <a:lstStyle/>
+          <a:p>
+            <a:r>
+              <a:rPr lang="en-US" dirty="0"/>
+              <a:t>推定値で埋めさせない。実測してもらう。思ったより減っていない項目が見つかるのが、むしろ収穫。</a:t>
+            </a:r>
+            <a:endParaRPr lang="en-US" dirty="0"/>
+          </a:p>
+        </p:txBody>
+      </p:sp>
+      <p:sp>
+        <p:nvSpPr>
+          <p:cNvPr id="4" name="Slide Number Placeholder 3"/>
+          <p:cNvSpPr>
+            <a:spLocks noGrp="1"/>
+          </p:cNvSpPr>
+          <p:nvPr>
+            <p:ph type="sldNum" sz="quarter" idx="10"/>
+          </p:nvPr>
+        </p:nvSpPr>
+        <p:spPr/>
+        <p:txBody>
+          <a:bodyPr/>
+          <a:lstStyle/>
+          <a:p>
+            <a:fld id="{F7021451-1387-4CA6-816F-3879F97B5CBC}" type="slidenum">
+              <a:rPr lang="en-US"/>
+              <a:t>15</a:t>
             </a:fld>
             <a:endParaRPr lang="en-US"/>
           </a:p>
@@ -1481,7 +1748,7 @@
           <a:p>
             <a:r>
               <a:rPr lang="en-US" dirty="0"/>
-              <a:t>第8回の不足資料リストと第10回の基準未定義業務を、必ずここで回収する。担当のつかない項目は永久に埋まらない。</a:t>
+              <a:t>1つ目が核心。専任と割り当ての違いを、はっきり分けて答える。2つ目で金額を断定しない。見積を取る、という行動に落とす。</a:t>
             </a:r>
             <a:endParaRPr lang="en-US" dirty="0"/>
           </a:p>
@@ -2175,13 +2442,13 @@
             <a:r>
               <a:rPr lang="en-US" sz="1100" b="1" spc="250" kern="0" dirty="0">
                 <a:solidFill>
-                  <a:srgbClr val="3B6B4A"/>
-                </a:solidFill>
-                <a:latin typeface="Yu Gothic" pitchFamily="34" charset="0"/>
-                <a:ea typeface="Yu Gothic" pitchFamily="34" charset="-122"/>
-                <a:cs typeface="Yu Gothic" pitchFamily="34" charset="-120"/>
-              </a:rPr>
-              <a:t>業務への組み込み</a:t>
+                  <a:srgbClr val="8A8177"/>
+                </a:solidFill>
+                <a:latin typeface="Yu Gothic" pitchFamily="34" charset="0"/>
+                <a:ea typeface="Yu Gothic" pitchFamily="34" charset="-122"/>
+                <a:cs typeface="Yu Gothic" pitchFamily="34" charset="-120"/>
+              </a:rPr>
+              <a:t>用語</a:t>
             </a:r>
             <a:endParaRPr lang="en-US" sz="1100" dirty="0"/>
           </a:p>
@@ -2220,7 +2487,7 @@
                 <a:ea typeface="Yu Gothic" pitchFamily="34" charset="-122"/>
                 <a:cs typeface="Yu Gothic" pitchFamily="34" charset="-120"/>
               </a:rPr>
-              <a:t>帰る前に決めること</a:t>
+              <a:t>今日出てきた言葉</a:t>
             </a:r>
             <a:endParaRPr lang="en-US" sz="2600" dirty="0"/>
           </a:p>
@@ -2228,53 +2495,14 @@
       </p:sp>
       <p:sp>
         <p:nvSpPr>
-          <p:cNvPr id="4" name="Text 2"/>
-          <p:cNvSpPr txBox="1"/>
-          <p:nvPr/>
-        </p:nvSpPr>
-        <p:spPr>
-          <a:xfrm>
-            <a:off x="777240" y="1572768"/>
-            <a:ext cx="10607040" cy="320040"/>
-          </a:xfrm>
-          <a:prstGeom prst="rect">
-            <a:avLst/>
-          </a:prstGeom>
-          <a:noFill/>
-          <a:ln/>
-        </p:spPr>
-        <p:txBody>
-          <a:bodyPr wrap="square" lIns="0" tIns="0" rIns="0" bIns="0" rtlCol="0" anchor="ctr"/>
-          <a:lstStyle/>
-          <a:p>
-            <a:pPr indent="0" marL="0">
-              <a:buNone/>
-            </a:pPr>
-            <a:r>
-              <a:rPr lang="en-US" sz="1250" b="1" dirty="0">
-                <a:solidFill>
-                  <a:srgbClr val="3B6B4A"/>
-                </a:solidFill>
-                <a:latin typeface="Yu Gothic" pitchFamily="34" charset="0"/>
-                <a:ea typeface="Yu Gothic" pitchFamily="34" charset="-122"/>
-                <a:cs typeface="Yu Gothic" pitchFamily="34" charset="-120"/>
-              </a:rPr>
-              <a:t>ここを決めないと、持ち帰っても使われません。紙に書きます。</a:t>
-            </a:r>
-            <a:endParaRPr lang="en-US" sz="1250" dirty="0"/>
-          </a:p>
-        </p:txBody>
-      </p:sp>
-      <p:sp>
-        <p:nvSpPr>
-          <p:cNvPr id="5" name="Shape 3"/>
+          <p:cNvPr id="4" name="Shape 2"/>
           <p:cNvSpPr/>
           <p:nvPr/>
         </p:nvSpPr>
         <p:spPr>
           <a:xfrm>
-            <a:off x="777240" y="2103120"/>
-            <a:ext cx="10607040" cy="914400"/>
+            <a:off x="777240" y="1828800"/>
+            <a:ext cx="10607040" cy="1078992"/>
           </a:xfrm>
           <a:prstGeom prst="rect">
             <a:avLst/>
@@ -2292,20 +2520,59 @@
       </p:sp>
       <p:sp>
         <p:nvSpPr>
+          <p:cNvPr id="5" name="Text 3"/>
+          <p:cNvSpPr txBox="1"/>
+          <p:nvPr/>
+        </p:nvSpPr>
+        <p:spPr>
+          <a:xfrm>
+            <a:off x="1097280" y="1920240"/>
+            <a:ext cx="2969971" cy="896112"/>
+          </a:xfrm>
+          <a:prstGeom prst="rect">
+            <a:avLst/>
+          </a:prstGeom>
+          <a:noFill/>
+          <a:ln/>
+        </p:spPr>
+        <p:txBody>
+          <a:bodyPr wrap="square" lIns="0" tIns="0" rIns="0" bIns="0" rtlCol="0" anchor="ctr"/>
+          <a:lstStyle/>
+          <a:p>
+            <a:pPr indent="0" marL="0">
+              <a:buNone/>
+            </a:pPr>
+            <a:r>
+              <a:rPr lang="en-US" sz="1500" b="1" dirty="0">
+                <a:solidFill>
+                  <a:srgbClr val="23201D"/>
+                </a:solidFill>
+                <a:latin typeface="Yu Gothic" pitchFamily="34" charset="0"/>
+                <a:ea typeface="Yu Gothic" pitchFamily="34" charset="-122"/>
+                <a:cs typeface="Yu Gothic" pitchFamily="34" charset="-120"/>
+              </a:rPr>
+              <a:t>推進体制</a:t>
+            </a:r>
+            <a:endParaRPr lang="en-US" sz="1500" dirty="0"/>
+          </a:p>
+        </p:txBody>
+      </p:sp>
+      <p:sp>
+        <p:nvSpPr>
           <p:cNvPr id="6" name="Shape 4"/>
           <p:cNvSpPr/>
           <p:nvPr/>
         </p:nvSpPr>
         <p:spPr>
           <a:xfrm>
-            <a:off x="777240" y="2103120"/>
-            <a:ext cx="54864" cy="914400"/>
+            <a:off x="4065422" y="1956816"/>
+            <a:ext cx="18288" cy="822960"/>
           </a:xfrm>
           <a:prstGeom prst="rect">
             <a:avLst/>
           </a:prstGeom>
           <a:solidFill>
-            <a:srgbClr val="3B6B4A"/>
+            <a:srgbClr val="EDE7DB"/>
           </a:solidFill>
           <a:ln w="12700">
             <a:solidFill>
@@ -2323,47 +2590,8 @@
         </p:nvSpPr>
         <p:spPr>
           <a:xfrm>
-            <a:off x="1143000" y="2176272"/>
-            <a:ext cx="2757830" cy="768096"/>
-          </a:xfrm>
-          <a:prstGeom prst="rect">
-            <a:avLst/>
-          </a:prstGeom>
-          <a:noFill/>
-          <a:ln/>
-        </p:spPr>
-        <p:txBody>
-          <a:bodyPr wrap="square" lIns="0" tIns="0" rIns="0" bIns="0" rtlCol="0" anchor="ctr"/>
-          <a:lstStyle/>
-          <a:p>
-            <a:pPr indent="0" marL="0">
-              <a:buNone/>
-            </a:pPr>
-            <a:r>
-              <a:rPr lang="en-US" sz="1400" b="1" dirty="0">
-                <a:solidFill>
-                  <a:srgbClr val="3B6B4A"/>
-                </a:solidFill>
-                <a:latin typeface="Yu Gothic" pitchFamily="34" charset="0"/>
-                <a:ea typeface="Yu Gothic" pitchFamily="34" charset="-122"/>
-                <a:cs typeface="Yu Gothic" pitchFamily="34" charset="-120"/>
-              </a:rPr>
-              <a:t>回す人に、月何時間割り当てるか</a:t>
-            </a:r>
-            <a:endParaRPr lang="en-US" sz="1400" dirty="0"/>
-          </a:p>
-        </p:txBody>
-      </p:sp>
-      <p:sp>
-        <p:nvSpPr>
-          <p:cNvPr id="8" name="Text 6"/>
-          <p:cNvSpPr txBox="1"/>
-          <p:nvPr/>
-        </p:nvSpPr>
-        <p:spPr>
-          <a:xfrm>
-            <a:off x="4006901" y="2176272"/>
-            <a:ext cx="7011619" cy="768096"/>
+            <a:off x="4383634" y="1920240"/>
+            <a:ext cx="6682435" cy="896112"/>
           </a:xfrm>
           <a:prstGeom prst="rect">
             <a:avLst/>
@@ -2384,13 +2612,13 @@
             <a:r>
               <a:rPr lang="en-US" sz="1250" dirty="0">
                 <a:solidFill>
-                  <a:srgbClr val="3F3933"/>
-                </a:solidFill>
-                <a:latin typeface="Yu Gothic" pitchFamily="34" charset="0"/>
-                <a:ea typeface="Yu Gothic" pitchFamily="34" charset="-122"/>
-                <a:cs typeface="Yu Gothic" pitchFamily="34" charset="-120"/>
-              </a:rPr>
-              <a:t>「片手間で」は必ず失敗します。時間を業務として認めます</a:t>
+                  <a:srgbClr val="5A534A"/>
+                </a:solidFill>
+                <a:latin typeface="Yu Gothic" pitchFamily="34" charset="0"/>
+                <a:ea typeface="Yu Gothic" pitchFamily="34" charset="-122"/>
+                <a:cs typeface="Yu Gothic" pitchFamily="34" charset="-120"/>
+              </a:rPr>
+              <a:t>決める人・回す人・作る人・守る人の4役割。1〜2名の兼任で構いません</a:t>
             </a:r>
             <a:endParaRPr lang="en-US" sz="1250" dirty="0"/>
           </a:p>
@@ -2398,14 +2626,14 @@
       </p:sp>
       <p:sp>
         <p:nvSpPr>
-          <p:cNvPr id="9" name="Shape 7"/>
+          <p:cNvPr id="8" name="Shape 6"/>
           <p:cNvSpPr/>
           <p:nvPr/>
         </p:nvSpPr>
         <p:spPr>
           <a:xfrm>
-            <a:off x="777240" y="3154680"/>
-            <a:ext cx="10607040" cy="914400"/>
+            <a:off x="777240" y="3063240"/>
+            <a:ext cx="10607040" cy="1078992"/>
           </a:xfrm>
           <a:prstGeom prst="rect">
             <a:avLst/>
@@ -2423,20 +2651,59 @@
       </p:sp>
       <p:sp>
         <p:nvSpPr>
+          <p:cNvPr id="9" name="Text 7"/>
+          <p:cNvSpPr txBox="1"/>
+          <p:nvPr/>
+        </p:nvSpPr>
+        <p:spPr>
+          <a:xfrm>
+            <a:off x="1097280" y="3154680"/>
+            <a:ext cx="2969971" cy="896112"/>
+          </a:xfrm>
+          <a:prstGeom prst="rect">
+            <a:avLst/>
+          </a:prstGeom>
+          <a:noFill/>
+          <a:ln/>
+        </p:spPr>
+        <p:txBody>
+          <a:bodyPr wrap="square" lIns="0" tIns="0" rIns="0" bIns="0" rtlCol="0" anchor="ctr"/>
+          <a:lstStyle/>
+          <a:p>
+            <a:pPr indent="0" marL="0">
+              <a:buNone/>
+            </a:pPr>
+            <a:r>
+              <a:rPr lang="en-US" sz="1500" b="1" dirty="0">
+                <a:solidFill>
+                  <a:srgbClr val="23201D"/>
+                </a:solidFill>
+                <a:latin typeface="Yu Gothic" pitchFamily="34" charset="0"/>
+                <a:ea typeface="Yu Gothic" pitchFamily="34" charset="-122"/>
+                <a:cs typeface="Yu Gothic" pitchFamily="34" charset="-120"/>
+              </a:rPr>
+              <a:t>権限管理</a:t>
+            </a:r>
+            <a:endParaRPr lang="en-US" sz="1500" dirty="0"/>
+          </a:p>
+        </p:txBody>
+      </p:sp>
+      <p:sp>
+        <p:nvSpPr>
           <p:cNvPr id="10" name="Shape 8"/>
           <p:cNvSpPr/>
           <p:nvPr/>
         </p:nvSpPr>
         <p:spPr>
           <a:xfrm>
-            <a:off x="777240" y="3154680"/>
-            <a:ext cx="54864" cy="914400"/>
+            <a:off x="4065422" y="3191256"/>
+            <a:ext cx="18288" cy="822960"/>
           </a:xfrm>
           <a:prstGeom prst="rect">
             <a:avLst/>
           </a:prstGeom>
           <a:solidFill>
-            <a:srgbClr val="3B6B4A"/>
+            <a:srgbClr val="EDE7DB"/>
           </a:solidFill>
           <a:ln w="12700">
             <a:solidFill>
@@ -2454,47 +2721,8 @@
         </p:nvSpPr>
         <p:spPr>
           <a:xfrm>
-            <a:off x="1143000" y="3227832"/>
-            <a:ext cx="2757830" cy="768096"/>
-          </a:xfrm>
-          <a:prstGeom prst="rect">
-            <a:avLst/>
-          </a:prstGeom>
-          <a:noFill/>
-          <a:ln/>
-        </p:spPr>
-        <p:txBody>
-          <a:bodyPr wrap="square" lIns="0" tIns="0" rIns="0" bIns="0" rtlCol="0" anchor="ctr"/>
-          <a:lstStyle/>
-          <a:p>
-            <a:pPr indent="0" marL="0">
-              <a:buNone/>
-            </a:pPr>
-            <a:r>
-              <a:rPr lang="en-US" sz="1400" b="1" dirty="0">
-                <a:solidFill>
-                  <a:srgbClr val="3B6B4A"/>
-                </a:solidFill>
-                <a:latin typeface="Yu Gothic" pitchFamily="34" charset="0"/>
-                <a:ea typeface="Yu Gothic" pitchFamily="34" charset="-122"/>
-                <a:cs typeface="Yu Gothic" pitchFamily="34" charset="-120"/>
-              </a:rPr>
-              <a:t>第8回・第10回の宿題を誰が引き取るか</a:t>
-            </a:r>
-            <a:endParaRPr lang="en-US" sz="1400" dirty="0"/>
-          </a:p>
-        </p:txBody>
-      </p:sp>
-      <p:sp>
-        <p:nvSpPr>
-          <p:cNvPr id="12" name="Text 10"/>
-          <p:cNvSpPr txBox="1"/>
-          <p:nvPr/>
-        </p:nvSpPr>
-        <p:spPr>
-          <a:xfrm>
-            <a:off x="4006901" y="3227832"/>
-            <a:ext cx="7011619" cy="768096"/>
+            <a:off x="4383634" y="3154680"/>
+            <a:ext cx="6682435" cy="896112"/>
           </a:xfrm>
           <a:prstGeom prst="rect">
             <a:avLst/>
@@ -2515,13 +2743,13 @@
             <a:r>
               <a:rPr lang="en-US" sz="1250" dirty="0">
                 <a:solidFill>
-                  <a:srgbClr val="3F3933"/>
-                </a:solidFill>
-                <a:latin typeface="Yu Gothic" pitchFamily="34" charset="0"/>
-                <a:ea typeface="Yu Gothic" pitchFamily="34" charset="-122"/>
-                <a:cs typeface="Yu Gothic" pitchFamily="34" charset="-120"/>
-              </a:rPr>
-              <a:t>不足資料リストと、基準が決まっていない業務。担当のつかない項目は永久に埋まりません</a:t>
+                  <a:srgbClr val="5A534A"/>
+                </a:solidFill>
+                <a:latin typeface="Yu Gothic" pitchFamily="34" charset="0"/>
+                <a:ea typeface="Yu Gothic" pitchFamily="34" charset="-122"/>
+                <a:cs typeface="Yu Gothic" pitchFamily="34" charset="-120"/>
+              </a:rPr>
+              <a:t>誰が何のアカウントを持つか。退職時の手順まで含めて決めます</a:t>
             </a:r>
             <a:endParaRPr lang="en-US" sz="1250" dirty="0"/>
           </a:p>
@@ -2529,14 +2757,14 @@
       </p:sp>
       <p:sp>
         <p:nvSpPr>
-          <p:cNvPr id="13" name="Shape 11"/>
+          <p:cNvPr id="12" name="Shape 10"/>
           <p:cNvSpPr/>
           <p:nvPr/>
         </p:nvSpPr>
         <p:spPr>
           <a:xfrm>
-            <a:off x="777240" y="4206240"/>
-            <a:ext cx="10607040" cy="914400"/>
+            <a:off x="777240" y="4297680"/>
+            <a:ext cx="10607040" cy="1078992"/>
           </a:xfrm>
           <a:prstGeom prst="rect">
             <a:avLst/>
@@ -2554,20 +2782,59 @@
       </p:sp>
       <p:sp>
         <p:nvSpPr>
+          <p:cNvPr id="13" name="Text 11"/>
+          <p:cNvSpPr txBox="1"/>
+          <p:nvPr/>
+        </p:nvSpPr>
+        <p:spPr>
+          <a:xfrm>
+            <a:off x="1097280" y="4389120"/>
+            <a:ext cx="2969971" cy="896112"/>
+          </a:xfrm>
+          <a:prstGeom prst="rect">
+            <a:avLst/>
+          </a:prstGeom>
+          <a:noFill/>
+          <a:ln/>
+        </p:spPr>
+        <p:txBody>
+          <a:bodyPr wrap="square" lIns="0" tIns="0" rIns="0" bIns="0" rtlCol="0" anchor="ctr"/>
+          <a:lstStyle/>
+          <a:p>
+            <a:pPr indent="0" marL="0">
+              <a:buNone/>
+            </a:pPr>
+            <a:r>
+              <a:rPr lang="en-US" sz="1500" b="1" dirty="0">
+                <a:solidFill>
+                  <a:srgbClr val="23201D"/>
+                </a:solidFill>
+                <a:latin typeface="Yu Gothic" pitchFamily="34" charset="0"/>
+                <a:ea typeface="Yu Gothic" pitchFamily="34" charset="-122"/>
+                <a:cs typeface="Yu Gothic" pitchFamily="34" charset="-120"/>
+              </a:rPr>
+              <a:t>効果測定</a:t>
+            </a:r>
+            <a:endParaRPr lang="en-US" sz="1500" dirty="0"/>
+          </a:p>
+        </p:txBody>
+      </p:sp>
+      <p:sp>
+        <p:nvSpPr>
           <p:cNvPr id="14" name="Shape 12"/>
           <p:cNvSpPr/>
           <p:nvPr/>
         </p:nvSpPr>
         <p:spPr>
           <a:xfrm>
-            <a:off x="777240" y="4206240"/>
-            <a:ext cx="54864" cy="914400"/>
+            <a:off x="4065422" y="4425696"/>
+            <a:ext cx="18288" cy="822960"/>
           </a:xfrm>
           <a:prstGeom prst="rect">
             <a:avLst/>
           </a:prstGeom>
           <a:solidFill>
-            <a:srgbClr val="3B6B4A"/>
+            <a:srgbClr val="EDE7DB"/>
           </a:solidFill>
           <a:ln w="12700">
             <a:solidFill>
@@ -2585,47 +2852,8 @@
         </p:nvSpPr>
         <p:spPr>
           <a:xfrm>
-            <a:off x="1143000" y="4279392"/>
-            <a:ext cx="2757830" cy="768096"/>
-          </a:xfrm>
-          <a:prstGeom prst="rect">
-            <a:avLst/>
-          </a:prstGeom>
-          <a:noFill/>
-          <a:ln/>
-        </p:spPr>
-        <p:txBody>
-          <a:bodyPr wrap="square" lIns="0" tIns="0" rIns="0" bIns="0" rtlCol="0" anchor="ctr"/>
-          <a:lstStyle/>
-          <a:p>
-            <a:pPr indent="0" marL="0">
-              <a:buNone/>
-            </a:pPr>
-            <a:r>
-              <a:rPr lang="en-US" sz="1400" b="1" dirty="0">
-                <a:solidFill>
-                  <a:srgbClr val="3B6B4A"/>
-                </a:solidFill>
-                <a:latin typeface="Yu Gothic" pitchFamily="34" charset="0"/>
-                <a:ea typeface="Yu Gothic" pitchFamily="34" charset="-122"/>
-                <a:cs typeface="Yu Gothic" pitchFamily="34" charset="-120"/>
-              </a:rPr>
-              <a:t>いつ見直すか</a:t>
-            </a:r>
-            <a:endParaRPr lang="en-US" sz="1400" dirty="0"/>
-          </a:p>
-        </p:txBody>
-      </p:sp>
-      <p:sp>
-        <p:nvSpPr>
-          <p:cNvPr id="16" name="Text 14"/>
-          <p:cNvSpPr txBox="1"/>
-          <p:nvPr/>
-        </p:nvSpPr>
-        <p:spPr>
-          <a:xfrm>
-            <a:off x="4006901" y="4279392"/>
-            <a:ext cx="7011619" cy="768096"/>
+            <a:off x="4383634" y="4389120"/>
+            <a:ext cx="6682435" cy="896112"/>
           </a:xfrm>
           <a:prstGeom prst="rect">
             <a:avLst/>
@@ -2646,15 +2874,54 @@
             <a:r>
               <a:rPr lang="en-US" sz="1250" dirty="0">
                 <a:solidFill>
-                  <a:srgbClr val="3F3933"/>
-                </a:solidFill>
-                <a:latin typeface="Yu Gothic" pitchFamily="34" charset="0"/>
-                <a:ea typeface="Yu Gothic" pitchFamily="34" charset="-122"/>
-                <a:cs typeface="Yu Gothic" pitchFamily="34" charset="-120"/>
-              </a:rPr>
-              <a:t>3か月後。費用と効果を突き合わせる日を決めます</a:t>
+                  <a:srgbClr val="5A534A"/>
+                </a:solidFill>
+                <a:latin typeface="Yu Gothic" pitchFamily="34" charset="0"/>
+                <a:ea typeface="Yu Gothic" pitchFamily="34" charset="-122"/>
+                <a:cs typeface="Yu Gothic" pitchFamily="34" charset="-120"/>
+              </a:rPr>
+              <a:t>時間・品質・範囲・金額の4行。金額だけで語らないのが要点です</a:t>
             </a:r>
             <a:endParaRPr lang="en-US" sz="1250" dirty="0"/>
+          </a:p>
+        </p:txBody>
+      </p:sp>
+      <p:sp>
+        <p:nvSpPr>
+          <p:cNvPr id="16" name="Text 14"/>
+          <p:cNvSpPr txBox="1"/>
+          <p:nvPr/>
+        </p:nvSpPr>
+        <p:spPr>
+          <a:xfrm>
+            <a:off x="777240" y="5623560"/>
+            <a:ext cx="10607040" cy="411480"/>
+          </a:xfrm>
+          <a:prstGeom prst="rect">
+            <a:avLst/>
+          </a:prstGeom>
+          <a:noFill/>
+          <a:ln/>
+        </p:spPr>
+        <p:txBody>
+          <a:bodyPr wrap="square" lIns="0" tIns="0" rIns="0" bIns="0" rtlCol="0" anchor="ctr"/>
+          <a:lstStyle/>
+          <a:p>
+            <a:pPr indent="0" marL="0">
+              <a:buNone/>
+            </a:pPr>
+            <a:r>
+              <a:rPr lang="en-US" sz="1150" dirty="0">
+                <a:solidFill>
+                  <a:srgbClr val="8A8177"/>
+                </a:solidFill>
+                <a:latin typeface="Yu Gothic" pitchFamily="34" charset="0"/>
+                <a:ea typeface="Yu Gothic" pitchFamily="34" charset="-122"/>
+                <a:cs typeface="Yu Gothic" pitchFamily="34" charset="-120"/>
+              </a:rPr>
+              <a:t>配布した用語辞典にも同じものが載っています。覚える必要はありません。</a:t>
+            </a:r>
+            <a:endParaRPr lang="en-US" sz="1150" dirty="0"/>
           </a:p>
         </p:txBody>
       </p:sp>
@@ -2730,7 +2997,7 @@
                 <a:ea typeface="Yu Gothic" pitchFamily="34" charset="-122"/>
                 <a:cs typeface="Yu Gothic" pitchFamily="34" charset="-120"/>
               </a:rPr>
-              <a:t>組み込み</a:t>
+              <a:t>用語</a:t>
             </a:r>
             <a:endParaRPr lang="en-US" sz="900" dirty="0"/>
           </a:p>
@@ -2795,13 +3062,13 @@
             <a:r>
               <a:rPr lang="en-US" sz="1100" b="1" spc="250" kern="0" dirty="0">
                 <a:solidFill>
-                  <a:srgbClr val="B04A2F"/>
-                </a:solidFill>
-                <a:latin typeface="Yu Gothic" pitchFamily="34" charset="0"/>
-                <a:ea typeface="Yu Gothic" pitchFamily="34" charset="-122"/>
-                <a:cs typeface="Yu Gothic" pitchFamily="34" charset="-120"/>
-              </a:rPr>
-              <a:t>ここだけは</a:t>
+                  <a:srgbClr val="2F4F6B"/>
+                </a:solidFill>
+                <a:latin typeface="Yu Gothic" pitchFamily="34" charset="0"/>
+                <a:ea typeface="Yu Gothic" pitchFamily="34" charset="-122"/>
+                <a:cs typeface="Yu Gothic" pitchFamily="34" charset="-120"/>
+              </a:rPr>
+              <a:t>演習</a:t>
             </a:r>
             <a:endParaRPr lang="en-US" sz="1100" dirty="0"/>
           </a:p>
@@ -2815,7 +3082,7 @@
         </p:nvSpPr>
         <p:spPr>
           <a:xfrm>
-            <a:off x="777240" y="1097280"/>
+            <a:off x="777240" y="896112"/>
             <a:ext cx="10607040" cy="640080"/>
           </a:xfrm>
           <a:prstGeom prst="rect">
@@ -2840,7 +3107,7 @@
                 <a:ea typeface="Yu Gothic" pitchFamily="34" charset="-122"/>
                 <a:cs typeface="Yu Gothic" pitchFamily="34" charset="-120"/>
               </a:rPr>
-              <a:t>個人名義の契約が残っていませんか</a:t>
+              <a:t>今日、一緒にやること</a:t>
             </a:r>
             <a:endParaRPr lang="en-US" sz="2600" dirty="0"/>
           </a:p>
@@ -2848,20 +3115,84 @@
       </p:sp>
       <p:sp>
         <p:nvSpPr>
-          <p:cNvPr id="4" name="Shape 2"/>
+          <p:cNvPr id="4" name="Text 2"/>
+          <p:cNvSpPr txBox="1"/>
+          <p:nvPr/>
+        </p:nvSpPr>
+        <p:spPr>
+          <a:xfrm>
+            <a:off x="777240" y="1572768"/>
+            <a:ext cx="10607040" cy="320040"/>
+          </a:xfrm>
+          <a:prstGeom prst="rect">
+            <a:avLst/>
+          </a:prstGeom>
+          <a:noFill/>
+          <a:ln/>
+        </p:spPr>
+        <p:txBody>
+          <a:bodyPr wrap="square" lIns="0" tIns="0" rIns="0" bIns="0" rtlCol="0" anchor="ctr"/>
+          <a:lstStyle/>
+          <a:p>
+            <a:pPr indent="0" marL="0">
+              <a:buNone/>
+            </a:pPr>
+            <a:r>
+              <a:rPr lang="en-US" sz="1250" b="1" dirty="0">
+                <a:solidFill>
+                  <a:srgbClr val="2F4F6B"/>
+                </a:solidFill>
+                <a:latin typeface="Yu Gothic" pitchFamily="34" charset="0"/>
+                <a:ea typeface="Yu Gothic" pitchFamily="34" charset="-122"/>
+                <a:cs typeface="Yu Gothic" pitchFamily="34" charset="-120"/>
+              </a:rPr>
+              <a:t>55分。操作するのはご自身です。</a:t>
+            </a:r>
+            <a:endParaRPr lang="en-US" sz="1250" dirty="0"/>
+          </a:p>
+        </p:txBody>
+      </p:sp>
+      <p:sp>
+        <p:nvSpPr>
+          <p:cNvPr id="5" name="Shape 3"/>
           <p:cNvSpPr/>
           <p:nvPr/>
         </p:nvSpPr>
         <p:spPr>
           <a:xfrm>
             <a:off x="777240" y="2148840"/>
-            <a:ext cx="64008" cy="2194560"/>
+            <a:ext cx="3383280" cy="2880360"/>
           </a:xfrm>
           <a:prstGeom prst="rect">
             <a:avLst/>
           </a:prstGeom>
           <a:solidFill>
-            <a:srgbClr val="B04A2F"/>
+            <a:srgbClr val="FFFFFF"/>
+          </a:solidFill>
+          <a:ln w="12700">
+            <a:solidFill>
+              <a:srgbClr val="EDE7DB"/>
+            </a:solidFill>
+            <a:prstDash val="solid"/>
+          </a:ln>
+        </p:spPr>
+      </p:sp>
+      <p:sp>
+        <p:nvSpPr>
+          <p:cNvPr id="6" name="Shape 4"/>
+          <p:cNvSpPr/>
+          <p:nvPr/>
+        </p:nvSpPr>
+        <p:spPr>
+          <a:xfrm>
+            <a:off x="1051560" y="2395728"/>
+            <a:ext cx="438912" cy="438912"/>
+          </a:xfrm>
+          <a:prstGeom prst="ellipse">
+            <a:avLst/>
+          </a:prstGeom>
+          <a:solidFill>
+            <a:srgbClr val="2F4F6B"/>
           </a:solidFill>
           <a:ln w="12700">
             <a:solidFill>
@@ -2873,14 +3204,53 @@
       </p:sp>
       <p:sp>
         <p:nvSpPr>
-          <p:cNvPr id="5" name="Text 3"/>
-          <p:cNvSpPr txBox="1"/>
-          <p:nvPr/>
-        </p:nvSpPr>
-        <p:spPr>
-          <a:xfrm>
-            <a:off x="1188720" y="2148840"/>
-            <a:ext cx="9966960" cy="2194560"/>
+          <p:cNvPr id="7" name="Text 5"/>
+          <p:cNvSpPr txBox="1"/>
+          <p:nvPr/>
+        </p:nvSpPr>
+        <p:spPr>
+          <a:xfrm>
+            <a:off x="1051560" y="2395728"/>
+            <a:ext cx="438912" cy="438912"/>
+          </a:xfrm>
+          <a:prstGeom prst="rect">
+            <a:avLst/>
+          </a:prstGeom>
+          <a:noFill/>
+          <a:ln/>
+        </p:spPr>
+        <p:txBody>
+          <a:bodyPr wrap="square" lIns="0" tIns="0" rIns="0" bIns="0" rtlCol="0" anchor="ctr"/>
+          <a:lstStyle/>
+          <a:p>
+            <a:pPr algn="ctr" indent="0" marL="0">
+              <a:buNone/>
+            </a:pPr>
+            <a:r>
+              <a:rPr lang="en-US" sz="1300" b="1" dirty="0">
+                <a:solidFill>
+                  <a:srgbClr val="FFFFFF"/>
+                </a:solidFill>
+                <a:latin typeface="Yu Gothic" pitchFamily="34" charset="0"/>
+                <a:ea typeface="Yu Gothic" pitchFamily="34" charset="-122"/>
+                <a:cs typeface="Yu Gothic" pitchFamily="34" charset="-120"/>
+              </a:rPr>
+              <a:t>1</a:t>
+            </a:r>
+            <a:endParaRPr lang="en-US" sz="1300" dirty="0"/>
+          </a:p>
+        </p:txBody>
+      </p:sp>
+      <p:sp>
+        <p:nvSpPr>
+          <p:cNvPr id="8" name="Text 6"/>
+          <p:cNvSpPr txBox="1"/>
+          <p:nvPr/>
+        </p:nvSpPr>
+        <p:spPr>
+          <a:xfrm>
+            <a:off x="1051560" y="2944368"/>
+            <a:ext cx="2834640" cy="731520"/>
           </a:xfrm>
           <a:prstGeom prst="rect">
             <a:avLst/>
@@ -2894,41 +3264,108 @@
           <a:p>
             <a:pPr indent="0" marL="0">
               <a:lnSpc>
-                <a:spcPct val="160000"/>
+                <a:spcPct val="125000"/>
               </a:lnSpc>
               <a:buNone/>
             </a:pPr>
             <a:r>
-              <a:rPr lang="en-US" sz="1650" dirty="0">
-                <a:solidFill>
-                  <a:srgbClr val="3F3933"/>
-                </a:solidFill>
-                <a:latin typeface="Yu Gothic" pitchFamily="34" charset="0"/>
-                <a:ea typeface="Yu Gothic" pitchFamily="34" charset="-122"/>
-                <a:cs typeface="Yu Gothic" pitchFamily="34" charset="-120"/>
-              </a:rPr>
-              <a:t>ここで洗い出してください。社長個人のクレジットカードで契約したまま、社員が使っている状態は珍しくありません。退職時の手順も含めて、この回で整理します。法人契約への移行を検討するなら、今日がその場です。</a:t>
-            </a:r>
-            <a:endParaRPr lang="en-US" sz="1650" dirty="0"/>
-          </a:p>
-        </p:txBody>
-      </p:sp>
-      <p:sp>
-        <p:nvSpPr>
-          <p:cNvPr id="6" name="Shape 4"/>
+              <a:rPr lang="en-US" sz="1450" b="1" dirty="0">
+                <a:solidFill>
+                  <a:srgbClr val="23201D"/>
+                </a:solidFill>
+                <a:latin typeface="Yu Gothic" pitchFamily="34" charset="0"/>
+                <a:ea typeface="Yu Gothic" pitchFamily="34" charset="-122"/>
+                <a:cs typeface="Yu Gothic" pitchFamily="34" charset="-120"/>
+              </a:rPr>
+              <a:t>体制図を書く</a:t>
+            </a:r>
+            <a:endParaRPr lang="en-US" sz="1450" dirty="0"/>
+          </a:p>
+        </p:txBody>
+      </p:sp>
+      <p:sp>
+        <p:nvSpPr>
+          <p:cNvPr id="9" name="Text 7"/>
+          <p:cNvSpPr txBox="1"/>
+          <p:nvPr/>
+        </p:nvSpPr>
+        <p:spPr>
+          <a:xfrm>
+            <a:off x="1051560" y="3703320"/>
+            <a:ext cx="2834640" cy="1188720"/>
+          </a:xfrm>
+          <a:prstGeom prst="rect">
+            <a:avLst/>
+          </a:prstGeom>
+          <a:noFill/>
+          <a:ln/>
+        </p:spPr>
+        <p:txBody>
+          <a:bodyPr wrap="square" lIns="0" tIns="0" rIns="0" bIns="0" rtlCol="0" anchor="ctr"/>
+          <a:lstStyle/>
+          <a:p>
+            <a:pPr indent="0" marL="0">
+              <a:lnSpc>
+                <a:spcPct val="130000"/>
+              </a:lnSpc>
+              <a:buNone/>
+            </a:pPr>
+            <a:r>
+              <a:rPr lang="en-US" sz="1150" dirty="0">
+                <a:solidFill>
+                  <a:srgbClr val="5A534A"/>
+                </a:solidFill>
+                <a:latin typeface="Yu Gothic" pitchFamily="34" charset="0"/>
+                <a:ea typeface="Yu Gothic" pitchFamily="34" charset="-122"/>
+                <a:cs typeface="Yu Gothic" pitchFamily="34" charset="-120"/>
+              </a:rPr>
+              <a:t>推進役を実名で決めます。決まらないなら、その理由を言葉にします</a:t>
+            </a:r>
+            <a:endParaRPr lang="en-US" sz="1150" dirty="0"/>
+          </a:p>
+        </p:txBody>
+      </p:sp>
+      <p:sp>
+        <p:nvSpPr>
+          <p:cNvPr id="10" name="Shape 8"/>
           <p:cNvSpPr/>
           <p:nvPr/>
         </p:nvSpPr>
         <p:spPr>
           <a:xfrm>
-            <a:off x="777240" y="4709160"/>
-            <a:ext cx="10607040" cy="960120"/>
+            <a:off x="4389120" y="2148840"/>
+            <a:ext cx="3383280" cy="2880360"/>
           </a:xfrm>
           <a:prstGeom prst="rect">
             <a:avLst/>
           </a:prstGeom>
           <a:solidFill>
-            <a:srgbClr val="EDE7DB"/>
+            <a:srgbClr val="FFFFFF"/>
+          </a:solidFill>
+          <a:ln w="12700">
+            <a:solidFill>
+              <a:srgbClr val="EDE7DB"/>
+            </a:solidFill>
+            <a:prstDash val="solid"/>
+          </a:ln>
+        </p:spPr>
+      </p:sp>
+      <p:sp>
+        <p:nvSpPr>
+          <p:cNvPr id="11" name="Shape 9"/>
+          <p:cNvSpPr/>
+          <p:nvPr/>
+        </p:nvSpPr>
+        <p:spPr>
+          <a:xfrm>
+            <a:off x="4663440" y="2395728"/>
+            <a:ext cx="438912" cy="438912"/>
+          </a:xfrm>
+          <a:prstGeom prst="ellipse">
+            <a:avLst/>
+          </a:prstGeom>
+          <a:solidFill>
+            <a:srgbClr val="2F4F6B"/>
           </a:solidFill>
           <a:ln w="12700">
             <a:solidFill>
@@ -2940,53 +3377,95 @@
       </p:sp>
       <p:sp>
         <p:nvSpPr>
-          <p:cNvPr id="7" name="Text 5"/>
-          <p:cNvSpPr txBox="1"/>
-          <p:nvPr/>
-        </p:nvSpPr>
-        <p:spPr>
-          <a:xfrm>
-            <a:off x="1051560" y="4800600"/>
-            <a:ext cx="1463040" cy="256032"/>
-          </a:xfrm>
-          <a:prstGeom prst="rect">
-            <a:avLst/>
-          </a:prstGeom>
-          <a:noFill/>
-          <a:ln/>
-        </p:spPr>
-        <p:txBody>
-          <a:bodyPr wrap="square" lIns="0" tIns="0" rIns="0" bIns="0" rtlCol="0" anchor="ctr"/>
-          <a:lstStyle/>
-          <a:p>
-            <a:pPr indent="0" marL="0">
-              <a:buNone/>
-            </a:pPr>
-            <a:r>
-              <a:rPr lang="en-US" sz="900" b="1" spc="150" kern="0" dirty="0">
-                <a:solidFill>
-                  <a:srgbClr val="B04A2F"/>
-                </a:solidFill>
-                <a:latin typeface="Yu Gothic" pitchFamily="34" charset="0"/>
-                <a:ea typeface="Yu Gothic" pitchFamily="34" charset="-122"/>
-                <a:cs typeface="Yu Gothic" pitchFamily="34" charset="-120"/>
-              </a:rPr>
-              <a:t>他社では</a:t>
-            </a:r>
-            <a:endParaRPr lang="en-US" sz="900" dirty="0"/>
-          </a:p>
-        </p:txBody>
-      </p:sp>
-      <p:sp>
-        <p:nvSpPr>
-          <p:cNvPr id="8" name="Text 6"/>
-          <p:cNvSpPr txBox="1"/>
-          <p:nvPr/>
-        </p:nvSpPr>
-        <p:spPr>
-          <a:xfrm>
-            <a:off x="1051560" y="5029200"/>
-            <a:ext cx="10058400" cy="566928"/>
+          <p:cNvPr id="12" name="Text 10"/>
+          <p:cNvSpPr txBox="1"/>
+          <p:nvPr/>
+        </p:nvSpPr>
+        <p:spPr>
+          <a:xfrm>
+            <a:off x="4663440" y="2395728"/>
+            <a:ext cx="438912" cy="438912"/>
+          </a:xfrm>
+          <a:prstGeom prst="rect">
+            <a:avLst/>
+          </a:prstGeom>
+          <a:noFill/>
+          <a:ln/>
+        </p:spPr>
+        <p:txBody>
+          <a:bodyPr wrap="square" lIns="0" tIns="0" rIns="0" bIns="0" rtlCol="0" anchor="ctr"/>
+          <a:lstStyle/>
+          <a:p>
+            <a:pPr algn="ctr" indent="0" marL="0">
+              <a:buNone/>
+            </a:pPr>
+            <a:r>
+              <a:rPr lang="en-US" sz="1300" b="1" dirty="0">
+                <a:solidFill>
+                  <a:srgbClr val="FFFFFF"/>
+                </a:solidFill>
+                <a:latin typeface="Yu Gothic" pitchFamily="34" charset="0"/>
+                <a:ea typeface="Yu Gothic" pitchFamily="34" charset="-122"/>
+                <a:cs typeface="Yu Gothic" pitchFamily="34" charset="-120"/>
+              </a:rPr>
+              <a:t>2</a:t>
+            </a:r>
+            <a:endParaRPr lang="en-US" sz="1300" dirty="0"/>
+          </a:p>
+        </p:txBody>
+      </p:sp>
+      <p:sp>
+        <p:nvSpPr>
+          <p:cNvPr id="13" name="Text 11"/>
+          <p:cNvSpPr txBox="1"/>
+          <p:nvPr/>
+        </p:nvSpPr>
+        <p:spPr>
+          <a:xfrm>
+            <a:off x="4663440" y="2944368"/>
+            <a:ext cx="2834640" cy="731520"/>
+          </a:xfrm>
+          <a:prstGeom prst="rect">
+            <a:avLst/>
+          </a:prstGeom>
+          <a:noFill/>
+          <a:ln/>
+        </p:spPr>
+        <p:txBody>
+          <a:bodyPr wrap="square" lIns="0" tIns="0" rIns="0" bIns="0" rtlCol="0" anchor="ctr"/>
+          <a:lstStyle/>
+          <a:p>
+            <a:pPr indent="0" marL="0">
+              <a:lnSpc>
+                <a:spcPct val="125000"/>
+              </a:lnSpc>
+              <a:buNone/>
+            </a:pPr>
+            <a:r>
+              <a:rPr lang="en-US" sz="1450" b="1" dirty="0">
+                <a:solidFill>
+                  <a:srgbClr val="23201D"/>
+                </a:solidFill>
+                <a:latin typeface="Yu Gothic" pitchFamily="34" charset="0"/>
+                <a:ea typeface="Yu Gothic" pitchFamily="34" charset="-122"/>
+                <a:cs typeface="Yu Gothic" pitchFamily="34" charset="-120"/>
+              </a:rPr>
+              <a:t>権限と費用を洗う</a:t>
+            </a:r>
+            <a:endParaRPr lang="en-US" sz="1450" dirty="0"/>
+          </a:p>
+        </p:txBody>
+      </p:sp>
+      <p:sp>
+        <p:nvSpPr>
+          <p:cNvPr id="14" name="Text 12"/>
+          <p:cNvSpPr txBox="1"/>
+          <p:nvPr/>
+        </p:nvSpPr>
+        <p:spPr>
+          <a:xfrm>
+            <a:off x="4663440" y="3703320"/>
+            <a:ext cx="2834640" cy="1188720"/>
           </a:xfrm>
           <a:prstGeom prst="rect">
             <a:avLst/>
@@ -3005,23 +3484,196 @@
               <a:buNone/>
             </a:pPr>
             <a:r>
-              <a:rPr lang="en-US" sz="1250" dirty="0">
-                <a:solidFill>
-                  <a:srgbClr val="3F3933"/>
-                </a:solidFill>
-                <a:latin typeface="Yu Gothic" pitchFamily="34" charset="0"/>
-                <a:ea typeface="Yu Gothic" pitchFamily="34" charset="-122"/>
-                <a:cs typeface="Yu Gothic" pitchFamily="34" charset="-120"/>
-              </a:rPr>
-              <a:t>推進役を決めずに始めた会社と、専任ではないが月4時間を正式に割り当てた会社の対比があります。前者は3か月で止まり、後者は1年後も回っています。差は熱意ではなく、時間が業務として認められていたかどうかでした。</a:t>
-            </a:r>
-            <a:endParaRPr lang="en-US" sz="1250" dirty="0"/>
-          </a:p>
-        </p:txBody>
-      </p:sp>
-      <p:sp>
-        <p:nvSpPr>
-          <p:cNvPr id="9" name="Text 7"/>
+              <a:rPr lang="en-US" sz="1150" dirty="0">
+                <a:solidFill>
+                  <a:srgbClr val="5A534A"/>
+                </a:solidFill>
+                <a:latin typeface="Yu Gothic" pitchFamily="34" charset="0"/>
+                <a:ea typeface="Yu Gothic" pitchFamily="34" charset="-122"/>
+                <a:cs typeface="Yu Gothic" pitchFamily="34" charset="-120"/>
+              </a:rPr>
+              <a:t>誰が何のアカウントを持ち、月いくら払っているか。個人名義が残っていないかを確認します</a:t>
+            </a:r>
+            <a:endParaRPr lang="en-US" sz="1150" dirty="0"/>
+          </a:p>
+        </p:txBody>
+      </p:sp>
+      <p:sp>
+        <p:nvSpPr>
+          <p:cNvPr id="15" name="Shape 13"/>
+          <p:cNvSpPr/>
+          <p:nvPr/>
+        </p:nvSpPr>
+        <p:spPr>
+          <a:xfrm>
+            <a:off x="8001000" y="2148840"/>
+            <a:ext cx="3383280" cy="2880360"/>
+          </a:xfrm>
+          <a:prstGeom prst="rect">
+            <a:avLst/>
+          </a:prstGeom>
+          <a:solidFill>
+            <a:srgbClr val="FFFFFF"/>
+          </a:solidFill>
+          <a:ln w="12700">
+            <a:solidFill>
+              <a:srgbClr val="EDE7DB"/>
+            </a:solidFill>
+            <a:prstDash val="solid"/>
+          </a:ln>
+        </p:spPr>
+      </p:sp>
+      <p:sp>
+        <p:nvSpPr>
+          <p:cNvPr id="16" name="Shape 14"/>
+          <p:cNvSpPr/>
+          <p:nvPr/>
+        </p:nvSpPr>
+        <p:spPr>
+          <a:xfrm>
+            <a:off x="8275320" y="2395728"/>
+            <a:ext cx="438912" cy="438912"/>
+          </a:xfrm>
+          <a:prstGeom prst="ellipse">
+            <a:avLst/>
+          </a:prstGeom>
+          <a:solidFill>
+            <a:srgbClr val="2F4F6B"/>
+          </a:solidFill>
+          <a:ln w="12700">
+            <a:solidFill>
+              <a:srgbClr val="333333"/>
+            </a:solidFill>
+            <a:prstDash val="solid"/>
+          </a:ln>
+        </p:spPr>
+      </p:sp>
+      <p:sp>
+        <p:nvSpPr>
+          <p:cNvPr id="17" name="Text 15"/>
+          <p:cNvSpPr txBox="1"/>
+          <p:nvPr/>
+        </p:nvSpPr>
+        <p:spPr>
+          <a:xfrm>
+            <a:off x="8275320" y="2395728"/>
+            <a:ext cx="438912" cy="438912"/>
+          </a:xfrm>
+          <a:prstGeom prst="rect">
+            <a:avLst/>
+          </a:prstGeom>
+          <a:noFill/>
+          <a:ln/>
+        </p:spPr>
+        <p:txBody>
+          <a:bodyPr wrap="square" lIns="0" tIns="0" rIns="0" bIns="0" rtlCol="0" anchor="ctr"/>
+          <a:lstStyle/>
+          <a:p>
+            <a:pPr algn="ctr" indent="0" marL="0">
+              <a:buNone/>
+            </a:pPr>
+            <a:r>
+              <a:rPr lang="en-US" sz="1300" b="1" dirty="0">
+                <a:solidFill>
+                  <a:srgbClr val="FFFFFF"/>
+                </a:solidFill>
+                <a:latin typeface="Yu Gothic" pitchFamily="34" charset="0"/>
+                <a:ea typeface="Yu Gothic" pitchFamily="34" charset="-122"/>
+                <a:cs typeface="Yu Gothic" pitchFamily="34" charset="-120"/>
+              </a:rPr>
+              <a:t>3</a:t>
+            </a:r>
+            <a:endParaRPr lang="en-US" sz="1300" dirty="0"/>
+          </a:p>
+        </p:txBody>
+      </p:sp>
+      <p:sp>
+        <p:nvSpPr>
+          <p:cNvPr id="18" name="Text 16"/>
+          <p:cNvSpPr txBox="1"/>
+          <p:nvPr/>
+        </p:nvSpPr>
+        <p:spPr>
+          <a:xfrm>
+            <a:off x="8275320" y="2944368"/>
+            <a:ext cx="2834640" cy="731520"/>
+          </a:xfrm>
+          <a:prstGeom prst="rect">
+            <a:avLst/>
+          </a:prstGeom>
+          <a:noFill/>
+          <a:ln/>
+        </p:spPr>
+        <p:txBody>
+          <a:bodyPr wrap="square" lIns="0" tIns="0" rIns="0" bIns="0" rtlCol="0" anchor="ctr"/>
+          <a:lstStyle/>
+          <a:p>
+            <a:pPr indent="0" marL="0">
+              <a:lnSpc>
+                <a:spcPct val="125000"/>
+              </a:lnSpc>
+              <a:buNone/>
+            </a:pPr>
+            <a:r>
+              <a:rPr lang="en-US" sz="1450" b="1" dirty="0">
+                <a:solidFill>
+                  <a:srgbClr val="23201D"/>
+                </a:solidFill>
+                <a:latin typeface="Yu Gothic" pitchFamily="34" charset="0"/>
+                <a:ea typeface="Yu Gothic" pitchFamily="34" charset="-122"/>
+                <a:cs typeface="Yu Gothic" pitchFamily="34" charset="-120"/>
+              </a:rPr>
+              <a:t>効果測定シートを作る</a:t>
+            </a:r>
+            <a:endParaRPr lang="en-US" sz="1450" dirty="0"/>
+          </a:p>
+        </p:txBody>
+      </p:sp>
+      <p:sp>
+        <p:nvSpPr>
+          <p:cNvPr id="19" name="Text 17"/>
+          <p:cNvSpPr txBox="1"/>
+          <p:nvPr/>
+        </p:nvSpPr>
+        <p:spPr>
+          <a:xfrm>
+            <a:off x="8275320" y="3703320"/>
+            <a:ext cx="2834640" cy="1188720"/>
+          </a:xfrm>
+          <a:prstGeom prst="rect">
+            <a:avLst/>
+          </a:prstGeom>
+          <a:noFill/>
+          <a:ln/>
+        </p:spPr>
+        <p:txBody>
+          <a:bodyPr wrap="square" lIns="0" tIns="0" rIns="0" bIns="0" rtlCol="0" anchor="ctr"/>
+          <a:lstStyle/>
+          <a:p>
+            <a:pPr indent="0" marL="0">
+              <a:lnSpc>
+                <a:spcPct val="130000"/>
+              </a:lnSpc>
+              <a:buNone/>
+            </a:pPr>
+            <a:r>
+              <a:rPr lang="en-US" sz="1150" dirty="0">
+                <a:solidFill>
+                  <a:srgbClr val="5A534A"/>
+                </a:solidFill>
+                <a:latin typeface="Yu Gothic" pitchFamily="34" charset="0"/>
+                <a:ea typeface="Yu Gothic" pitchFamily="34" charset="-122"/>
+                <a:cs typeface="Yu Gothic" pitchFamily="34" charset="-120"/>
+              </a:rPr>
+              <a:t>時間・品質・範囲・金額の4行。現在値をその場で埋めます</a:t>
+            </a:r>
+            <a:endParaRPr lang="en-US" sz="1150" dirty="0"/>
+          </a:p>
+        </p:txBody>
+      </p:sp>
+      <p:sp>
+        <p:nvSpPr>
+          <p:cNvPr id="20" name="Text 18"/>
           <p:cNvSpPr txBox="1"/>
           <p:nvPr/>
         </p:nvSpPr>
@@ -3060,7 +3712,7 @@
       </p:sp>
       <p:sp>
         <p:nvSpPr>
-          <p:cNvPr id="10" name="Text 8"/>
+          <p:cNvPr id="21" name="Text 19"/>
           <p:cNvSpPr txBox="1"/>
           <p:nvPr/>
         </p:nvSpPr>
@@ -3091,7 +3743,7 @@
                 <a:ea typeface="Yu Gothic" pitchFamily="34" charset="-122"/>
                 <a:cs typeface="Yu Gothic" pitchFamily="34" charset="-120"/>
               </a:rPr>
-              <a:t>ここだけは</a:t>
+              <a:t>演習</a:t>
             </a:r>
             <a:endParaRPr lang="en-US" sz="900" dirty="0"/>
           </a:p>
@@ -3108,6 +3760,1532 @@
 <file path=ppt/slides/slide12.xml><?xml version="1.0" encoding="utf-8"?>
 <p:sld xmlns:a="http://schemas.openxmlformats.org/drawingml/2006/main" xmlns:r="http://schemas.openxmlformats.org/officeDocument/2006/relationships" xmlns:p="http://schemas.openxmlformats.org/presentationml/2006/main">
   <p:cSld name="Slide 12">
+    <p:bg>
+      <p:bgPr>
+        <a:solidFill>
+          <a:srgbClr val="F6F2EA"/>
+        </a:solidFill>
+      </p:bgPr>
+    </p:bg>
+    <p:spTree>
+      <p:nvGrpSpPr>
+        <p:cNvPr id="1" name=""/>
+        <p:cNvGrpSpPr/>
+        <p:nvPr/>
+      </p:nvGrpSpPr>
+      <p:grpSpPr>
+        <a:xfrm>
+          <a:off x="0" y="0"/>
+          <a:ext cx="0" cy="0"/>
+          <a:chOff x="0" y="0"/>
+          <a:chExt cx="0" cy="0"/>
+        </a:xfrm>
+      </p:grpSpPr>
+      <p:sp>
+        <p:nvSpPr>
+          <p:cNvPr id="2" name="Text 0"/>
+          <p:cNvSpPr txBox="1"/>
+          <p:nvPr/>
+        </p:nvSpPr>
+        <p:spPr>
+          <a:xfrm>
+            <a:off x="777240" y="566928"/>
+            <a:ext cx="10607040" cy="274320"/>
+          </a:xfrm>
+          <a:prstGeom prst="rect">
+            <a:avLst/>
+          </a:prstGeom>
+          <a:noFill/>
+          <a:ln/>
+        </p:spPr>
+        <p:txBody>
+          <a:bodyPr wrap="square" lIns="0" tIns="0" rIns="0" bIns="0" rtlCol="0" anchor="ctr"/>
+          <a:lstStyle/>
+          <a:p>
+            <a:pPr indent="0" marL="0">
+              <a:buNone/>
+            </a:pPr>
+            <a:r>
+              <a:rPr lang="en-US" sz="1100" b="1" spc="250" kern="0" dirty="0">
+                <a:solidFill>
+                  <a:srgbClr val="3B6B4A"/>
+                </a:solidFill>
+                <a:latin typeface="Yu Gothic" pitchFamily="34" charset="0"/>
+                <a:ea typeface="Yu Gothic" pitchFamily="34" charset="-122"/>
+                <a:cs typeface="Yu Gothic" pitchFamily="34" charset="-120"/>
+              </a:rPr>
+              <a:t>業務への組み込み</a:t>
+            </a:r>
+            <a:endParaRPr lang="en-US" sz="1100" dirty="0"/>
+          </a:p>
+        </p:txBody>
+      </p:sp>
+      <p:sp>
+        <p:nvSpPr>
+          <p:cNvPr id="3" name="Text 1"/>
+          <p:cNvSpPr txBox="1"/>
+          <p:nvPr/>
+        </p:nvSpPr>
+        <p:spPr>
+          <a:xfrm>
+            <a:off x="777240" y="896112"/>
+            <a:ext cx="10607040" cy="640080"/>
+          </a:xfrm>
+          <a:prstGeom prst="rect">
+            <a:avLst/>
+          </a:prstGeom>
+          <a:noFill/>
+          <a:ln/>
+        </p:spPr>
+        <p:txBody>
+          <a:bodyPr wrap="square" lIns="0" tIns="0" rIns="0" bIns="0" rtlCol="0" anchor="ctr"/>
+          <a:lstStyle/>
+          <a:p>
+            <a:pPr indent="0" marL="0">
+              <a:buNone/>
+            </a:pPr>
+            <a:r>
+              <a:rPr lang="en-US" sz="2600" b="1" dirty="0">
+                <a:solidFill>
+                  <a:srgbClr val="23201D"/>
+                </a:solidFill>
+                <a:latin typeface="Yu Gothic" pitchFamily="34" charset="0"/>
+                <a:ea typeface="Yu Gothic" pitchFamily="34" charset="-122"/>
+                <a:cs typeface="Yu Gothic" pitchFamily="34" charset="-120"/>
+              </a:rPr>
+              <a:t>帰る前に決めること</a:t>
+            </a:r>
+            <a:endParaRPr lang="en-US" sz="2600" dirty="0"/>
+          </a:p>
+        </p:txBody>
+      </p:sp>
+      <p:sp>
+        <p:nvSpPr>
+          <p:cNvPr id="4" name="Text 2"/>
+          <p:cNvSpPr txBox="1"/>
+          <p:nvPr/>
+        </p:nvSpPr>
+        <p:spPr>
+          <a:xfrm>
+            <a:off x="777240" y="1572768"/>
+            <a:ext cx="10607040" cy="320040"/>
+          </a:xfrm>
+          <a:prstGeom prst="rect">
+            <a:avLst/>
+          </a:prstGeom>
+          <a:noFill/>
+          <a:ln/>
+        </p:spPr>
+        <p:txBody>
+          <a:bodyPr wrap="square" lIns="0" tIns="0" rIns="0" bIns="0" rtlCol="0" anchor="ctr"/>
+          <a:lstStyle/>
+          <a:p>
+            <a:pPr indent="0" marL="0">
+              <a:buNone/>
+            </a:pPr>
+            <a:r>
+              <a:rPr lang="en-US" sz="1250" b="1" dirty="0">
+                <a:solidFill>
+                  <a:srgbClr val="3B6B4A"/>
+                </a:solidFill>
+                <a:latin typeface="Yu Gothic" pitchFamily="34" charset="0"/>
+                <a:ea typeface="Yu Gothic" pitchFamily="34" charset="-122"/>
+                <a:cs typeface="Yu Gothic" pitchFamily="34" charset="-120"/>
+              </a:rPr>
+              <a:t>ここを決めないと、持ち帰っても使われません。紙に書きます。</a:t>
+            </a:r>
+            <a:endParaRPr lang="en-US" sz="1250" dirty="0"/>
+          </a:p>
+        </p:txBody>
+      </p:sp>
+      <p:sp>
+        <p:nvSpPr>
+          <p:cNvPr id="5" name="Shape 3"/>
+          <p:cNvSpPr/>
+          <p:nvPr/>
+        </p:nvSpPr>
+        <p:spPr>
+          <a:xfrm>
+            <a:off x="777240" y="2103120"/>
+            <a:ext cx="10607040" cy="914400"/>
+          </a:xfrm>
+          <a:prstGeom prst="rect">
+            <a:avLst/>
+          </a:prstGeom>
+          <a:solidFill>
+            <a:srgbClr val="FFFFFF"/>
+          </a:solidFill>
+          <a:ln w="12700">
+            <a:solidFill>
+              <a:srgbClr val="EDE7DB"/>
+            </a:solidFill>
+            <a:prstDash val="solid"/>
+          </a:ln>
+        </p:spPr>
+      </p:sp>
+      <p:sp>
+        <p:nvSpPr>
+          <p:cNvPr id="6" name="Shape 4"/>
+          <p:cNvSpPr/>
+          <p:nvPr/>
+        </p:nvSpPr>
+        <p:spPr>
+          <a:xfrm>
+            <a:off x="777240" y="2103120"/>
+            <a:ext cx="54864" cy="914400"/>
+          </a:xfrm>
+          <a:prstGeom prst="rect">
+            <a:avLst/>
+          </a:prstGeom>
+          <a:solidFill>
+            <a:srgbClr val="3B6B4A"/>
+          </a:solidFill>
+          <a:ln w="12700">
+            <a:solidFill>
+              <a:srgbClr val="333333"/>
+            </a:solidFill>
+            <a:prstDash val="solid"/>
+          </a:ln>
+        </p:spPr>
+      </p:sp>
+      <p:sp>
+        <p:nvSpPr>
+          <p:cNvPr id="7" name="Text 5"/>
+          <p:cNvSpPr txBox="1"/>
+          <p:nvPr/>
+        </p:nvSpPr>
+        <p:spPr>
+          <a:xfrm>
+            <a:off x="1143000" y="2176272"/>
+            <a:ext cx="2757830" cy="768096"/>
+          </a:xfrm>
+          <a:prstGeom prst="rect">
+            <a:avLst/>
+          </a:prstGeom>
+          <a:noFill/>
+          <a:ln/>
+        </p:spPr>
+        <p:txBody>
+          <a:bodyPr wrap="square" lIns="0" tIns="0" rIns="0" bIns="0" rtlCol="0" anchor="ctr"/>
+          <a:lstStyle/>
+          <a:p>
+            <a:pPr indent="0" marL="0">
+              <a:buNone/>
+            </a:pPr>
+            <a:r>
+              <a:rPr lang="en-US" sz="1400" b="1" dirty="0">
+                <a:solidFill>
+                  <a:srgbClr val="3B6B4A"/>
+                </a:solidFill>
+                <a:latin typeface="Yu Gothic" pitchFamily="34" charset="0"/>
+                <a:ea typeface="Yu Gothic" pitchFamily="34" charset="-122"/>
+                <a:cs typeface="Yu Gothic" pitchFamily="34" charset="-120"/>
+              </a:rPr>
+              <a:t>回す人に、月何時間割り当てるか</a:t>
+            </a:r>
+            <a:endParaRPr lang="en-US" sz="1400" dirty="0"/>
+          </a:p>
+        </p:txBody>
+      </p:sp>
+      <p:sp>
+        <p:nvSpPr>
+          <p:cNvPr id="8" name="Text 6"/>
+          <p:cNvSpPr txBox="1"/>
+          <p:nvPr/>
+        </p:nvSpPr>
+        <p:spPr>
+          <a:xfrm>
+            <a:off x="4006901" y="2176272"/>
+            <a:ext cx="7011619" cy="768096"/>
+          </a:xfrm>
+          <a:prstGeom prst="rect">
+            <a:avLst/>
+          </a:prstGeom>
+          <a:noFill/>
+          <a:ln/>
+        </p:spPr>
+        <p:txBody>
+          <a:bodyPr wrap="square" lIns="0" tIns="0" rIns="0" bIns="0" rtlCol="0" anchor="ctr"/>
+          <a:lstStyle/>
+          <a:p>
+            <a:pPr indent="0" marL="0">
+              <a:lnSpc>
+                <a:spcPct val="130000"/>
+              </a:lnSpc>
+              <a:buNone/>
+            </a:pPr>
+            <a:r>
+              <a:rPr lang="en-US" sz="1250" dirty="0">
+                <a:solidFill>
+                  <a:srgbClr val="3F3933"/>
+                </a:solidFill>
+                <a:latin typeface="Yu Gothic" pitchFamily="34" charset="0"/>
+                <a:ea typeface="Yu Gothic" pitchFamily="34" charset="-122"/>
+                <a:cs typeface="Yu Gothic" pitchFamily="34" charset="-120"/>
+              </a:rPr>
+              <a:t>「片手間で」は必ず失敗します。時間を業務として認めます</a:t>
+            </a:r>
+            <a:endParaRPr lang="en-US" sz="1250" dirty="0"/>
+          </a:p>
+        </p:txBody>
+      </p:sp>
+      <p:sp>
+        <p:nvSpPr>
+          <p:cNvPr id="9" name="Shape 7"/>
+          <p:cNvSpPr/>
+          <p:nvPr/>
+        </p:nvSpPr>
+        <p:spPr>
+          <a:xfrm>
+            <a:off x="777240" y="3154680"/>
+            <a:ext cx="10607040" cy="914400"/>
+          </a:xfrm>
+          <a:prstGeom prst="rect">
+            <a:avLst/>
+          </a:prstGeom>
+          <a:solidFill>
+            <a:srgbClr val="FFFFFF"/>
+          </a:solidFill>
+          <a:ln w="12700">
+            <a:solidFill>
+              <a:srgbClr val="EDE7DB"/>
+            </a:solidFill>
+            <a:prstDash val="solid"/>
+          </a:ln>
+        </p:spPr>
+      </p:sp>
+      <p:sp>
+        <p:nvSpPr>
+          <p:cNvPr id="10" name="Shape 8"/>
+          <p:cNvSpPr/>
+          <p:nvPr/>
+        </p:nvSpPr>
+        <p:spPr>
+          <a:xfrm>
+            <a:off x="777240" y="3154680"/>
+            <a:ext cx="54864" cy="914400"/>
+          </a:xfrm>
+          <a:prstGeom prst="rect">
+            <a:avLst/>
+          </a:prstGeom>
+          <a:solidFill>
+            <a:srgbClr val="3B6B4A"/>
+          </a:solidFill>
+          <a:ln w="12700">
+            <a:solidFill>
+              <a:srgbClr val="333333"/>
+            </a:solidFill>
+            <a:prstDash val="solid"/>
+          </a:ln>
+        </p:spPr>
+      </p:sp>
+      <p:sp>
+        <p:nvSpPr>
+          <p:cNvPr id="11" name="Text 9"/>
+          <p:cNvSpPr txBox="1"/>
+          <p:nvPr/>
+        </p:nvSpPr>
+        <p:spPr>
+          <a:xfrm>
+            <a:off x="1143000" y="3227832"/>
+            <a:ext cx="2757830" cy="768096"/>
+          </a:xfrm>
+          <a:prstGeom prst="rect">
+            <a:avLst/>
+          </a:prstGeom>
+          <a:noFill/>
+          <a:ln/>
+        </p:spPr>
+        <p:txBody>
+          <a:bodyPr wrap="square" lIns="0" tIns="0" rIns="0" bIns="0" rtlCol="0" anchor="ctr"/>
+          <a:lstStyle/>
+          <a:p>
+            <a:pPr indent="0" marL="0">
+              <a:buNone/>
+            </a:pPr>
+            <a:r>
+              <a:rPr lang="en-US" sz="1400" b="1" dirty="0">
+                <a:solidFill>
+                  <a:srgbClr val="3B6B4A"/>
+                </a:solidFill>
+                <a:latin typeface="Yu Gothic" pitchFamily="34" charset="0"/>
+                <a:ea typeface="Yu Gothic" pitchFamily="34" charset="-122"/>
+                <a:cs typeface="Yu Gothic" pitchFamily="34" charset="-120"/>
+              </a:rPr>
+              <a:t>第8回・第10回の宿題を誰が引き取るか</a:t>
+            </a:r>
+            <a:endParaRPr lang="en-US" sz="1400" dirty="0"/>
+          </a:p>
+        </p:txBody>
+      </p:sp>
+      <p:sp>
+        <p:nvSpPr>
+          <p:cNvPr id="12" name="Text 10"/>
+          <p:cNvSpPr txBox="1"/>
+          <p:nvPr/>
+        </p:nvSpPr>
+        <p:spPr>
+          <a:xfrm>
+            <a:off x="4006901" y="3227832"/>
+            <a:ext cx="7011619" cy="768096"/>
+          </a:xfrm>
+          <a:prstGeom prst="rect">
+            <a:avLst/>
+          </a:prstGeom>
+          <a:noFill/>
+          <a:ln/>
+        </p:spPr>
+        <p:txBody>
+          <a:bodyPr wrap="square" lIns="0" tIns="0" rIns="0" bIns="0" rtlCol="0" anchor="ctr"/>
+          <a:lstStyle/>
+          <a:p>
+            <a:pPr indent="0" marL="0">
+              <a:lnSpc>
+                <a:spcPct val="130000"/>
+              </a:lnSpc>
+              <a:buNone/>
+            </a:pPr>
+            <a:r>
+              <a:rPr lang="en-US" sz="1250" dirty="0">
+                <a:solidFill>
+                  <a:srgbClr val="3F3933"/>
+                </a:solidFill>
+                <a:latin typeface="Yu Gothic" pitchFamily="34" charset="0"/>
+                <a:ea typeface="Yu Gothic" pitchFamily="34" charset="-122"/>
+                <a:cs typeface="Yu Gothic" pitchFamily="34" charset="-120"/>
+              </a:rPr>
+              <a:t>不足資料リストと、基準が決まっていない業務。担当のつかない項目は永久に埋まりません</a:t>
+            </a:r>
+            <a:endParaRPr lang="en-US" sz="1250" dirty="0"/>
+          </a:p>
+        </p:txBody>
+      </p:sp>
+      <p:sp>
+        <p:nvSpPr>
+          <p:cNvPr id="13" name="Shape 11"/>
+          <p:cNvSpPr/>
+          <p:nvPr/>
+        </p:nvSpPr>
+        <p:spPr>
+          <a:xfrm>
+            <a:off x="777240" y="4206240"/>
+            <a:ext cx="10607040" cy="914400"/>
+          </a:xfrm>
+          <a:prstGeom prst="rect">
+            <a:avLst/>
+          </a:prstGeom>
+          <a:solidFill>
+            <a:srgbClr val="FFFFFF"/>
+          </a:solidFill>
+          <a:ln w="12700">
+            <a:solidFill>
+              <a:srgbClr val="EDE7DB"/>
+            </a:solidFill>
+            <a:prstDash val="solid"/>
+          </a:ln>
+        </p:spPr>
+      </p:sp>
+      <p:sp>
+        <p:nvSpPr>
+          <p:cNvPr id="14" name="Shape 12"/>
+          <p:cNvSpPr/>
+          <p:nvPr/>
+        </p:nvSpPr>
+        <p:spPr>
+          <a:xfrm>
+            <a:off x="777240" y="4206240"/>
+            <a:ext cx="54864" cy="914400"/>
+          </a:xfrm>
+          <a:prstGeom prst="rect">
+            <a:avLst/>
+          </a:prstGeom>
+          <a:solidFill>
+            <a:srgbClr val="3B6B4A"/>
+          </a:solidFill>
+          <a:ln w="12700">
+            <a:solidFill>
+              <a:srgbClr val="333333"/>
+            </a:solidFill>
+            <a:prstDash val="solid"/>
+          </a:ln>
+        </p:spPr>
+      </p:sp>
+      <p:sp>
+        <p:nvSpPr>
+          <p:cNvPr id="15" name="Text 13"/>
+          <p:cNvSpPr txBox="1"/>
+          <p:nvPr/>
+        </p:nvSpPr>
+        <p:spPr>
+          <a:xfrm>
+            <a:off x="1143000" y="4279392"/>
+            <a:ext cx="2757830" cy="768096"/>
+          </a:xfrm>
+          <a:prstGeom prst="rect">
+            <a:avLst/>
+          </a:prstGeom>
+          <a:noFill/>
+          <a:ln/>
+        </p:spPr>
+        <p:txBody>
+          <a:bodyPr wrap="square" lIns="0" tIns="0" rIns="0" bIns="0" rtlCol="0" anchor="ctr"/>
+          <a:lstStyle/>
+          <a:p>
+            <a:pPr indent="0" marL="0">
+              <a:buNone/>
+            </a:pPr>
+            <a:r>
+              <a:rPr lang="en-US" sz="1400" b="1" dirty="0">
+                <a:solidFill>
+                  <a:srgbClr val="3B6B4A"/>
+                </a:solidFill>
+                <a:latin typeface="Yu Gothic" pitchFamily="34" charset="0"/>
+                <a:ea typeface="Yu Gothic" pitchFamily="34" charset="-122"/>
+                <a:cs typeface="Yu Gothic" pitchFamily="34" charset="-120"/>
+              </a:rPr>
+              <a:t>いつ見直すか</a:t>
+            </a:r>
+            <a:endParaRPr lang="en-US" sz="1400" dirty="0"/>
+          </a:p>
+        </p:txBody>
+      </p:sp>
+      <p:sp>
+        <p:nvSpPr>
+          <p:cNvPr id="16" name="Text 14"/>
+          <p:cNvSpPr txBox="1"/>
+          <p:nvPr/>
+        </p:nvSpPr>
+        <p:spPr>
+          <a:xfrm>
+            <a:off x="4006901" y="4279392"/>
+            <a:ext cx="7011619" cy="768096"/>
+          </a:xfrm>
+          <a:prstGeom prst="rect">
+            <a:avLst/>
+          </a:prstGeom>
+          <a:noFill/>
+          <a:ln/>
+        </p:spPr>
+        <p:txBody>
+          <a:bodyPr wrap="square" lIns="0" tIns="0" rIns="0" bIns="0" rtlCol="0" anchor="ctr"/>
+          <a:lstStyle/>
+          <a:p>
+            <a:pPr indent="0" marL="0">
+              <a:lnSpc>
+                <a:spcPct val="130000"/>
+              </a:lnSpc>
+              <a:buNone/>
+            </a:pPr>
+            <a:r>
+              <a:rPr lang="en-US" sz="1250" dirty="0">
+                <a:solidFill>
+                  <a:srgbClr val="3F3933"/>
+                </a:solidFill>
+                <a:latin typeface="Yu Gothic" pitchFamily="34" charset="0"/>
+                <a:ea typeface="Yu Gothic" pitchFamily="34" charset="-122"/>
+                <a:cs typeface="Yu Gothic" pitchFamily="34" charset="-120"/>
+              </a:rPr>
+              <a:t>3か月後。費用と効果を突き合わせる日を決めます</a:t>
+            </a:r>
+            <a:endParaRPr lang="en-US" sz="1250" dirty="0"/>
+          </a:p>
+        </p:txBody>
+      </p:sp>
+      <p:sp>
+        <p:nvSpPr>
+          <p:cNvPr id="17" name="Text 15"/>
+          <p:cNvSpPr txBox="1"/>
+          <p:nvPr/>
+        </p:nvSpPr>
+        <p:spPr>
+          <a:xfrm>
+            <a:off x="777240" y="6382512"/>
+            <a:ext cx="7424928" cy="256032"/>
+          </a:xfrm>
+          <a:prstGeom prst="rect">
+            <a:avLst/>
+          </a:prstGeom>
+          <a:noFill/>
+          <a:ln/>
+        </p:spPr>
+        <p:txBody>
+          <a:bodyPr wrap="square" lIns="0" tIns="0" rIns="0" bIns="0" rtlCol="0" anchor="ctr"/>
+          <a:lstStyle/>
+          <a:p>
+            <a:pPr indent="0" marL="0">
+              <a:buNone/>
+            </a:pPr>
+            <a:r>
+              <a:rPr lang="en-US" sz="900" dirty="0">
+                <a:solidFill>
+                  <a:srgbClr val="8A8177"/>
+                </a:solidFill>
+                <a:latin typeface="Yu Gothic" pitchFamily="34" charset="0"/>
+                <a:ea typeface="Yu Gothic" pitchFamily="34" charset="-122"/>
+                <a:cs typeface="Yu Gothic" pitchFamily="34" charset="-120"/>
+              </a:rPr>
+              <a:t>第11回　組織に載せる</a:t>
+            </a:r>
+            <a:endParaRPr lang="en-US" sz="900" dirty="0"/>
+          </a:p>
+        </p:txBody>
+      </p:sp>
+      <p:sp>
+        <p:nvSpPr>
+          <p:cNvPr id="18" name="Text 16"/>
+          <p:cNvSpPr txBox="1"/>
+          <p:nvPr/>
+        </p:nvSpPr>
+        <p:spPr>
+          <a:xfrm>
+            <a:off x="8202168" y="6382512"/>
+            <a:ext cx="3182112" cy="256032"/>
+          </a:xfrm>
+          <a:prstGeom prst="rect">
+            <a:avLst/>
+          </a:prstGeom>
+          <a:noFill/>
+          <a:ln/>
+        </p:spPr>
+        <p:txBody>
+          <a:bodyPr wrap="square" lIns="0" tIns="0" rIns="0" bIns="0" rtlCol="0" anchor="ctr"/>
+          <a:lstStyle/>
+          <a:p>
+            <a:pPr algn="r" indent="0" marL="0">
+              <a:buNone/>
+            </a:pPr>
+            <a:r>
+              <a:rPr lang="en-US" sz="900" dirty="0">
+                <a:solidFill>
+                  <a:srgbClr val="8A8177"/>
+                </a:solidFill>
+                <a:latin typeface="Yu Gothic" pitchFamily="34" charset="0"/>
+                <a:ea typeface="Yu Gothic" pitchFamily="34" charset="-122"/>
+                <a:cs typeface="Yu Gothic" pitchFamily="34" charset="-120"/>
+              </a:rPr>
+              <a:t>組み込み</a:t>
+            </a:r>
+            <a:endParaRPr lang="en-US" sz="900" dirty="0"/>
+          </a:p>
+        </p:txBody>
+      </p:sp>
+    </p:spTree>
+  </p:cSld>
+  <p:clrMapOvr>
+    <a:masterClrMapping/>
+  </p:clrMapOvr>
+</p:sld>
+</file>
+
+<file path=ppt/slides/slide13.xml><?xml version="1.0" encoding="utf-8"?>
+<p:sld xmlns:a="http://schemas.openxmlformats.org/drawingml/2006/main" xmlns:r="http://schemas.openxmlformats.org/officeDocument/2006/relationships" xmlns:p="http://schemas.openxmlformats.org/presentationml/2006/main">
+  <p:cSld name="Slide 13">
+    <p:bg>
+      <p:bgPr>
+        <a:solidFill>
+          <a:srgbClr val="F6F2EA"/>
+        </a:solidFill>
+      </p:bgPr>
+    </p:bg>
+    <p:spTree>
+      <p:nvGrpSpPr>
+        <p:cNvPr id="1" name=""/>
+        <p:cNvGrpSpPr/>
+        <p:nvPr/>
+      </p:nvGrpSpPr>
+      <p:grpSpPr>
+        <a:xfrm>
+          <a:off x="0" y="0"/>
+          <a:ext cx="0" cy="0"/>
+          <a:chOff x="0" y="0"/>
+          <a:chExt cx="0" cy="0"/>
+        </a:xfrm>
+      </p:grpSpPr>
+      <p:sp>
+        <p:nvSpPr>
+          <p:cNvPr id="2" name="Text 0"/>
+          <p:cNvSpPr txBox="1"/>
+          <p:nvPr/>
+        </p:nvSpPr>
+        <p:spPr>
+          <a:xfrm>
+            <a:off x="777240" y="566928"/>
+            <a:ext cx="10607040" cy="274320"/>
+          </a:xfrm>
+          <a:prstGeom prst="rect">
+            <a:avLst/>
+          </a:prstGeom>
+          <a:noFill/>
+          <a:ln/>
+        </p:spPr>
+        <p:txBody>
+          <a:bodyPr wrap="square" lIns="0" tIns="0" rIns="0" bIns="0" rtlCol="0" anchor="ctr"/>
+          <a:lstStyle/>
+          <a:p>
+            <a:pPr indent="0" marL="0">
+              <a:buNone/>
+            </a:pPr>
+            <a:r>
+              <a:rPr lang="en-US" sz="1100" b="1" spc="250" kern="0" dirty="0">
+                <a:solidFill>
+                  <a:srgbClr val="B04A2F"/>
+                </a:solidFill>
+                <a:latin typeface="Yu Gothic" pitchFamily="34" charset="0"/>
+                <a:ea typeface="Yu Gothic" pitchFamily="34" charset="-122"/>
+                <a:cs typeface="Yu Gothic" pitchFamily="34" charset="-120"/>
+              </a:rPr>
+              <a:t>ここだけは</a:t>
+            </a:r>
+            <a:endParaRPr lang="en-US" sz="1100" dirty="0"/>
+          </a:p>
+        </p:txBody>
+      </p:sp>
+      <p:sp>
+        <p:nvSpPr>
+          <p:cNvPr id="3" name="Text 1"/>
+          <p:cNvSpPr txBox="1"/>
+          <p:nvPr/>
+        </p:nvSpPr>
+        <p:spPr>
+          <a:xfrm>
+            <a:off x="777240" y="1097280"/>
+            <a:ext cx="10607040" cy="640080"/>
+          </a:xfrm>
+          <a:prstGeom prst="rect">
+            <a:avLst/>
+          </a:prstGeom>
+          <a:noFill/>
+          <a:ln/>
+        </p:spPr>
+        <p:txBody>
+          <a:bodyPr wrap="square" lIns="0" tIns="0" rIns="0" bIns="0" rtlCol="0" anchor="ctr"/>
+          <a:lstStyle/>
+          <a:p>
+            <a:pPr indent="0" marL="0">
+              <a:buNone/>
+            </a:pPr>
+            <a:r>
+              <a:rPr lang="en-US" sz="2600" b="1" dirty="0">
+                <a:solidFill>
+                  <a:srgbClr val="23201D"/>
+                </a:solidFill>
+                <a:latin typeface="Yu Gothic" pitchFamily="34" charset="0"/>
+                <a:ea typeface="Yu Gothic" pitchFamily="34" charset="-122"/>
+                <a:cs typeface="Yu Gothic" pitchFamily="34" charset="-120"/>
+              </a:rPr>
+              <a:t>個人名義の契約が残っていませんか</a:t>
+            </a:r>
+            <a:endParaRPr lang="en-US" sz="2600" dirty="0"/>
+          </a:p>
+        </p:txBody>
+      </p:sp>
+      <p:sp>
+        <p:nvSpPr>
+          <p:cNvPr id="4" name="Shape 2"/>
+          <p:cNvSpPr/>
+          <p:nvPr/>
+        </p:nvSpPr>
+        <p:spPr>
+          <a:xfrm>
+            <a:off x="777240" y="2148840"/>
+            <a:ext cx="64008" cy="2194560"/>
+          </a:xfrm>
+          <a:prstGeom prst="rect">
+            <a:avLst/>
+          </a:prstGeom>
+          <a:solidFill>
+            <a:srgbClr val="B04A2F"/>
+          </a:solidFill>
+          <a:ln w="12700">
+            <a:solidFill>
+              <a:srgbClr val="333333"/>
+            </a:solidFill>
+            <a:prstDash val="solid"/>
+          </a:ln>
+        </p:spPr>
+      </p:sp>
+      <p:sp>
+        <p:nvSpPr>
+          <p:cNvPr id="5" name="Text 3"/>
+          <p:cNvSpPr txBox="1"/>
+          <p:nvPr/>
+        </p:nvSpPr>
+        <p:spPr>
+          <a:xfrm>
+            <a:off x="1188720" y="2148840"/>
+            <a:ext cx="9966960" cy="2194560"/>
+          </a:xfrm>
+          <a:prstGeom prst="rect">
+            <a:avLst/>
+          </a:prstGeom>
+          <a:noFill/>
+          <a:ln/>
+        </p:spPr>
+        <p:txBody>
+          <a:bodyPr wrap="square" lIns="0" tIns="0" rIns="0" bIns="0" rtlCol="0" anchor="ctr"/>
+          <a:lstStyle/>
+          <a:p>
+            <a:pPr indent="0" marL="0">
+              <a:lnSpc>
+                <a:spcPct val="160000"/>
+              </a:lnSpc>
+              <a:buNone/>
+            </a:pPr>
+            <a:r>
+              <a:rPr lang="en-US" sz="1650" dirty="0">
+                <a:solidFill>
+                  <a:srgbClr val="3F3933"/>
+                </a:solidFill>
+                <a:latin typeface="Yu Gothic" pitchFamily="34" charset="0"/>
+                <a:ea typeface="Yu Gothic" pitchFamily="34" charset="-122"/>
+                <a:cs typeface="Yu Gothic" pitchFamily="34" charset="-120"/>
+              </a:rPr>
+              <a:t>ここで洗い出してください。社長個人のクレジットカードで契約したまま、社員が使っている状態は珍しくありません。退職時の手順も含めて、この回で整理します。法人契約への移行を検討するなら、今日がその場です。</a:t>
+            </a:r>
+            <a:endParaRPr lang="en-US" sz="1650" dirty="0"/>
+          </a:p>
+        </p:txBody>
+      </p:sp>
+      <p:sp>
+        <p:nvSpPr>
+          <p:cNvPr id="6" name="Shape 4"/>
+          <p:cNvSpPr/>
+          <p:nvPr/>
+        </p:nvSpPr>
+        <p:spPr>
+          <a:xfrm>
+            <a:off x="777240" y="4709160"/>
+            <a:ext cx="10607040" cy="960120"/>
+          </a:xfrm>
+          <a:prstGeom prst="rect">
+            <a:avLst/>
+          </a:prstGeom>
+          <a:solidFill>
+            <a:srgbClr val="EDE7DB"/>
+          </a:solidFill>
+          <a:ln w="12700">
+            <a:solidFill>
+              <a:srgbClr val="333333"/>
+            </a:solidFill>
+            <a:prstDash val="solid"/>
+          </a:ln>
+        </p:spPr>
+      </p:sp>
+      <p:sp>
+        <p:nvSpPr>
+          <p:cNvPr id="7" name="Text 5"/>
+          <p:cNvSpPr txBox="1"/>
+          <p:nvPr/>
+        </p:nvSpPr>
+        <p:spPr>
+          <a:xfrm>
+            <a:off x="1051560" y="4800600"/>
+            <a:ext cx="1463040" cy="256032"/>
+          </a:xfrm>
+          <a:prstGeom prst="rect">
+            <a:avLst/>
+          </a:prstGeom>
+          <a:noFill/>
+          <a:ln/>
+        </p:spPr>
+        <p:txBody>
+          <a:bodyPr wrap="square" lIns="0" tIns="0" rIns="0" bIns="0" rtlCol="0" anchor="ctr"/>
+          <a:lstStyle/>
+          <a:p>
+            <a:pPr indent="0" marL="0">
+              <a:buNone/>
+            </a:pPr>
+            <a:r>
+              <a:rPr lang="en-US" sz="900" b="1" spc="150" kern="0" dirty="0">
+                <a:solidFill>
+                  <a:srgbClr val="B04A2F"/>
+                </a:solidFill>
+                <a:latin typeface="Yu Gothic" pitchFamily="34" charset="0"/>
+                <a:ea typeface="Yu Gothic" pitchFamily="34" charset="-122"/>
+                <a:cs typeface="Yu Gothic" pitchFamily="34" charset="-120"/>
+              </a:rPr>
+              <a:t>他社では</a:t>
+            </a:r>
+            <a:endParaRPr lang="en-US" sz="900" dirty="0"/>
+          </a:p>
+        </p:txBody>
+      </p:sp>
+      <p:sp>
+        <p:nvSpPr>
+          <p:cNvPr id="8" name="Text 6"/>
+          <p:cNvSpPr txBox="1"/>
+          <p:nvPr/>
+        </p:nvSpPr>
+        <p:spPr>
+          <a:xfrm>
+            <a:off x="1051560" y="5029200"/>
+            <a:ext cx="10058400" cy="566928"/>
+          </a:xfrm>
+          <a:prstGeom prst="rect">
+            <a:avLst/>
+          </a:prstGeom>
+          <a:noFill/>
+          <a:ln/>
+        </p:spPr>
+        <p:txBody>
+          <a:bodyPr wrap="square" lIns="0" tIns="0" rIns="0" bIns="0" rtlCol="0" anchor="ctr"/>
+          <a:lstStyle/>
+          <a:p>
+            <a:pPr indent="0" marL="0">
+              <a:lnSpc>
+                <a:spcPct val="130000"/>
+              </a:lnSpc>
+              <a:buNone/>
+            </a:pPr>
+            <a:r>
+              <a:rPr lang="en-US" sz="1250" dirty="0">
+                <a:solidFill>
+                  <a:srgbClr val="3F3933"/>
+                </a:solidFill>
+                <a:latin typeface="Yu Gothic" pitchFamily="34" charset="0"/>
+                <a:ea typeface="Yu Gothic" pitchFamily="34" charset="-122"/>
+                <a:cs typeface="Yu Gothic" pitchFamily="34" charset="-120"/>
+              </a:rPr>
+              <a:t>推進役を決めずに始めた会社と、専任ではないが月4時間を正式に割り当てた会社の対比があります。前者は3か月で止まり、後者は1年後も回っています。差は熱意ではなく、時間が業務として認められていたかどうかでした。</a:t>
+            </a:r>
+            <a:endParaRPr lang="en-US" sz="1250" dirty="0"/>
+          </a:p>
+        </p:txBody>
+      </p:sp>
+      <p:sp>
+        <p:nvSpPr>
+          <p:cNvPr id="9" name="Text 7"/>
+          <p:cNvSpPr txBox="1"/>
+          <p:nvPr/>
+        </p:nvSpPr>
+        <p:spPr>
+          <a:xfrm>
+            <a:off x="777240" y="6382512"/>
+            <a:ext cx="7424928" cy="256032"/>
+          </a:xfrm>
+          <a:prstGeom prst="rect">
+            <a:avLst/>
+          </a:prstGeom>
+          <a:noFill/>
+          <a:ln/>
+        </p:spPr>
+        <p:txBody>
+          <a:bodyPr wrap="square" lIns="0" tIns="0" rIns="0" bIns="0" rtlCol="0" anchor="ctr"/>
+          <a:lstStyle/>
+          <a:p>
+            <a:pPr indent="0" marL="0">
+              <a:buNone/>
+            </a:pPr>
+            <a:r>
+              <a:rPr lang="en-US" sz="900" dirty="0">
+                <a:solidFill>
+                  <a:srgbClr val="8A8177"/>
+                </a:solidFill>
+                <a:latin typeface="Yu Gothic" pitchFamily="34" charset="0"/>
+                <a:ea typeface="Yu Gothic" pitchFamily="34" charset="-122"/>
+                <a:cs typeface="Yu Gothic" pitchFamily="34" charset="-120"/>
+              </a:rPr>
+              <a:t>第11回　組織に載せる</a:t>
+            </a:r>
+            <a:endParaRPr lang="en-US" sz="900" dirty="0"/>
+          </a:p>
+        </p:txBody>
+      </p:sp>
+      <p:sp>
+        <p:nvSpPr>
+          <p:cNvPr id="10" name="Text 8"/>
+          <p:cNvSpPr txBox="1"/>
+          <p:nvPr/>
+        </p:nvSpPr>
+        <p:spPr>
+          <a:xfrm>
+            <a:off x="8202168" y="6382512"/>
+            <a:ext cx="3182112" cy="256032"/>
+          </a:xfrm>
+          <a:prstGeom prst="rect">
+            <a:avLst/>
+          </a:prstGeom>
+          <a:noFill/>
+          <a:ln/>
+        </p:spPr>
+        <p:txBody>
+          <a:bodyPr wrap="square" lIns="0" tIns="0" rIns="0" bIns="0" rtlCol="0" anchor="ctr"/>
+          <a:lstStyle/>
+          <a:p>
+            <a:pPr algn="r" indent="0" marL="0">
+              <a:buNone/>
+            </a:pPr>
+            <a:r>
+              <a:rPr lang="en-US" sz="900" dirty="0">
+                <a:solidFill>
+                  <a:srgbClr val="8A8177"/>
+                </a:solidFill>
+                <a:latin typeface="Yu Gothic" pitchFamily="34" charset="0"/>
+                <a:ea typeface="Yu Gothic" pitchFamily="34" charset="-122"/>
+                <a:cs typeface="Yu Gothic" pitchFamily="34" charset="-120"/>
+              </a:rPr>
+              <a:t>ここだけは</a:t>
+            </a:r>
+            <a:endParaRPr lang="en-US" sz="900" dirty="0"/>
+          </a:p>
+        </p:txBody>
+      </p:sp>
+    </p:spTree>
+  </p:cSld>
+  <p:clrMapOvr>
+    <a:masterClrMapping/>
+  </p:clrMapOvr>
+</p:sld>
+</file>
+
+<file path=ppt/slides/slide14.xml><?xml version="1.0" encoding="utf-8"?>
+<p:sld xmlns:a="http://schemas.openxmlformats.org/drawingml/2006/main" xmlns:r="http://schemas.openxmlformats.org/officeDocument/2006/relationships" xmlns:p="http://schemas.openxmlformats.org/presentationml/2006/main">
+  <p:cSld name="Slide 14">
+    <p:bg>
+      <p:bgPr>
+        <a:solidFill>
+          <a:srgbClr val="F6F2EA"/>
+        </a:solidFill>
+      </p:bgPr>
+    </p:bg>
+    <p:spTree>
+      <p:nvGrpSpPr>
+        <p:cNvPr id="1" name=""/>
+        <p:cNvGrpSpPr/>
+        <p:nvPr/>
+      </p:nvGrpSpPr>
+      <p:grpSpPr>
+        <a:xfrm>
+          <a:off x="0" y="0"/>
+          <a:ext cx="0" cy="0"/>
+          <a:chOff x="0" y="0"/>
+          <a:chExt cx="0" cy="0"/>
+        </a:xfrm>
+      </p:grpSpPr>
+      <p:sp>
+        <p:nvSpPr>
+          <p:cNvPr id="2" name="Text 0"/>
+          <p:cNvSpPr txBox="1"/>
+          <p:nvPr/>
+        </p:nvSpPr>
+        <p:spPr>
+          <a:xfrm>
+            <a:off x="777240" y="566928"/>
+            <a:ext cx="10607040" cy="274320"/>
+          </a:xfrm>
+          <a:prstGeom prst="rect">
+            <a:avLst/>
+          </a:prstGeom>
+          <a:noFill/>
+          <a:ln/>
+        </p:spPr>
+        <p:txBody>
+          <a:bodyPr wrap="square" lIns="0" tIns="0" rIns="0" bIns="0" rtlCol="0" anchor="ctr"/>
+          <a:lstStyle/>
+          <a:p>
+            <a:pPr indent="0" marL="0">
+              <a:buNone/>
+            </a:pPr>
+            <a:r>
+              <a:rPr lang="en-US" sz="1100" b="1" spc="250" kern="0" dirty="0">
+                <a:solidFill>
+                  <a:srgbClr val="3B6B4A"/>
+                </a:solidFill>
+                <a:latin typeface="Yu Gothic" pitchFamily="34" charset="0"/>
+                <a:ea typeface="Yu Gothic" pitchFamily="34" charset="-122"/>
+                <a:cs typeface="Yu Gothic" pitchFamily="34" charset="-120"/>
+              </a:rPr>
+              <a:t>次回まで</a:t>
+            </a:r>
+            <a:endParaRPr lang="en-US" sz="1100" dirty="0"/>
+          </a:p>
+        </p:txBody>
+      </p:sp>
+      <p:sp>
+        <p:nvSpPr>
+          <p:cNvPr id="3" name="Text 1"/>
+          <p:cNvSpPr txBox="1"/>
+          <p:nvPr/>
+        </p:nvSpPr>
+        <p:spPr>
+          <a:xfrm>
+            <a:off x="777240" y="896112"/>
+            <a:ext cx="10607040" cy="640080"/>
+          </a:xfrm>
+          <a:prstGeom prst="rect">
+            <a:avLst/>
+          </a:prstGeom>
+          <a:noFill/>
+          <a:ln/>
+        </p:spPr>
+        <p:txBody>
+          <a:bodyPr wrap="square" lIns="0" tIns="0" rIns="0" bIns="0" rtlCol="0" anchor="ctr"/>
+          <a:lstStyle/>
+          <a:p>
+            <a:pPr indent="0" marL="0">
+              <a:buNone/>
+            </a:pPr>
+            <a:r>
+              <a:rPr lang="en-US" sz="2600" b="1" dirty="0">
+                <a:solidFill>
+                  <a:srgbClr val="23201D"/>
+                </a:solidFill>
+                <a:latin typeface="Yu Gothic" pitchFamily="34" charset="0"/>
+                <a:ea typeface="Yu Gothic" pitchFamily="34" charset="-122"/>
+                <a:cs typeface="Yu Gothic" pitchFamily="34" charset="-120"/>
+              </a:rPr>
+              <a:t>次回は「AIを前提に事業を組み直す【社員同席】」</a:t>
+            </a:r>
+            <a:endParaRPr lang="en-US" sz="2600" dirty="0"/>
+          </a:p>
+        </p:txBody>
+      </p:sp>
+      <p:sp>
+        <p:nvSpPr>
+          <p:cNvPr id="4" name="Text 2"/>
+          <p:cNvSpPr txBox="1"/>
+          <p:nvPr/>
+        </p:nvSpPr>
+        <p:spPr>
+          <a:xfrm>
+            <a:off x="777240" y="1572768"/>
+            <a:ext cx="9546336" cy="457200"/>
+          </a:xfrm>
+          <a:prstGeom prst="rect">
+            <a:avLst/>
+          </a:prstGeom>
+          <a:noFill/>
+          <a:ln/>
+        </p:spPr>
+        <p:txBody>
+          <a:bodyPr wrap="square" lIns="0" tIns="0" rIns="0" bIns="0" rtlCol="0" anchor="ctr"/>
+          <a:lstStyle/>
+          <a:p>
+            <a:pPr indent="0" marL="0">
+              <a:buNone/>
+            </a:pPr>
+            <a:r>
+              <a:rPr lang="en-US" sz="1400" b="1" dirty="0">
+                <a:solidFill>
+                  <a:srgbClr val="3B6B4A"/>
+                </a:solidFill>
+                <a:latin typeface="Yu Gothic" pitchFamily="34" charset="0"/>
+                <a:ea typeface="Yu Gothic" pitchFamily="34" charset="-122"/>
+                <a:cs typeface="Yu Gothic" pitchFamily="34" charset="-120"/>
+              </a:rPr>
+              <a:t>最終回です。道具の話を終えて、事業の話に戻ります。</a:t>
+            </a:r>
+            <a:endParaRPr lang="en-US" sz="1400" dirty="0"/>
+          </a:p>
+        </p:txBody>
+      </p:sp>
+      <p:sp>
+        <p:nvSpPr>
+          <p:cNvPr id="5" name="Shape 3"/>
+          <p:cNvSpPr/>
+          <p:nvPr/>
+        </p:nvSpPr>
+        <p:spPr>
+          <a:xfrm>
+            <a:off x="777240" y="2240280"/>
+            <a:ext cx="4985309" cy="2286000"/>
+          </a:xfrm>
+          <a:prstGeom prst="rect">
+            <a:avLst/>
+          </a:prstGeom>
+          <a:solidFill>
+            <a:srgbClr val="FFFFFF"/>
+          </a:solidFill>
+          <a:ln w="12700">
+            <a:solidFill>
+              <a:srgbClr val="EDE7DB"/>
+            </a:solidFill>
+            <a:prstDash val="solid"/>
+          </a:ln>
+        </p:spPr>
+      </p:sp>
+      <p:sp>
+        <p:nvSpPr>
+          <p:cNvPr id="6" name="Text 4"/>
+          <p:cNvSpPr txBox="1"/>
+          <p:nvPr/>
+        </p:nvSpPr>
+        <p:spPr>
+          <a:xfrm>
+            <a:off x="1051560" y="2377440"/>
+            <a:ext cx="4242816" cy="274320"/>
+          </a:xfrm>
+          <a:prstGeom prst="rect">
+            <a:avLst/>
+          </a:prstGeom>
+          <a:noFill/>
+          <a:ln/>
+        </p:spPr>
+        <p:txBody>
+          <a:bodyPr wrap="square" lIns="0" tIns="0" rIns="0" bIns="0" rtlCol="0" anchor="ctr"/>
+          <a:lstStyle/>
+          <a:p>
+            <a:pPr indent="0" marL="0">
+              <a:buNone/>
+            </a:pPr>
+            <a:r>
+              <a:rPr lang="en-US" sz="1000" b="1" spc="150" kern="0" dirty="0">
+                <a:solidFill>
+                  <a:srgbClr val="B04A2F"/>
+                </a:solidFill>
+                <a:latin typeface="Yu Gothic" pitchFamily="34" charset="0"/>
+                <a:ea typeface="Yu Gothic" pitchFamily="34" charset="-122"/>
+                <a:cs typeface="Yu Gothic" pitchFamily="34" charset="-120"/>
+              </a:rPr>
+              <a:t>次回までにやること</a:t>
+            </a:r>
+            <a:endParaRPr lang="en-US" sz="1000" dirty="0"/>
+          </a:p>
+        </p:txBody>
+      </p:sp>
+      <p:sp>
+        <p:nvSpPr>
+          <p:cNvPr id="7" name="Text 5"/>
+          <p:cNvSpPr txBox="1"/>
+          <p:nvPr/>
+        </p:nvSpPr>
+        <p:spPr>
+          <a:xfrm>
+            <a:off x="1051560" y="2743200"/>
+            <a:ext cx="4436669" cy="1554480"/>
+          </a:xfrm>
+          <a:prstGeom prst="rect">
+            <a:avLst/>
+          </a:prstGeom>
+          <a:noFill/>
+          <a:ln/>
+        </p:spPr>
+        <p:txBody>
+          <a:bodyPr wrap="square" lIns="0" tIns="0" rIns="0" bIns="0" rtlCol="0" anchor="ctr"/>
+          <a:lstStyle/>
+          <a:p>
+            <a:pPr indent="0" marL="0">
+              <a:lnSpc>
+                <a:spcPct val="140000"/>
+              </a:lnSpc>
+              <a:buNone/>
+            </a:pPr>
+            <a:r>
+              <a:rPr lang="en-US" sz="1400" dirty="0">
+                <a:solidFill>
+                  <a:srgbClr val="23201D"/>
+                </a:solidFill>
+                <a:latin typeface="Yu Gothic" pitchFamily="34" charset="0"/>
+                <a:ea typeface="Yu Gothic" pitchFamily="34" charset="-122"/>
+                <a:cs typeface="Yu Gothic" pitchFamily="34" charset="-120"/>
+              </a:rPr>
+              <a:t>効果測定シートの「現在」の列を、実測値で埋める</a:t>
+            </a:r>
+            <a:endParaRPr lang="en-US" sz="1400" dirty="0"/>
+          </a:p>
+        </p:txBody>
+      </p:sp>
+      <p:sp>
+        <p:nvSpPr>
+          <p:cNvPr id="8" name="Shape 6"/>
+          <p:cNvSpPr/>
+          <p:nvPr/>
+        </p:nvSpPr>
+        <p:spPr>
+          <a:xfrm>
+            <a:off x="6398971" y="2240280"/>
+            <a:ext cx="4985309" cy="2286000"/>
+          </a:xfrm>
+          <a:prstGeom prst="rect">
+            <a:avLst/>
+          </a:prstGeom>
+          <a:solidFill>
+            <a:srgbClr val="FFFFFF"/>
+          </a:solidFill>
+          <a:ln w="12700">
+            <a:solidFill>
+              <a:srgbClr val="EDE7DB"/>
+            </a:solidFill>
+            <a:prstDash val="solid"/>
+          </a:ln>
+        </p:spPr>
+      </p:sp>
+      <p:sp>
+        <p:nvSpPr>
+          <p:cNvPr id="9" name="Text 7"/>
+          <p:cNvSpPr txBox="1"/>
+          <p:nvPr/>
+        </p:nvSpPr>
+        <p:spPr>
+          <a:xfrm>
+            <a:off x="6673291" y="2377440"/>
+            <a:ext cx="4242816" cy="274320"/>
+          </a:xfrm>
+          <a:prstGeom prst="rect">
+            <a:avLst/>
+          </a:prstGeom>
+          <a:noFill/>
+          <a:ln/>
+        </p:spPr>
+        <p:txBody>
+          <a:bodyPr wrap="square" lIns="0" tIns="0" rIns="0" bIns="0" rtlCol="0" anchor="ctr"/>
+          <a:lstStyle/>
+          <a:p>
+            <a:pPr indent="0" marL="0">
+              <a:buNone/>
+            </a:pPr>
+            <a:r>
+              <a:rPr lang="en-US" sz="1000" b="1" spc="150" kern="0" dirty="0">
+                <a:solidFill>
+                  <a:srgbClr val="3B6B4A"/>
+                </a:solidFill>
+                <a:latin typeface="Yu Gothic" pitchFamily="34" charset="0"/>
+                <a:ea typeface="Yu Gothic" pitchFamily="34" charset="-122"/>
+                <a:cs typeface="Yu Gothic" pitchFamily="34" charset="-120"/>
+              </a:rPr>
+              <a:t>次回の持ち物</a:t>
+            </a:r>
+            <a:endParaRPr lang="en-US" sz="1000" dirty="0"/>
+          </a:p>
+        </p:txBody>
+      </p:sp>
+      <p:sp>
+        <p:nvSpPr>
+          <p:cNvPr id="10" name="Text 8"/>
+          <p:cNvSpPr txBox="1"/>
+          <p:nvPr/>
+        </p:nvSpPr>
+        <p:spPr>
+          <a:xfrm>
+            <a:off x="6673291" y="2743200"/>
+            <a:ext cx="4436669" cy="694944"/>
+          </a:xfrm>
+          <a:prstGeom prst="rect">
+            <a:avLst/>
+          </a:prstGeom>
+          <a:noFill/>
+          <a:ln/>
+        </p:spPr>
+        <p:txBody>
+          <a:bodyPr wrap="square" lIns="0" tIns="0" rIns="0" bIns="0" rtlCol="0" anchor="ctr"/>
+          <a:lstStyle/>
+          <a:p>
+            <a:pPr indent="0" marL="0">
+              <a:lnSpc>
+                <a:spcPct val="130000"/>
+              </a:lnSpc>
+              <a:buNone/>
+            </a:pPr>
+            <a:r>
+              <a:rPr lang="en-US" sz="1250" dirty="0">
+                <a:solidFill>
+                  <a:srgbClr val="23201D"/>
+                </a:solidFill>
+                <a:latin typeface="Yu Gothic" pitchFamily="34" charset="0"/>
+                <a:ea typeface="Yu Gothic" pitchFamily="34" charset="-122"/>
+                <a:cs typeface="Yu Gothic" pitchFamily="34" charset="-120"/>
+              </a:rPr>
+              <a:t>・今期の事業計画</a:t>
+            </a:r>
+            <a:endParaRPr lang="en-US" sz="1250" dirty="0"/>
+          </a:p>
+        </p:txBody>
+      </p:sp>
+      <p:sp>
+        <p:nvSpPr>
+          <p:cNvPr id="11" name="Text 9"/>
+          <p:cNvSpPr txBox="1"/>
+          <p:nvPr/>
+        </p:nvSpPr>
+        <p:spPr>
+          <a:xfrm>
+            <a:off x="6673291" y="3474720"/>
+            <a:ext cx="4436669" cy="694944"/>
+          </a:xfrm>
+          <a:prstGeom prst="rect">
+            <a:avLst/>
+          </a:prstGeom>
+          <a:noFill/>
+          <a:ln/>
+        </p:spPr>
+        <p:txBody>
+          <a:bodyPr wrap="square" lIns="0" tIns="0" rIns="0" bIns="0" rtlCol="0" anchor="ctr"/>
+          <a:lstStyle/>
+          <a:p>
+            <a:pPr indent="0" marL="0">
+              <a:lnSpc>
+                <a:spcPct val="130000"/>
+              </a:lnSpc>
+              <a:buNone/>
+            </a:pPr>
+            <a:r>
+              <a:rPr lang="en-US" sz="1250" dirty="0">
+                <a:solidFill>
+                  <a:srgbClr val="23201D"/>
+                </a:solidFill>
+                <a:latin typeface="Yu Gothic" pitchFamily="34" charset="0"/>
+                <a:ea typeface="Yu Gothic" pitchFamily="34" charset="-122"/>
+                <a:cs typeface="Yu Gothic" pitchFamily="34" charset="-120"/>
+              </a:rPr>
+              <a:t>・社員の方の出席確保（この半年で実際に使った方を必ず）</a:t>
+            </a:r>
+            <a:endParaRPr lang="en-US" sz="1250" dirty="0"/>
+          </a:p>
+        </p:txBody>
+      </p:sp>
+      <p:sp>
+        <p:nvSpPr>
+          <p:cNvPr id="12" name="Shape 10"/>
+          <p:cNvSpPr/>
+          <p:nvPr/>
+        </p:nvSpPr>
+        <p:spPr>
+          <a:xfrm>
+            <a:off x="777240" y="4800600"/>
+            <a:ext cx="10607040" cy="777240"/>
+          </a:xfrm>
+          <a:prstGeom prst="rect">
+            <a:avLst/>
+          </a:prstGeom>
+          <a:solidFill>
+            <a:srgbClr val="EDE7DB"/>
+          </a:solidFill>
+          <a:ln w="12700">
+            <a:solidFill>
+              <a:srgbClr val="333333"/>
+            </a:solidFill>
+            <a:prstDash val="solid"/>
+          </a:ln>
+        </p:spPr>
+      </p:sp>
+      <p:sp>
+        <p:nvSpPr>
+          <p:cNvPr id="13" name="Text 11"/>
+          <p:cNvSpPr txBox="1"/>
+          <p:nvPr/>
+        </p:nvSpPr>
+        <p:spPr>
+          <a:xfrm>
+            <a:off x="1097280" y="4800600"/>
+            <a:ext cx="9966960" cy="777240"/>
+          </a:xfrm>
+          <a:prstGeom prst="rect">
+            <a:avLst/>
+          </a:prstGeom>
+          <a:noFill/>
+          <a:ln/>
+        </p:spPr>
+        <p:txBody>
+          <a:bodyPr wrap="square" lIns="0" tIns="0" rIns="0" bIns="0" rtlCol="0" anchor="ctr"/>
+          <a:lstStyle/>
+          <a:p>
+            <a:pPr indent="0" marL="0">
+              <a:buNone/>
+            </a:pPr>
+            <a:r>
+              <a:rPr lang="en-US" sz="1250" dirty="0">
+                <a:solidFill>
+                  <a:srgbClr val="5A534A"/>
+                </a:solidFill>
+                <a:latin typeface="Yu Gothic" pitchFamily="34" charset="0"/>
+                <a:ea typeface="Yu Gothic" pitchFamily="34" charset="-122"/>
+                <a:cs typeface="Yu Gothic" pitchFamily="34" charset="-120"/>
+              </a:rPr>
+              <a:t>この内容は、次回の3日前にあらためてお送りします。</a:t>
+            </a:r>
+            <a:endParaRPr lang="en-US" sz="1250" dirty="0"/>
+          </a:p>
+        </p:txBody>
+      </p:sp>
+      <p:sp>
+        <p:nvSpPr>
+          <p:cNvPr id="14" name="Text 12"/>
+          <p:cNvSpPr txBox="1"/>
+          <p:nvPr/>
+        </p:nvSpPr>
+        <p:spPr>
+          <a:xfrm>
+            <a:off x="777240" y="6382512"/>
+            <a:ext cx="7424928" cy="256032"/>
+          </a:xfrm>
+          <a:prstGeom prst="rect">
+            <a:avLst/>
+          </a:prstGeom>
+          <a:noFill/>
+          <a:ln/>
+        </p:spPr>
+        <p:txBody>
+          <a:bodyPr wrap="square" lIns="0" tIns="0" rIns="0" bIns="0" rtlCol="0" anchor="ctr"/>
+          <a:lstStyle/>
+          <a:p>
+            <a:pPr indent="0" marL="0">
+              <a:buNone/>
+            </a:pPr>
+            <a:r>
+              <a:rPr lang="en-US" sz="900" dirty="0">
+                <a:solidFill>
+                  <a:srgbClr val="8A8177"/>
+                </a:solidFill>
+                <a:latin typeface="Yu Gothic" pitchFamily="34" charset="0"/>
+                <a:ea typeface="Yu Gothic" pitchFamily="34" charset="-122"/>
+                <a:cs typeface="Yu Gothic" pitchFamily="34" charset="-120"/>
+              </a:rPr>
+              <a:t>第11回　組織に載せる</a:t>
+            </a:r>
+            <a:endParaRPr lang="en-US" sz="900" dirty="0"/>
+          </a:p>
+        </p:txBody>
+      </p:sp>
+      <p:sp>
+        <p:nvSpPr>
+          <p:cNvPr id="15" name="Text 13"/>
+          <p:cNvSpPr txBox="1"/>
+          <p:nvPr/>
+        </p:nvSpPr>
+        <p:spPr>
+          <a:xfrm>
+            <a:off x="8202168" y="6382512"/>
+            <a:ext cx="3182112" cy="256032"/>
+          </a:xfrm>
+          <a:prstGeom prst="rect">
+            <a:avLst/>
+          </a:prstGeom>
+          <a:noFill/>
+          <a:ln/>
+        </p:spPr>
+        <p:txBody>
+          <a:bodyPr wrap="square" lIns="0" tIns="0" rIns="0" bIns="0" rtlCol="0" anchor="ctr"/>
+          <a:lstStyle/>
+          <a:p>
+            <a:pPr algn="r" indent="0" marL="0">
+              <a:buNone/>
+            </a:pPr>
+            <a:r>
+              <a:rPr lang="en-US" sz="900" dirty="0">
+                <a:solidFill>
+                  <a:srgbClr val="8A8177"/>
+                </a:solidFill>
+                <a:latin typeface="Yu Gothic" pitchFamily="34" charset="0"/>
+                <a:ea typeface="Yu Gothic" pitchFamily="34" charset="-122"/>
+                <a:cs typeface="Yu Gothic" pitchFamily="34" charset="-120"/>
+              </a:rPr>
+              <a:t>次回まで</a:t>
+            </a:r>
+            <a:endParaRPr lang="en-US" sz="900" dirty="0"/>
+          </a:p>
+        </p:txBody>
+      </p:sp>
+    </p:spTree>
+  </p:cSld>
+  <p:clrMapOvr>
+    <a:masterClrMapping/>
+  </p:clrMapOvr>
+</p:sld>
+</file>
+
+<file path=ppt/slides/slide15.xml><?xml version="1.0" encoding="utf-8"?>
+<p:sld xmlns:a="http://schemas.openxmlformats.org/drawingml/2006/main" xmlns:r="http://schemas.openxmlformats.org/officeDocument/2006/relationships" xmlns:p="http://schemas.openxmlformats.org/presentationml/2006/main">
+  <p:cSld name="Slide 15">
     <p:bg>
       <p:bgPr>
         <a:solidFill>
@@ -8474,13 +10652,13 @@
             <a:r>
               <a:rPr lang="en-US" sz="1100" b="1" spc="250" kern="0" dirty="0">
                 <a:solidFill>
-                  <a:srgbClr val="2F4F6B"/>
-                </a:solidFill>
-                <a:latin typeface="Yu Gothic" pitchFamily="34" charset="0"/>
-                <a:ea typeface="Yu Gothic" pitchFamily="34" charset="-122"/>
-                <a:cs typeface="Yu Gothic" pitchFamily="34" charset="-120"/>
-              </a:rPr>
-              <a:t>演習</a:t>
+                  <a:srgbClr val="B04A2F"/>
+                </a:solidFill>
+                <a:latin typeface="Yu Gothic" pitchFamily="34" charset="0"/>
+                <a:ea typeface="Yu Gothic" pitchFamily="34" charset="-122"/>
+                <a:cs typeface="Yu Gothic" pitchFamily="34" charset="-120"/>
+              </a:rPr>
+              <a:t>想定問答</a:t>
             </a:r>
             <a:endParaRPr lang="en-US" sz="1100" dirty="0"/>
           </a:p>
@@ -8519,7 +10697,7 @@
                 <a:ea typeface="Yu Gothic" pitchFamily="34" charset="-122"/>
                 <a:cs typeface="Yu Gothic" pitchFamily="34" charset="-120"/>
               </a:rPr>
-              <a:t>今日、一緒にやること</a:t>
+              <a:t>この回で、よく聞かれること</a:t>
             </a:r>
             <a:endParaRPr lang="en-US" sz="2600" dirty="0"/>
           </a:p>
@@ -8527,53 +10705,14 @@
       </p:sp>
       <p:sp>
         <p:nvSpPr>
-          <p:cNvPr id="4" name="Text 2"/>
-          <p:cNvSpPr txBox="1"/>
-          <p:nvPr/>
-        </p:nvSpPr>
-        <p:spPr>
-          <a:xfrm>
-            <a:off x="777240" y="1572768"/>
-            <a:ext cx="10607040" cy="320040"/>
-          </a:xfrm>
-          <a:prstGeom prst="rect">
-            <a:avLst/>
-          </a:prstGeom>
-          <a:noFill/>
-          <a:ln/>
-        </p:spPr>
-        <p:txBody>
-          <a:bodyPr wrap="square" lIns="0" tIns="0" rIns="0" bIns="0" rtlCol="0" anchor="ctr"/>
-          <a:lstStyle/>
-          <a:p>
-            <a:pPr indent="0" marL="0">
-              <a:buNone/>
-            </a:pPr>
-            <a:r>
-              <a:rPr lang="en-US" sz="1250" b="1" dirty="0">
-                <a:solidFill>
-                  <a:srgbClr val="2F4F6B"/>
-                </a:solidFill>
-                <a:latin typeface="Yu Gothic" pitchFamily="34" charset="0"/>
-                <a:ea typeface="Yu Gothic" pitchFamily="34" charset="-122"/>
-                <a:cs typeface="Yu Gothic" pitchFamily="34" charset="-120"/>
-              </a:rPr>
-              <a:t>55分。操作するのはご自身です。</a:t>
-            </a:r>
-            <a:endParaRPr lang="en-US" sz="1250" dirty="0"/>
-          </a:p>
-        </p:txBody>
-      </p:sp>
-      <p:sp>
-        <p:nvSpPr>
-          <p:cNvPr id="5" name="Shape 3"/>
+          <p:cNvPr id="4" name="Shape 2"/>
           <p:cNvSpPr/>
           <p:nvPr/>
         </p:nvSpPr>
         <p:spPr>
           <a:xfrm>
-            <a:off x="777240" y="2148840"/>
-            <a:ext cx="3383280" cy="2880360"/>
+            <a:off x="777240" y="1737360"/>
+            <a:ext cx="10607040" cy="1170432"/>
           </a:xfrm>
           <a:prstGeom prst="rect">
             <a:avLst/>
@@ -8591,16 +10730,16 @@
       </p:sp>
       <p:sp>
         <p:nvSpPr>
-          <p:cNvPr id="6" name="Shape 4"/>
+          <p:cNvPr id="5" name="Shape 3"/>
           <p:cNvSpPr/>
           <p:nvPr/>
         </p:nvSpPr>
         <p:spPr>
           <a:xfrm>
-            <a:off x="1051560" y="2395728"/>
-            <a:ext cx="438912" cy="438912"/>
-          </a:xfrm>
-          <a:prstGeom prst="ellipse">
+            <a:off x="777240" y="1737360"/>
+            <a:ext cx="54864" cy="1170432"/>
+          </a:xfrm>
+          <a:prstGeom prst="rect">
             <a:avLst/>
           </a:prstGeom>
           <a:solidFill>
@@ -8616,95 +10755,53 @@
       </p:sp>
       <p:sp>
         <p:nvSpPr>
+          <p:cNvPr id="6" name="Text 4"/>
+          <p:cNvSpPr txBox="1"/>
+          <p:nvPr/>
+        </p:nvSpPr>
+        <p:spPr>
+          <a:xfrm>
+            <a:off x="1097280" y="1828800"/>
+            <a:ext cx="9966960" cy="384048"/>
+          </a:xfrm>
+          <a:prstGeom prst="rect">
+            <a:avLst/>
+          </a:prstGeom>
+          <a:noFill/>
+          <a:ln/>
+        </p:spPr>
+        <p:txBody>
+          <a:bodyPr wrap="square" lIns="0" tIns="0" rIns="0" bIns="0" rtlCol="0" anchor="ctr"/>
+          <a:lstStyle/>
+          <a:p>
+            <a:pPr indent="0" marL="0">
+              <a:buNone/>
+            </a:pPr>
+            <a:r>
+              <a:rPr lang="en-US" sz="1400" b="1" dirty="0">
+                <a:solidFill>
+                  <a:srgbClr val="2F4F6B"/>
+                </a:solidFill>
+                <a:latin typeface="Yu Gothic" pitchFamily="34" charset="0"/>
+                <a:ea typeface="Yu Gothic" pitchFamily="34" charset="-122"/>
+                <a:cs typeface="Yu Gothic" pitchFamily="34" charset="-120"/>
+              </a:rPr>
+              <a:t>「専任を置く余裕はありません」</a:t>
+            </a:r>
+            <a:endParaRPr lang="en-US" sz="1400" dirty="0"/>
+          </a:p>
+        </p:txBody>
+      </p:sp>
+      <p:sp>
+        <p:nvSpPr>
           <p:cNvPr id="7" name="Text 5"/>
           <p:cNvSpPr txBox="1"/>
           <p:nvPr/>
         </p:nvSpPr>
         <p:spPr>
           <a:xfrm>
-            <a:off x="1051560" y="2395728"/>
-            <a:ext cx="438912" cy="438912"/>
-          </a:xfrm>
-          <a:prstGeom prst="rect">
-            <a:avLst/>
-          </a:prstGeom>
-          <a:noFill/>
-          <a:ln/>
-        </p:spPr>
-        <p:txBody>
-          <a:bodyPr wrap="square" lIns="0" tIns="0" rIns="0" bIns="0" rtlCol="0" anchor="ctr"/>
-          <a:lstStyle/>
-          <a:p>
-            <a:pPr algn="ctr" indent="0" marL="0">
-              <a:buNone/>
-            </a:pPr>
-            <a:r>
-              <a:rPr lang="en-US" sz="1300" b="1" dirty="0">
-                <a:solidFill>
-                  <a:srgbClr val="FFFFFF"/>
-                </a:solidFill>
-                <a:latin typeface="Yu Gothic" pitchFamily="34" charset="0"/>
-                <a:ea typeface="Yu Gothic" pitchFamily="34" charset="-122"/>
-                <a:cs typeface="Yu Gothic" pitchFamily="34" charset="-120"/>
-              </a:rPr>
-              <a:t>1</a:t>
-            </a:r>
-            <a:endParaRPr lang="en-US" sz="1300" dirty="0"/>
-          </a:p>
-        </p:txBody>
-      </p:sp>
-      <p:sp>
-        <p:nvSpPr>
-          <p:cNvPr id="8" name="Text 6"/>
-          <p:cNvSpPr txBox="1"/>
-          <p:nvPr/>
-        </p:nvSpPr>
-        <p:spPr>
-          <a:xfrm>
-            <a:off x="1051560" y="2944368"/>
-            <a:ext cx="2834640" cy="731520"/>
-          </a:xfrm>
-          <a:prstGeom prst="rect">
-            <a:avLst/>
-          </a:prstGeom>
-          <a:noFill/>
-          <a:ln/>
-        </p:spPr>
-        <p:txBody>
-          <a:bodyPr wrap="square" lIns="0" tIns="0" rIns="0" bIns="0" rtlCol="0" anchor="ctr"/>
-          <a:lstStyle/>
-          <a:p>
-            <a:pPr indent="0" marL="0">
-              <a:lnSpc>
-                <a:spcPct val="125000"/>
-              </a:lnSpc>
-              <a:buNone/>
-            </a:pPr>
-            <a:r>
-              <a:rPr lang="en-US" sz="1450" b="1" dirty="0">
-                <a:solidFill>
-                  <a:srgbClr val="23201D"/>
-                </a:solidFill>
-                <a:latin typeface="Yu Gothic" pitchFamily="34" charset="0"/>
-                <a:ea typeface="Yu Gothic" pitchFamily="34" charset="-122"/>
-                <a:cs typeface="Yu Gothic" pitchFamily="34" charset="-120"/>
-              </a:rPr>
-              <a:t>体制図を書く</a:t>
-            </a:r>
-            <a:endParaRPr lang="en-US" sz="1450" dirty="0"/>
-          </a:p>
-        </p:txBody>
-      </p:sp>
-      <p:sp>
-        <p:nvSpPr>
-          <p:cNvPr id="9" name="Text 7"/>
-          <p:cNvSpPr txBox="1"/>
-          <p:nvPr/>
-        </p:nvSpPr>
-        <p:spPr>
-          <a:xfrm>
-            <a:off x="1051560" y="3703320"/>
-            <a:ext cx="2834640" cy="1188720"/>
+            <a:off x="1097280" y="2231136"/>
+            <a:ext cx="9966960" cy="603504"/>
           </a:xfrm>
           <a:prstGeom prst="rect">
             <a:avLst/>
@@ -8723,30 +10820,30 @@
               <a:buNone/>
             </a:pPr>
             <a:r>
-              <a:rPr lang="en-US" sz="1150" dirty="0">
-                <a:solidFill>
-                  <a:srgbClr val="5A534A"/>
-                </a:solidFill>
-                <a:latin typeface="Yu Gothic" pitchFamily="34" charset="0"/>
-                <a:ea typeface="Yu Gothic" pitchFamily="34" charset="-122"/>
-                <a:cs typeface="Yu Gothic" pitchFamily="34" charset="-120"/>
-              </a:rPr>
-              <a:t>推進役を実名で決めます。決まらないなら、その理由を言葉にします</a:t>
-            </a:r>
-            <a:endParaRPr lang="en-US" sz="1150" dirty="0"/>
-          </a:p>
-        </p:txBody>
-      </p:sp>
-      <p:sp>
-        <p:nvSpPr>
-          <p:cNvPr id="10" name="Shape 8"/>
+              <a:rPr lang="en-US" sz="1250" dirty="0">
+                <a:solidFill>
+                  <a:srgbClr val="3F3933"/>
+                </a:solidFill>
+                <a:latin typeface="Yu Gothic" pitchFamily="34" charset="0"/>
+                <a:ea typeface="Yu Gothic" pitchFamily="34" charset="-122"/>
+                <a:cs typeface="Yu Gothic" pitchFamily="34" charset="-120"/>
+              </a:rPr>
+              <a:t>専任は要りません。月4時間を正式に割り当てるだけです。片手間でよい、にすると失敗します。</a:t>
+            </a:r>
+            <a:endParaRPr lang="en-US" sz="1250" dirty="0"/>
+          </a:p>
+        </p:txBody>
+      </p:sp>
+      <p:sp>
+        <p:nvSpPr>
+          <p:cNvPr id="8" name="Shape 6"/>
           <p:cNvSpPr/>
           <p:nvPr/>
         </p:nvSpPr>
         <p:spPr>
           <a:xfrm>
-            <a:off x="4389120" y="2148840"/>
-            <a:ext cx="3383280" cy="2880360"/>
+            <a:off x="777240" y="3035808"/>
+            <a:ext cx="10607040" cy="1170432"/>
           </a:xfrm>
           <a:prstGeom prst="rect">
             <a:avLst/>
@@ -8764,16 +10861,16 @@
       </p:sp>
       <p:sp>
         <p:nvSpPr>
-          <p:cNvPr id="11" name="Shape 9"/>
+          <p:cNvPr id="9" name="Shape 7"/>
           <p:cNvSpPr/>
           <p:nvPr/>
         </p:nvSpPr>
         <p:spPr>
           <a:xfrm>
-            <a:off x="4663440" y="2395728"/>
-            <a:ext cx="438912" cy="438912"/>
-          </a:xfrm>
-          <a:prstGeom prst="ellipse">
+            <a:off x="777240" y="3035808"/>
+            <a:ext cx="54864" cy="1170432"/>
+          </a:xfrm>
+          <a:prstGeom prst="rect">
             <a:avLst/>
           </a:prstGeom>
           <a:solidFill>
@@ -8789,95 +10886,53 @@
       </p:sp>
       <p:sp>
         <p:nvSpPr>
-          <p:cNvPr id="12" name="Text 10"/>
-          <p:cNvSpPr txBox="1"/>
-          <p:nvPr/>
-        </p:nvSpPr>
-        <p:spPr>
-          <a:xfrm>
-            <a:off x="4663440" y="2395728"/>
-            <a:ext cx="438912" cy="438912"/>
-          </a:xfrm>
-          <a:prstGeom prst="rect">
-            <a:avLst/>
-          </a:prstGeom>
-          <a:noFill/>
-          <a:ln/>
-        </p:spPr>
-        <p:txBody>
-          <a:bodyPr wrap="square" lIns="0" tIns="0" rIns="0" bIns="0" rtlCol="0" anchor="ctr"/>
-          <a:lstStyle/>
-          <a:p>
-            <a:pPr algn="ctr" indent="0" marL="0">
-              <a:buNone/>
-            </a:pPr>
-            <a:r>
-              <a:rPr lang="en-US" sz="1300" b="1" dirty="0">
-                <a:solidFill>
-                  <a:srgbClr val="FFFFFF"/>
-                </a:solidFill>
-                <a:latin typeface="Yu Gothic" pitchFamily="34" charset="0"/>
-                <a:ea typeface="Yu Gothic" pitchFamily="34" charset="-122"/>
-                <a:cs typeface="Yu Gothic" pitchFamily="34" charset="-120"/>
-              </a:rPr>
-              <a:t>2</a:t>
-            </a:r>
-            <a:endParaRPr lang="en-US" sz="1300" dirty="0"/>
-          </a:p>
-        </p:txBody>
-      </p:sp>
-      <p:sp>
-        <p:nvSpPr>
-          <p:cNvPr id="13" name="Text 11"/>
-          <p:cNvSpPr txBox="1"/>
-          <p:nvPr/>
-        </p:nvSpPr>
-        <p:spPr>
-          <a:xfrm>
-            <a:off x="4663440" y="2944368"/>
-            <a:ext cx="2834640" cy="731520"/>
-          </a:xfrm>
-          <a:prstGeom prst="rect">
-            <a:avLst/>
-          </a:prstGeom>
-          <a:noFill/>
-          <a:ln/>
-        </p:spPr>
-        <p:txBody>
-          <a:bodyPr wrap="square" lIns="0" tIns="0" rIns="0" bIns="0" rtlCol="0" anchor="ctr"/>
-          <a:lstStyle/>
-          <a:p>
-            <a:pPr indent="0" marL="0">
-              <a:lnSpc>
-                <a:spcPct val="125000"/>
-              </a:lnSpc>
-              <a:buNone/>
-            </a:pPr>
-            <a:r>
-              <a:rPr lang="en-US" sz="1450" b="1" dirty="0">
-                <a:solidFill>
-                  <a:srgbClr val="23201D"/>
-                </a:solidFill>
-                <a:latin typeface="Yu Gothic" pitchFamily="34" charset="0"/>
-                <a:ea typeface="Yu Gothic" pitchFamily="34" charset="-122"/>
-                <a:cs typeface="Yu Gothic" pitchFamily="34" charset="-120"/>
-              </a:rPr>
-              <a:t>権限と費用を洗う</a:t>
-            </a:r>
-            <a:endParaRPr lang="en-US" sz="1450" dirty="0"/>
-          </a:p>
-        </p:txBody>
-      </p:sp>
-      <p:sp>
-        <p:nvSpPr>
-          <p:cNvPr id="14" name="Text 12"/>
-          <p:cNvSpPr txBox="1"/>
-          <p:nvPr/>
-        </p:nvSpPr>
-        <p:spPr>
-          <a:xfrm>
-            <a:off x="4663440" y="3703320"/>
-            <a:ext cx="2834640" cy="1188720"/>
+          <p:cNvPr id="10" name="Text 8"/>
+          <p:cNvSpPr txBox="1"/>
+          <p:nvPr/>
+        </p:nvSpPr>
+        <p:spPr>
+          <a:xfrm>
+            <a:off x="1097280" y="3127248"/>
+            <a:ext cx="9966960" cy="384048"/>
+          </a:xfrm>
+          <a:prstGeom prst="rect">
+            <a:avLst/>
+          </a:prstGeom>
+          <a:noFill/>
+          <a:ln/>
+        </p:spPr>
+        <p:txBody>
+          <a:bodyPr wrap="square" lIns="0" tIns="0" rIns="0" bIns="0" rtlCol="0" anchor="ctr"/>
+          <a:lstStyle/>
+          <a:p>
+            <a:pPr indent="0" marL="0">
+              <a:buNone/>
+            </a:pPr>
+            <a:r>
+              <a:rPr lang="en-US" sz="1400" b="1" dirty="0">
+                <a:solidFill>
+                  <a:srgbClr val="2F4F6B"/>
+                </a:solidFill>
+                <a:latin typeface="Yu Gothic" pitchFamily="34" charset="0"/>
+                <a:ea typeface="Yu Gothic" pitchFamily="34" charset="-122"/>
+                <a:cs typeface="Yu Gothic" pitchFamily="34" charset="-120"/>
+              </a:rPr>
+              <a:t>「外注するといくらかかりますか」</a:t>
+            </a:r>
+            <a:endParaRPr lang="en-US" sz="1400" dirty="0"/>
+          </a:p>
+        </p:txBody>
+      </p:sp>
+      <p:sp>
+        <p:nvSpPr>
+          <p:cNvPr id="11" name="Text 9"/>
+          <p:cNvSpPr txBox="1"/>
+          <p:nvPr/>
+        </p:nvSpPr>
+        <p:spPr>
+          <a:xfrm>
+            <a:off x="1097280" y="3529584"/>
+            <a:ext cx="9966960" cy="603504"/>
           </a:xfrm>
           <a:prstGeom prst="rect">
             <a:avLst/>
@@ -8896,30 +10951,30 @@
               <a:buNone/>
             </a:pPr>
             <a:r>
-              <a:rPr lang="en-US" sz="1150" dirty="0">
-                <a:solidFill>
-                  <a:srgbClr val="5A534A"/>
-                </a:solidFill>
-                <a:latin typeface="Yu Gothic" pitchFamily="34" charset="0"/>
-                <a:ea typeface="Yu Gothic" pitchFamily="34" charset="-122"/>
-                <a:cs typeface="Yu Gothic" pitchFamily="34" charset="-120"/>
-              </a:rPr>
-              <a:t>誰が何のアカウントを持ち、月いくら払っているか。個人名義が残っていないかを確認します</a:t>
-            </a:r>
-            <a:endParaRPr lang="en-US" sz="1150" dirty="0"/>
-          </a:p>
-        </p:txBody>
-      </p:sp>
-      <p:sp>
-        <p:nvSpPr>
-          <p:cNvPr id="15" name="Shape 13"/>
+              <a:rPr lang="en-US" sz="1250" dirty="0">
+                <a:solidFill>
+                  <a:srgbClr val="3F3933"/>
+                </a:solidFill>
+                <a:latin typeface="Yu Gothic" pitchFamily="34" charset="0"/>
+                <a:ea typeface="Yu Gothic" pitchFamily="34" charset="-122"/>
+                <a:cs typeface="Yu Gothic" pitchFamily="34" charset="-120"/>
+              </a:rPr>
+              <a:t>改修の頻度によります。まずは3か月に1回程度を想定して、見積を取ってみてください。金額が分かれば判断できます。</a:t>
+            </a:r>
+            <a:endParaRPr lang="en-US" sz="1250" dirty="0"/>
+          </a:p>
+        </p:txBody>
+      </p:sp>
+      <p:sp>
+        <p:nvSpPr>
+          <p:cNvPr id="12" name="Shape 10"/>
           <p:cNvSpPr/>
           <p:nvPr/>
         </p:nvSpPr>
         <p:spPr>
           <a:xfrm>
-            <a:off x="8001000" y="2148840"/>
-            <a:ext cx="3383280" cy="2880360"/>
+            <a:off x="777240" y="4334256"/>
+            <a:ext cx="10607040" cy="1170432"/>
           </a:xfrm>
           <a:prstGeom prst="rect">
             <a:avLst/>
@@ -8937,16 +10992,16 @@
       </p:sp>
       <p:sp>
         <p:nvSpPr>
-          <p:cNvPr id="16" name="Shape 14"/>
+          <p:cNvPr id="13" name="Shape 11"/>
           <p:cNvSpPr/>
           <p:nvPr/>
         </p:nvSpPr>
         <p:spPr>
           <a:xfrm>
-            <a:off x="8275320" y="2395728"/>
-            <a:ext cx="438912" cy="438912"/>
-          </a:xfrm>
-          <a:prstGeom prst="ellipse">
+            <a:off x="777240" y="4334256"/>
+            <a:ext cx="54864" cy="1170432"/>
+          </a:xfrm>
+          <a:prstGeom prst="rect">
             <a:avLst/>
           </a:prstGeom>
           <a:solidFill>
@@ -8962,95 +11017,53 @@
       </p:sp>
       <p:sp>
         <p:nvSpPr>
-          <p:cNvPr id="17" name="Text 15"/>
-          <p:cNvSpPr txBox="1"/>
-          <p:nvPr/>
-        </p:nvSpPr>
-        <p:spPr>
-          <a:xfrm>
-            <a:off x="8275320" y="2395728"/>
-            <a:ext cx="438912" cy="438912"/>
-          </a:xfrm>
-          <a:prstGeom prst="rect">
-            <a:avLst/>
-          </a:prstGeom>
-          <a:noFill/>
-          <a:ln/>
-        </p:spPr>
-        <p:txBody>
-          <a:bodyPr wrap="square" lIns="0" tIns="0" rIns="0" bIns="0" rtlCol="0" anchor="ctr"/>
-          <a:lstStyle/>
-          <a:p>
-            <a:pPr algn="ctr" indent="0" marL="0">
-              <a:buNone/>
-            </a:pPr>
-            <a:r>
-              <a:rPr lang="en-US" sz="1300" b="1" dirty="0">
-                <a:solidFill>
-                  <a:srgbClr val="FFFFFF"/>
-                </a:solidFill>
-                <a:latin typeface="Yu Gothic" pitchFamily="34" charset="0"/>
-                <a:ea typeface="Yu Gothic" pitchFamily="34" charset="-122"/>
-                <a:cs typeface="Yu Gothic" pitchFamily="34" charset="-120"/>
-              </a:rPr>
-              <a:t>3</a:t>
-            </a:r>
-            <a:endParaRPr lang="en-US" sz="1300" dirty="0"/>
-          </a:p>
-        </p:txBody>
-      </p:sp>
-      <p:sp>
-        <p:nvSpPr>
-          <p:cNvPr id="18" name="Text 16"/>
-          <p:cNvSpPr txBox="1"/>
-          <p:nvPr/>
-        </p:nvSpPr>
-        <p:spPr>
-          <a:xfrm>
-            <a:off x="8275320" y="2944368"/>
-            <a:ext cx="2834640" cy="731520"/>
-          </a:xfrm>
-          <a:prstGeom prst="rect">
-            <a:avLst/>
-          </a:prstGeom>
-          <a:noFill/>
-          <a:ln/>
-        </p:spPr>
-        <p:txBody>
-          <a:bodyPr wrap="square" lIns="0" tIns="0" rIns="0" bIns="0" rtlCol="0" anchor="ctr"/>
-          <a:lstStyle/>
-          <a:p>
-            <a:pPr indent="0" marL="0">
-              <a:lnSpc>
-                <a:spcPct val="125000"/>
-              </a:lnSpc>
-              <a:buNone/>
-            </a:pPr>
-            <a:r>
-              <a:rPr lang="en-US" sz="1450" b="1" dirty="0">
-                <a:solidFill>
-                  <a:srgbClr val="23201D"/>
-                </a:solidFill>
-                <a:latin typeface="Yu Gothic" pitchFamily="34" charset="0"/>
-                <a:ea typeface="Yu Gothic" pitchFamily="34" charset="-122"/>
-                <a:cs typeface="Yu Gothic" pitchFamily="34" charset="-120"/>
-              </a:rPr>
-              <a:t>効果測定シートを作る</a:t>
-            </a:r>
-            <a:endParaRPr lang="en-US" sz="1450" dirty="0"/>
-          </a:p>
-        </p:txBody>
-      </p:sp>
-      <p:sp>
-        <p:nvSpPr>
-          <p:cNvPr id="19" name="Text 17"/>
-          <p:cNvSpPr txBox="1"/>
-          <p:nvPr/>
-        </p:nvSpPr>
-        <p:spPr>
-          <a:xfrm>
-            <a:off x="8275320" y="3703320"/>
-            <a:ext cx="2834640" cy="1188720"/>
+          <p:cNvPr id="14" name="Text 12"/>
+          <p:cNvSpPr txBox="1"/>
+          <p:nvPr/>
+        </p:nvSpPr>
+        <p:spPr>
+          <a:xfrm>
+            <a:off x="1097280" y="4425696"/>
+            <a:ext cx="9966960" cy="384048"/>
+          </a:xfrm>
+          <a:prstGeom prst="rect">
+            <a:avLst/>
+          </a:prstGeom>
+          <a:noFill/>
+          <a:ln/>
+        </p:spPr>
+        <p:txBody>
+          <a:bodyPr wrap="square" lIns="0" tIns="0" rIns="0" bIns="0" rtlCol="0" anchor="ctr"/>
+          <a:lstStyle/>
+          <a:p>
+            <a:pPr indent="0" marL="0">
+              <a:buNone/>
+            </a:pPr>
+            <a:r>
+              <a:rPr lang="en-US" sz="1400" b="1" dirty="0">
+                <a:solidFill>
+                  <a:srgbClr val="2F4F6B"/>
+                </a:solidFill>
+                <a:latin typeface="Yu Gothic" pitchFamily="34" charset="0"/>
+                <a:ea typeface="Yu Gothic" pitchFamily="34" charset="-122"/>
+                <a:cs typeface="Yu Gothic" pitchFamily="34" charset="-120"/>
+              </a:rPr>
+              <a:t>「効果が数字で出せません」</a:t>
+            </a:r>
+            <a:endParaRPr lang="en-US" sz="1400" dirty="0"/>
+          </a:p>
+        </p:txBody>
+      </p:sp>
+      <p:sp>
+        <p:nvSpPr>
+          <p:cNvPr id="15" name="Text 13"/>
+          <p:cNvSpPr txBox="1"/>
+          <p:nvPr/>
+        </p:nvSpPr>
+        <p:spPr>
+          <a:xfrm>
+            <a:off x="1097280" y="4828032"/>
+            <a:ext cx="9966960" cy="603504"/>
           </a:xfrm>
           <a:prstGeom prst="rect">
             <a:avLst/>
@@ -9069,23 +11082,23 @@
               <a:buNone/>
             </a:pPr>
             <a:r>
-              <a:rPr lang="en-US" sz="1150" dirty="0">
-                <a:solidFill>
-                  <a:srgbClr val="5A534A"/>
-                </a:solidFill>
-                <a:latin typeface="Yu Gothic" pitchFamily="34" charset="0"/>
-                <a:ea typeface="Yu Gothic" pitchFamily="34" charset="-122"/>
-                <a:cs typeface="Yu Gothic" pitchFamily="34" charset="-120"/>
-              </a:rPr>
-              <a:t>時間・品質・範囲・金額の4行。現在値をその場で埋めます</a:t>
-            </a:r>
-            <a:endParaRPr lang="en-US" sz="1150" dirty="0"/>
-          </a:p>
-        </p:txBody>
-      </p:sp>
-      <p:sp>
-        <p:nvSpPr>
-          <p:cNvPr id="20" name="Text 18"/>
+              <a:rPr lang="en-US" sz="1250" dirty="0">
+                <a:solidFill>
+                  <a:srgbClr val="3F3933"/>
+                </a:solidFill>
+                <a:latin typeface="Yu Gothic" pitchFamily="34" charset="0"/>
+                <a:ea typeface="Yu Gothic" pitchFamily="34" charset="-122"/>
+                <a:cs typeface="Yu Gothic" pitchFamily="34" charset="-120"/>
+              </a:rPr>
+              <a:t>時間以外の列を使います。やり直し件数は測りやすく、社内での説得力もあります。</a:t>
+            </a:r>
+            <a:endParaRPr lang="en-US" sz="1250" dirty="0"/>
+          </a:p>
+        </p:txBody>
+      </p:sp>
+      <p:sp>
+        <p:nvSpPr>
+          <p:cNvPr id="16" name="Text 14"/>
           <p:cNvSpPr txBox="1"/>
           <p:nvPr/>
         </p:nvSpPr>
@@ -9124,7 +11137,7 @@
       </p:sp>
       <p:sp>
         <p:nvSpPr>
-          <p:cNvPr id="21" name="Text 19"/>
+          <p:cNvPr id="17" name="Text 15"/>
           <p:cNvSpPr txBox="1"/>
           <p:nvPr/>
         </p:nvSpPr>
@@ -9155,7 +11168,7 @@
                 <a:ea typeface="Yu Gothic" pitchFamily="34" charset="-122"/>
                 <a:cs typeface="Yu Gothic" pitchFamily="34" charset="-120"/>
               </a:rPr>
-              <a:t>演習</a:t>
+              <a:t>想定問答</a:t>
             </a:r>
             <a:endParaRPr lang="en-US" sz="900" dirty="0"/>
           </a:p>

--- a/slides/pptx/第11回_組織に載せる.pptx
+++ b/slides/pptx/第11回_組織に載せる.pptx
@@ -4604,7 +4604,7 @@
                 <a:ea typeface="Yu Gothic" pitchFamily="34" charset="-122"/>
                 <a:cs typeface="Yu Gothic" pitchFamily="34" charset="-120"/>
               </a:rPr>
-              <a:t>他社では</a:t>
+              <a:t>よくある型</a:t>
             </a:r>
             <a:endParaRPr lang="en-US" sz="900" dirty="0"/>
           </a:p>
@@ -4646,7 +4646,7 @@
                 <a:ea typeface="Yu Gothic" pitchFamily="34" charset="-122"/>
                 <a:cs typeface="Yu Gothic" pitchFamily="34" charset="-120"/>
               </a:rPr>
-              <a:t>推進役を決めずに始めた会社と、専任ではないが月4時間を正式に割り当てた会社の対比があります。前者は3か月で止まり、後者は1年後も回っています。差は熱意ではなく、時間が業務として認められていたかどうかでした。</a:t>
+              <a:t>推進役に「専任でなくてよいが、月4時間を業務として割り当てる」かどうかで、1年後に残るかが分かれる。差は熱意ではなく、時間が業務として認められているかどうか。</a:t>
             </a:r>
             <a:endParaRPr lang="en-US" sz="1250" dirty="0"/>
           </a:p>

--- a/slides/pptx/第11回_組織に載せる.pptx
+++ b/slides/pptx/第11回_組織に載せる.pptx
@@ -3146,7 +3146,7 @@
                 <a:ea typeface="Yu Gothic" pitchFamily="34" charset="-122"/>
                 <a:cs typeface="Yu Gothic" pitchFamily="34" charset="-120"/>
               </a:rPr>
-              <a:t>55分。操作するのはご自身です。</a:t>
+              <a:t>75分。操作するのはご自身です。</a:t>
             </a:r>
             <a:endParaRPr lang="en-US" sz="1250" dirty="0"/>
           </a:p>

--- a/slides/pptx/第11回_組織に載せる.pptx
+++ b/slides/pptx/第11回_組織に載せる.pptx
@@ -6350,7 +6350,7 @@
         <p:spPr>
           <a:xfrm>
             <a:off x="960120" y="4873752"/>
-            <a:ext cx="1956816" cy="237744"/>
+            <a:ext cx="2468880" cy="237744"/>
           </a:xfrm>
           <a:prstGeom prst="rect">
             <a:avLst/>
@@ -6389,7 +6389,7 @@
         <p:spPr>
           <a:xfrm>
             <a:off x="960120" y="5111496"/>
-            <a:ext cx="1956816" cy="384048"/>
+            <a:ext cx="2468880" cy="384048"/>
           </a:xfrm>
           <a:prstGeom prst="rect">
             <a:avLst/>
@@ -6427,8 +6427,8 @@
         </p:nvSpPr>
         <p:spPr>
           <a:xfrm>
-            <a:off x="3008376" y="4873752"/>
-            <a:ext cx="1956816" cy="237744"/>
+            <a:off x="3520440" y="4873752"/>
+            <a:ext cx="2468880" cy="237744"/>
           </a:xfrm>
           <a:prstGeom prst="rect">
             <a:avLst/>
@@ -6452,7 +6452,7 @@
                 <a:ea typeface="Yu Gothic" pitchFamily="34" charset="-122"/>
                 <a:cs typeface="Yu Gothic" pitchFamily="34" charset="-120"/>
               </a:rPr>
-              <a:t>15-35分</a:t>
+              <a:t>15-30分</a:t>
             </a:r>
             <a:endParaRPr lang="en-US" sz="900" dirty="0"/>
           </a:p>
@@ -6466,8 +6466,8 @@
         </p:nvSpPr>
         <p:spPr>
           <a:xfrm>
-            <a:off x="3008376" y="5111496"/>
-            <a:ext cx="1956816" cy="384048"/>
+            <a:off x="3520440" y="5111496"/>
+            <a:ext cx="2468880" cy="384048"/>
           </a:xfrm>
           <a:prstGeom prst="rect">
             <a:avLst/>
@@ -6505,8 +6505,8 @@
         </p:nvSpPr>
         <p:spPr>
           <a:xfrm>
-            <a:off x="5056632" y="4873752"/>
-            <a:ext cx="1956816" cy="237744"/>
+            <a:off x="6080760" y="4873752"/>
+            <a:ext cx="2468880" cy="237744"/>
           </a:xfrm>
           <a:prstGeom prst="rect">
             <a:avLst/>
@@ -6530,7 +6530,7 @@
                 <a:ea typeface="Yu Gothic" pitchFamily="34" charset="-122"/>
                 <a:cs typeface="Yu Gothic" pitchFamily="34" charset="-120"/>
               </a:rPr>
-              <a:t>35-90分</a:t>
+              <a:t>30-105分</a:t>
             </a:r>
             <a:endParaRPr lang="en-US" sz="900" dirty="0"/>
           </a:p>
@@ -6544,8 +6544,8 @@
         </p:nvSpPr>
         <p:spPr>
           <a:xfrm>
-            <a:off x="5056632" y="5111496"/>
-            <a:ext cx="1956816" cy="384048"/>
+            <a:off x="6080760" y="5111496"/>
+            <a:ext cx="2468880" cy="384048"/>
           </a:xfrm>
           <a:prstGeom prst="rect">
             <a:avLst/>
@@ -6583,8 +6583,8 @@
         </p:nvSpPr>
         <p:spPr>
           <a:xfrm>
-            <a:off x="7104888" y="4873752"/>
-            <a:ext cx="1956816" cy="237744"/>
+            <a:off x="8641080" y="4873752"/>
+            <a:ext cx="2468880" cy="237744"/>
           </a:xfrm>
           <a:prstGeom prst="rect">
             <a:avLst/>
@@ -6608,7 +6608,7 @@
                 <a:ea typeface="Yu Gothic" pitchFamily="34" charset="-122"/>
                 <a:cs typeface="Yu Gothic" pitchFamily="34" charset="-120"/>
               </a:rPr>
-              <a:t>90-105分</a:t>
+              <a:t>105-120分</a:t>
             </a:r>
             <a:endParaRPr lang="en-US" sz="900" dirty="0"/>
           </a:p>
@@ -6622,8 +6622,8 @@
         </p:nvSpPr>
         <p:spPr>
           <a:xfrm>
-            <a:off x="7104888" y="5111496"/>
-            <a:ext cx="1956816" cy="384048"/>
+            <a:off x="8641080" y="5111496"/>
+            <a:ext cx="2468880" cy="384048"/>
           </a:xfrm>
           <a:prstGeom prst="rect">
             <a:avLst/>
@@ -6647,7 +6647,7 @@
                 <a:ea typeface="Yu Gothic" pitchFamily="34" charset="-122"/>
                 <a:cs typeface="Yu Gothic" pitchFamily="34" charset="-120"/>
               </a:rPr>
-              <a:t>業務への組み込み</a:t>
+              <a:t>組み込み・宿題・記録</a:t>
             </a:r>
             <a:endParaRPr lang="en-US" sz="1100" dirty="0"/>
           </a:p>
@@ -6656,84 +6656,6 @@
       <p:sp>
         <p:nvSpPr>
           <p:cNvPr id="15" name="Text 13"/>
-          <p:cNvSpPr txBox="1"/>
-          <p:nvPr/>
-        </p:nvSpPr>
-        <p:spPr>
-          <a:xfrm>
-            <a:off x="9153144" y="4873752"/>
-            <a:ext cx="1956816" cy="237744"/>
-          </a:xfrm>
-          <a:prstGeom prst="rect">
-            <a:avLst/>
-          </a:prstGeom>
-          <a:noFill/>
-          <a:ln/>
-        </p:spPr>
-        <p:txBody>
-          <a:bodyPr wrap="square" lIns="0" tIns="0" rIns="0" bIns="0" rtlCol="0" anchor="ctr"/>
-          <a:lstStyle/>
-          <a:p>
-            <a:pPr indent="0" marL="0">
-              <a:buNone/>
-            </a:pPr>
-            <a:r>
-              <a:rPr lang="en-US" sz="900" b="1" dirty="0">
-                <a:solidFill>
-                  <a:srgbClr val="B04A2F"/>
-                </a:solidFill>
-                <a:latin typeface="Yu Gothic" pitchFamily="34" charset="0"/>
-                <a:ea typeface="Yu Gothic" pitchFamily="34" charset="-122"/>
-                <a:cs typeface="Yu Gothic" pitchFamily="34" charset="-120"/>
-              </a:rPr>
-              <a:t>105-120分</a:t>
-            </a:r>
-            <a:endParaRPr lang="en-US" sz="900" dirty="0"/>
-          </a:p>
-        </p:txBody>
-      </p:sp>
-      <p:sp>
-        <p:nvSpPr>
-          <p:cNvPr id="16" name="Text 14"/>
-          <p:cNvSpPr txBox="1"/>
-          <p:nvPr/>
-        </p:nvSpPr>
-        <p:spPr>
-          <a:xfrm>
-            <a:off x="9153144" y="5111496"/>
-            <a:ext cx="1956816" cy="384048"/>
-          </a:xfrm>
-          <a:prstGeom prst="rect">
-            <a:avLst/>
-          </a:prstGeom>
-          <a:noFill/>
-          <a:ln/>
-        </p:spPr>
-        <p:txBody>
-          <a:bodyPr wrap="square" lIns="0" tIns="0" rIns="0" bIns="0" rtlCol="0" anchor="ctr"/>
-          <a:lstStyle/>
-          <a:p>
-            <a:pPr indent="0" marL="0">
-              <a:buNone/>
-            </a:pPr>
-            <a:r>
-              <a:rPr lang="en-US" sz="1100" dirty="0">
-                <a:solidFill>
-                  <a:srgbClr val="23201D"/>
-                </a:solidFill>
-                <a:latin typeface="Yu Gothic" pitchFamily="34" charset="0"/>
-                <a:ea typeface="Yu Gothic" pitchFamily="34" charset="-122"/>
-                <a:cs typeface="Yu Gothic" pitchFamily="34" charset="-120"/>
-              </a:rPr>
-              <a:t>宿題・記録</a:t>
-            </a:r>
-            <a:endParaRPr lang="en-US" sz="1100" dirty="0"/>
-          </a:p>
-        </p:txBody>
-      </p:sp>
-      <p:sp>
-        <p:nvSpPr>
-          <p:cNvPr id="17" name="Text 15"/>
           <p:cNvSpPr txBox="1"/>
           <p:nvPr/>
         </p:nvSpPr>
@@ -6772,7 +6694,7 @@
       </p:sp>
       <p:sp>
         <p:nvSpPr>
-          <p:cNvPr id="18" name="Text 16"/>
+          <p:cNvPr id="16" name="Text 14"/>
           <p:cNvSpPr txBox="1"/>
           <p:nvPr/>
         </p:nvSpPr>

--- a/slides/pptx/第11回_組織に載せる.pptx
+++ b/slides/pptx/第11回_組織に載せる.pptx
@@ -2304,6 +2304,10 @@
             <a:prstDash val="solid"/>
           </a:ln>
         </p:spPr>
+        <p:txBody>
+          <a:bodyPr/>
+          <a:p/>
+        </p:txBody>
       </p:sp>
       <p:sp>
         <p:nvSpPr>
@@ -2517,6 +2521,10 @@
             <a:prstDash val="solid"/>
           </a:ln>
         </p:spPr>
+        <p:txBody>
+          <a:bodyPr/>
+          <a:p/>
+        </p:txBody>
       </p:sp>
       <p:sp>
         <p:nvSpPr>
@@ -2581,6 +2589,10 @@
             <a:prstDash val="solid"/>
           </a:ln>
         </p:spPr>
+        <p:txBody>
+          <a:bodyPr/>
+          <a:p/>
+        </p:txBody>
       </p:sp>
       <p:sp>
         <p:nvSpPr>
@@ -2648,6 +2660,10 @@
             <a:prstDash val="solid"/>
           </a:ln>
         </p:spPr>
+        <p:txBody>
+          <a:bodyPr/>
+          <a:p/>
+        </p:txBody>
       </p:sp>
       <p:sp>
         <p:nvSpPr>
@@ -2712,6 +2728,10 @@
             <a:prstDash val="solid"/>
           </a:ln>
         </p:spPr>
+        <p:txBody>
+          <a:bodyPr/>
+          <a:p/>
+        </p:txBody>
       </p:sp>
       <p:sp>
         <p:nvSpPr>
@@ -2779,6 +2799,10 @@
             <a:prstDash val="solid"/>
           </a:ln>
         </p:spPr>
+        <p:txBody>
+          <a:bodyPr/>
+          <a:p/>
+        </p:txBody>
       </p:sp>
       <p:sp>
         <p:nvSpPr>
@@ -2843,6 +2867,10 @@
             <a:prstDash val="solid"/>
           </a:ln>
         </p:spPr>
+        <p:txBody>
+          <a:bodyPr/>
+          <a:p/>
+        </p:txBody>
       </p:sp>
       <p:sp>
         <p:nvSpPr>
@@ -3068,7 +3096,7 @@
                 <a:ea typeface="Yu Gothic" pitchFamily="34" charset="-122"/>
                 <a:cs typeface="Yu Gothic" pitchFamily="34" charset="-120"/>
               </a:rPr>
-              <a:t>演習</a:t>
+              <a:t>実演</a:t>
             </a:r>
             <a:endParaRPr lang="en-US" sz="1100" dirty="0"/>
           </a:p>
@@ -3107,7 +3135,7 @@
                 <a:ea typeface="Yu Gothic" pitchFamily="34" charset="-122"/>
                 <a:cs typeface="Yu Gothic" pitchFamily="34" charset="-120"/>
               </a:rPr>
-              <a:t>今日、一緒にやること</a:t>
+              <a:t>今日、画面でお見せすること</a:t>
             </a:r>
             <a:endParaRPr lang="en-US" sz="2600" dirty="0"/>
           </a:p>
@@ -3146,7 +3174,7 @@
                 <a:ea typeface="Yu Gothic" pitchFamily="34" charset="-122"/>
                 <a:cs typeface="Yu Gothic" pitchFamily="34" charset="-120"/>
               </a:rPr>
-              <a:t>75分。操作するのはご自身です。</a:t>
+              <a:t>75分。講師の画面でお見せします。</a:t>
             </a:r>
             <a:endParaRPr lang="en-US" sz="1250" dirty="0"/>
           </a:p>
@@ -3176,6 +3204,10 @@
             <a:prstDash val="solid"/>
           </a:ln>
         </p:spPr>
+        <p:txBody>
+          <a:bodyPr/>
+          <a:p/>
+        </p:txBody>
       </p:sp>
       <p:sp>
         <p:nvSpPr>
@@ -3201,6 +3233,10 @@
             <a:prstDash val="solid"/>
           </a:ln>
         </p:spPr>
+        <p:txBody>
+          <a:bodyPr/>
+          <a:p/>
+        </p:txBody>
       </p:sp>
       <p:sp>
         <p:nvSpPr>
@@ -3349,6 +3385,10 @@
             <a:prstDash val="solid"/>
           </a:ln>
         </p:spPr>
+        <p:txBody>
+          <a:bodyPr/>
+          <a:p/>
+        </p:txBody>
       </p:sp>
       <p:sp>
         <p:nvSpPr>
@@ -3374,6 +3414,10 @@
             <a:prstDash val="solid"/>
           </a:ln>
         </p:spPr>
+        <p:txBody>
+          <a:bodyPr/>
+          <a:p/>
+        </p:txBody>
       </p:sp>
       <p:sp>
         <p:nvSpPr>
@@ -3522,6 +3566,10 @@
             <a:prstDash val="solid"/>
           </a:ln>
         </p:spPr>
+        <p:txBody>
+          <a:bodyPr/>
+          <a:p/>
+        </p:txBody>
       </p:sp>
       <p:sp>
         <p:nvSpPr>
@@ -3547,6 +3595,10 @@
             <a:prstDash val="solid"/>
           </a:ln>
         </p:spPr>
+        <p:txBody>
+          <a:bodyPr/>
+          <a:p/>
+        </p:txBody>
       </p:sp>
       <p:sp>
         <p:nvSpPr>
@@ -3743,7 +3795,7 @@
                 <a:ea typeface="Yu Gothic" pitchFamily="34" charset="-122"/>
                 <a:cs typeface="Yu Gothic" pitchFamily="34" charset="-120"/>
               </a:rPr>
-              <a:t>演習</a:t>
+              <a:t>実演</a:t>
             </a:r>
             <a:endParaRPr lang="en-US" sz="900" dirty="0"/>
           </a:p>
@@ -3922,6 +3974,10 @@
             <a:prstDash val="solid"/>
           </a:ln>
         </p:spPr>
+        <p:txBody>
+          <a:bodyPr/>
+          <a:p/>
+        </p:txBody>
       </p:sp>
       <p:sp>
         <p:nvSpPr>
@@ -3947,6 +4003,10 @@
             <a:prstDash val="solid"/>
           </a:ln>
         </p:spPr>
+        <p:txBody>
+          <a:bodyPr/>
+          <a:p/>
+        </p:txBody>
       </p:sp>
       <p:sp>
         <p:nvSpPr>
@@ -4053,6 +4113,10 @@
             <a:prstDash val="solid"/>
           </a:ln>
         </p:spPr>
+        <p:txBody>
+          <a:bodyPr/>
+          <a:p/>
+        </p:txBody>
       </p:sp>
       <p:sp>
         <p:nvSpPr>
@@ -4078,6 +4142,10 @@
             <a:prstDash val="solid"/>
           </a:ln>
         </p:spPr>
+        <p:txBody>
+          <a:bodyPr/>
+          <a:p/>
+        </p:txBody>
       </p:sp>
       <p:sp>
         <p:nvSpPr>
@@ -4184,6 +4252,10 @@
             <a:prstDash val="solid"/>
           </a:ln>
         </p:spPr>
+        <p:txBody>
+          <a:bodyPr/>
+          <a:p/>
+        </p:txBody>
       </p:sp>
       <p:sp>
         <p:nvSpPr>
@@ -4209,6 +4281,10 @@
             <a:prstDash val="solid"/>
           </a:ln>
         </p:spPr>
+        <p:txBody>
+          <a:bodyPr/>
+          <a:p/>
+        </p:txBody>
       </p:sp>
       <p:sp>
         <p:nvSpPr>
@@ -4503,6 +4579,10 @@
             <a:prstDash val="solid"/>
           </a:ln>
         </p:spPr>
+        <p:txBody>
+          <a:bodyPr/>
+          <a:p/>
+        </p:txBody>
       </p:sp>
       <p:sp>
         <p:nvSpPr>
@@ -4570,6 +4650,10 @@
             <a:prstDash val="solid"/>
           </a:ln>
         </p:spPr>
+        <p:txBody>
+          <a:bodyPr/>
+          <a:p/>
+        </p:txBody>
       </p:sp>
       <p:sp>
         <p:nvSpPr>
@@ -4903,6 +4987,10 @@
             <a:prstDash val="solid"/>
           </a:ln>
         </p:spPr>
+        <p:txBody>
+          <a:bodyPr/>
+          <a:p/>
+        </p:txBody>
       </p:sp>
       <p:sp>
         <p:nvSpPr>
@@ -5009,6 +5097,10 @@
             <a:prstDash val="solid"/>
           </a:ln>
         </p:spPr>
+        <p:txBody>
+          <a:bodyPr/>
+          <a:p/>
+        </p:txBody>
       </p:sp>
       <p:sp>
         <p:nvSpPr>
@@ -5157,6 +5249,10 @@
             <a:prstDash val="solid"/>
           </a:ln>
         </p:spPr>
+        <p:txBody>
+          <a:bodyPr/>
+          <a:p/>
+        </p:txBody>
       </p:sp>
       <p:sp>
         <p:nvSpPr>
@@ -5409,6 +5505,10 @@
             <a:prstDash val="solid"/>
           </a:ln>
         </p:spPr>
+        <p:txBody>
+          <a:bodyPr/>
+          <a:p/>
+        </p:txBody>
       </p:sp>
       <p:sp>
         <p:nvSpPr>
@@ -5706,6 +5806,10 @@
             <a:prstDash val="solid"/>
           </a:ln>
         </p:spPr>
+        <p:txBody>
+          <a:bodyPr/>
+          <a:p/>
+        </p:txBody>
       </p:sp>
       <p:sp>
         <p:nvSpPr>
@@ -5809,6 +5913,10 @@
             <a:prstDash val="solid"/>
           </a:ln>
         </p:spPr>
+        <p:txBody>
+          <a:bodyPr/>
+          <a:p/>
+        </p:txBody>
       </p:sp>
       <p:sp>
         <p:nvSpPr>
@@ -5912,6 +6020,10 @@
             <a:prstDash val="solid"/>
           </a:ln>
         </p:spPr>
+        <p:txBody>
+          <a:bodyPr/>
+          <a:p/>
+        </p:txBody>
       </p:sp>
       <p:sp>
         <p:nvSpPr>
@@ -6015,6 +6127,10 @@
             <a:prstDash val="solid"/>
           </a:ln>
         </p:spPr>
+        <p:txBody>
+          <a:bodyPr/>
+          <a:p/>
+        </p:txBody>
       </p:sp>
       <p:sp>
         <p:nvSpPr>
@@ -6273,6 +6389,10 @@
             <a:prstDash val="solid"/>
           </a:ln>
         </p:spPr>
+        <p:txBody>
+          <a:bodyPr/>
+          <a:p/>
+        </p:txBody>
       </p:sp>
       <p:sp>
         <p:nvSpPr>
@@ -6340,6 +6460,10 @@
             <a:prstDash val="solid"/>
           </a:ln>
         </p:spPr>
+        <p:txBody>
+          <a:bodyPr/>
+          <a:p/>
+        </p:txBody>
       </p:sp>
       <p:sp>
         <p:nvSpPr>
@@ -6569,7 +6693,7 @@
                 <a:ea typeface="Yu Gothic" pitchFamily="34" charset="-122"/>
                 <a:cs typeface="Yu Gothic" pitchFamily="34" charset="-120"/>
               </a:rPr>
-              <a:t>一緒に手を動かす</a:t>
+              <a:t>画面で順にお見せする</a:t>
             </a:r>
             <a:endParaRPr lang="en-US" sz="1100" dirty="0"/>
           </a:p>
@@ -6865,6 +6989,10 @@
             <a:prstDash val="solid"/>
           </a:ln>
         </p:spPr>
+        <p:txBody>
+          <a:bodyPr/>
+          <a:p/>
+        </p:txBody>
       </p:sp>
       <p:sp>
         <p:nvSpPr>
@@ -6890,6 +7018,10 @@
             <a:prstDash val="solid"/>
           </a:ln>
         </p:spPr>
+        <p:txBody>
+          <a:bodyPr/>
+          <a:p/>
+        </p:txBody>
       </p:sp>
       <p:sp>
         <p:nvSpPr>
@@ -7035,6 +7167,10 @@
             <a:prstDash val="solid"/>
           </a:ln>
         </p:spPr>
+        <p:txBody>
+          <a:bodyPr/>
+          <a:p/>
+        </p:txBody>
       </p:sp>
       <p:sp>
         <p:nvSpPr>
@@ -7060,6 +7196,10 @@
             <a:prstDash val="solid"/>
           </a:ln>
         </p:spPr>
+        <p:txBody>
+          <a:bodyPr/>
+          <a:p/>
+        </p:txBody>
       </p:sp>
       <p:sp>
         <p:nvSpPr>
@@ -7205,6 +7345,10 @@
             <a:prstDash val="solid"/>
           </a:ln>
         </p:spPr>
+        <p:txBody>
+          <a:bodyPr/>
+          <a:p/>
+        </p:txBody>
       </p:sp>
       <p:sp>
         <p:nvSpPr>
@@ -7230,6 +7374,10 @@
             <a:prstDash val="solid"/>
           </a:ln>
         </p:spPr>
+        <p:txBody>
+          <a:bodyPr/>
+          <a:p/>
+        </p:txBody>
       </p:sp>
       <p:sp>
         <p:nvSpPr>
@@ -7375,6 +7523,10 @@
             <a:prstDash val="solid"/>
           </a:ln>
         </p:spPr>
+        <p:txBody>
+          <a:bodyPr/>
+          <a:p/>
+        </p:txBody>
       </p:sp>
       <p:sp>
         <p:nvSpPr>
@@ -7400,6 +7552,10 @@
             <a:prstDash val="solid"/>
           </a:ln>
         </p:spPr>
+        <p:txBody>
+          <a:bodyPr/>
+          <a:p/>
+        </p:txBody>
       </p:sp>
       <p:sp>
         <p:nvSpPr>
@@ -7772,6 +7928,10 @@
             <a:prstDash val="solid"/>
           </a:ln>
         </p:spPr>
+        <p:txBody>
+          <a:bodyPr/>
+          <a:p/>
+        </p:txBody>
       </p:sp>
       <p:sp>
         <p:nvSpPr>
@@ -7797,6 +7957,10 @@
             <a:prstDash val="solid"/>
           </a:ln>
         </p:spPr>
+        <p:txBody>
+          <a:bodyPr/>
+          <a:p/>
+        </p:txBody>
       </p:sp>
       <p:sp>
         <p:nvSpPr>
@@ -8511,6 +8675,10 @@
             <a:prstDash val="solid"/>
           </a:ln>
         </p:spPr>
+        <p:txBody>
+          <a:bodyPr/>
+          <a:p/>
+        </p:txBody>
       </p:sp>
       <p:sp>
         <p:nvSpPr>
@@ -8617,6 +8785,10 @@
             <a:prstDash val="solid"/>
           </a:ln>
         </p:spPr>
+        <p:txBody>
+          <a:bodyPr/>
+          <a:p/>
+        </p:txBody>
       </p:sp>
       <p:sp>
         <p:nvSpPr>
@@ -8849,6 +9021,10 @@
             <a:prstDash val="solid"/>
           </a:ln>
         </p:spPr>
+        <p:txBody>
+          <a:bodyPr/>
+          <a:p/>
+        </p:txBody>
       </p:sp>
       <p:sp>
         <p:nvSpPr>
@@ -8916,6 +9092,10 @@
             <a:prstDash val="solid"/>
           </a:ln>
         </p:spPr>
+        <p:txBody>
+          <a:bodyPr/>
+          <a:p/>
+        </p:txBody>
       </p:sp>
       <p:sp>
         <p:nvSpPr>
@@ -9168,6 +9348,10 @@
             <a:prstDash val="solid"/>
           </a:ln>
         </p:spPr>
+        <p:txBody>
+          <a:bodyPr/>
+          <a:p/>
+        </p:txBody>
       </p:sp>
       <p:sp>
         <p:nvSpPr>
@@ -9274,6 +9458,10 @@
             <a:prstDash val="solid"/>
           </a:ln>
         </p:spPr>
+        <p:txBody>
+          <a:bodyPr/>
+          <a:p/>
+        </p:txBody>
       </p:sp>
       <p:sp>
         <p:nvSpPr>
@@ -9506,6 +9694,10 @@
             <a:prstDash val="solid"/>
           </a:ln>
         </p:spPr>
+        <p:txBody>
+          <a:bodyPr/>
+          <a:p/>
+        </p:txBody>
       </p:sp>
       <p:sp>
         <p:nvSpPr>
@@ -9573,6 +9765,10 @@
             <a:prstDash val="solid"/>
           </a:ln>
         </p:spPr>
+        <p:txBody>
+          <a:bodyPr/>
+          <a:p/>
+        </p:txBody>
       </p:sp>
       <p:sp>
         <p:nvSpPr>
@@ -9825,6 +10021,10 @@
             <a:prstDash val="solid"/>
           </a:ln>
         </p:spPr>
+        <p:txBody>
+          <a:bodyPr/>
+          <a:p/>
+        </p:txBody>
       </p:sp>
       <p:sp>
         <p:nvSpPr>
@@ -9931,6 +10131,10 @@
             <a:prstDash val="solid"/>
           </a:ln>
         </p:spPr>
+        <p:txBody>
+          <a:bodyPr/>
+          <a:p/>
+        </p:txBody>
       </p:sp>
       <p:sp>
         <p:nvSpPr>
@@ -10037,6 +10241,10 @@
             <a:prstDash val="solid"/>
           </a:ln>
         </p:spPr>
+        <p:txBody>
+          <a:bodyPr/>
+          <a:p/>
+        </p:txBody>
       </p:sp>
       <p:sp>
         <p:nvSpPr>
@@ -10143,6 +10351,10 @@
             <a:prstDash val="solid"/>
           </a:ln>
         </p:spPr>
+        <p:txBody>
+          <a:bodyPr/>
+          <a:p/>
+        </p:txBody>
       </p:sp>
       <p:sp>
         <p:nvSpPr>
@@ -10249,6 +10461,10 @@
             <a:prstDash val="solid"/>
           </a:ln>
         </p:spPr>
+        <p:txBody>
+          <a:bodyPr/>
+          <a:p/>
+        </p:txBody>
       </p:sp>
       <p:sp>
         <p:nvSpPr>
@@ -10355,6 +10571,10 @@
             <a:prstDash val="solid"/>
           </a:ln>
         </p:spPr>
+        <p:txBody>
+          <a:bodyPr/>
+          <a:p/>
+        </p:txBody>
       </p:sp>
       <p:sp>
         <p:nvSpPr>
@@ -10649,6 +10869,10 @@
             <a:prstDash val="solid"/>
           </a:ln>
         </p:spPr>
+        <p:txBody>
+          <a:bodyPr/>
+          <a:p/>
+        </p:txBody>
       </p:sp>
       <p:sp>
         <p:nvSpPr>
@@ -10674,6 +10898,10 @@
             <a:prstDash val="solid"/>
           </a:ln>
         </p:spPr>
+        <p:txBody>
+          <a:bodyPr/>
+          <a:p/>
+        </p:txBody>
       </p:sp>
       <p:sp>
         <p:nvSpPr>
@@ -10780,6 +11008,10 @@
             <a:prstDash val="solid"/>
           </a:ln>
         </p:spPr>
+        <p:txBody>
+          <a:bodyPr/>
+          <a:p/>
+        </p:txBody>
       </p:sp>
       <p:sp>
         <p:nvSpPr>
@@ -10805,6 +11037,10 @@
             <a:prstDash val="solid"/>
           </a:ln>
         </p:spPr>
+        <p:txBody>
+          <a:bodyPr/>
+          <a:p/>
+        </p:txBody>
       </p:sp>
       <p:sp>
         <p:nvSpPr>
@@ -10911,6 +11147,10 @@
             <a:prstDash val="solid"/>
           </a:ln>
         </p:spPr>
+        <p:txBody>
+          <a:bodyPr/>
+          <a:p/>
+        </p:txBody>
       </p:sp>
       <p:sp>
         <p:nvSpPr>
@@ -10936,6 +11176,10 @@
             <a:prstDash val="solid"/>
           </a:ln>
         </p:spPr>
+        <p:txBody>
+          <a:bodyPr/>
+          <a:p/>
+        </p:txBody>
       </p:sp>
       <p:sp>
         <p:nvSpPr>
